--- a/tmp-tj/261028_dream-cosmetics_audit-reseaux-sociaux_v2.pptx
+++ b/tmp-tj/261028_dream-cosmetics_audit-reseaux-sociaux_v2.pptx
@@ -174,7 +174,7 @@
             <c:idx val="0"/>
             <c:spPr>
               <a:solidFill>
-                <a:srgbClr val="AE172A"/>
+                <a:srgbClr val="B9B9B9"/>
               </a:solidFill>
             </c:spPr>
           </c:dPt>
@@ -198,7 +198,7 @@
             <c:idx val="3"/>
             <c:spPr>
               <a:solidFill>
-                <a:srgbClr val="B9B9B9"/>
+                <a:srgbClr val="AE172A"/>
               </a:solidFill>
             </c:spPr>
           </c:dPt>
@@ -208,16 +208,16 @@
               <c:strCache>
                 <c:ptCount val="4"/>
                 <c:pt idx="0">
-                  <c:v>Dream Cosmetics</c:v>
+                  <c:v>Gandour</c:v>
                 </c:pt>
                 <c:pt idx="1">
+                  <c:v>Kaera</c:v>
+                </c:pt>
+                <c:pt idx="2">
                   <c:v>SIVOP</c:v>
                 </c:pt>
-                <c:pt idx="2">
-                  <c:v>Kaera</c:v>
-                </c:pt>
                 <c:pt idx="3">
-                  <c:v>Gandour</c:v>
+                  <c:v>Dream Cosmetics</c:v>
                 </c:pt>
               </c:strCache>
             </c:strRef>
@@ -229,16 +229,16 @@
                 <c:formatCode>General</c:formatCode>
                 <c:ptCount val="4"/>
                 <c:pt idx="0">
-                  <c:v>0.38</c:v>
+                  <c:v>0.03</c:v>
                 </c:pt>
                 <c:pt idx="1">
+                  <c:v>0.07</c:v>
+                </c:pt>
+                <c:pt idx="2">
                   <c:v>0.11</c:v>
                 </c:pt>
-                <c:pt idx="2">
-                  <c:v>0.07</c:v>
-                </c:pt>
                 <c:pt idx="3">
-                  <c:v>0.03</c:v>
+                  <c:v>0.38</c:v>
                 </c:pt>
               </c:numCache>
             </c:numRef>
@@ -271,7 +271,7 @@
       <c:catAx>
         <c:axId val="-2068027336"/>
         <c:scaling>
-          <c:orientation val="maxMin"/>
+          <c:orientation val="minMax"/>
         </c:scaling>
         <c:delete val="0"/>
         <c:axPos val="l"/>
@@ -376,7 +376,7 @@
             <c:idx val="0"/>
             <c:spPr>
               <a:solidFill>
-                <a:srgbClr val="AE172A"/>
+                <a:srgbClr val="B9B9B9"/>
               </a:solidFill>
             </c:spPr>
           </c:dPt>
@@ -416,7 +416,7 @@
             <c:idx val="5"/>
             <c:spPr>
               <a:solidFill>
-                <a:srgbClr val="B9B9B9"/>
+                <a:srgbClr val="AE172A"/>
               </a:solidFill>
             </c:spPr>
           </c:dPt>
@@ -426,22 +426,22 @@
               <c:strCache>
                 <c:ptCount val="6"/>
                 <c:pt idx="0">
-                  <c:v>Babymed (8)</c:v>
+                  <c:v>Always Young (1)</c:v>
                 </c:pt>
                 <c:pt idx="1">
+                  <c:v>Dr Wang (1)</c:v>
+                </c:pt>
+                <c:pt idx="2">
+                  <c:v>Sans gamme nommée (7)</c:v>
+                </c:pt>
+                <c:pt idx="3">
+                  <c:v>Cocopulp (2)</c:v>
+                </c:pt>
+                <c:pt idx="4">
                   <c:v>Day by Day (4)</c:v>
                 </c:pt>
-                <c:pt idx="2">
-                  <c:v>Cocopulp (2)</c:v>
-                </c:pt>
-                <c:pt idx="3">
-                  <c:v>Sans gamme nommée (7)</c:v>
-                </c:pt>
-                <c:pt idx="4">
-                  <c:v>Dr Wang (1)</c:v>
-                </c:pt>
                 <c:pt idx="5">
-                  <c:v>Always Young (1)</c:v>
+                  <c:v>Babymed (8)</c:v>
                 </c:pt>
               </c:strCache>
             </c:strRef>
@@ -453,22 +453,22 @@
                 <c:formatCode>General</c:formatCode>
                 <c:ptCount val="6"/>
                 <c:pt idx="0">
-                  <c:v>216</c:v>
+                  <c:v>13</c:v>
                 </c:pt>
                 <c:pt idx="1">
+                  <c:v>46</c:v>
+                </c:pt>
+                <c:pt idx="2">
+                  <c:v>52</c:v>
+                </c:pt>
+                <c:pt idx="3">
+                  <c:v>1724</c:v>
+                </c:pt>
+                <c:pt idx="4">
                   <c:v>112</c:v>
                 </c:pt>
-                <c:pt idx="2">
-                  <c:v>1724</c:v>
-                </c:pt>
-                <c:pt idx="3">
-                  <c:v>52</c:v>
-                </c:pt>
-                <c:pt idx="4">
-                  <c:v>46</c:v>
-                </c:pt>
                 <c:pt idx="5">
-                  <c:v>13</c:v>
+                  <c:v>216</c:v>
                 </c:pt>
               </c:numCache>
             </c:numRef>
@@ -500,7 +500,7 @@
       <c:catAx>
         <c:axId val="-2068027336"/>
         <c:scaling>
-          <c:orientation val="maxMin"/>
+          <c:orientation val="minMax"/>
         </c:scaling>
         <c:delete val="0"/>
         <c:axPos val="l"/>
@@ -4424,7 +4424,7 @@
               </a:lnSpc>
             </a:pPr>
             <a:r>
-              <a:rPr sz="2500" b="1">
+              <a:rPr sz="2100" b="1">
                 <a:solidFill>
                   <a:srgbClr val="111111"/>
                 </a:solidFill>
@@ -10529,7 +10529,7 @@
               </a:lnSpc>
             </a:pPr>
             <a:r>
-              <a:rPr sz="2500" b="1">
+              <a:rPr sz="2100" b="1">
                 <a:solidFill>
                   <a:srgbClr val="111111"/>
                 </a:solidFill>
@@ -10784,8 +10784,8 @@
         </p:nvSpPr>
         <p:spPr>
           <a:xfrm>
-            <a:off x="1836000" y="1943999"/>
-            <a:ext cx="3888000" cy="503999"/>
+            <a:off x="1836000" y="1907998"/>
+            <a:ext cx="3924000" cy="720000"/>
           </a:xfrm>
           <a:prstGeom prst="rect">
             <a:avLst/>
@@ -10804,7 +10804,7 @@
               </a:lnSpc>
             </a:pPr>
             <a:r>
-              <a:rPr sz="1900" b="1">
+              <a:rPr sz="1700" b="1">
                 <a:solidFill>
                   <a:srgbClr val="111111"/>
                 </a:solidFill>
@@ -10823,8 +10823,8 @@
         </p:nvSpPr>
         <p:spPr>
           <a:xfrm>
-            <a:off x="1836000" y="2519999"/>
-            <a:ext cx="3888000" cy="1007999"/>
+            <a:off x="1836000" y="2645999"/>
+            <a:ext cx="3924000" cy="972000"/>
           </a:xfrm>
           <a:prstGeom prst="rect">
             <a:avLst/>
@@ -10843,7 +10843,7 @@
               </a:lnSpc>
             </a:pPr>
             <a:r>
-              <a:rPr sz="1300" b="0">
+              <a:rPr sz="1250" b="0">
                 <a:solidFill>
                   <a:srgbClr val="5A5A5A"/>
                 </a:solidFill>
@@ -10976,8 +10976,8 @@
         </p:nvSpPr>
         <p:spPr>
           <a:xfrm>
-            <a:off x="7452000" y="1943999"/>
-            <a:ext cx="3888000" cy="503999"/>
+            <a:off x="7452000" y="1907998"/>
+            <a:ext cx="3924000" cy="720000"/>
           </a:xfrm>
           <a:prstGeom prst="rect">
             <a:avLst/>
@@ -10996,7 +10996,7 @@
               </a:lnSpc>
             </a:pPr>
             <a:r>
-              <a:rPr sz="1900" b="1">
+              <a:rPr sz="1700" b="1">
                 <a:solidFill>
                   <a:srgbClr val="111111"/>
                 </a:solidFill>
@@ -11015,8 +11015,8 @@
         </p:nvSpPr>
         <p:spPr>
           <a:xfrm>
-            <a:off x="7452000" y="2519999"/>
-            <a:ext cx="3888000" cy="1007999"/>
+            <a:off x="7452000" y="2645999"/>
+            <a:ext cx="3924000" cy="972000"/>
           </a:xfrm>
           <a:prstGeom prst="rect">
             <a:avLst/>
@@ -11035,7 +11035,7 @@
               </a:lnSpc>
             </a:pPr>
             <a:r>
-              <a:rPr sz="1300" b="0">
+              <a:rPr sz="1250" b="0">
                 <a:solidFill>
                   <a:srgbClr val="5A5A5A"/>
                 </a:solidFill>
@@ -11168,8 +11168,8 @@
         </p:nvSpPr>
         <p:spPr>
           <a:xfrm>
-            <a:off x="1836000" y="4211999"/>
-            <a:ext cx="3888000" cy="503999"/>
+            <a:off x="1836000" y="4175998"/>
+            <a:ext cx="3924000" cy="720000"/>
           </a:xfrm>
           <a:prstGeom prst="rect">
             <a:avLst/>
@@ -11188,7 +11188,7 @@
               </a:lnSpc>
             </a:pPr>
             <a:r>
-              <a:rPr sz="1900" b="1">
+              <a:rPr sz="1700" b="1">
                 <a:solidFill>
                   <a:srgbClr val="111111"/>
                 </a:solidFill>
@@ -11207,8 +11207,8 @@
         </p:nvSpPr>
         <p:spPr>
           <a:xfrm>
-            <a:off x="1836000" y="4787999"/>
-            <a:ext cx="3888000" cy="1007999"/>
+            <a:off x="1836000" y="4913999"/>
+            <a:ext cx="3924000" cy="972000"/>
           </a:xfrm>
           <a:prstGeom prst="rect">
             <a:avLst/>
@@ -11227,7 +11227,7 @@
               </a:lnSpc>
             </a:pPr>
             <a:r>
-              <a:rPr sz="1300" b="0">
+              <a:rPr sz="1250" b="0">
                 <a:solidFill>
                   <a:srgbClr val="5A5A5A"/>
                 </a:solidFill>
@@ -11360,8 +11360,8 @@
         </p:nvSpPr>
         <p:spPr>
           <a:xfrm>
-            <a:off x="7452000" y="4211999"/>
-            <a:ext cx="3888000" cy="503999"/>
+            <a:off x="7452000" y="4175998"/>
+            <a:ext cx="3924000" cy="720000"/>
           </a:xfrm>
           <a:prstGeom prst="rect">
             <a:avLst/>
@@ -11380,7 +11380,7 @@
               </a:lnSpc>
             </a:pPr>
             <a:r>
-              <a:rPr sz="1900" b="1">
+              <a:rPr sz="1700" b="1">
                 <a:solidFill>
                   <a:srgbClr val="111111"/>
                 </a:solidFill>
@@ -11399,8 +11399,8 @@
         </p:nvSpPr>
         <p:spPr>
           <a:xfrm>
-            <a:off x="7452000" y="4787999"/>
-            <a:ext cx="3888000" cy="1007999"/>
+            <a:off x="7452000" y="4913999"/>
+            <a:ext cx="3924000" cy="972000"/>
           </a:xfrm>
           <a:prstGeom prst="rect">
             <a:avLst/>
@@ -11419,7 +11419,7 @@
               </a:lnSpc>
             </a:pPr>
             <a:r>
-              <a:rPr sz="1300" b="0">
+              <a:rPr sz="1250" b="0">
                 <a:solidFill>
                   <a:srgbClr val="5A5A5A"/>
                 </a:solidFill>
@@ -17609,7 +17609,7 @@
               </a:lnSpc>
             </a:pPr>
             <a:r>
-              <a:rPr sz="2500" b="1">
+              <a:rPr sz="2100" b="1">
                 <a:solidFill>
                   <a:srgbClr val="111111"/>
                 </a:solidFill>
@@ -19759,7 +19759,7 @@
               </a:lnSpc>
             </a:pPr>
             <a:r>
-              <a:rPr sz="2500" b="1">
+              <a:rPr sz="2100" b="1">
                 <a:solidFill>
                   <a:srgbClr val="111111"/>
                 </a:solidFill>
@@ -20910,7 +20910,7 @@
               </a:lnSpc>
             </a:pPr>
             <a:r>
-              <a:rPr sz="2500" b="1">
+              <a:rPr sz="2100" b="1">
                 <a:solidFill>
                   <a:srgbClr val="111111"/>
                 </a:solidFill>
@@ -22333,7 +22333,7 @@
               </a:lnSpc>
             </a:pPr>
             <a:r>
-              <a:rPr sz="2500" b="1">
+              <a:rPr sz="2100" b="1">
                 <a:solidFill>
                   <a:srgbClr val="111111"/>
                 </a:solidFill>
@@ -23843,7 +23843,7 @@
               </a:lnSpc>
             </a:pPr>
             <a:r>
-              <a:rPr sz="2500" b="1">
+              <a:rPr sz="2100" b="1">
                 <a:solidFill>
                   <a:srgbClr val="111111"/>
                 </a:solidFill>
@@ -24955,7 +24955,7 @@
               </a:lnSpc>
             </a:pPr>
             <a:r>
-              <a:rPr sz="2500" b="1">
+              <a:rPr sz="2100" b="1">
                 <a:solidFill>
                   <a:srgbClr val="111111"/>
                 </a:solidFill>

--- a/tmp-tj/261028_dream-cosmetics_audit-reseaux-sociaux_v2.pptx
+++ b/tmp-tj/261028_dream-cosmetics_audit-reseaux-sociaux_v2.pptx
@@ -133,25 +133,7 @@
 <c:chartSpace xmlns:c="http://schemas.openxmlformats.org/drawingml/2006/chart" xmlns:a="http://schemas.openxmlformats.org/drawingml/2006/main" xmlns:r="http://schemas.openxmlformats.org/officeDocument/2006/relationships">
   <c:date1904 val="0"/>
   <c:chart>
-    <c:title>
-      <c:tx>
-        <c:rich>
-          <a:bodyPr/>
-          <a:lstStyle/>
-          <a:p>
-            <a:r>
-              <a:rPr sz="1250" b="1">
-                <a:latin typeface="Poppins"/>
-              </a:rPr>
-              <a:t>Instagram : J’aime médians ÷ abonnés (%)</a:t>
-            </a:r>
-          </a:p>
-        </c:rich>
-      </c:tx>
-      <c:layout/>
-      <c:overlay val="0"/>
-    </c:title>
-    <c:autoTitleDeleted val="0"/>
+    <c:autoTitleDeleted val="1"/>
     <c:plotArea>
       <c:barChart>
         <c:barDir val="bar"/>
@@ -303,12 +285,19 @@
       </c:catAx>
       <c:valAx>
         <c:axId val="-2113994440"/>
-        <c:scaling/>
+        <c:scaling>
+          <c:min val="0.0"/>
+        </c:scaling>
         <c:delete/>
         <c:axPos val="b"/>
-        <c:majorTickMark val="out"/>
+        <c:majorTickMark val="none"/>
         <c:minorTickMark val="none"/>
-        <c:tickLblPos val="nextTo"/>
+        <c:tickLblPos val="none"/>
+        <c:spPr>
+          <a:ln>
+            <a:noFill/>
+          </a:ln>
+        </c:spPr>
         <c:crossAx val="-2068027336"/>
         <c:crosses val="autoZero"/>
       </c:valAx>
@@ -335,25 +324,7 @@
 <c:chartSpace xmlns:c="http://schemas.openxmlformats.org/drawingml/2006/chart" xmlns:a="http://schemas.openxmlformats.org/drawingml/2006/main" xmlns:r="http://schemas.openxmlformats.org/officeDocument/2006/relationships">
   <c:date1904 val="0"/>
   <c:chart>
-    <c:title>
-      <c:tx>
-        <c:rich>
-          <a:bodyPr/>
-          <a:lstStyle/>
-          <a:p>
-            <a:r>
-              <a:rPr sz="1250" b="1">
-                <a:latin typeface="Poppins"/>
-              </a:rPr>
-              <a:t>Réactions médianes par gamme (nombre de publications)</a:t>
-            </a:r>
-          </a:p>
-        </c:rich>
-      </c:tx>
-      <c:layout/>
-      <c:overlay val="0"/>
-    </c:title>
-    <c:autoTitleDeleted val="0"/>
+    <c:autoTitleDeleted val="1"/>
     <c:plotArea>
       <c:barChart>
         <c:barDir val="bar"/>
@@ -532,12 +503,19 @@
       </c:catAx>
       <c:valAx>
         <c:axId val="-2113994440"/>
-        <c:scaling/>
+        <c:scaling>
+          <c:min val="0.0"/>
+        </c:scaling>
         <c:delete/>
         <c:axPos val="b"/>
-        <c:majorTickMark val="out"/>
+        <c:majorTickMark val="none"/>
         <c:minorTickMark val="none"/>
-        <c:tickLblPos val="nextTo"/>
+        <c:tickLblPos val="none"/>
+        <c:spPr>
+          <a:ln>
+            <a:noFill/>
+          </a:ln>
+        </c:spPr>
         <c:crossAx val="-2068027336"/>
         <c:crosses val="autoZero"/>
       </c:valAx>
@@ -3631,7 +3609,7 @@
       </p:sp>
       <p:pic>
         <p:nvPicPr>
-          <p:cNvPr id="4" name="Picture 3" descr="v_d_bebe.jpg"/>
+          <p:cNvPr id="4" name="Picture 3" descr="w_d_bebe.jpg"/>
           <p:cNvPicPr>
             <a:picLocks noChangeAspect="1"/>
           </p:cNvPicPr>
@@ -6497,8 +6475,8 @@
           <p:nvPr/>
         </p:nvGraphicFramePr>
         <p:xfrm>
-          <a:off x="576000" y="1584000"/>
-          <a:ext cx="5760000" cy="4464000"/>
+          <a:off x="576000" y="1944000"/>
+          <a:ext cx="5760000" cy="4104000"/>
         </p:xfrm>
         <a:graphic>
           <a:graphicData uri="http://schemas.openxmlformats.org/drawingml/2006/chart">
@@ -6509,6 +6487,45 @@
       <p:sp>
         <p:nvSpPr>
           <p:cNvPr id="10" name="TextBox 9"/>
+          <p:cNvSpPr txBox="1"/>
+          <p:nvPr/>
+        </p:nvSpPr>
+        <p:spPr>
+          <a:xfrm>
+            <a:off x="576000" y="1548000"/>
+            <a:ext cx="5760000" cy="360000"/>
+          </a:xfrm>
+          <a:prstGeom prst="rect">
+            <a:avLst/>
+          </a:prstGeom>
+          <a:noFill/>
+        </p:spPr>
+        <p:txBody>
+          <a:bodyPr wrap="square" lIns="36000" rIns="36000" tIns="18000" bIns="18000" anchor="t">
+            <a:spAutoFit/>
+          </a:bodyPr>
+          <a:lstStyle/>
+          <a:p>
+            <a:pPr algn="l">
+              <a:lnSpc>
+                <a:spcPct val="110000"/>
+              </a:lnSpc>
+            </a:pPr>
+            <a:r>
+              <a:rPr sz="1250" b="1">
+                <a:solidFill>
+                  <a:srgbClr val="111111"/>
+                </a:solidFill>
+                <a:latin typeface="Poppins"/>
+              </a:rPr>
+              <a:t>Réactions médianes par gamme (nombre de publications)</a:t>
+            </a:r>
+          </a:p>
+        </p:txBody>
+      </p:sp>
+      <p:sp>
+        <p:nvSpPr>
+          <p:cNvPr id="11" name="TextBox 10"/>
           <p:cNvSpPr txBox="1"/>
           <p:nvPr/>
         </p:nvSpPr>
@@ -6961,7 +6978,7 @@
         </p:nvSpPr>
         <p:spPr>
           <a:xfrm>
-            <a:off x="1260000" y="1872000"/>
+            <a:off x="1260000" y="1835999"/>
             <a:ext cx="720000" cy="720000"/>
           </a:xfrm>
           <a:prstGeom prst="ellipse">
@@ -7013,7 +7030,7 @@
         </p:blipFill>
         <p:spPr>
           <a:xfrm>
-            <a:off x="1418400" y="2030400"/>
+            <a:off x="1418400" y="1994399"/>
             <a:ext cx="403200" cy="403200"/>
           </a:xfrm>
           <a:prstGeom prst="rect">
@@ -7029,8 +7046,47 @@
         </p:nvSpPr>
         <p:spPr>
           <a:xfrm>
-            <a:off x="684000" y="2772000"/>
-            <a:ext cx="1872000" cy="360000"/>
+            <a:off x="684000" y="2664000"/>
+            <a:ext cx="1872000" cy="576000"/>
+          </a:xfrm>
+          <a:prstGeom prst="rect">
+            <a:avLst/>
+          </a:prstGeom>
+          <a:noFill/>
+        </p:spPr>
+        <p:txBody>
+          <a:bodyPr wrap="square" lIns="36000" rIns="36000" tIns="18000" bIns="18000" anchor="ctr">
+            <a:spAutoFit/>
+          </a:bodyPr>
+          <a:lstStyle/>
+          <a:p>
+            <a:pPr algn="ctr">
+              <a:lnSpc>
+                <a:spcPct val="110000"/>
+              </a:lnSpc>
+            </a:pPr>
+            <a:r>
+              <a:rPr sz="1400" b="1">
+                <a:solidFill>
+                  <a:srgbClr val="111111"/>
+                </a:solidFill>
+                <a:latin typeface="Poppins"/>
+              </a:rPr>
+              <a:t>Une idée</a:t>
+            </a:r>
+          </a:p>
+        </p:txBody>
+      </p:sp>
+      <p:sp>
+        <p:nvSpPr>
+          <p:cNvPr id="13" name="TextBox 12"/>
+          <p:cNvSpPr txBox="1"/>
+          <p:nvPr/>
+        </p:nvSpPr>
+        <p:spPr>
+          <a:xfrm>
+            <a:off x="684000" y="3311999"/>
+            <a:ext cx="1872000" cy="1188000"/>
           </a:xfrm>
           <a:prstGeom prst="rect">
             <a:avLst/>
@@ -7049,46 +7105,7 @@
               </a:lnSpc>
             </a:pPr>
             <a:r>
-              <a:rPr sz="1500" b="1">
-                <a:solidFill>
-                  <a:srgbClr val="111111"/>
-                </a:solidFill>
-                <a:latin typeface="Poppins"/>
-              </a:rPr>
-              <a:t>Une idée</a:t>
-            </a:r>
-          </a:p>
-        </p:txBody>
-      </p:sp>
-      <p:sp>
-        <p:nvSpPr>
-          <p:cNvPr id="13" name="TextBox 12"/>
-          <p:cNvSpPr txBox="1"/>
-          <p:nvPr/>
-        </p:nvSpPr>
-        <p:spPr>
-          <a:xfrm>
-            <a:off x="684000" y="3168000"/>
-            <a:ext cx="1872000" cy="1296000"/>
-          </a:xfrm>
-          <a:prstGeom prst="rect">
-            <a:avLst/>
-          </a:prstGeom>
-          <a:noFill/>
-        </p:spPr>
-        <p:txBody>
-          <a:bodyPr wrap="square" lIns="36000" rIns="36000" tIns="18000" bIns="18000" anchor="t">
-            <a:spAutoFit/>
-          </a:bodyPr>
-          <a:lstStyle/>
-          <a:p>
-            <a:pPr algn="ctr">
-              <a:lnSpc>
-                <a:spcPct val="110000"/>
-              </a:lnSpc>
-            </a:pPr>
-            <a:r>
-              <a:rPr sz="1150" b="0">
+              <a:rPr sz="1100" b="0">
                 <a:solidFill>
                   <a:srgbClr val="5A5A5A"/>
                 </a:solidFill>
@@ -7153,7 +7170,7 @@
         </p:nvSpPr>
         <p:spPr>
           <a:xfrm>
-            <a:off x="3492000" y="1872000"/>
+            <a:off x="3492000" y="1835999"/>
             <a:ext cx="720000" cy="720000"/>
           </a:xfrm>
           <a:prstGeom prst="ellipse">
@@ -7205,7 +7222,7 @@
         </p:blipFill>
         <p:spPr>
           <a:xfrm>
-            <a:off x="3650400" y="2030400"/>
+            <a:off x="3650400" y="1994399"/>
             <a:ext cx="403200" cy="403200"/>
           </a:xfrm>
           <a:prstGeom prst="rect">
@@ -7221,8 +7238,47 @@
         </p:nvSpPr>
         <p:spPr>
           <a:xfrm>
-            <a:off x="2916000" y="2772000"/>
-            <a:ext cx="1872000" cy="360000"/>
+            <a:off x="2916000" y="2664000"/>
+            <a:ext cx="1872000" cy="576000"/>
+          </a:xfrm>
+          <a:prstGeom prst="rect">
+            <a:avLst/>
+          </a:prstGeom>
+          <a:noFill/>
+        </p:spPr>
+        <p:txBody>
+          <a:bodyPr wrap="square" lIns="36000" rIns="36000" tIns="18000" bIns="18000" anchor="ctr">
+            <a:spAutoFit/>
+          </a:bodyPr>
+          <a:lstStyle/>
+          <a:p>
+            <a:pPr algn="ctr">
+              <a:lnSpc>
+                <a:spcPct val="110000"/>
+              </a:lnSpc>
+            </a:pPr>
+            <a:r>
+              <a:rPr sz="1400" b="1">
+                <a:solidFill>
+                  <a:srgbClr val="111111"/>
+                </a:solidFill>
+                <a:latin typeface="Poppins"/>
+              </a:rPr>
+              <a:t>Une personne</a:t>
+            </a:r>
+          </a:p>
+        </p:txBody>
+      </p:sp>
+      <p:sp>
+        <p:nvSpPr>
+          <p:cNvPr id="18" name="TextBox 17"/>
+          <p:cNvSpPr txBox="1"/>
+          <p:nvPr/>
+        </p:nvSpPr>
+        <p:spPr>
+          <a:xfrm>
+            <a:off x="2916000" y="3311999"/>
+            <a:ext cx="1872000" cy="1188000"/>
           </a:xfrm>
           <a:prstGeom prst="rect">
             <a:avLst/>
@@ -7241,46 +7297,7 @@
               </a:lnSpc>
             </a:pPr>
             <a:r>
-              <a:rPr sz="1500" b="1">
-                <a:solidFill>
-                  <a:srgbClr val="111111"/>
-                </a:solidFill>
-                <a:latin typeface="Poppins"/>
-              </a:rPr>
-              <a:t>Une personne</a:t>
-            </a:r>
-          </a:p>
-        </p:txBody>
-      </p:sp>
-      <p:sp>
-        <p:nvSpPr>
-          <p:cNvPr id="18" name="TextBox 17"/>
-          <p:cNvSpPr txBox="1"/>
-          <p:nvPr/>
-        </p:nvSpPr>
-        <p:spPr>
-          <a:xfrm>
-            <a:off x="2916000" y="3168000"/>
-            <a:ext cx="1872000" cy="1296000"/>
-          </a:xfrm>
-          <a:prstGeom prst="rect">
-            <a:avLst/>
-          </a:prstGeom>
-          <a:noFill/>
-        </p:spPr>
-        <p:txBody>
-          <a:bodyPr wrap="square" lIns="36000" rIns="36000" tIns="18000" bIns="18000" anchor="t">
-            <a:spAutoFit/>
-          </a:bodyPr>
-          <a:lstStyle/>
-          <a:p>
-            <a:pPr algn="ctr">
-              <a:lnSpc>
-                <a:spcPct val="110000"/>
-              </a:lnSpc>
-            </a:pPr>
-            <a:r>
-              <a:rPr sz="1150" b="0">
+              <a:rPr sz="1100" b="0">
                 <a:solidFill>
                   <a:srgbClr val="5A5A5A"/>
                 </a:solidFill>
@@ -7345,7 +7362,7 @@
         </p:nvSpPr>
         <p:spPr>
           <a:xfrm>
-            <a:off x="5724000" y="1872000"/>
+            <a:off x="5724000" y="1835999"/>
             <a:ext cx="720000" cy="720000"/>
           </a:xfrm>
           <a:prstGeom prst="ellipse">
@@ -7397,7 +7414,7 @@
         </p:blipFill>
         <p:spPr>
           <a:xfrm>
-            <a:off x="5882400" y="2030400"/>
+            <a:off x="5882400" y="1994399"/>
             <a:ext cx="403200" cy="403200"/>
           </a:xfrm>
           <a:prstGeom prst="rect">
@@ -7413,8 +7430,47 @@
         </p:nvSpPr>
         <p:spPr>
           <a:xfrm>
-            <a:off x="5148000" y="2772000"/>
-            <a:ext cx="1872000" cy="360000"/>
+            <a:off x="5148000" y="2664000"/>
+            <a:ext cx="1872000" cy="576000"/>
+          </a:xfrm>
+          <a:prstGeom prst="rect">
+            <a:avLst/>
+          </a:prstGeom>
+          <a:noFill/>
+        </p:spPr>
+        <p:txBody>
+          <a:bodyPr wrap="square" lIns="36000" rIns="36000" tIns="18000" bIns="18000" anchor="ctr">
+            <a:spAutoFit/>
+          </a:bodyPr>
+          <a:lstStyle/>
+          <a:p>
+            <a:pPr algn="ctr">
+              <a:lnSpc>
+                <a:spcPct val="110000"/>
+              </a:lnSpc>
+            </a:pPr>
+            <a:r>
+              <a:rPr sz="1400" b="1">
+                <a:solidFill>
+                  <a:srgbClr val="111111"/>
+                </a:solidFill>
+                <a:latin typeface="Poppins"/>
+              </a:rPr>
+              <a:t>Une vraie question</a:t>
+            </a:r>
+          </a:p>
+        </p:txBody>
+      </p:sp>
+      <p:sp>
+        <p:nvSpPr>
+          <p:cNvPr id="23" name="TextBox 22"/>
+          <p:cNvSpPr txBox="1"/>
+          <p:nvPr/>
+        </p:nvSpPr>
+        <p:spPr>
+          <a:xfrm>
+            <a:off x="5148000" y="3311999"/>
+            <a:ext cx="1872000" cy="1188000"/>
           </a:xfrm>
           <a:prstGeom prst="rect">
             <a:avLst/>
@@ -7433,46 +7489,7 @@
               </a:lnSpc>
             </a:pPr>
             <a:r>
-              <a:rPr sz="1500" b="1">
-                <a:solidFill>
-                  <a:srgbClr val="111111"/>
-                </a:solidFill>
-                <a:latin typeface="Poppins"/>
-              </a:rPr>
-              <a:t>Une vraie question</a:t>
-            </a:r>
-          </a:p>
-        </p:txBody>
-      </p:sp>
-      <p:sp>
-        <p:nvSpPr>
-          <p:cNvPr id="23" name="TextBox 22"/>
-          <p:cNvSpPr txBox="1"/>
-          <p:nvPr/>
-        </p:nvSpPr>
-        <p:spPr>
-          <a:xfrm>
-            <a:off x="5148000" y="3168000"/>
-            <a:ext cx="1872000" cy="1296000"/>
-          </a:xfrm>
-          <a:prstGeom prst="rect">
-            <a:avLst/>
-          </a:prstGeom>
-          <a:noFill/>
-        </p:spPr>
-        <p:txBody>
-          <a:bodyPr wrap="square" lIns="36000" rIns="36000" tIns="18000" bIns="18000" anchor="t">
-            <a:spAutoFit/>
-          </a:bodyPr>
-          <a:lstStyle/>
-          <a:p>
-            <a:pPr algn="ctr">
-              <a:lnSpc>
-                <a:spcPct val="110000"/>
-              </a:lnSpc>
-            </a:pPr>
-            <a:r>
-              <a:rPr sz="1150" b="0">
+              <a:rPr sz="1100" b="0">
                 <a:solidFill>
                   <a:srgbClr val="5A5A5A"/>
                 </a:solidFill>
@@ -7537,7 +7554,7 @@
         </p:nvSpPr>
         <p:spPr>
           <a:xfrm>
-            <a:off x="7956000" y="1872000"/>
+            <a:off x="7956000" y="1835999"/>
             <a:ext cx="720000" cy="720000"/>
           </a:xfrm>
           <a:prstGeom prst="ellipse">
@@ -7589,7 +7606,7 @@
         </p:blipFill>
         <p:spPr>
           <a:xfrm>
-            <a:off x="8114400" y="2030400"/>
+            <a:off x="8114400" y="1994399"/>
             <a:ext cx="403200" cy="403200"/>
           </a:xfrm>
           <a:prstGeom prst="rect">
@@ -7605,8 +7622,47 @@
         </p:nvSpPr>
         <p:spPr>
           <a:xfrm>
-            <a:off x="7380000" y="2772000"/>
-            <a:ext cx="1872000" cy="360000"/>
+            <a:off x="7380000" y="2664000"/>
+            <a:ext cx="1872000" cy="576000"/>
+          </a:xfrm>
+          <a:prstGeom prst="rect">
+            <a:avLst/>
+          </a:prstGeom>
+          <a:noFill/>
+        </p:spPr>
+        <p:txBody>
+          <a:bodyPr wrap="square" lIns="36000" rIns="36000" tIns="18000" bIns="18000" anchor="ctr">
+            <a:spAutoFit/>
+          </a:bodyPr>
+          <a:lstStyle/>
+          <a:p>
+            <a:pPr algn="ctr">
+              <a:lnSpc>
+                <a:spcPct val="110000"/>
+              </a:lnSpc>
+            </a:pPr>
+            <a:r>
+              <a:rPr sz="1400" b="1">
+                <a:solidFill>
+                  <a:srgbClr val="111111"/>
+                </a:solidFill>
+                <a:latin typeface="Poppins"/>
+              </a:rPr>
+              <a:t>Le français d’abord</a:t>
+            </a:r>
+          </a:p>
+        </p:txBody>
+      </p:sp>
+      <p:sp>
+        <p:nvSpPr>
+          <p:cNvPr id="28" name="TextBox 27"/>
+          <p:cNvSpPr txBox="1"/>
+          <p:nvPr/>
+        </p:nvSpPr>
+        <p:spPr>
+          <a:xfrm>
+            <a:off x="7380000" y="3311999"/>
+            <a:ext cx="1872000" cy="1188000"/>
           </a:xfrm>
           <a:prstGeom prst="rect">
             <a:avLst/>
@@ -7625,46 +7681,7 @@
               </a:lnSpc>
             </a:pPr>
             <a:r>
-              <a:rPr sz="1500" b="1">
-                <a:solidFill>
-                  <a:srgbClr val="111111"/>
-                </a:solidFill>
-                <a:latin typeface="Poppins"/>
-              </a:rPr>
-              <a:t>Le français d’abord</a:t>
-            </a:r>
-          </a:p>
-        </p:txBody>
-      </p:sp>
-      <p:sp>
-        <p:nvSpPr>
-          <p:cNvPr id="28" name="TextBox 27"/>
-          <p:cNvSpPr txBox="1"/>
-          <p:nvPr/>
-        </p:nvSpPr>
-        <p:spPr>
-          <a:xfrm>
-            <a:off x="7380000" y="3168000"/>
-            <a:ext cx="1872000" cy="1296000"/>
-          </a:xfrm>
-          <a:prstGeom prst="rect">
-            <a:avLst/>
-          </a:prstGeom>
-          <a:noFill/>
-        </p:spPr>
-        <p:txBody>
-          <a:bodyPr wrap="square" lIns="36000" rIns="36000" tIns="18000" bIns="18000" anchor="t">
-            <a:spAutoFit/>
-          </a:bodyPr>
-          <a:lstStyle/>
-          <a:p>
-            <a:pPr algn="ctr">
-              <a:lnSpc>
-                <a:spcPct val="110000"/>
-              </a:lnSpc>
-            </a:pPr>
-            <a:r>
-              <a:rPr sz="1150" b="0">
+              <a:rPr sz="1100" b="0">
                 <a:solidFill>
                   <a:srgbClr val="5A5A5A"/>
                 </a:solidFill>
@@ -7729,7 +7746,7 @@
         </p:nvSpPr>
         <p:spPr>
           <a:xfrm>
-            <a:off x="10188000" y="1872000"/>
+            <a:off x="10188000" y="1835999"/>
             <a:ext cx="720000" cy="720000"/>
           </a:xfrm>
           <a:prstGeom prst="ellipse">
@@ -7781,7 +7798,7 @@
         </p:blipFill>
         <p:spPr>
           <a:xfrm>
-            <a:off x="10346400" y="2030400"/>
+            <a:off x="10346400" y="1994399"/>
             <a:ext cx="403200" cy="403200"/>
           </a:xfrm>
           <a:prstGeom prst="rect">
@@ -7797,8 +7814,47 @@
         </p:nvSpPr>
         <p:spPr>
           <a:xfrm>
-            <a:off x="9612000" y="2772000"/>
-            <a:ext cx="1872000" cy="360000"/>
+            <a:off x="9612000" y="2664000"/>
+            <a:ext cx="1872000" cy="576000"/>
+          </a:xfrm>
+          <a:prstGeom prst="rect">
+            <a:avLst/>
+          </a:prstGeom>
+          <a:noFill/>
+        </p:spPr>
+        <p:txBody>
+          <a:bodyPr wrap="square" lIns="36000" rIns="36000" tIns="18000" bIns="18000" anchor="ctr">
+            <a:spAutoFit/>
+          </a:bodyPr>
+          <a:lstStyle/>
+          <a:p>
+            <a:pPr algn="ctr">
+              <a:lnSpc>
+                <a:spcPct val="110000"/>
+              </a:lnSpc>
+            </a:pPr>
+            <a:r>
+              <a:rPr sz="1400" b="1">
+                <a:solidFill>
+                  <a:srgbClr val="111111"/>
+                </a:solidFill>
+                <a:latin typeface="Poppins"/>
+              </a:rPr>
+              <a:t>Le nom de la gamme</a:t>
+            </a:r>
+          </a:p>
+        </p:txBody>
+      </p:sp>
+      <p:sp>
+        <p:nvSpPr>
+          <p:cNvPr id="33" name="TextBox 32"/>
+          <p:cNvSpPr txBox="1"/>
+          <p:nvPr/>
+        </p:nvSpPr>
+        <p:spPr>
+          <a:xfrm>
+            <a:off x="9612000" y="3311999"/>
+            <a:ext cx="1872000" cy="1188000"/>
           </a:xfrm>
           <a:prstGeom prst="rect">
             <a:avLst/>
@@ -7817,46 +7873,7 @@
               </a:lnSpc>
             </a:pPr>
             <a:r>
-              <a:rPr sz="1500" b="1">
-                <a:solidFill>
-                  <a:srgbClr val="111111"/>
-                </a:solidFill>
-                <a:latin typeface="Poppins"/>
-              </a:rPr>
-              <a:t>Le nom de la gamme</a:t>
-            </a:r>
-          </a:p>
-        </p:txBody>
-      </p:sp>
-      <p:sp>
-        <p:nvSpPr>
-          <p:cNvPr id="33" name="TextBox 32"/>
-          <p:cNvSpPr txBox="1"/>
-          <p:nvPr/>
-        </p:nvSpPr>
-        <p:spPr>
-          <a:xfrm>
-            <a:off x="9612000" y="3168000"/>
-            <a:ext cx="1872000" cy="1296000"/>
-          </a:xfrm>
-          <a:prstGeom prst="rect">
-            <a:avLst/>
-          </a:prstGeom>
-          <a:noFill/>
-        </p:spPr>
-        <p:txBody>
-          <a:bodyPr wrap="square" lIns="36000" rIns="36000" tIns="18000" bIns="18000" anchor="t">
-            <a:spAutoFit/>
-          </a:bodyPr>
-          <a:lstStyle/>
-          <a:p>
-            <a:pPr algn="ctr">
-              <a:lnSpc>
-                <a:spcPct val="110000"/>
-              </a:lnSpc>
-            </a:pPr>
-            <a:r>
-              <a:rPr sz="1150" b="0">
+              <a:rPr sz="1100" b="0">
                 <a:solidFill>
                   <a:srgbClr val="5A5A5A"/>
                 </a:solidFill>
@@ -8259,7 +8276,7 @@
       </p:sp>
       <p:pic>
         <p:nvPicPr>
-          <p:cNvPr id="9" name="Picture 8" descr="v_d_always.jpg"/>
+          <p:cNvPr id="9" name="Picture 8" descr="w_d_always.jpg"/>
           <p:cNvPicPr>
             <a:picLocks noChangeAspect="1"/>
           </p:cNvPicPr>
@@ -8273,8 +8290,8 @@
         </p:blipFill>
         <p:spPr>
           <a:xfrm>
-            <a:off x="799200" y="1440000"/>
-            <a:ext cx="1929600" cy="2412000"/>
+            <a:off x="792000" y="1475999"/>
+            <a:ext cx="1944000" cy="2430000"/>
           </a:xfrm>
           <a:prstGeom prst="rect">
             <a:avLst/>
@@ -8283,7 +8300,7 @@
       </p:pic>
       <p:pic>
         <p:nvPicPr>
-          <p:cNvPr id="10" name="Picture 9" descr="v_d_homme.jpg"/>
+          <p:cNvPr id="10" name="Picture 9" descr="w_d_homme.jpg"/>
           <p:cNvPicPr>
             <a:picLocks noChangeAspect="1"/>
           </p:cNvPicPr>
@@ -8297,8 +8314,8 @@
         </p:blipFill>
         <p:spPr>
           <a:xfrm>
-            <a:off x="3319200" y="1440000"/>
-            <a:ext cx="1929600" cy="2412000"/>
+            <a:off x="3276000" y="1475999"/>
+            <a:ext cx="1944000" cy="2430000"/>
           </a:xfrm>
           <a:prstGeom prst="rect">
             <a:avLst/>
@@ -8307,7 +8324,7 @@
       </p:pic>
       <p:pic>
         <p:nvPicPr>
-          <p:cNvPr id="11" name="Picture 10" descr="v_d_boutons.jpg"/>
+          <p:cNvPr id="11" name="Picture 10" descr="w_d_boutons.jpg"/>
           <p:cNvPicPr>
             <a:picLocks noChangeAspect="1"/>
           </p:cNvPicPr>
@@ -8321,8 +8338,8 @@
         </p:blipFill>
         <p:spPr>
           <a:xfrm>
-            <a:off x="5839200" y="1440000"/>
-            <a:ext cx="1929600" cy="2412000"/>
+            <a:off x="5760000" y="1475999"/>
+            <a:ext cx="1944000" cy="2430000"/>
           </a:xfrm>
           <a:prstGeom prst="rect">
             <a:avLst/>
@@ -8331,7 +8348,7 @@
       </p:pic>
       <p:pic>
         <p:nvPicPr>
-          <p:cNvPr id="12" name="Picture 11" descr="v_d_parfum.jpg"/>
+          <p:cNvPr id="12" name="Picture 11" descr="w_d_parfum.jpg"/>
           <p:cNvPicPr>
             <a:picLocks noChangeAspect="1"/>
           </p:cNvPicPr>
@@ -8345,8 +8362,8 @@
         </p:blipFill>
         <p:spPr>
           <a:xfrm>
-            <a:off x="799200" y="3924000"/>
-            <a:ext cx="1929600" cy="2412000"/>
+            <a:off x="792000" y="3977999"/>
+            <a:ext cx="1944000" cy="2430000"/>
           </a:xfrm>
           <a:prstGeom prst="rect">
             <a:avLst/>
@@ -8355,7 +8372,7 @@
       </p:pic>
       <p:pic>
         <p:nvPicPr>
-          <p:cNvPr id="13" name="Picture 12" descr="v_d_carotte.jpg"/>
+          <p:cNvPr id="13" name="Picture 12" descr="w_d_carotte.jpg"/>
           <p:cNvPicPr>
             <a:picLocks noChangeAspect="1"/>
           </p:cNvPicPr>
@@ -8369,8 +8386,8 @@
         </p:blipFill>
         <p:spPr>
           <a:xfrm>
-            <a:off x="3319200" y="3924000"/>
-            <a:ext cx="1929600" cy="2412000"/>
+            <a:off x="3276000" y="3977999"/>
+            <a:ext cx="1944000" cy="2430000"/>
           </a:xfrm>
           <a:prstGeom prst="rect">
             <a:avLst/>
@@ -8379,7 +8396,7 @@
       </p:pic>
       <p:pic>
         <p:nvPicPr>
-          <p:cNvPr id="14" name="Picture 13" descr="v_d_bebe.jpg"/>
+          <p:cNvPr id="14" name="Picture 13" descr="w_d_bebe.jpg"/>
           <p:cNvPicPr>
             <a:picLocks noChangeAspect="1"/>
           </p:cNvPicPr>
@@ -8393,8 +8410,8 @@
         </p:blipFill>
         <p:spPr>
           <a:xfrm>
-            <a:off x="5839200" y="3924000"/>
-            <a:ext cx="1929600" cy="2412000"/>
+            <a:off x="5760000" y="3977999"/>
+            <a:ext cx="1944000" cy="2430000"/>
           </a:xfrm>
           <a:prstGeom prst="rect">
             <a:avLst/>
@@ -8802,9 +8819,92 @@
           </a:p>
         </p:txBody>
       </p:sp>
+      <p:sp>
+        <p:nvSpPr>
+          <p:cNvPr id="9" name="Rounded Rectangle 8"/>
+          <p:cNvSpPr/>
+          <p:nvPr/>
+        </p:nvSpPr>
+        <p:spPr>
+          <a:xfrm>
+            <a:off x="576000" y="1512000"/>
+            <a:ext cx="3456000" cy="270000"/>
+          </a:xfrm>
+          <a:prstGeom prst="roundRect">
+            <a:avLst/>
+          </a:prstGeom>
+          <a:solidFill>
+            <a:srgbClr val="E2E2E2"/>
+          </a:solidFill>
+          <a:ln>
+            <a:noFill/>
+          </a:ln>
+          <a:effectLst/>
+        </p:spPr>
+        <p:style>
+          <a:lnRef idx="1">
+            <a:schemeClr val="accent1"/>
+          </a:lnRef>
+          <a:fillRef idx="3">
+            <a:schemeClr val="accent1"/>
+          </a:fillRef>
+          <a:effectRef idx="2">
+            <a:schemeClr val="accent1"/>
+          </a:effectRef>
+          <a:fontRef idx="minor">
+            <a:schemeClr val="lt1"/>
+          </a:fontRef>
+        </p:style>
+        <p:txBody>
+          <a:bodyPr rtlCol="0" anchor="ctr"/>
+          <a:lstStyle/>
+          <a:p>
+            <a:pPr algn="ctr"/>
+          </a:p>
+        </p:txBody>
+      </p:sp>
+      <p:sp>
+        <p:nvSpPr>
+          <p:cNvPr id="10" name="TextBox 9"/>
+          <p:cNvSpPr txBox="1"/>
+          <p:nvPr/>
+        </p:nvSpPr>
+        <p:spPr>
+          <a:xfrm>
+            <a:off x="576000" y="1512000"/>
+            <a:ext cx="3456000" cy="270000"/>
+          </a:xfrm>
+          <a:prstGeom prst="rect">
+            <a:avLst/>
+          </a:prstGeom>
+          <a:noFill/>
+        </p:spPr>
+        <p:txBody>
+          <a:bodyPr wrap="square" lIns="36000" rIns="36000" tIns="18000" bIns="18000" anchor="ctr">
+            <a:spAutoFit/>
+          </a:bodyPr>
+          <a:lstStyle/>
+          <a:p>
+            <a:pPr algn="ctr">
+              <a:lnSpc>
+                <a:spcPct val="110000"/>
+              </a:lnSpc>
+            </a:pPr>
+            <a:r>
+              <a:rPr sz="1000" b="1">
+                <a:solidFill>
+                  <a:srgbClr val="5A5A5A"/>
+                </a:solidFill>
+                <a:latin typeface="Poppins"/>
+              </a:rPr>
+              <a:t>AVANT · PUBLIÉ</a:t>
+            </a:r>
+          </a:p>
+        </p:txBody>
+      </p:sp>
       <p:pic>
         <p:nvPicPr>
-          <p:cNvPr id="9" name="Picture 8" descr="cmp_d_always.jpg"/>
+          <p:cNvPr id="11" name="Picture 10" descr="b_d_always.jpg"/>
           <p:cNvPicPr>
             <a:picLocks noChangeAspect="1"/>
           </p:cNvPicPr>
@@ -8818,14 +8918,719 @@
         </p:blipFill>
         <p:spPr>
           <a:xfrm>
-            <a:off x="1408045" y="1422000"/>
-            <a:ext cx="9351910" cy="4896000"/>
+            <a:off x="576000" y="2087100"/>
+            <a:ext cx="3456000" cy="4033800"/>
           </a:xfrm>
           <a:prstGeom prst="rect">
             <a:avLst/>
           </a:prstGeom>
         </p:spPr>
       </p:pic>
+      <p:sp>
+        <p:nvSpPr>
+          <p:cNvPr id="12" name="Oval 11"/>
+          <p:cNvSpPr/>
+          <p:nvPr/>
+        </p:nvSpPr>
+        <p:spPr>
+          <a:xfrm>
+            <a:off x="4158000" y="3744000"/>
+            <a:ext cx="540000" cy="540000"/>
+          </a:xfrm>
+          <a:prstGeom prst="ellipse">
+            <a:avLst/>
+          </a:prstGeom>
+          <a:solidFill>
+            <a:srgbClr val="AE172A"/>
+          </a:solidFill>
+          <a:ln>
+            <a:noFill/>
+          </a:ln>
+          <a:effectLst/>
+        </p:spPr>
+        <p:style>
+          <a:lnRef idx="1">
+            <a:schemeClr val="accent1"/>
+          </a:lnRef>
+          <a:fillRef idx="3">
+            <a:schemeClr val="accent1"/>
+          </a:fillRef>
+          <a:effectRef idx="2">
+            <a:schemeClr val="accent1"/>
+          </a:effectRef>
+          <a:fontRef idx="minor">
+            <a:schemeClr val="lt1"/>
+          </a:fontRef>
+        </p:style>
+        <p:txBody>
+          <a:bodyPr rtlCol="0" anchor="ctr"/>
+          <a:lstStyle/>
+          <a:p>
+            <a:pPr algn="ctr"/>
+          </a:p>
+        </p:txBody>
+      </p:sp>
+      <p:pic>
+        <p:nvPicPr>
+          <p:cNvPr id="13" name="Picture 12" descr="arrow-right_bl.png"/>
+          <p:cNvPicPr>
+            <a:picLocks noChangeAspect="1"/>
+          </p:cNvPicPr>
+          <p:nvPr/>
+        </p:nvPicPr>
+        <p:blipFill>
+          <a:blip r:embed="rId4"/>
+          <a:stretch>
+            <a:fillRect/>
+          </a:stretch>
+        </p:blipFill>
+        <p:spPr>
+          <a:xfrm>
+            <a:off x="4266000" y="3851999"/>
+            <a:ext cx="324000" cy="324000"/>
+          </a:xfrm>
+          <a:prstGeom prst="rect">
+            <a:avLst/>
+          </a:prstGeom>
+        </p:spPr>
+      </p:pic>
+      <p:sp>
+        <p:nvSpPr>
+          <p:cNvPr id="14" name="Rounded Rectangle 13"/>
+          <p:cNvSpPr/>
+          <p:nvPr/>
+        </p:nvSpPr>
+        <p:spPr>
+          <a:xfrm>
+            <a:off x="4824000" y="1512000"/>
+            <a:ext cx="3816000" cy="270000"/>
+          </a:xfrm>
+          <a:prstGeom prst="roundRect">
+            <a:avLst/>
+          </a:prstGeom>
+          <a:solidFill>
+            <a:srgbClr val="AE172A"/>
+          </a:solidFill>
+          <a:ln>
+            <a:noFill/>
+          </a:ln>
+          <a:effectLst/>
+        </p:spPr>
+        <p:style>
+          <a:lnRef idx="1">
+            <a:schemeClr val="accent1"/>
+          </a:lnRef>
+          <a:fillRef idx="3">
+            <a:schemeClr val="accent1"/>
+          </a:fillRef>
+          <a:effectRef idx="2">
+            <a:schemeClr val="accent1"/>
+          </a:effectRef>
+          <a:fontRef idx="minor">
+            <a:schemeClr val="lt1"/>
+          </a:fontRef>
+        </p:style>
+        <p:txBody>
+          <a:bodyPr rtlCol="0" anchor="ctr"/>
+          <a:lstStyle/>
+          <a:p>
+            <a:pPr algn="ctr"/>
+          </a:p>
+        </p:txBody>
+      </p:sp>
+      <p:sp>
+        <p:nvSpPr>
+          <p:cNvPr id="15" name="TextBox 14"/>
+          <p:cNvSpPr txBox="1"/>
+          <p:nvPr/>
+        </p:nvSpPr>
+        <p:spPr>
+          <a:xfrm>
+            <a:off x="4824000" y="1512000"/>
+            <a:ext cx="3816000" cy="270000"/>
+          </a:xfrm>
+          <a:prstGeom prst="rect">
+            <a:avLst/>
+          </a:prstGeom>
+          <a:noFill/>
+        </p:spPr>
+        <p:txBody>
+          <a:bodyPr wrap="square" lIns="36000" rIns="36000" tIns="18000" bIns="18000" anchor="ctr">
+            <a:spAutoFit/>
+          </a:bodyPr>
+          <a:lstStyle/>
+          <a:p>
+            <a:pPr algn="ctr">
+              <a:lnSpc>
+                <a:spcPct val="110000"/>
+              </a:lnSpc>
+            </a:pPr>
+            <a:r>
+              <a:rPr sz="1000" b="1">
+                <a:solidFill>
+                  <a:srgbClr val="FFFFFF"/>
+                </a:solidFill>
+                <a:latin typeface="Poppins"/>
+              </a:rPr>
+              <a:t>APRÈS · PROPOSÉ</a:t>
+            </a:r>
+          </a:p>
+        </p:txBody>
+      </p:sp>
+      <p:pic>
+        <p:nvPicPr>
+          <p:cNvPr id="16" name="Picture 15" descr="w_d_always.jpg"/>
+          <p:cNvPicPr>
+            <a:picLocks noChangeAspect="1"/>
+          </p:cNvPicPr>
+          <p:nvPr/>
+        </p:nvPicPr>
+        <p:blipFill>
+          <a:blip r:embed="rId5"/>
+          <a:stretch>
+            <a:fillRect/>
+          </a:stretch>
+        </p:blipFill>
+        <p:spPr>
+          <a:xfrm>
+            <a:off x="4946400" y="1872000"/>
+            <a:ext cx="3571200" cy="4464000"/>
+          </a:xfrm>
+          <a:prstGeom prst="rect">
+            <a:avLst/>
+          </a:prstGeom>
+        </p:spPr>
+      </p:pic>
+      <p:sp>
+        <p:nvSpPr>
+          <p:cNvPr id="17" name="Rounded Rectangle 16"/>
+          <p:cNvSpPr/>
+          <p:nvPr/>
+        </p:nvSpPr>
+        <p:spPr>
+          <a:xfrm>
+            <a:off x="8820000" y="1512000"/>
+            <a:ext cx="2808000" cy="4824000"/>
+          </a:xfrm>
+          <a:prstGeom prst="roundRect">
+            <a:avLst>
+              <a:gd name="adj" fmla="val 6000"/>
+            </a:avLst>
+          </a:prstGeom>
+          <a:solidFill>
+            <a:srgbClr val="FFF0F1"/>
+          </a:solidFill>
+          <a:ln>
+            <a:noFill/>
+          </a:ln>
+          <a:effectLst/>
+        </p:spPr>
+        <p:style>
+          <a:lnRef idx="1">
+            <a:schemeClr val="accent1"/>
+          </a:lnRef>
+          <a:fillRef idx="3">
+            <a:schemeClr val="accent1"/>
+          </a:fillRef>
+          <a:effectRef idx="2">
+            <a:schemeClr val="accent1"/>
+          </a:effectRef>
+          <a:fontRef idx="minor">
+            <a:schemeClr val="lt1"/>
+          </a:fontRef>
+        </p:style>
+        <p:txBody>
+          <a:bodyPr rtlCol="0" anchor="ctr"/>
+          <a:lstStyle/>
+          <a:p>
+            <a:pPr algn="ctr"/>
+          </a:p>
+        </p:txBody>
+      </p:sp>
+      <p:sp>
+        <p:nvSpPr>
+          <p:cNvPr id="18" name="TextBox 17"/>
+          <p:cNvSpPr txBox="1"/>
+          <p:nvPr/>
+        </p:nvSpPr>
+        <p:spPr>
+          <a:xfrm>
+            <a:off x="9036000" y="1655999"/>
+            <a:ext cx="2448000" cy="324000"/>
+          </a:xfrm>
+          <a:prstGeom prst="rect">
+            <a:avLst/>
+          </a:prstGeom>
+          <a:noFill/>
+        </p:spPr>
+        <p:txBody>
+          <a:bodyPr wrap="square" lIns="36000" rIns="36000" tIns="18000" bIns="18000" anchor="t">
+            <a:spAutoFit/>
+          </a:bodyPr>
+          <a:lstStyle/>
+          <a:p>
+            <a:pPr algn="l">
+              <a:lnSpc>
+                <a:spcPct val="110000"/>
+              </a:lnSpc>
+            </a:pPr>
+            <a:r>
+              <a:rPr sz="1500" b="1">
+                <a:solidFill>
+                  <a:srgbClr val="AE172A"/>
+                </a:solidFill>
+                <a:latin typeface="Poppins"/>
+              </a:rPr>
+              <a:t>Ce qui change</a:t>
+            </a:r>
+          </a:p>
+        </p:txBody>
+      </p:sp>
+      <p:sp>
+        <p:nvSpPr>
+          <p:cNvPr id="19" name="Oval 18"/>
+          <p:cNvSpPr/>
+          <p:nvPr/>
+        </p:nvSpPr>
+        <p:spPr>
+          <a:xfrm>
+            <a:off x="9036000" y="2088000"/>
+            <a:ext cx="342000" cy="342000"/>
+          </a:xfrm>
+          <a:prstGeom prst="ellipse">
+            <a:avLst/>
+          </a:prstGeom>
+          <a:solidFill>
+            <a:srgbClr val="FF8087"/>
+          </a:solidFill>
+          <a:ln>
+            <a:noFill/>
+          </a:ln>
+          <a:effectLst/>
+        </p:spPr>
+        <p:style>
+          <a:lnRef idx="1">
+            <a:schemeClr val="accent1"/>
+          </a:lnRef>
+          <a:fillRef idx="3">
+            <a:schemeClr val="accent1"/>
+          </a:fillRef>
+          <a:effectRef idx="2">
+            <a:schemeClr val="accent1"/>
+          </a:effectRef>
+          <a:fontRef idx="minor">
+            <a:schemeClr val="lt1"/>
+          </a:fontRef>
+        </p:style>
+        <p:txBody>
+          <a:bodyPr rtlCol="0" anchor="ctr"/>
+          <a:lstStyle/>
+          <a:p>
+            <a:pPr algn="ctr"/>
+          </a:p>
+        </p:txBody>
+      </p:sp>
+      <p:pic>
+        <p:nvPicPr>
+          <p:cNvPr id="20" name="Picture 19" descr="check_bl.png"/>
+          <p:cNvPicPr>
+            <a:picLocks noChangeAspect="1"/>
+          </p:cNvPicPr>
+          <p:nvPr/>
+        </p:nvPicPr>
+        <p:blipFill>
+          <a:blip r:embed="rId6"/>
+          <a:stretch>
+            <a:fillRect/>
+          </a:stretch>
+        </p:blipFill>
+        <p:spPr>
+          <a:xfrm>
+            <a:off x="9097200" y="2149200"/>
+            <a:ext cx="216000" cy="216000"/>
+          </a:xfrm>
+          <a:prstGeom prst="rect">
+            <a:avLst/>
+          </a:prstGeom>
+        </p:spPr>
+      </p:pic>
+      <p:sp>
+        <p:nvSpPr>
+          <p:cNvPr id="21" name="TextBox 20"/>
+          <p:cNvSpPr txBox="1"/>
+          <p:nvPr/>
+        </p:nvSpPr>
+        <p:spPr>
+          <a:xfrm>
+            <a:off x="9468000" y="2052000"/>
+            <a:ext cx="2052000" cy="648000"/>
+          </a:xfrm>
+          <a:prstGeom prst="rect">
+            <a:avLst/>
+          </a:prstGeom>
+          <a:noFill/>
+        </p:spPr>
+        <p:txBody>
+          <a:bodyPr wrap="square" lIns="36000" rIns="36000" tIns="18000" bIns="18000" anchor="t">
+            <a:spAutoFit/>
+          </a:bodyPr>
+          <a:lstStyle/>
+          <a:p>
+            <a:pPr algn="l">
+              <a:lnSpc>
+                <a:spcPct val="110000"/>
+              </a:lnSpc>
+            </a:pPr>
+            <a:r>
+              <a:rPr sz="1100" b="1">
+                <a:solidFill>
+                  <a:srgbClr val="111111"/>
+                </a:solidFill>
+                <a:latin typeface="Poppins"/>
+              </a:rPr>
+              <a:t>Le texte en français, d’abord</a:t>
+            </a:r>
+          </a:p>
+        </p:txBody>
+      </p:sp>
+      <p:sp>
+        <p:nvSpPr>
+          <p:cNvPr id="22" name="Oval 21"/>
+          <p:cNvSpPr/>
+          <p:nvPr/>
+        </p:nvSpPr>
+        <p:spPr>
+          <a:xfrm>
+            <a:off x="9036000" y="2790000"/>
+            <a:ext cx="342000" cy="342000"/>
+          </a:xfrm>
+          <a:prstGeom prst="ellipse">
+            <a:avLst/>
+          </a:prstGeom>
+          <a:solidFill>
+            <a:srgbClr val="FF8087"/>
+          </a:solidFill>
+          <a:ln>
+            <a:noFill/>
+          </a:ln>
+          <a:effectLst/>
+        </p:spPr>
+        <p:style>
+          <a:lnRef idx="1">
+            <a:schemeClr val="accent1"/>
+          </a:lnRef>
+          <a:fillRef idx="3">
+            <a:schemeClr val="accent1"/>
+          </a:fillRef>
+          <a:effectRef idx="2">
+            <a:schemeClr val="accent1"/>
+          </a:effectRef>
+          <a:fontRef idx="minor">
+            <a:schemeClr val="lt1"/>
+          </a:fontRef>
+        </p:style>
+        <p:txBody>
+          <a:bodyPr rtlCol="0" anchor="ctr"/>
+          <a:lstStyle/>
+          <a:p>
+            <a:pPr algn="ctr"/>
+          </a:p>
+        </p:txBody>
+      </p:sp>
+      <p:pic>
+        <p:nvPicPr>
+          <p:cNvPr id="23" name="Picture 22" descr="check_bl.png"/>
+          <p:cNvPicPr>
+            <a:picLocks noChangeAspect="1"/>
+          </p:cNvPicPr>
+          <p:nvPr/>
+        </p:nvPicPr>
+        <p:blipFill>
+          <a:blip r:embed="rId6"/>
+          <a:stretch>
+            <a:fillRect/>
+          </a:stretch>
+        </p:blipFill>
+        <p:spPr>
+          <a:xfrm>
+            <a:off x="9097200" y="2851200"/>
+            <a:ext cx="216000" cy="216000"/>
+          </a:xfrm>
+          <a:prstGeom prst="rect">
+            <a:avLst/>
+          </a:prstGeom>
+        </p:spPr>
+      </p:pic>
+      <p:sp>
+        <p:nvSpPr>
+          <p:cNvPr id="24" name="TextBox 23"/>
+          <p:cNvSpPr txBox="1"/>
+          <p:nvPr/>
+        </p:nvSpPr>
+        <p:spPr>
+          <a:xfrm>
+            <a:off x="9468000" y="2754000"/>
+            <a:ext cx="2052000" cy="648000"/>
+          </a:xfrm>
+          <a:prstGeom prst="rect">
+            <a:avLst/>
+          </a:prstGeom>
+          <a:noFill/>
+        </p:spPr>
+        <p:txBody>
+          <a:bodyPr wrap="square" lIns="36000" rIns="36000" tIns="18000" bIns="18000" anchor="t">
+            <a:spAutoFit/>
+          </a:bodyPr>
+          <a:lstStyle/>
+          <a:p>
+            <a:pPr algn="l">
+              <a:lnSpc>
+                <a:spcPct val="110000"/>
+              </a:lnSpc>
+            </a:pPr>
+            <a:r>
+              <a:rPr sz="1100" b="1">
+                <a:solidFill>
+                  <a:srgbClr val="111111"/>
+                </a:solidFill>
+                <a:latin typeface="Poppins"/>
+              </a:rPr>
+              <a:t>Un visage et le produit, côte à côte</a:t>
+            </a:r>
+          </a:p>
+        </p:txBody>
+      </p:sp>
+      <p:sp>
+        <p:nvSpPr>
+          <p:cNvPr id="25" name="Oval 24"/>
+          <p:cNvSpPr/>
+          <p:nvPr/>
+        </p:nvSpPr>
+        <p:spPr>
+          <a:xfrm>
+            <a:off x="9036000" y="3492000"/>
+            <a:ext cx="342000" cy="342000"/>
+          </a:xfrm>
+          <a:prstGeom prst="ellipse">
+            <a:avLst/>
+          </a:prstGeom>
+          <a:solidFill>
+            <a:srgbClr val="FF8087"/>
+          </a:solidFill>
+          <a:ln>
+            <a:noFill/>
+          </a:ln>
+          <a:effectLst/>
+        </p:spPr>
+        <p:style>
+          <a:lnRef idx="1">
+            <a:schemeClr val="accent1"/>
+          </a:lnRef>
+          <a:fillRef idx="3">
+            <a:schemeClr val="accent1"/>
+          </a:fillRef>
+          <a:effectRef idx="2">
+            <a:schemeClr val="accent1"/>
+          </a:effectRef>
+          <a:fontRef idx="minor">
+            <a:schemeClr val="lt1"/>
+          </a:fontRef>
+        </p:style>
+        <p:txBody>
+          <a:bodyPr rtlCol="0" anchor="ctr"/>
+          <a:lstStyle/>
+          <a:p>
+            <a:pPr algn="ctr"/>
+          </a:p>
+        </p:txBody>
+      </p:sp>
+      <p:pic>
+        <p:nvPicPr>
+          <p:cNvPr id="26" name="Picture 25" descr="check_bl.png"/>
+          <p:cNvPicPr>
+            <a:picLocks noChangeAspect="1"/>
+          </p:cNvPicPr>
+          <p:nvPr/>
+        </p:nvPicPr>
+        <p:blipFill>
+          <a:blip r:embed="rId6"/>
+          <a:stretch>
+            <a:fillRect/>
+          </a:stretch>
+        </p:blipFill>
+        <p:spPr>
+          <a:xfrm>
+            <a:off x="9097200" y="3553200"/>
+            <a:ext cx="216000" cy="216000"/>
+          </a:xfrm>
+          <a:prstGeom prst="rect">
+            <a:avLst/>
+          </a:prstGeom>
+        </p:spPr>
+      </p:pic>
+      <p:sp>
+        <p:nvSpPr>
+          <p:cNvPr id="27" name="TextBox 26"/>
+          <p:cNvSpPr txBox="1"/>
+          <p:nvPr/>
+        </p:nvSpPr>
+        <p:spPr>
+          <a:xfrm>
+            <a:off x="9468000" y="3456000"/>
+            <a:ext cx="2052000" cy="648000"/>
+          </a:xfrm>
+          <a:prstGeom prst="rect">
+            <a:avLst/>
+          </a:prstGeom>
+          <a:noFill/>
+        </p:spPr>
+        <p:txBody>
+          <a:bodyPr wrap="square" lIns="36000" rIns="36000" tIns="18000" bIns="18000" anchor="t">
+            <a:spAutoFit/>
+          </a:bodyPr>
+          <a:lstStyle/>
+          <a:p>
+            <a:pPr algn="l">
+              <a:lnSpc>
+                <a:spcPct val="110000"/>
+              </a:lnSpc>
+            </a:pPr>
+            <a:r>
+              <a:rPr sz="1100" b="1">
+                <a:solidFill>
+                  <a:srgbClr val="111111"/>
+                </a:solidFill>
+                <a:latin typeface="Poppins"/>
+              </a:rPr>
+              <a:t>Une question à laquelle on répond en 1 mot</a:t>
+            </a:r>
+          </a:p>
+        </p:txBody>
+      </p:sp>
+      <p:sp>
+        <p:nvSpPr>
+          <p:cNvPr id="28" name="Rectangle 27"/>
+          <p:cNvSpPr/>
+          <p:nvPr/>
+        </p:nvSpPr>
+        <p:spPr>
+          <a:xfrm>
+            <a:off x="9036000" y="4248000"/>
+            <a:ext cx="2376000" cy="21600"/>
+          </a:xfrm>
+          <a:prstGeom prst="rect">
+            <a:avLst/>
+          </a:prstGeom>
+          <a:solidFill>
+            <a:srgbClr val="E2E2E2"/>
+          </a:solidFill>
+          <a:ln>
+            <a:noFill/>
+          </a:ln>
+          <a:effectLst/>
+        </p:spPr>
+        <p:style>
+          <a:lnRef idx="1">
+            <a:schemeClr val="accent1"/>
+          </a:lnRef>
+          <a:fillRef idx="3">
+            <a:schemeClr val="accent1"/>
+          </a:fillRef>
+          <a:effectRef idx="2">
+            <a:schemeClr val="accent1"/>
+          </a:effectRef>
+          <a:fontRef idx="minor">
+            <a:schemeClr val="lt1"/>
+          </a:fontRef>
+        </p:style>
+        <p:txBody>
+          <a:bodyPr rtlCol="0" anchor="ctr"/>
+          <a:lstStyle/>
+          <a:p>
+            <a:pPr algn="ctr"/>
+          </a:p>
+        </p:txBody>
+      </p:sp>
+      <p:sp>
+        <p:nvSpPr>
+          <p:cNvPr id="29" name="TextBox 28"/>
+          <p:cNvSpPr txBox="1"/>
+          <p:nvPr/>
+        </p:nvSpPr>
+        <p:spPr>
+          <a:xfrm>
+            <a:off x="9036000" y="4320000"/>
+            <a:ext cx="2376000" cy="251999"/>
+          </a:xfrm>
+          <a:prstGeom prst="rect">
+            <a:avLst/>
+          </a:prstGeom>
+          <a:noFill/>
+        </p:spPr>
+        <p:txBody>
+          <a:bodyPr wrap="square" lIns="36000" rIns="36000" tIns="18000" bIns="18000" anchor="t">
+            <a:spAutoFit/>
+          </a:bodyPr>
+          <a:lstStyle/>
+          <a:p>
+            <a:pPr algn="l">
+              <a:lnSpc>
+                <a:spcPct val="110000"/>
+              </a:lnSpc>
+            </a:pPr>
+            <a:r>
+              <a:rPr sz="900" b="1">
+                <a:solidFill>
+                  <a:srgbClr val="5A5A5A"/>
+                </a:solidFill>
+                <a:latin typeface="Poppins"/>
+              </a:rPr>
+              <a:t>LE TEXTE PROPOSÉ</a:t>
+            </a:r>
+          </a:p>
+        </p:txBody>
+      </p:sp>
+      <p:sp>
+        <p:nvSpPr>
+          <p:cNvPr id="30" name="TextBox 29"/>
+          <p:cNvSpPr txBox="1"/>
+          <p:nvPr/>
+        </p:nvSpPr>
+        <p:spPr>
+          <a:xfrm>
+            <a:off x="9036000" y="4536000"/>
+            <a:ext cx="2376000" cy="1764000"/>
+          </a:xfrm>
+          <a:prstGeom prst="rect">
+            <a:avLst/>
+          </a:prstGeom>
+          <a:noFill/>
+        </p:spPr>
+        <p:txBody>
+          <a:bodyPr wrap="square" lIns="36000" rIns="36000" tIns="18000" bIns="18000" anchor="t">
+            <a:spAutoFit/>
+          </a:bodyPr>
+          <a:lstStyle/>
+          <a:p>
+            <a:pPr algn="l">
+              <a:lnSpc>
+                <a:spcPct val="110000"/>
+              </a:lnSpc>
+            </a:pPr>
+            <a:r>
+              <a:rPr sz="950" b="0">
+                <a:solidFill>
+                  <a:srgbClr val="111111"/>
+                </a:solidFill>
+                <a:latin typeface="Poppins"/>
+              </a:rPr>
+              <a:t>Le soir, on se démaquille, on applique, on souffle. 2 minutes pour soi. 🤍
+La crème Always Young s’applique en fin de journée, sur peau propre.
+ Vous, c’est le matin ou le soir ? Dites-le 👇</a:t>
+            </a:r>
+          </a:p>
+        </p:txBody>
+      </p:sp>
     </p:spTree>
   </p:cSld>
   <p:clrMapOvr>
@@ -9112,9 +9917,92 @@
           </a:p>
         </p:txBody>
       </p:sp>
+      <p:sp>
+        <p:nvSpPr>
+          <p:cNvPr id="9" name="Rounded Rectangle 8"/>
+          <p:cNvSpPr/>
+          <p:nvPr/>
+        </p:nvSpPr>
+        <p:spPr>
+          <a:xfrm>
+            <a:off x="576000" y="1512000"/>
+            <a:ext cx="3456000" cy="270000"/>
+          </a:xfrm>
+          <a:prstGeom prst="roundRect">
+            <a:avLst/>
+          </a:prstGeom>
+          <a:solidFill>
+            <a:srgbClr val="E2E2E2"/>
+          </a:solidFill>
+          <a:ln>
+            <a:noFill/>
+          </a:ln>
+          <a:effectLst/>
+        </p:spPr>
+        <p:style>
+          <a:lnRef idx="1">
+            <a:schemeClr val="accent1"/>
+          </a:lnRef>
+          <a:fillRef idx="3">
+            <a:schemeClr val="accent1"/>
+          </a:fillRef>
+          <a:effectRef idx="2">
+            <a:schemeClr val="accent1"/>
+          </a:effectRef>
+          <a:fontRef idx="minor">
+            <a:schemeClr val="lt1"/>
+          </a:fontRef>
+        </p:style>
+        <p:txBody>
+          <a:bodyPr rtlCol="0" anchor="ctr"/>
+          <a:lstStyle/>
+          <a:p>
+            <a:pPr algn="ctr"/>
+          </a:p>
+        </p:txBody>
+      </p:sp>
+      <p:sp>
+        <p:nvSpPr>
+          <p:cNvPr id="10" name="TextBox 9"/>
+          <p:cNvSpPr txBox="1"/>
+          <p:nvPr/>
+        </p:nvSpPr>
+        <p:spPr>
+          <a:xfrm>
+            <a:off x="576000" y="1512000"/>
+            <a:ext cx="3456000" cy="270000"/>
+          </a:xfrm>
+          <a:prstGeom prst="rect">
+            <a:avLst/>
+          </a:prstGeom>
+          <a:noFill/>
+        </p:spPr>
+        <p:txBody>
+          <a:bodyPr wrap="square" lIns="36000" rIns="36000" tIns="18000" bIns="18000" anchor="ctr">
+            <a:spAutoFit/>
+          </a:bodyPr>
+          <a:lstStyle/>
+          <a:p>
+            <a:pPr algn="ctr">
+              <a:lnSpc>
+                <a:spcPct val="110000"/>
+              </a:lnSpc>
+            </a:pPr>
+            <a:r>
+              <a:rPr sz="1000" b="1">
+                <a:solidFill>
+                  <a:srgbClr val="5A5A5A"/>
+                </a:solidFill>
+                <a:latin typeface="Poppins"/>
+              </a:rPr>
+              <a:t>AVANT · PUBLIÉ</a:t>
+            </a:r>
+          </a:p>
+        </p:txBody>
+      </p:sp>
       <p:pic>
         <p:nvPicPr>
-          <p:cNvPr id="9" name="Picture 8" descr="cmp_d_homme.jpg"/>
+          <p:cNvPr id="11" name="Picture 10" descr="b_d_homme.jpg"/>
           <p:cNvPicPr>
             <a:picLocks noChangeAspect="1"/>
           </p:cNvPicPr>
@@ -9128,14 +10016,719 @@
         </p:blipFill>
         <p:spPr>
           <a:xfrm>
-            <a:off x="1306044" y="1422000"/>
-            <a:ext cx="9555912" cy="4896000"/>
+            <a:off x="576000" y="1949400"/>
+            <a:ext cx="3456000" cy="4309200"/>
           </a:xfrm>
           <a:prstGeom prst="rect">
             <a:avLst/>
           </a:prstGeom>
         </p:spPr>
       </p:pic>
+      <p:sp>
+        <p:nvSpPr>
+          <p:cNvPr id="12" name="Oval 11"/>
+          <p:cNvSpPr/>
+          <p:nvPr/>
+        </p:nvSpPr>
+        <p:spPr>
+          <a:xfrm>
+            <a:off x="4158000" y="3744000"/>
+            <a:ext cx="540000" cy="540000"/>
+          </a:xfrm>
+          <a:prstGeom prst="ellipse">
+            <a:avLst/>
+          </a:prstGeom>
+          <a:solidFill>
+            <a:srgbClr val="AE172A"/>
+          </a:solidFill>
+          <a:ln>
+            <a:noFill/>
+          </a:ln>
+          <a:effectLst/>
+        </p:spPr>
+        <p:style>
+          <a:lnRef idx="1">
+            <a:schemeClr val="accent1"/>
+          </a:lnRef>
+          <a:fillRef idx="3">
+            <a:schemeClr val="accent1"/>
+          </a:fillRef>
+          <a:effectRef idx="2">
+            <a:schemeClr val="accent1"/>
+          </a:effectRef>
+          <a:fontRef idx="minor">
+            <a:schemeClr val="lt1"/>
+          </a:fontRef>
+        </p:style>
+        <p:txBody>
+          <a:bodyPr rtlCol="0" anchor="ctr"/>
+          <a:lstStyle/>
+          <a:p>
+            <a:pPr algn="ctr"/>
+          </a:p>
+        </p:txBody>
+      </p:sp>
+      <p:pic>
+        <p:nvPicPr>
+          <p:cNvPr id="13" name="Picture 12" descr="arrow-right_bl.png"/>
+          <p:cNvPicPr>
+            <a:picLocks noChangeAspect="1"/>
+          </p:cNvPicPr>
+          <p:nvPr/>
+        </p:nvPicPr>
+        <p:blipFill>
+          <a:blip r:embed="rId4"/>
+          <a:stretch>
+            <a:fillRect/>
+          </a:stretch>
+        </p:blipFill>
+        <p:spPr>
+          <a:xfrm>
+            <a:off x="4266000" y="3851999"/>
+            <a:ext cx="324000" cy="324000"/>
+          </a:xfrm>
+          <a:prstGeom prst="rect">
+            <a:avLst/>
+          </a:prstGeom>
+        </p:spPr>
+      </p:pic>
+      <p:sp>
+        <p:nvSpPr>
+          <p:cNvPr id="14" name="Rounded Rectangle 13"/>
+          <p:cNvSpPr/>
+          <p:nvPr/>
+        </p:nvSpPr>
+        <p:spPr>
+          <a:xfrm>
+            <a:off x="4824000" y="1512000"/>
+            <a:ext cx="3816000" cy="270000"/>
+          </a:xfrm>
+          <a:prstGeom prst="roundRect">
+            <a:avLst/>
+          </a:prstGeom>
+          <a:solidFill>
+            <a:srgbClr val="AE172A"/>
+          </a:solidFill>
+          <a:ln>
+            <a:noFill/>
+          </a:ln>
+          <a:effectLst/>
+        </p:spPr>
+        <p:style>
+          <a:lnRef idx="1">
+            <a:schemeClr val="accent1"/>
+          </a:lnRef>
+          <a:fillRef idx="3">
+            <a:schemeClr val="accent1"/>
+          </a:fillRef>
+          <a:effectRef idx="2">
+            <a:schemeClr val="accent1"/>
+          </a:effectRef>
+          <a:fontRef idx="minor">
+            <a:schemeClr val="lt1"/>
+          </a:fontRef>
+        </p:style>
+        <p:txBody>
+          <a:bodyPr rtlCol="0" anchor="ctr"/>
+          <a:lstStyle/>
+          <a:p>
+            <a:pPr algn="ctr"/>
+          </a:p>
+        </p:txBody>
+      </p:sp>
+      <p:sp>
+        <p:nvSpPr>
+          <p:cNvPr id="15" name="TextBox 14"/>
+          <p:cNvSpPr txBox="1"/>
+          <p:nvPr/>
+        </p:nvSpPr>
+        <p:spPr>
+          <a:xfrm>
+            <a:off x="4824000" y="1512000"/>
+            <a:ext cx="3816000" cy="270000"/>
+          </a:xfrm>
+          <a:prstGeom prst="rect">
+            <a:avLst/>
+          </a:prstGeom>
+          <a:noFill/>
+        </p:spPr>
+        <p:txBody>
+          <a:bodyPr wrap="square" lIns="36000" rIns="36000" tIns="18000" bIns="18000" anchor="ctr">
+            <a:spAutoFit/>
+          </a:bodyPr>
+          <a:lstStyle/>
+          <a:p>
+            <a:pPr algn="ctr">
+              <a:lnSpc>
+                <a:spcPct val="110000"/>
+              </a:lnSpc>
+            </a:pPr>
+            <a:r>
+              <a:rPr sz="1000" b="1">
+                <a:solidFill>
+                  <a:srgbClr val="FFFFFF"/>
+                </a:solidFill>
+                <a:latin typeface="Poppins"/>
+              </a:rPr>
+              <a:t>APRÈS · PROPOSÉ</a:t>
+            </a:r>
+          </a:p>
+        </p:txBody>
+      </p:sp>
+      <p:pic>
+        <p:nvPicPr>
+          <p:cNvPr id="16" name="Picture 15" descr="w_d_homme.jpg"/>
+          <p:cNvPicPr>
+            <a:picLocks noChangeAspect="1"/>
+          </p:cNvPicPr>
+          <p:nvPr/>
+        </p:nvPicPr>
+        <p:blipFill>
+          <a:blip r:embed="rId5"/>
+          <a:stretch>
+            <a:fillRect/>
+          </a:stretch>
+        </p:blipFill>
+        <p:spPr>
+          <a:xfrm>
+            <a:off x="4946400" y="1872000"/>
+            <a:ext cx="3571200" cy="4464000"/>
+          </a:xfrm>
+          <a:prstGeom prst="rect">
+            <a:avLst/>
+          </a:prstGeom>
+        </p:spPr>
+      </p:pic>
+      <p:sp>
+        <p:nvSpPr>
+          <p:cNvPr id="17" name="Rounded Rectangle 16"/>
+          <p:cNvSpPr/>
+          <p:nvPr/>
+        </p:nvSpPr>
+        <p:spPr>
+          <a:xfrm>
+            <a:off x="8820000" y="1512000"/>
+            <a:ext cx="2808000" cy="4824000"/>
+          </a:xfrm>
+          <a:prstGeom prst="roundRect">
+            <a:avLst>
+              <a:gd name="adj" fmla="val 6000"/>
+            </a:avLst>
+          </a:prstGeom>
+          <a:solidFill>
+            <a:srgbClr val="FFF0F1"/>
+          </a:solidFill>
+          <a:ln>
+            <a:noFill/>
+          </a:ln>
+          <a:effectLst/>
+        </p:spPr>
+        <p:style>
+          <a:lnRef idx="1">
+            <a:schemeClr val="accent1"/>
+          </a:lnRef>
+          <a:fillRef idx="3">
+            <a:schemeClr val="accent1"/>
+          </a:fillRef>
+          <a:effectRef idx="2">
+            <a:schemeClr val="accent1"/>
+          </a:effectRef>
+          <a:fontRef idx="minor">
+            <a:schemeClr val="lt1"/>
+          </a:fontRef>
+        </p:style>
+        <p:txBody>
+          <a:bodyPr rtlCol="0" anchor="ctr"/>
+          <a:lstStyle/>
+          <a:p>
+            <a:pPr algn="ctr"/>
+          </a:p>
+        </p:txBody>
+      </p:sp>
+      <p:sp>
+        <p:nvSpPr>
+          <p:cNvPr id="18" name="TextBox 17"/>
+          <p:cNvSpPr txBox="1"/>
+          <p:nvPr/>
+        </p:nvSpPr>
+        <p:spPr>
+          <a:xfrm>
+            <a:off x="9036000" y="1655999"/>
+            <a:ext cx="2448000" cy="324000"/>
+          </a:xfrm>
+          <a:prstGeom prst="rect">
+            <a:avLst/>
+          </a:prstGeom>
+          <a:noFill/>
+        </p:spPr>
+        <p:txBody>
+          <a:bodyPr wrap="square" lIns="36000" rIns="36000" tIns="18000" bIns="18000" anchor="t">
+            <a:spAutoFit/>
+          </a:bodyPr>
+          <a:lstStyle/>
+          <a:p>
+            <a:pPr algn="l">
+              <a:lnSpc>
+                <a:spcPct val="110000"/>
+              </a:lnSpc>
+            </a:pPr>
+            <a:r>
+              <a:rPr sz="1500" b="1">
+                <a:solidFill>
+                  <a:srgbClr val="AE172A"/>
+                </a:solidFill>
+                <a:latin typeface="Poppins"/>
+              </a:rPr>
+              <a:t>Ce qui change</a:t>
+            </a:r>
+          </a:p>
+        </p:txBody>
+      </p:sp>
+      <p:sp>
+        <p:nvSpPr>
+          <p:cNvPr id="19" name="Oval 18"/>
+          <p:cNvSpPr/>
+          <p:nvPr/>
+        </p:nvSpPr>
+        <p:spPr>
+          <a:xfrm>
+            <a:off x="9036000" y="2088000"/>
+            <a:ext cx="342000" cy="342000"/>
+          </a:xfrm>
+          <a:prstGeom prst="ellipse">
+            <a:avLst/>
+          </a:prstGeom>
+          <a:solidFill>
+            <a:srgbClr val="FF8087"/>
+          </a:solidFill>
+          <a:ln>
+            <a:noFill/>
+          </a:ln>
+          <a:effectLst/>
+        </p:spPr>
+        <p:style>
+          <a:lnRef idx="1">
+            <a:schemeClr val="accent1"/>
+          </a:lnRef>
+          <a:fillRef idx="3">
+            <a:schemeClr val="accent1"/>
+          </a:fillRef>
+          <a:effectRef idx="2">
+            <a:schemeClr val="accent1"/>
+          </a:effectRef>
+          <a:fontRef idx="minor">
+            <a:schemeClr val="lt1"/>
+          </a:fontRef>
+        </p:style>
+        <p:txBody>
+          <a:bodyPr rtlCol="0" anchor="ctr"/>
+          <a:lstStyle/>
+          <a:p>
+            <a:pPr algn="ctr"/>
+          </a:p>
+        </p:txBody>
+      </p:sp>
+      <p:pic>
+        <p:nvPicPr>
+          <p:cNvPr id="20" name="Picture 19" descr="check_bl.png"/>
+          <p:cNvPicPr>
+            <a:picLocks noChangeAspect="1"/>
+          </p:cNvPicPr>
+          <p:nvPr/>
+        </p:nvPicPr>
+        <p:blipFill>
+          <a:blip r:embed="rId6"/>
+          <a:stretch>
+            <a:fillRect/>
+          </a:stretch>
+        </p:blipFill>
+        <p:spPr>
+          <a:xfrm>
+            <a:off x="9097200" y="2149200"/>
+            <a:ext cx="216000" cy="216000"/>
+          </a:xfrm>
+          <a:prstGeom prst="rect">
+            <a:avLst/>
+          </a:prstGeom>
+        </p:spPr>
+      </p:pic>
+      <p:sp>
+        <p:nvSpPr>
+          <p:cNvPr id="21" name="TextBox 20"/>
+          <p:cNvSpPr txBox="1"/>
+          <p:nvPr/>
+        </p:nvSpPr>
+        <p:spPr>
+          <a:xfrm>
+            <a:off x="9468000" y="2052000"/>
+            <a:ext cx="2052000" cy="648000"/>
+          </a:xfrm>
+          <a:prstGeom prst="rect">
+            <a:avLst/>
+          </a:prstGeom>
+          <a:noFill/>
+        </p:spPr>
+        <p:txBody>
+          <a:bodyPr wrap="square" lIns="36000" rIns="36000" tIns="18000" bIns="18000" anchor="t">
+            <a:spAutoFit/>
+          </a:bodyPr>
+          <a:lstStyle/>
+          <a:p>
+            <a:pPr algn="l">
+              <a:lnSpc>
+                <a:spcPct val="110000"/>
+              </a:lnSpc>
+            </a:pPr>
+            <a:r>
+              <a:rPr sz="1100" b="1">
+                <a:solidFill>
+                  <a:srgbClr val="111111"/>
+                </a:solidFill>
+                <a:latin typeface="Poppins"/>
+              </a:rPr>
+              <a:t>Les 3 étapes écrites dans le post, pas cachées</a:t>
+            </a:r>
+          </a:p>
+        </p:txBody>
+      </p:sp>
+      <p:sp>
+        <p:nvSpPr>
+          <p:cNvPr id="22" name="Oval 21"/>
+          <p:cNvSpPr/>
+          <p:nvPr/>
+        </p:nvSpPr>
+        <p:spPr>
+          <a:xfrm>
+            <a:off x="9036000" y="2790000"/>
+            <a:ext cx="342000" cy="342000"/>
+          </a:xfrm>
+          <a:prstGeom prst="ellipse">
+            <a:avLst/>
+          </a:prstGeom>
+          <a:solidFill>
+            <a:srgbClr val="FF8087"/>
+          </a:solidFill>
+          <a:ln>
+            <a:noFill/>
+          </a:ln>
+          <a:effectLst/>
+        </p:spPr>
+        <p:style>
+          <a:lnRef idx="1">
+            <a:schemeClr val="accent1"/>
+          </a:lnRef>
+          <a:fillRef idx="3">
+            <a:schemeClr val="accent1"/>
+          </a:fillRef>
+          <a:effectRef idx="2">
+            <a:schemeClr val="accent1"/>
+          </a:effectRef>
+          <a:fontRef idx="minor">
+            <a:schemeClr val="lt1"/>
+          </a:fontRef>
+        </p:style>
+        <p:txBody>
+          <a:bodyPr rtlCol="0" anchor="ctr"/>
+          <a:lstStyle/>
+          <a:p>
+            <a:pPr algn="ctr"/>
+          </a:p>
+        </p:txBody>
+      </p:sp>
+      <p:pic>
+        <p:nvPicPr>
+          <p:cNvPr id="23" name="Picture 22" descr="check_bl.png"/>
+          <p:cNvPicPr>
+            <a:picLocks noChangeAspect="1"/>
+          </p:cNvPicPr>
+          <p:nvPr/>
+        </p:nvPicPr>
+        <p:blipFill>
+          <a:blip r:embed="rId6"/>
+          <a:stretch>
+            <a:fillRect/>
+          </a:stretch>
+        </p:blipFill>
+        <p:spPr>
+          <a:xfrm>
+            <a:off x="9097200" y="2851200"/>
+            <a:ext cx="216000" cy="216000"/>
+          </a:xfrm>
+          <a:prstGeom prst="rect">
+            <a:avLst/>
+          </a:prstGeom>
+        </p:spPr>
+      </p:pic>
+      <p:sp>
+        <p:nvSpPr>
+          <p:cNvPr id="24" name="TextBox 23"/>
+          <p:cNvSpPr txBox="1"/>
+          <p:nvPr/>
+        </p:nvSpPr>
+        <p:spPr>
+          <a:xfrm>
+            <a:off x="9468000" y="2754000"/>
+            <a:ext cx="2052000" cy="648000"/>
+          </a:xfrm>
+          <a:prstGeom prst="rect">
+            <a:avLst/>
+          </a:prstGeom>
+          <a:noFill/>
+        </p:spPr>
+        <p:txBody>
+          <a:bodyPr wrap="square" lIns="36000" rIns="36000" tIns="18000" bIns="18000" anchor="t">
+            <a:spAutoFit/>
+          </a:bodyPr>
+          <a:lstStyle/>
+          <a:p>
+            <a:pPr algn="l">
+              <a:lnSpc>
+                <a:spcPct val="110000"/>
+              </a:lnSpc>
+            </a:pPr>
+            <a:r>
+              <a:rPr sz="1100" b="1">
+                <a:solidFill>
+                  <a:srgbClr val="111111"/>
+                </a:solidFill>
+                <a:latin typeface="Poppins"/>
+              </a:rPr>
+              <a:t>Le produit montré, avec son nom</a:t>
+            </a:r>
+          </a:p>
+        </p:txBody>
+      </p:sp>
+      <p:sp>
+        <p:nvSpPr>
+          <p:cNvPr id="25" name="Oval 24"/>
+          <p:cNvSpPr/>
+          <p:nvPr/>
+        </p:nvSpPr>
+        <p:spPr>
+          <a:xfrm>
+            <a:off x="9036000" y="3492000"/>
+            <a:ext cx="342000" cy="342000"/>
+          </a:xfrm>
+          <a:prstGeom prst="ellipse">
+            <a:avLst/>
+          </a:prstGeom>
+          <a:solidFill>
+            <a:srgbClr val="FF8087"/>
+          </a:solidFill>
+          <a:ln>
+            <a:noFill/>
+          </a:ln>
+          <a:effectLst/>
+        </p:spPr>
+        <p:style>
+          <a:lnRef idx="1">
+            <a:schemeClr val="accent1"/>
+          </a:lnRef>
+          <a:fillRef idx="3">
+            <a:schemeClr val="accent1"/>
+          </a:fillRef>
+          <a:effectRef idx="2">
+            <a:schemeClr val="accent1"/>
+          </a:effectRef>
+          <a:fontRef idx="minor">
+            <a:schemeClr val="lt1"/>
+          </a:fontRef>
+        </p:style>
+        <p:txBody>
+          <a:bodyPr rtlCol="0" anchor="ctr"/>
+          <a:lstStyle/>
+          <a:p>
+            <a:pPr algn="ctr"/>
+          </a:p>
+        </p:txBody>
+      </p:sp>
+      <p:pic>
+        <p:nvPicPr>
+          <p:cNvPr id="26" name="Picture 25" descr="check_bl.png"/>
+          <p:cNvPicPr>
+            <a:picLocks noChangeAspect="1"/>
+          </p:cNvPicPr>
+          <p:nvPr/>
+        </p:nvPicPr>
+        <p:blipFill>
+          <a:blip r:embed="rId6"/>
+          <a:stretch>
+            <a:fillRect/>
+          </a:stretch>
+        </p:blipFill>
+        <p:spPr>
+          <a:xfrm>
+            <a:off x="9097200" y="3553200"/>
+            <a:ext cx="216000" cy="216000"/>
+          </a:xfrm>
+          <a:prstGeom prst="rect">
+            <a:avLst/>
+          </a:prstGeom>
+        </p:spPr>
+      </p:pic>
+      <p:sp>
+        <p:nvSpPr>
+          <p:cNvPr id="27" name="TextBox 26"/>
+          <p:cNvSpPr txBox="1"/>
+          <p:nvPr/>
+        </p:nvSpPr>
+        <p:spPr>
+          <a:xfrm>
+            <a:off x="9468000" y="3456000"/>
+            <a:ext cx="2052000" cy="648000"/>
+          </a:xfrm>
+          <a:prstGeom prst="rect">
+            <a:avLst/>
+          </a:prstGeom>
+          <a:noFill/>
+        </p:spPr>
+        <p:txBody>
+          <a:bodyPr wrap="square" lIns="36000" rIns="36000" tIns="18000" bIns="18000" anchor="t">
+            <a:spAutoFit/>
+          </a:bodyPr>
+          <a:lstStyle/>
+          <a:p>
+            <a:pPr algn="l">
+              <a:lnSpc>
+                <a:spcPct val="110000"/>
+              </a:lnSpc>
+            </a:pPr>
+            <a:r>
+              <a:rPr sz="1100" b="1">
+                <a:solidFill>
+                  <a:srgbClr val="111111"/>
+                </a:solidFill>
+                <a:latin typeface="Poppins"/>
+              </a:rPr>
+              <a:t>On fait compter : réponse facile</a:t>
+            </a:r>
+          </a:p>
+        </p:txBody>
+      </p:sp>
+      <p:sp>
+        <p:nvSpPr>
+          <p:cNvPr id="28" name="Rectangle 27"/>
+          <p:cNvSpPr/>
+          <p:nvPr/>
+        </p:nvSpPr>
+        <p:spPr>
+          <a:xfrm>
+            <a:off x="9036000" y="4248000"/>
+            <a:ext cx="2376000" cy="21600"/>
+          </a:xfrm>
+          <a:prstGeom prst="rect">
+            <a:avLst/>
+          </a:prstGeom>
+          <a:solidFill>
+            <a:srgbClr val="E2E2E2"/>
+          </a:solidFill>
+          <a:ln>
+            <a:noFill/>
+          </a:ln>
+          <a:effectLst/>
+        </p:spPr>
+        <p:style>
+          <a:lnRef idx="1">
+            <a:schemeClr val="accent1"/>
+          </a:lnRef>
+          <a:fillRef idx="3">
+            <a:schemeClr val="accent1"/>
+          </a:fillRef>
+          <a:effectRef idx="2">
+            <a:schemeClr val="accent1"/>
+          </a:effectRef>
+          <a:fontRef idx="minor">
+            <a:schemeClr val="lt1"/>
+          </a:fontRef>
+        </p:style>
+        <p:txBody>
+          <a:bodyPr rtlCol="0" anchor="ctr"/>
+          <a:lstStyle/>
+          <a:p>
+            <a:pPr algn="ctr"/>
+          </a:p>
+        </p:txBody>
+      </p:sp>
+      <p:sp>
+        <p:nvSpPr>
+          <p:cNvPr id="29" name="TextBox 28"/>
+          <p:cNvSpPr txBox="1"/>
+          <p:nvPr/>
+        </p:nvSpPr>
+        <p:spPr>
+          <a:xfrm>
+            <a:off x="9036000" y="4320000"/>
+            <a:ext cx="2376000" cy="251999"/>
+          </a:xfrm>
+          <a:prstGeom prst="rect">
+            <a:avLst/>
+          </a:prstGeom>
+          <a:noFill/>
+        </p:spPr>
+        <p:txBody>
+          <a:bodyPr wrap="square" lIns="36000" rIns="36000" tIns="18000" bIns="18000" anchor="t">
+            <a:spAutoFit/>
+          </a:bodyPr>
+          <a:lstStyle/>
+          <a:p>
+            <a:pPr algn="l">
+              <a:lnSpc>
+                <a:spcPct val="110000"/>
+              </a:lnSpc>
+            </a:pPr>
+            <a:r>
+              <a:rPr sz="900" b="1">
+                <a:solidFill>
+                  <a:srgbClr val="5A5A5A"/>
+                </a:solidFill>
+                <a:latin typeface="Poppins"/>
+              </a:rPr>
+              <a:t>LE TEXTE PROPOSÉ</a:t>
+            </a:r>
+          </a:p>
+        </p:txBody>
+      </p:sp>
+      <p:sp>
+        <p:nvSpPr>
+          <p:cNvPr id="30" name="TextBox 29"/>
+          <p:cNvSpPr txBox="1"/>
+          <p:nvPr/>
+        </p:nvSpPr>
+        <p:spPr>
+          <a:xfrm>
+            <a:off x="9036000" y="4536000"/>
+            <a:ext cx="2376000" cy="1764000"/>
+          </a:xfrm>
+          <a:prstGeom prst="rect">
+            <a:avLst/>
+          </a:prstGeom>
+          <a:noFill/>
+        </p:spPr>
+        <p:txBody>
+          <a:bodyPr wrap="square" lIns="36000" rIns="36000" tIns="18000" bIns="18000" anchor="t">
+            <a:spAutoFit/>
+          </a:bodyPr>
+          <a:lstStyle/>
+          <a:p>
+            <a:pPr algn="l">
+              <a:lnSpc>
+                <a:spcPct val="110000"/>
+              </a:lnSpc>
+            </a:pPr>
+            <a:r>
+              <a:rPr sz="950" b="0">
+                <a:solidFill>
+                  <a:srgbClr val="111111"/>
+                </a:solidFill>
+                <a:latin typeface="Poppins"/>
+              </a:rPr>
+              <a:t>Messieurs, après la douche : 1. on sèche bien, 2. on hydrate, 3. on parfume. 💧
+Le gel douche Day by Day Men fait la première étape pour vous.
+ Vous en faites combien sur les 3 ? 👇</a:t>
+            </a:r>
+          </a:p>
+        </p:txBody>
+      </p:sp>
     </p:spTree>
   </p:cSld>
   <p:clrMapOvr>
@@ -9422,9 +11015,92 @@
           </a:p>
         </p:txBody>
       </p:sp>
+      <p:sp>
+        <p:nvSpPr>
+          <p:cNvPr id="9" name="Rounded Rectangle 8"/>
+          <p:cNvSpPr/>
+          <p:nvPr/>
+        </p:nvSpPr>
+        <p:spPr>
+          <a:xfrm>
+            <a:off x="576000" y="1512000"/>
+            <a:ext cx="3456000" cy="270000"/>
+          </a:xfrm>
+          <a:prstGeom prst="roundRect">
+            <a:avLst/>
+          </a:prstGeom>
+          <a:solidFill>
+            <a:srgbClr val="E2E2E2"/>
+          </a:solidFill>
+          <a:ln>
+            <a:noFill/>
+          </a:ln>
+          <a:effectLst/>
+        </p:spPr>
+        <p:style>
+          <a:lnRef idx="1">
+            <a:schemeClr val="accent1"/>
+          </a:lnRef>
+          <a:fillRef idx="3">
+            <a:schemeClr val="accent1"/>
+          </a:fillRef>
+          <a:effectRef idx="2">
+            <a:schemeClr val="accent1"/>
+          </a:effectRef>
+          <a:fontRef idx="minor">
+            <a:schemeClr val="lt1"/>
+          </a:fontRef>
+        </p:style>
+        <p:txBody>
+          <a:bodyPr rtlCol="0" anchor="ctr"/>
+          <a:lstStyle/>
+          <a:p>
+            <a:pPr algn="ctr"/>
+          </a:p>
+        </p:txBody>
+      </p:sp>
+      <p:sp>
+        <p:nvSpPr>
+          <p:cNvPr id="10" name="TextBox 9"/>
+          <p:cNvSpPr txBox="1"/>
+          <p:nvPr/>
+        </p:nvSpPr>
+        <p:spPr>
+          <a:xfrm>
+            <a:off x="576000" y="1512000"/>
+            <a:ext cx="3456000" cy="270000"/>
+          </a:xfrm>
+          <a:prstGeom prst="rect">
+            <a:avLst/>
+          </a:prstGeom>
+          <a:noFill/>
+        </p:spPr>
+        <p:txBody>
+          <a:bodyPr wrap="square" lIns="36000" rIns="36000" tIns="18000" bIns="18000" anchor="ctr">
+            <a:spAutoFit/>
+          </a:bodyPr>
+          <a:lstStyle/>
+          <a:p>
+            <a:pPr algn="ctr">
+              <a:lnSpc>
+                <a:spcPct val="110000"/>
+              </a:lnSpc>
+            </a:pPr>
+            <a:r>
+              <a:rPr sz="1000" b="1">
+                <a:solidFill>
+                  <a:srgbClr val="5A5A5A"/>
+                </a:solidFill>
+                <a:latin typeface="Poppins"/>
+              </a:rPr>
+              <a:t>AVANT · PUBLIÉ</a:t>
+            </a:r>
+          </a:p>
+        </p:txBody>
+      </p:sp>
       <p:pic>
         <p:nvPicPr>
-          <p:cNvPr id="9" name="Picture 8" descr="cmp_d_boutons.jpg"/>
+          <p:cNvPr id="11" name="Picture 10" descr="b_d_boutons.jpg"/>
           <p:cNvPicPr>
             <a:picLocks noChangeAspect="1"/>
           </p:cNvPicPr>
@@ -9438,14 +11114,719 @@
         </p:blipFill>
         <p:spPr>
           <a:xfrm>
-            <a:off x="1306044" y="1422000"/>
-            <a:ext cx="9555912" cy="4896000"/>
+            <a:off x="576000" y="1949400"/>
+            <a:ext cx="3456000" cy="4309200"/>
           </a:xfrm>
           <a:prstGeom prst="rect">
             <a:avLst/>
           </a:prstGeom>
         </p:spPr>
       </p:pic>
+      <p:sp>
+        <p:nvSpPr>
+          <p:cNvPr id="12" name="Oval 11"/>
+          <p:cNvSpPr/>
+          <p:nvPr/>
+        </p:nvSpPr>
+        <p:spPr>
+          <a:xfrm>
+            <a:off x="4158000" y="3744000"/>
+            <a:ext cx="540000" cy="540000"/>
+          </a:xfrm>
+          <a:prstGeom prst="ellipse">
+            <a:avLst/>
+          </a:prstGeom>
+          <a:solidFill>
+            <a:srgbClr val="AE172A"/>
+          </a:solidFill>
+          <a:ln>
+            <a:noFill/>
+          </a:ln>
+          <a:effectLst/>
+        </p:spPr>
+        <p:style>
+          <a:lnRef idx="1">
+            <a:schemeClr val="accent1"/>
+          </a:lnRef>
+          <a:fillRef idx="3">
+            <a:schemeClr val="accent1"/>
+          </a:fillRef>
+          <a:effectRef idx="2">
+            <a:schemeClr val="accent1"/>
+          </a:effectRef>
+          <a:fontRef idx="minor">
+            <a:schemeClr val="lt1"/>
+          </a:fontRef>
+        </p:style>
+        <p:txBody>
+          <a:bodyPr rtlCol="0" anchor="ctr"/>
+          <a:lstStyle/>
+          <a:p>
+            <a:pPr algn="ctr"/>
+          </a:p>
+        </p:txBody>
+      </p:sp>
+      <p:pic>
+        <p:nvPicPr>
+          <p:cNvPr id="13" name="Picture 12" descr="arrow-right_bl.png"/>
+          <p:cNvPicPr>
+            <a:picLocks noChangeAspect="1"/>
+          </p:cNvPicPr>
+          <p:nvPr/>
+        </p:nvPicPr>
+        <p:blipFill>
+          <a:blip r:embed="rId4"/>
+          <a:stretch>
+            <a:fillRect/>
+          </a:stretch>
+        </p:blipFill>
+        <p:spPr>
+          <a:xfrm>
+            <a:off x="4266000" y="3851999"/>
+            <a:ext cx="324000" cy="324000"/>
+          </a:xfrm>
+          <a:prstGeom prst="rect">
+            <a:avLst/>
+          </a:prstGeom>
+        </p:spPr>
+      </p:pic>
+      <p:sp>
+        <p:nvSpPr>
+          <p:cNvPr id="14" name="Rounded Rectangle 13"/>
+          <p:cNvSpPr/>
+          <p:nvPr/>
+        </p:nvSpPr>
+        <p:spPr>
+          <a:xfrm>
+            <a:off x="4824000" y="1512000"/>
+            <a:ext cx="3816000" cy="270000"/>
+          </a:xfrm>
+          <a:prstGeom prst="roundRect">
+            <a:avLst/>
+          </a:prstGeom>
+          <a:solidFill>
+            <a:srgbClr val="AE172A"/>
+          </a:solidFill>
+          <a:ln>
+            <a:noFill/>
+          </a:ln>
+          <a:effectLst/>
+        </p:spPr>
+        <p:style>
+          <a:lnRef idx="1">
+            <a:schemeClr val="accent1"/>
+          </a:lnRef>
+          <a:fillRef idx="3">
+            <a:schemeClr val="accent1"/>
+          </a:fillRef>
+          <a:effectRef idx="2">
+            <a:schemeClr val="accent1"/>
+          </a:effectRef>
+          <a:fontRef idx="minor">
+            <a:schemeClr val="lt1"/>
+          </a:fontRef>
+        </p:style>
+        <p:txBody>
+          <a:bodyPr rtlCol="0" anchor="ctr"/>
+          <a:lstStyle/>
+          <a:p>
+            <a:pPr algn="ctr"/>
+          </a:p>
+        </p:txBody>
+      </p:sp>
+      <p:sp>
+        <p:nvSpPr>
+          <p:cNvPr id="15" name="TextBox 14"/>
+          <p:cNvSpPr txBox="1"/>
+          <p:nvPr/>
+        </p:nvSpPr>
+        <p:spPr>
+          <a:xfrm>
+            <a:off x="4824000" y="1512000"/>
+            <a:ext cx="3816000" cy="270000"/>
+          </a:xfrm>
+          <a:prstGeom prst="rect">
+            <a:avLst/>
+          </a:prstGeom>
+          <a:noFill/>
+        </p:spPr>
+        <p:txBody>
+          <a:bodyPr wrap="square" lIns="36000" rIns="36000" tIns="18000" bIns="18000" anchor="ctr">
+            <a:spAutoFit/>
+          </a:bodyPr>
+          <a:lstStyle/>
+          <a:p>
+            <a:pPr algn="ctr">
+              <a:lnSpc>
+                <a:spcPct val="110000"/>
+              </a:lnSpc>
+            </a:pPr>
+            <a:r>
+              <a:rPr sz="1000" b="1">
+                <a:solidFill>
+                  <a:srgbClr val="FFFFFF"/>
+                </a:solidFill>
+                <a:latin typeface="Poppins"/>
+              </a:rPr>
+              <a:t>APRÈS · PROPOSÉ</a:t>
+            </a:r>
+          </a:p>
+        </p:txBody>
+      </p:sp>
+      <p:pic>
+        <p:nvPicPr>
+          <p:cNvPr id="16" name="Picture 15" descr="w_d_boutons.jpg"/>
+          <p:cNvPicPr>
+            <a:picLocks noChangeAspect="1"/>
+          </p:cNvPicPr>
+          <p:nvPr/>
+        </p:nvPicPr>
+        <p:blipFill>
+          <a:blip r:embed="rId5"/>
+          <a:stretch>
+            <a:fillRect/>
+          </a:stretch>
+        </p:blipFill>
+        <p:spPr>
+          <a:xfrm>
+            <a:off x="4946400" y="1872000"/>
+            <a:ext cx="3571200" cy="4464000"/>
+          </a:xfrm>
+          <a:prstGeom prst="rect">
+            <a:avLst/>
+          </a:prstGeom>
+        </p:spPr>
+      </p:pic>
+      <p:sp>
+        <p:nvSpPr>
+          <p:cNvPr id="17" name="Rounded Rectangle 16"/>
+          <p:cNvSpPr/>
+          <p:nvPr/>
+        </p:nvSpPr>
+        <p:spPr>
+          <a:xfrm>
+            <a:off x="8820000" y="1512000"/>
+            <a:ext cx="2808000" cy="4824000"/>
+          </a:xfrm>
+          <a:prstGeom prst="roundRect">
+            <a:avLst>
+              <a:gd name="adj" fmla="val 6000"/>
+            </a:avLst>
+          </a:prstGeom>
+          <a:solidFill>
+            <a:srgbClr val="FFF0F1"/>
+          </a:solidFill>
+          <a:ln>
+            <a:noFill/>
+          </a:ln>
+          <a:effectLst/>
+        </p:spPr>
+        <p:style>
+          <a:lnRef idx="1">
+            <a:schemeClr val="accent1"/>
+          </a:lnRef>
+          <a:fillRef idx="3">
+            <a:schemeClr val="accent1"/>
+          </a:fillRef>
+          <a:effectRef idx="2">
+            <a:schemeClr val="accent1"/>
+          </a:effectRef>
+          <a:fontRef idx="minor">
+            <a:schemeClr val="lt1"/>
+          </a:fontRef>
+        </p:style>
+        <p:txBody>
+          <a:bodyPr rtlCol="0" anchor="ctr"/>
+          <a:lstStyle/>
+          <a:p>
+            <a:pPr algn="ctr"/>
+          </a:p>
+        </p:txBody>
+      </p:sp>
+      <p:sp>
+        <p:nvSpPr>
+          <p:cNvPr id="18" name="TextBox 17"/>
+          <p:cNvSpPr txBox="1"/>
+          <p:nvPr/>
+        </p:nvSpPr>
+        <p:spPr>
+          <a:xfrm>
+            <a:off x="9036000" y="1655999"/>
+            <a:ext cx="2448000" cy="324000"/>
+          </a:xfrm>
+          <a:prstGeom prst="rect">
+            <a:avLst/>
+          </a:prstGeom>
+          <a:noFill/>
+        </p:spPr>
+        <p:txBody>
+          <a:bodyPr wrap="square" lIns="36000" rIns="36000" tIns="18000" bIns="18000" anchor="t">
+            <a:spAutoFit/>
+          </a:bodyPr>
+          <a:lstStyle/>
+          <a:p>
+            <a:pPr algn="l">
+              <a:lnSpc>
+                <a:spcPct val="110000"/>
+              </a:lnSpc>
+            </a:pPr>
+            <a:r>
+              <a:rPr sz="1500" b="1">
+                <a:solidFill>
+                  <a:srgbClr val="AE172A"/>
+                </a:solidFill>
+                <a:latin typeface="Poppins"/>
+              </a:rPr>
+              <a:t>Ce qui change</a:t>
+            </a:r>
+          </a:p>
+        </p:txBody>
+      </p:sp>
+      <p:sp>
+        <p:nvSpPr>
+          <p:cNvPr id="19" name="Oval 18"/>
+          <p:cNvSpPr/>
+          <p:nvPr/>
+        </p:nvSpPr>
+        <p:spPr>
+          <a:xfrm>
+            <a:off x="9036000" y="2088000"/>
+            <a:ext cx="342000" cy="342000"/>
+          </a:xfrm>
+          <a:prstGeom prst="ellipse">
+            <a:avLst/>
+          </a:prstGeom>
+          <a:solidFill>
+            <a:srgbClr val="FF8087"/>
+          </a:solidFill>
+          <a:ln>
+            <a:noFill/>
+          </a:ln>
+          <a:effectLst/>
+        </p:spPr>
+        <p:style>
+          <a:lnRef idx="1">
+            <a:schemeClr val="accent1"/>
+          </a:lnRef>
+          <a:fillRef idx="3">
+            <a:schemeClr val="accent1"/>
+          </a:fillRef>
+          <a:effectRef idx="2">
+            <a:schemeClr val="accent1"/>
+          </a:effectRef>
+          <a:fontRef idx="minor">
+            <a:schemeClr val="lt1"/>
+          </a:fontRef>
+        </p:style>
+        <p:txBody>
+          <a:bodyPr rtlCol="0" anchor="ctr"/>
+          <a:lstStyle/>
+          <a:p>
+            <a:pPr algn="ctr"/>
+          </a:p>
+        </p:txBody>
+      </p:sp>
+      <p:pic>
+        <p:nvPicPr>
+          <p:cNvPr id="20" name="Picture 19" descr="check_bl.png"/>
+          <p:cNvPicPr>
+            <a:picLocks noChangeAspect="1"/>
+          </p:cNvPicPr>
+          <p:nvPr/>
+        </p:nvPicPr>
+        <p:blipFill>
+          <a:blip r:embed="rId6"/>
+          <a:stretch>
+            <a:fillRect/>
+          </a:stretch>
+        </p:blipFill>
+        <p:spPr>
+          <a:xfrm>
+            <a:off x="9097200" y="2149200"/>
+            <a:ext cx="216000" cy="216000"/>
+          </a:xfrm>
+          <a:prstGeom prst="rect">
+            <a:avLst/>
+          </a:prstGeom>
+        </p:spPr>
+      </p:pic>
+      <p:sp>
+        <p:nvSpPr>
+          <p:cNvPr id="21" name="TextBox 20"/>
+          <p:cNvSpPr txBox="1"/>
+          <p:nvPr/>
+        </p:nvSpPr>
+        <p:spPr>
+          <a:xfrm>
+            <a:off x="9468000" y="2052000"/>
+            <a:ext cx="2052000" cy="648000"/>
+          </a:xfrm>
+          <a:prstGeom prst="rect">
+            <a:avLst/>
+          </a:prstGeom>
+          <a:noFill/>
+        </p:spPr>
+        <p:txBody>
+          <a:bodyPr wrap="square" lIns="36000" rIns="36000" tIns="18000" bIns="18000" anchor="t">
+            <a:spAutoFit/>
+          </a:bodyPr>
+          <a:lstStyle/>
+          <a:p>
+            <a:pPr algn="l">
+              <a:lnSpc>
+                <a:spcPct val="110000"/>
+              </a:lnSpc>
+            </a:pPr>
+            <a:r>
+              <a:rPr sz="1100" b="1">
+                <a:solidFill>
+                  <a:srgbClr val="111111"/>
+                </a:solidFill>
+                <a:latin typeface="Poppins"/>
+              </a:rPr>
+              <a:t>On donne la réponse, pas une devinette</a:t>
+            </a:r>
+          </a:p>
+        </p:txBody>
+      </p:sp>
+      <p:sp>
+        <p:nvSpPr>
+          <p:cNvPr id="22" name="Oval 21"/>
+          <p:cNvSpPr/>
+          <p:nvPr/>
+        </p:nvSpPr>
+        <p:spPr>
+          <a:xfrm>
+            <a:off x="9036000" y="2790000"/>
+            <a:ext cx="342000" cy="342000"/>
+          </a:xfrm>
+          <a:prstGeom prst="ellipse">
+            <a:avLst/>
+          </a:prstGeom>
+          <a:solidFill>
+            <a:srgbClr val="FF8087"/>
+          </a:solidFill>
+          <a:ln>
+            <a:noFill/>
+          </a:ln>
+          <a:effectLst/>
+        </p:spPr>
+        <p:style>
+          <a:lnRef idx="1">
+            <a:schemeClr val="accent1"/>
+          </a:lnRef>
+          <a:fillRef idx="3">
+            <a:schemeClr val="accent1"/>
+          </a:fillRef>
+          <a:effectRef idx="2">
+            <a:schemeClr val="accent1"/>
+          </a:effectRef>
+          <a:fontRef idx="minor">
+            <a:schemeClr val="lt1"/>
+          </a:fontRef>
+        </p:style>
+        <p:txBody>
+          <a:bodyPr rtlCol="0" anchor="ctr"/>
+          <a:lstStyle/>
+          <a:p>
+            <a:pPr algn="ctr"/>
+          </a:p>
+        </p:txBody>
+      </p:sp>
+      <p:pic>
+        <p:nvPicPr>
+          <p:cNvPr id="23" name="Picture 22" descr="check_bl.png"/>
+          <p:cNvPicPr>
+            <a:picLocks noChangeAspect="1"/>
+          </p:cNvPicPr>
+          <p:nvPr/>
+        </p:nvPicPr>
+        <p:blipFill>
+          <a:blip r:embed="rId6"/>
+          <a:stretch>
+            <a:fillRect/>
+          </a:stretch>
+        </p:blipFill>
+        <p:spPr>
+          <a:xfrm>
+            <a:off x="9097200" y="2851200"/>
+            <a:ext cx="216000" cy="216000"/>
+          </a:xfrm>
+          <a:prstGeom prst="rect">
+            <a:avLst/>
+          </a:prstGeom>
+        </p:spPr>
+      </p:pic>
+      <p:sp>
+        <p:nvSpPr>
+          <p:cNvPr id="24" name="TextBox 23"/>
+          <p:cNvSpPr txBox="1"/>
+          <p:nvPr/>
+        </p:nvSpPr>
+        <p:spPr>
+          <a:xfrm>
+            <a:off x="9468000" y="2754000"/>
+            <a:ext cx="2052000" cy="648000"/>
+          </a:xfrm>
+          <a:prstGeom prst="rect">
+            <a:avLst/>
+          </a:prstGeom>
+          <a:noFill/>
+        </p:spPr>
+        <p:txBody>
+          <a:bodyPr wrap="square" lIns="36000" rIns="36000" tIns="18000" bIns="18000" anchor="t">
+            <a:spAutoFit/>
+          </a:bodyPr>
+          <a:lstStyle/>
+          <a:p>
+            <a:pPr algn="l">
+              <a:lnSpc>
+                <a:spcPct val="110000"/>
+              </a:lnSpc>
+            </a:pPr>
+            <a:r>
+              <a:rPr sz="1100" b="1">
+                <a:solidFill>
+                  <a:srgbClr val="111111"/>
+                </a:solidFill>
+                <a:latin typeface="Poppins"/>
+              </a:rPr>
+              <a:t>Un conseil utile, qu’on a envie de partager</a:t>
+            </a:r>
+          </a:p>
+        </p:txBody>
+      </p:sp>
+      <p:sp>
+        <p:nvSpPr>
+          <p:cNvPr id="25" name="Oval 24"/>
+          <p:cNvSpPr/>
+          <p:nvPr/>
+        </p:nvSpPr>
+        <p:spPr>
+          <a:xfrm>
+            <a:off x="9036000" y="3492000"/>
+            <a:ext cx="342000" cy="342000"/>
+          </a:xfrm>
+          <a:prstGeom prst="ellipse">
+            <a:avLst/>
+          </a:prstGeom>
+          <a:solidFill>
+            <a:srgbClr val="FF8087"/>
+          </a:solidFill>
+          <a:ln>
+            <a:noFill/>
+          </a:ln>
+          <a:effectLst/>
+        </p:spPr>
+        <p:style>
+          <a:lnRef idx="1">
+            <a:schemeClr val="accent1"/>
+          </a:lnRef>
+          <a:fillRef idx="3">
+            <a:schemeClr val="accent1"/>
+          </a:fillRef>
+          <a:effectRef idx="2">
+            <a:schemeClr val="accent1"/>
+          </a:effectRef>
+          <a:fontRef idx="minor">
+            <a:schemeClr val="lt1"/>
+          </a:fontRef>
+        </p:style>
+        <p:txBody>
+          <a:bodyPr rtlCol="0" anchor="ctr"/>
+          <a:lstStyle/>
+          <a:p>
+            <a:pPr algn="ctr"/>
+          </a:p>
+        </p:txBody>
+      </p:sp>
+      <p:pic>
+        <p:nvPicPr>
+          <p:cNvPr id="26" name="Picture 25" descr="check_bl.png"/>
+          <p:cNvPicPr>
+            <a:picLocks noChangeAspect="1"/>
+          </p:cNvPicPr>
+          <p:nvPr/>
+        </p:nvPicPr>
+        <p:blipFill>
+          <a:blip r:embed="rId6"/>
+          <a:stretch>
+            <a:fillRect/>
+          </a:stretch>
+        </p:blipFill>
+        <p:spPr>
+          <a:xfrm>
+            <a:off x="9097200" y="3553200"/>
+            <a:ext cx="216000" cy="216000"/>
+          </a:xfrm>
+          <a:prstGeom prst="rect">
+            <a:avLst/>
+          </a:prstGeom>
+        </p:spPr>
+      </p:pic>
+      <p:sp>
+        <p:nvSpPr>
+          <p:cNvPr id="27" name="TextBox 26"/>
+          <p:cNvSpPr txBox="1"/>
+          <p:nvPr/>
+        </p:nvSpPr>
+        <p:spPr>
+          <a:xfrm>
+            <a:off x="9468000" y="3456000"/>
+            <a:ext cx="2052000" cy="648000"/>
+          </a:xfrm>
+          <a:prstGeom prst="rect">
+            <a:avLst/>
+          </a:prstGeom>
+          <a:noFill/>
+        </p:spPr>
+        <p:txBody>
+          <a:bodyPr wrap="square" lIns="36000" rIns="36000" tIns="18000" bIns="18000" anchor="t">
+            <a:spAutoFit/>
+          </a:bodyPr>
+          <a:lstStyle/>
+          <a:p>
+            <a:pPr algn="l">
+              <a:lnSpc>
+                <a:spcPct val="110000"/>
+              </a:lnSpc>
+            </a:pPr>
+            <a:r>
+              <a:rPr sz="1100" b="1">
+                <a:solidFill>
+                  <a:srgbClr val="111111"/>
+                </a:solidFill>
+                <a:latin typeface="Poppins"/>
+              </a:rPr>
+              <a:t>Le produit en appui, pas en vedette</a:t>
+            </a:r>
+          </a:p>
+        </p:txBody>
+      </p:sp>
+      <p:sp>
+        <p:nvSpPr>
+          <p:cNvPr id="28" name="Rectangle 27"/>
+          <p:cNvSpPr/>
+          <p:nvPr/>
+        </p:nvSpPr>
+        <p:spPr>
+          <a:xfrm>
+            <a:off x="9036000" y="4248000"/>
+            <a:ext cx="2376000" cy="21600"/>
+          </a:xfrm>
+          <a:prstGeom prst="rect">
+            <a:avLst/>
+          </a:prstGeom>
+          <a:solidFill>
+            <a:srgbClr val="E2E2E2"/>
+          </a:solidFill>
+          <a:ln>
+            <a:noFill/>
+          </a:ln>
+          <a:effectLst/>
+        </p:spPr>
+        <p:style>
+          <a:lnRef idx="1">
+            <a:schemeClr val="accent1"/>
+          </a:lnRef>
+          <a:fillRef idx="3">
+            <a:schemeClr val="accent1"/>
+          </a:fillRef>
+          <a:effectRef idx="2">
+            <a:schemeClr val="accent1"/>
+          </a:effectRef>
+          <a:fontRef idx="minor">
+            <a:schemeClr val="lt1"/>
+          </a:fontRef>
+        </p:style>
+        <p:txBody>
+          <a:bodyPr rtlCol="0" anchor="ctr"/>
+          <a:lstStyle/>
+          <a:p>
+            <a:pPr algn="ctr"/>
+          </a:p>
+        </p:txBody>
+      </p:sp>
+      <p:sp>
+        <p:nvSpPr>
+          <p:cNvPr id="29" name="TextBox 28"/>
+          <p:cNvSpPr txBox="1"/>
+          <p:nvPr/>
+        </p:nvSpPr>
+        <p:spPr>
+          <a:xfrm>
+            <a:off x="9036000" y="4320000"/>
+            <a:ext cx="2376000" cy="251999"/>
+          </a:xfrm>
+          <a:prstGeom prst="rect">
+            <a:avLst/>
+          </a:prstGeom>
+          <a:noFill/>
+        </p:spPr>
+        <p:txBody>
+          <a:bodyPr wrap="square" lIns="36000" rIns="36000" tIns="18000" bIns="18000" anchor="t">
+            <a:spAutoFit/>
+          </a:bodyPr>
+          <a:lstStyle/>
+          <a:p>
+            <a:pPr algn="l">
+              <a:lnSpc>
+                <a:spcPct val="110000"/>
+              </a:lnSpc>
+            </a:pPr>
+            <a:r>
+              <a:rPr sz="900" b="1">
+                <a:solidFill>
+                  <a:srgbClr val="5A5A5A"/>
+                </a:solidFill>
+                <a:latin typeface="Poppins"/>
+              </a:rPr>
+              <a:t>LE TEXTE PROPOSÉ</a:t>
+            </a:r>
+          </a:p>
+        </p:txBody>
+      </p:sp>
+      <p:sp>
+        <p:nvSpPr>
+          <p:cNvPr id="30" name="TextBox 29"/>
+          <p:cNvSpPr txBox="1"/>
+          <p:nvPr/>
+        </p:nvSpPr>
+        <p:spPr>
+          <a:xfrm>
+            <a:off x="9036000" y="4536000"/>
+            <a:ext cx="2376000" cy="1764000"/>
+          </a:xfrm>
+          <a:prstGeom prst="rect">
+            <a:avLst/>
+          </a:prstGeom>
+          <a:noFill/>
+        </p:spPr>
+        <p:txBody>
+          <a:bodyPr wrap="square" lIns="36000" rIns="36000" tIns="18000" bIns="18000" anchor="t">
+            <a:spAutoFit/>
+          </a:bodyPr>
+          <a:lstStyle/>
+          <a:p>
+            <a:pPr algn="l">
+              <a:lnSpc>
+                <a:spcPct val="110000"/>
+              </a:lnSpc>
+            </a:pPr>
+            <a:r>
+              <a:rPr sz="950" b="0">
+                <a:solidFill>
+                  <a:srgbClr val="111111"/>
+                </a:solidFill>
+                <a:latin typeface="Poppins"/>
+              </a:rPr>
+              <a:t>Vos boutons reviennent ? Regardez votre taie d’oreiller. 😴
+Elle touche votre visage 8 heures par nuit. Changez-la chaque semaine, et nettoyez votre peau matin et soir.
+ Vous la changez tous les combien ? 👇</a:t>
+            </a:r>
+          </a:p>
+        </p:txBody>
+      </p:sp>
     </p:spTree>
   </p:cSld>
   <p:clrMapOvr>
@@ -9732,9 +12113,92 @@
           </a:p>
         </p:txBody>
       </p:sp>
+      <p:sp>
+        <p:nvSpPr>
+          <p:cNvPr id="9" name="Rounded Rectangle 8"/>
+          <p:cNvSpPr/>
+          <p:nvPr/>
+        </p:nvSpPr>
+        <p:spPr>
+          <a:xfrm>
+            <a:off x="576000" y="1512000"/>
+            <a:ext cx="3456000" cy="270000"/>
+          </a:xfrm>
+          <a:prstGeom prst="roundRect">
+            <a:avLst/>
+          </a:prstGeom>
+          <a:solidFill>
+            <a:srgbClr val="E2E2E2"/>
+          </a:solidFill>
+          <a:ln>
+            <a:noFill/>
+          </a:ln>
+          <a:effectLst/>
+        </p:spPr>
+        <p:style>
+          <a:lnRef idx="1">
+            <a:schemeClr val="accent1"/>
+          </a:lnRef>
+          <a:fillRef idx="3">
+            <a:schemeClr val="accent1"/>
+          </a:fillRef>
+          <a:effectRef idx="2">
+            <a:schemeClr val="accent1"/>
+          </a:effectRef>
+          <a:fontRef idx="minor">
+            <a:schemeClr val="lt1"/>
+          </a:fontRef>
+        </p:style>
+        <p:txBody>
+          <a:bodyPr rtlCol="0" anchor="ctr"/>
+          <a:lstStyle/>
+          <a:p>
+            <a:pPr algn="ctr"/>
+          </a:p>
+        </p:txBody>
+      </p:sp>
+      <p:sp>
+        <p:nvSpPr>
+          <p:cNvPr id="10" name="TextBox 9"/>
+          <p:cNvSpPr txBox="1"/>
+          <p:nvPr/>
+        </p:nvSpPr>
+        <p:spPr>
+          <a:xfrm>
+            <a:off x="576000" y="1512000"/>
+            <a:ext cx="3456000" cy="270000"/>
+          </a:xfrm>
+          <a:prstGeom prst="rect">
+            <a:avLst/>
+          </a:prstGeom>
+          <a:noFill/>
+        </p:spPr>
+        <p:txBody>
+          <a:bodyPr wrap="square" lIns="36000" rIns="36000" tIns="18000" bIns="18000" anchor="ctr">
+            <a:spAutoFit/>
+          </a:bodyPr>
+          <a:lstStyle/>
+          <a:p>
+            <a:pPr algn="ctr">
+              <a:lnSpc>
+                <a:spcPct val="110000"/>
+              </a:lnSpc>
+            </a:pPr>
+            <a:r>
+              <a:rPr sz="1000" b="1">
+                <a:solidFill>
+                  <a:srgbClr val="5A5A5A"/>
+                </a:solidFill>
+                <a:latin typeface="Poppins"/>
+              </a:rPr>
+              <a:t>AVANT · PUBLIÉ</a:t>
+            </a:r>
+          </a:p>
+        </p:txBody>
+      </p:sp>
       <p:pic>
         <p:nvPicPr>
-          <p:cNvPr id="9" name="Picture 8" descr="cmp_d_parfum.jpg"/>
+          <p:cNvPr id="11" name="Picture 10" descr="b_d_parfum.jpg"/>
           <p:cNvPicPr>
             <a:picLocks noChangeAspect="1"/>
           </p:cNvPicPr>
@@ -9748,14 +12212,719 @@
         </p:blipFill>
         <p:spPr>
           <a:xfrm>
-            <a:off x="1199493" y="1422000"/>
-            <a:ext cx="9769014" cy="4896000"/>
+            <a:off x="576000" y="1879200"/>
+            <a:ext cx="3456000" cy="4449600"/>
           </a:xfrm>
           <a:prstGeom prst="rect">
             <a:avLst/>
           </a:prstGeom>
         </p:spPr>
       </p:pic>
+      <p:sp>
+        <p:nvSpPr>
+          <p:cNvPr id="12" name="Oval 11"/>
+          <p:cNvSpPr/>
+          <p:nvPr/>
+        </p:nvSpPr>
+        <p:spPr>
+          <a:xfrm>
+            <a:off x="4158000" y="3744000"/>
+            <a:ext cx="540000" cy="540000"/>
+          </a:xfrm>
+          <a:prstGeom prst="ellipse">
+            <a:avLst/>
+          </a:prstGeom>
+          <a:solidFill>
+            <a:srgbClr val="AE172A"/>
+          </a:solidFill>
+          <a:ln>
+            <a:noFill/>
+          </a:ln>
+          <a:effectLst/>
+        </p:spPr>
+        <p:style>
+          <a:lnRef idx="1">
+            <a:schemeClr val="accent1"/>
+          </a:lnRef>
+          <a:fillRef idx="3">
+            <a:schemeClr val="accent1"/>
+          </a:fillRef>
+          <a:effectRef idx="2">
+            <a:schemeClr val="accent1"/>
+          </a:effectRef>
+          <a:fontRef idx="minor">
+            <a:schemeClr val="lt1"/>
+          </a:fontRef>
+        </p:style>
+        <p:txBody>
+          <a:bodyPr rtlCol="0" anchor="ctr"/>
+          <a:lstStyle/>
+          <a:p>
+            <a:pPr algn="ctr"/>
+          </a:p>
+        </p:txBody>
+      </p:sp>
+      <p:pic>
+        <p:nvPicPr>
+          <p:cNvPr id="13" name="Picture 12" descr="arrow-right_bl.png"/>
+          <p:cNvPicPr>
+            <a:picLocks noChangeAspect="1"/>
+          </p:cNvPicPr>
+          <p:nvPr/>
+        </p:nvPicPr>
+        <p:blipFill>
+          <a:blip r:embed="rId4"/>
+          <a:stretch>
+            <a:fillRect/>
+          </a:stretch>
+        </p:blipFill>
+        <p:spPr>
+          <a:xfrm>
+            <a:off x="4266000" y="3851999"/>
+            <a:ext cx="324000" cy="324000"/>
+          </a:xfrm>
+          <a:prstGeom prst="rect">
+            <a:avLst/>
+          </a:prstGeom>
+        </p:spPr>
+      </p:pic>
+      <p:sp>
+        <p:nvSpPr>
+          <p:cNvPr id="14" name="Rounded Rectangle 13"/>
+          <p:cNvSpPr/>
+          <p:nvPr/>
+        </p:nvSpPr>
+        <p:spPr>
+          <a:xfrm>
+            <a:off x="4824000" y="1512000"/>
+            <a:ext cx="3816000" cy="270000"/>
+          </a:xfrm>
+          <a:prstGeom prst="roundRect">
+            <a:avLst/>
+          </a:prstGeom>
+          <a:solidFill>
+            <a:srgbClr val="AE172A"/>
+          </a:solidFill>
+          <a:ln>
+            <a:noFill/>
+          </a:ln>
+          <a:effectLst/>
+        </p:spPr>
+        <p:style>
+          <a:lnRef idx="1">
+            <a:schemeClr val="accent1"/>
+          </a:lnRef>
+          <a:fillRef idx="3">
+            <a:schemeClr val="accent1"/>
+          </a:fillRef>
+          <a:effectRef idx="2">
+            <a:schemeClr val="accent1"/>
+          </a:effectRef>
+          <a:fontRef idx="minor">
+            <a:schemeClr val="lt1"/>
+          </a:fontRef>
+        </p:style>
+        <p:txBody>
+          <a:bodyPr rtlCol="0" anchor="ctr"/>
+          <a:lstStyle/>
+          <a:p>
+            <a:pPr algn="ctr"/>
+          </a:p>
+        </p:txBody>
+      </p:sp>
+      <p:sp>
+        <p:nvSpPr>
+          <p:cNvPr id="15" name="TextBox 14"/>
+          <p:cNvSpPr txBox="1"/>
+          <p:nvPr/>
+        </p:nvSpPr>
+        <p:spPr>
+          <a:xfrm>
+            <a:off x="4824000" y="1512000"/>
+            <a:ext cx="3816000" cy="270000"/>
+          </a:xfrm>
+          <a:prstGeom prst="rect">
+            <a:avLst/>
+          </a:prstGeom>
+          <a:noFill/>
+        </p:spPr>
+        <p:txBody>
+          <a:bodyPr wrap="square" lIns="36000" rIns="36000" tIns="18000" bIns="18000" anchor="ctr">
+            <a:spAutoFit/>
+          </a:bodyPr>
+          <a:lstStyle/>
+          <a:p>
+            <a:pPr algn="ctr">
+              <a:lnSpc>
+                <a:spcPct val="110000"/>
+              </a:lnSpc>
+            </a:pPr>
+            <a:r>
+              <a:rPr sz="1000" b="1">
+                <a:solidFill>
+                  <a:srgbClr val="FFFFFF"/>
+                </a:solidFill>
+                <a:latin typeface="Poppins"/>
+              </a:rPr>
+              <a:t>APRÈS · PROPOSÉ</a:t>
+            </a:r>
+          </a:p>
+        </p:txBody>
+      </p:sp>
+      <p:pic>
+        <p:nvPicPr>
+          <p:cNvPr id="16" name="Picture 15" descr="w_d_parfum.jpg"/>
+          <p:cNvPicPr>
+            <a:picLocks noChangeAspect="1"/>
+          </p:cNvPicPr>
+          <p:nvPr/>
+        </p:nvPicPr>
+        <p:blipFill>
+          <a:blip r:embed="rId5"/>
+          <a:stretch>
+            <a:fillRect/>
+          </a:stretch>
+        </p:blipFill>
+        <p:spPr>
+          <a:xfrm>
+            <a:off x="4946400" y="1872000"/>
+            <a:ext cx="3571200" cy="4464000"/>
+          </a:xfrm>
+          <a:prstGeom prst="rect">
+            <a:avLst/>
+          </a:prstGeom>
+        </p:spPr>
+      </p:pic>
+      <p:sp>
+        <p:nvSpPr>
+          <p:cNvPr id="17" name="Rounded Rectangle 16"/>
+          <p:cNvSpPr/>
+          <p:nvPr/>
+        </p:nvSpPr>
+        <p:spPr>
+          <a:xfrm>
+            <a:off x="8820000" y="1512000"/>
+            <a:ext cx="2808000" cy="4824000"/>
+          </a:xfrm>
+          <a:prstGeom prst="roundRect">
+            <a:avLst>
+              <a:gd name="adj" fmla="val 6000"/>
+            </a:avLst>
+          </a:prstGeom>
+          <a:solidFill>
+            <a:srgbClr val="FFF0F1"/>
+          </a:solidFill>
+          <a:ln>
+            <a:noFill/>
+          </a:ln>
+          <a:effectLst/>
+        </p:spPr>
+        <p:style>
+          <a:lnRef idx="1">
+            <a:schemeClr val="accent1"/>
+          </a:lnRef>
+          <a:fillRef idx="3">
+            <a:schemeClr val="accent1"/>
+          </a:fillRef>
+          <a:effectRef idx="2">
+            <a:schemeClr val="accent1"/>
+          </a:effectRef>
+          <a:fontRef idx="minor">
+            <a:schemeClr val="lt1"/>
+          </a:fontRef>
+        </p:style>
+        <p:txBody>
+          <a:bodyPr rtlCol="0" anchor="ctr"/>
+          <a:lstStyle/>
+          <a:p>
+            <a:pPr algn="ctr"/>
+          </a:p>
+        </p:txBody>
+      </p:sp>
+      <p:sp>
+        <p:nvSpPr>
+          <p:cNvPr id="18" name="TextBox 17"/>
+          <p:cNvSpPr txBox="1"/>
+          <p:nvPr/>
+        </p:nvSpPr>
+        <p:spPr>
+          <a:xfrm>
+            <a:off x="9036000" y="1655999"/>
+            <a:ext cx="2448000" cy="324000"/>
+          </a:xfrm>
+          <a:prstGeom prst="rect">
+            <a:avLst/>
+          </a:prstGeom>
+          <a:noFill/>
+        </p:spPr>
+        <p:txBody>
+          <a:bodyPr wrap="square" lIns="36000" rIns="36000" tIns="18000" bIns="18000" anchor="t">
+            <a:spAutoFit/>
+          </a:bodyPr>
+          <a:lstStyle/>
+          <a:p>
+            <a:pPr algn="l">
+              <a:lnSpc>
+                <a:spcPct val="110000"/>
+              </a:lnSpc>
+            </a:pPr>
+            <a:r>
+              <a:rPr sz="1500" b="1">
+                <a:solidFill>
+                  <a:srgbClr val="AE172A"/>
+                </a:solidFill>
+                <a:latin typeface="Poppins"/>
+              </a:rPr>
+              <a:t>Ce qui change</a:t>
+            </a:r>
+          </a:p>
+        </p:txBody>
+      </p:sp>
+      <p:sp>
+        <p:nvSpPr>
+          <p:cNvPr id="19" name="Oval 18"/>
+          <p:cNvSpPr/>
+          <p:nvPr/>
+        </p:nvSpPr>
+        <p:spPr>
+          <a:xfrm>
+            <a:off x="9036000" y="2088000"/>
+            <a:ext cx="342000" cy="342000"/>
+          </a:xfrm>
+          <a:prstGeom prst="ellipse">
+            <a:avLst/>
+          </a:prstGeom>
+          <a:solidFill>
+            <a:srgbClr val="FF8087"/>
+          </a:solidFill>
+          <a:ln>
+            <a:noFill/>
+          </a:ln>
+          <a:effectLst/>
+        </p:spPr>
+        <p:style>
+          <a:lnRef idx="1">
+            <a:schemeClr val="accent1"/>
+          </a:lnRef>
+          <a:fillRef idx="3">
+            <a:schemeClr val="accent1"/>
+          </a:fillRef>
+          <a:effectRef idx="2">
+            <a:schemeClr val="accent1"/>
+          </a:effectRef>
+          <a:fontRef idx="minor">
+            <a:schemeClr val="lt1"/>
+          </a:fontRef>
+        </p:style>
+        <p:txBody>
+          <a:bodyPr rtlCol="0" anchor="ctr"/>
+          <a:lstStyle/>
+          <a:p>
+            <a:pPr algn="ctr"/>
+          </a:p>
+        </p:txBody>
+      </p:sp>
+      <p:pic>
+        <p:nvPicPr>
+          <p:cNvPr id="20" name="Picture 19" descr="check_bl.png"/>
+          <p:cNvPicPr>
+            <a:picLocks noChangeAspect="1"/>
+          </p:cNvPicPr>
+          <p:nvPr/>
+        </p:nvPicPr>
+        <p:blipFill>
+          <a:blip r:embed="rId6"/>
+          <a:stretch>
+            <a:fillRect/>
+          </a:stretch>
+        </p:blipFill>
+        <p:spPr>
+          <a:xfrm>
+            <a:off x="9097200" y="2149200"/>
+            <a:ext cx="216000" cy="216000"/>
+          </a:xfrm>
+          <a:prstGeom prst="rect">
+            <a:avLst/>
+          </a:prstGeom>
+        </p:spPr>
+      </p:pic>
+      <p:sp>
+        <p:nvSpPr>
+          <p:cNvPr id="21" name="TextBox 20"/>
+          <p:cNvSpPr txBox="1"/>
+          <p:nvPr/>
+        </p:nvSpPr>
+        <p:spPr>
+          <a:xfrm>
+            <a:off x="9468000" y="2052000"/>
+            <a:ext cx="2052000" cy="648000"/>
+          </a:xfrm>
+          <a:prstGeom prst="rect">
+            <a:avLst/>
+          </a:prstGeom>
+          <a:noFill/>
+        </p:spPr>
+        <p:txBody>
+          <a:bodyPr wrap="square" lIns="36000" rIns="36000" tIns="18000" bIns="18000" anchor="t">
+            <a:spAutoFit/>
+          </a:bodyPr>
+          <a:lstStyle/>
+          <a:p>
+            <a:pPr algn="l">
+              <a:lnSpc>
+                <a:spcPct val="110000"/>
+              </a:lnSpc>
+            </a:pPr>
+            <a:r>
+              <a:rPr sz="1100" b="1">
+                <a:solidFill>
+                  <a:srgbClr val="111111"/>
+                </a:solidFill>
+                <a:latin typeface="Poppins"/>
+              </a:rPr>
+              <a:t>L’humour d’origine gardé, en plus court</a:t>
+            </a:r>
+          </a:p>
+        </p:txBody>
+      </p:sp>
+      <p:sp>
+        <p:nvSpPr>
+          <p:cNvPr id="22" name="Oval 21"/>
+          <p:cNvSpPr/>
+          <p:nvPr/>
+        </p:nvSpPr>
+        <p:spPr>
+          <a:xfrm>
+            <a:off x="9036000" y="2790000"/>
+            <a:ext cx="342000" cy="342000"/>
+          </a:xfrm>
+          <a:prstGeom prst="ellipse">
+            <a:avLst/>
+          </a:prstGeom>
+          <a:solidFill>
+            <a:srgbClr val="FF8087"/>
+          </a:solidFill>
+          <a:ln>
+            <a:noFill/>
+          </a:ln>
+          <a:effectLst/>
+        </p:spPr>
+        <p:style>
+          <a:lnRef idx="1">
+            <a:schemeClr val="accent1"/>
+          </a:lnRef>
+          <a:fillRef idx="3">
+            <a:schemeClr val="accent1"/>
+          </a:fillRef>
+          <a:effectRef idx="2">
+            <a:schemeClr val="accent1"/>
+          </a:effectRef>
+          <a:fontRef idx="minor">
+            <a:schemeClr val="lt1"/>
+          </a:fontRef>
+        </p:style>
+        <p:txBody>
+          <a:bodyPr rtlCol="0" anchor="ctr"/>
+          <a:lstStyle/>
+          <a:p>
+            <a:pPr algn="ctr"/>
+          </a:p>
+        </p:txBody>
+      </p:sp>
+      <p:pic>
+        <p:nvPicPr>
+          <p:cNvPr id="23" name="Picture 22" descr="check_bl.png"/>
+          <p:cNvPicPr>
+            <a:picLocks noChangeAspect="1"/>
+          </p:cNvPicPr>
+          <p:nvPr/>
+        </p:nvPicPr>
+        <p:blipFill>
+          <a:blip r:embed="rId6"/>
+          <a:stretch>
+            <a:fillRect/>
+          </a:stretch>
+        </p:blipFill>
+        <p:spPr>
+          <a:xfrm>
+            <a:off x="9097200" y="2851200"/>
+            <a:ext cx="216000" cy="216000"/>
+          </a:xfrm>
+          <a:prstGeom prst="rect">
+            <a:avLst/>
+          </a:prstGeom>
+        </p:spPr>
+      </p:pic>
+      <p:sp>
+        <p:nvSpPr>
+          <p:cNvPr id="24" name="TextBox 23"/>
+          <p:cNvSpPr txBox="1"/>
+          <p:nvPr/>
+        </p:nvSpPr>
+        <p:spPr>
+          <a:xfrm>
+            <a:off x="9468000" y="2754000"/>
+            <a:ext cx="2052000" cy="648000"/>
+          </a:xfrm>
+          <a:prstGeom prst="rect">
+            <a:avLst/>
+          </a:prstGeom>
+          <a:noFill/>
+        </p:spPr>
+        <p:txBody>
+          <a:bodyPr wrap="square" lIns="36000" rIns="36000" tIns="18000" bIns="18000" anchor="t">
+            <a:spAutoFit/>
+          </a:bodyPr>
+          <a:lstStyle/>
+          <a:p>
+            <a:pPr algn="l">
+              <a:lnSpc>
+                <a:spcPct val="110000"/>
+              </a:lnSpc>
+            </a:pPr>
+            <a:r>
+              <a:rPr sz="1100" b="1">
+                <a:solidFill>
+                  <a:srgbClr val="111111"/>
+                </a:solidFill>
+                <a:latin typeface="Poppins"/>
+              </a:rPr>
+              <a:t>Un homme et le flacon, bien visibles</a:t>
+            </a:r>
+          </a:p>
+        </p:txBody>
+      </p:sp>
+      <p:sp>
+        <p:nvSpPr>
+          <p:cNvPr id="25" name="Oval 24"/>
+          <p:cNvSpPr/>
+          <p:nvPr/>
+        </p:nvSpPr>
+        <p:spPr>
+          <a:xfrm>
+            <a:off x="9036000" y="3492000"/>
+            <a:ext cx="342000" cy="342000"/>
+          </a:xfrm>
+          <a:prstGeom prst="ellipse">
+            <a:avLst/>
+          </a:prstGeom>
+          <a:solidFill>
+            <a:srgbClr val="FF8087"/>
+          </a:solidFill>
+          <a:ln>
+            <a:noFill/>
+          </a:ln>
+          <a:effectLst/>
+        </p:spPr>
+        <p:style>
+          <a:lnRef idx="1">
+            <a:schemeClr val="accent1"/>
+          </a:lnRef>
+          <a:fillRef idx="3">
+            <a:schemeClr val="accent1"/>
+          </a:fillRef>
+          <a:effectRef idx="2">
+            <a:schemeClr val="accent1"/>
+          </a:effectRef>
+          <a:fontRef idx="minor">
+            <a:schemeClr val="lt1"/>
+          </a:fontRef>
+        </p:style>
+        <p:txBody>
+          <a:bodyPr rtlCol="0" anchor="ctr"/>
+          <a:lstStyle/>
+          <a:p>
+            <a:pPr algn="ctr"/>
+          </a:p>
+        </p:txBody>
+      </p:sp>
+      <p:pic>
+        <p:nvPicPr>
+          <p:cNvPr id="26" name="Picture 25" descr="check_bl.png"/>
+          <p:cNvPicPr>
+            <a:picLocks noChangeAspect="1"/>
+          </p:cNvPicPr>
+          <p:nvPr/>
+        </p:nvPicPr>
+        <p:blipFill>
+          <a:blip r:embed="rId6"/>
+          <a:stretch>
+            <a:fillRect/>
+          </a:stretch>
+        </p:blipFill>
+        <p:spPr>
+          <a:xfrm>
+            <a:off x="9097200" y="3553200"/>
+            <a:ext cx="216000" cy="216000"/>
+          </a:xfrm>
+          <a:prstGeom prst="rect">
+            <a:avLst/>
+          </a:prstGeom>
+        </p:spPr>
+      </p:pic>
+      <p:sp>
+        <p:nvSpPr>
+          <p:cNvPr id="27" name="TextBox 26"/>
+          <p:cNvSpPr txBox="1"/>
+          <p:nvPr/>
+        </p:nvSpPr>
+        <p:spPr>
+          <a:xfrm>
+            <a:off x="9468000" y="3456000"/>
+            <a:ext cx="2052000" cy="648000"/>
+          </a:xfrm>
+          <a:prstGeom prst="rect">
+            <a:avLst/>
+          </a:prstGeom>
+          <a:noFill/>
+        </p:spPr>
+        <p:txBody>
+          <a:bodyPr wrap="square" lIns="36000" rIns="36000" tIns="18000" bIns="18000" anchor="t">
+            <a:spAutoFit/>
+          </a:bodyPr>
+          <a:lstStyle/>
+          <a:p>
+            <a:pPr algn="l">
+              <a:lnSpc>
+                <a:spcPct val="110000"/>
+              </a:lnSpc>
+            </a:pPr>
+            <a:r>
+              <a:rPr sz="1100" b="1">
+                <a:solidFill>
+                  <a:srgbClr val="111111"/>
+                </a:solidFill>
+                <a:latin typeface="Poppins"/>
+              </a:rPr>
+              <a:t>L’identification fait voyager le post</a:t>
+            </a:r>
+          </a:p>
+        </p:txBody>
+      </p:sp>
+      <p:sp>
+        <p:nvSpPr>
+          <p:cNvPr id="28" name="Rectangle 27"/>
+          <p:cNvSpPr/>
+          <p:nvPr/>
+        </p:nvSpPr>
+        <p:spPr>
+          <a:xfrm>
+            <a:off x="9036000" y="4248000"/>
+            <a:ext cx="2376000" cy="21600"/>
+          </a:xfrm>
+          <a:prstGeom prst="rect">
+            <a:avLst/>
+          </a:prstGeom>
+          <a:solidFill>
+            <a:srgbClr val="E2E2E2"/>
+          </a:solidFill>
+          <a:ln>
+            <a:noFill/>
+          </a:ln>
+          <a:effectLst/>
+        </p:spPr>
+        <p:style>
+          <a:lnRef idx="1">
+            <a:schemeClr val="accent1"/>
+          </a:lnRef>
+          <a:fillRef idx="3">
+            <a:schemeClr val="accent1"/>
+          </a:fillRef>
+          <a:effectRef idx="2">
+            <a:schemeClr val="accent1"/>
+          </a:effectRef>
+          <a:fontRef idx="minor">
+            <a:schemeClr val="lt1"/>
+          </a:fontRef>
+        </p:style>
+        <p:txBody>
+          <a:bodyPr rtlCol="0" anchor="ctr"/>
+          <a:lstStyle/>
+          <a:p>
+            <a:pPr algn="ctr"/>
+          </a:p>
+        </p:txBody>
+      </p:sp>
+      <p:sp>
+        <p:nvSpPr>
+          <p:cNvPr id="29" name="TextBox 28"/>
+          <p:cNvSpPr txBox="1"/>
+          <p:nvPr/>
+        </p:nvSpPr>
+        <p:spPr>
+          <a:xfrm>
+            <a:off x="9036000" y="4320000"/>
+            <a:ext cx="2376000" cy="251999"/>
+          </a:xfrm>
+          <a:prstGeom prst="rect">
+            <a:avLst/>
+          </a:prstGeom>
+          <a:noFill/>
+        </p:spPr>
+        <p:txBody>
+          <a:bodyPr wrap="square" lIns="36000" rIns="36000" tIns="18000" bIns="18000" anchor="t">
+            <a:spAutoFit/>
+          </a:bodyPr>
+          <a:lstStyle/>
+          <a:p>
+            <a:pPr algn="l">
+              <a:lnSpc>
+                <a:spcPct val="110000"/>
+              </a:lnSpc>
+            </a:pPr>
+            <a:r>
+              <a:rPr sz="900" b="1">
+                <a:solidFill>
+                  <a:srgbClr val="5A5A5A"/>
+                </a:solidFill>
+                <a:latin typeface="Poppins"/>
+              </a:rPr>
+              <a:t>LE TEXTE PROPOSÉ</a:t>
+            </a:r>
+          </a:p>
+        </p:txBody>
+      </p:sp>
+      <p:sp>
+        <p:nvSpPr>
+          <p:cNvPr id="30" name="TextBox 29"/>
+          <p:cNvSpPr txBox="1"/>
+          <p:nvPr/>
+        </p:nvSpPr>
+        <p:spPr>
+          <a:xfrm>
+            <a:off x="9036000" y="4536000"/>
+            <a:ext cx="2376000" cy="1764000"/>
+          </a:xfrm>
+          <a:prstGeom prst="rect">
+            <a:avLst/>
+          </a:prstGeom>
+          <a:noFill/>
+        </p:spPr>
+        <p:txBody>
+          <a:bodyPr wrap="square" lIns="36000" rIns="36000" tIns="18000" bIns="18000" anchor="t">
+            <a:spAutoFit/>
+          </a:bodyPr>
+          <a:lstStyle/>
+          <a:p>
+            <a:pPr algn="l">
+              <a:lnSpc>
+                <a:spcPct val="110000"/>
+              </a:lnSpc>
+            </a:pPr>
+            <a:r>
+              <a:rPr sz="950" b="0">
+                <a:solidFill>
+                  <a:srgbClr val="111111"/>
+                </a:solidFill>
+                <a:latin typeface="Poppins"/>
+              </a:rPr>
+              <a:t>Elle dit qu’elle « emprunte ». On sait tous que c’est faux. 💙
+L’eau de Cologne Day by Day Men, fraîche toute la journée.
+ Identifiez celle qui vous pique votre parfum 👇</a:t>
+            </a:r>
+          </a:p>
+        </p:txBody>
+      </p:sp>
     </p:spTree>
   </p:cSld>
   <p:clrMapOvr>
@@ -10042,9 +13211,92 @@
           </a:p>
         </p:txBody>
       </p:sp>
+      <p:sp>
+        <p:nvSpPr>
+          <p:cNvPr id="9" name="Rounded Rectangle 8"/>
+          <p:cNvSpPr/>
+          <p:nvPr/>
+        </p:nvSpPr>
+        <p:spPr>
+          <a:xfrm>
+            <a:off x="576000" y="1512000"/>
+            <a:ext cx="3456000" cy="270000"/>
+          </a:xfrm>
+          <a:prstGeom prst="roundRect">
+            <a:avLst/>
+          </a:prstGeom>
+          <a:solidFill>
+            <a:srgbClr val="E2E2E2"/>
+          </a:solidFill>
+          <a:ln>
+            <a:noFill/>
+          </a:ln>
+          <a:effectLst/>
+        </p:spPr>
+        <p:style>
+          <a:lnRef idx="1">
+            <a:schemeClr val="accent1"/>
+          </a:lnRef>
+          <a:fillRef idx="3">
+            <a:schemeClr val="accent1"/>
+          </a:fillRef>
+          <a:effectRef idx="2">
+            <a:schemeClr val="accent1"/>
+          </a:effectRef>
+          <a:fontRef idx="minor">
+            <a:schemeClr val="lt1"/>
+          </a:fontRef>
+        </p:style>
+        <p:txBody>
+          <a:bodyPr rtlCol="0" anchor="ctr"/>
+          <a:lstStyle/>
+          <a:p>
+            <a:pPr algn="ctr"/>
+          </a:p>
+        </p:txBody>
+      </p:sp>
+      <p:sp>
+        <p:nvSpPr>
+          <p:cNvPr id="10" name="TextBox 9"/>
+          <p:cNvSpPr txBox="1"/>
+          <p:nvPr/>
+        </p:nvSpPr>
+        <p:spPr>
+          <a:xfrm>
+            <a:off x="576000" y="1512000"/>
+            <a:ext cx="3456000" cy="270000"/>
+          </a:xfrm>
+          <a:prstGeom prst="rect">
+            <a:avLst/>
+          </a:prstGeom>
+          <a:noFill/>
+        </p:spPr>
+        <p:txBody>
+          <a:bodyPr wrap="square" lIns="36000" rIns="36000" tIns="18000" bIns="18000" anchor="ctr">
+            <a:spAutoFit/>
+          </a:bodyPr>
+          <a:lstStyle/>
+          <a:p>
+            <a:pPr algn="ctr">
+              <a:lnSpc>
+                <a:spcPct val="110000"/>
+              </a:lnSpc>
+            </a:pPr>
+            <a:r>
+              <a:rPr sz="1000" b="1">
+                <a:solidFill>
+                  <a:srgbClr val="5A5A5A"/>
+                </a:solidFill>
+                <a:latin typeface="Poppins"/>
+              </a:rPr>
+              <a:t>AVANT · PUBLIÉ</a:t>
+            </a:r>
+          </a:p>
+        </p:txBody>
+      </p:sp>
       <p:pic>
         <p:nvPicPr>
-          <p:cNvPr id="9" name="Picture 8" descr="cmp_d_carotte.jpg"/>
+          <p:cNvPr id="11" name="Picture 10" descr="b_d_carotte.jpg"/>
           <p:cNvPicPr>
             <a:picLocks noChangeAspect="1"/>
           </p:cNvPicPr>
@@ -10058,14 +13310,719 @@
         </p:blipFill>
         <p:spPr>
           <a:xfrm>
-            <a:off x="1199493" y="1422000"/>
-            <a:ext cx="9769014" cy="4896000"/>
+            <a:off x="576000" y="2016900"/>
+            <a:ext cx="3456000" cy="4174200"/>
           </a:xfrm>
           <a:prstGeom prst="rect">
             <a:avLst/>
           </a:prstGeom>
         </p:spPr>
       </p:pic>
+      <p:sp>
+        <p:nvSpPr>
+          <p:cNvPr id="12" name="Oval 11"/>
+          <p:cNvSpPr/>
+          <p:nvPr/>
+        </p:nvSpPr>
+        <p:spPr>
+          <a:xfrm>
+            <a:off x="4158000" y="3744000"/>
+            <a:ext cx="540000" cy="540000"/>
+          </a:xfrm>
+          <a:prstGeom prst="ellipse">
+            <a:avLst/>
+          </a:prstGeom>
+          <a:solidFill>
+            <a:srgbClr val="AE172A"/>
+          </a:solidFill>
+          <a:ln>
+            <a:noFill/>
+          </a:ln>
+          <a:effectLst/>
+        </p:spPr>
+        <p:style>
+          <a:lnRef idx="1">
+            <a:schemeClr val="accent1"/>
+          </a:lnRef>
+          <a:fillRef idx="3">
+            <a:schemeClr val="accent1"/>
+          </a:fillRef>
+          <a:effectRef idx="2">
+            <a:schemeClr val="accent1"/>
+          </a:effectRef>
+          <a:fontRef idx="minor">
+            <a:schemeClr val="lt1"/>
+          </a:fontRef>
+        </p:style>
+        <p:txBody>
+          <a:bodyPr rtlCol="0" anchor="ctr"/>
+          <a:lstStyle/>
+          <a:p>
+            <a:pPr algn="ctr"/>
+          </a:p>
+        </p:txBody>
+      </p:sp>
+      <p:pic>
+        <p:nvPicPr>
+          <p:cNvPr id="13" name="Picture 12" descr="arrow-right_bl.png"/>
+          <p:cNvPicPr>
+            <a:picLocks noChangeAspect="1"/>
+          </p:cNvPicPr>
+          <p:nvPr/>
+        </p:nvPicPr>
+        <p:blipFill>
+          <a:blip r:embed="rId4"/>
+          <a:stretch>
+            <a:fillRect/>
+          </a:stretch>
+        </p:blipFill>
+        <p:spPr>
+          <a:xfrm>
+            <a:off x="4266000" y="3851999"/>
+            <a:ext cx="324000" cy="324000"/>
+          </a:xfrm>
+          <a:prstGeom prst="rect">
+            <a:avLst/>
+          </a:prstGeom>
+        </p:spPr>
+      </p:pic>
+      <p:sp>
+        <p:nvSpPr>
+          <p:cNvPr id="14" name="Rounded Rectangle 13"/>
+          <p:cNvSpPr/>
+          <p:nvPr/>
+        </p:nvSpPr>
+        <p:spPr>
+          <a:xfrm>
+            <a:off x="4824000" y="1512000"/>
+            <a:ext cx="3816000" cy="270000"/>
+          </a:xfrm>
+          <a:prstGeom prst="roundRect">
+            <a:avLst/>
+          </a:prstGeom>
+          <a:solidFill>
+            <a:srgbClr val="AE172A"/>
+          </a:solidFill>
+          <a:ln>
+            <a:noFill/>
+          </a:ln>
+          <a:effectLst/>
+        </p:spPr>
+        <p:style>
+          <a:lnRef idx="1">
+            <a:schemeClr val="accent1"/>
+          </a:lnRef>
+          <a:fillRef idx="3">
+            <a:schemeClr val="accent1"/>
+          </a:fillRef>
+          <a:effectRef idx="2">
+            <a:schemeClr val="accent1"/>
+          </a:effectRef>
+          <a:fontRef idx="minor">
+            <a:schemeClr val="lt1"/>
+          </a:fontRef>
+        </p:style>
+        <p:txBody>
+          <a:bodyPr rtlCol="0" anchor="ctr"/>
+          <a:lstStyle/>
+          <a:p>
+            <a:pPr algn="ctr"/>
+          </a:p>
+        </p:txBody>
+      </p:sp>
+      <p:sp>
+        <p:nvSpPr>
+          <p:cNvPr id="15" name="TextBox 14"/>
+          <p:cNvSpPr txBox="1"/>
+          <p:nvPr/>
+        </p:nvSpPr>
+        <p:spPr>
+          <a:xfrm>
+            <a:off x="4824000" y="1512000"/>
+            <a:ext cx="3816000" cy="270000"/>
+          </a:xfrm>
+          <a:prstGeom prst="rect">
+            <a:avLst/>
+          </a:prstGeom>
+          <a:noFill/>
+        </p:spPr>
+        <p:txBody>
+          <a:bodyPr wrap="square" lIns="36000" rIns="36000" tIns="18000" bIns="18000" anchor="ctr">
+            <a:spAutoFit/>
+          </a:bodyPr>
+          <a:lstStyle/>
+          <a:p>
+            <a:pPr algn="ctr">
+              <a:lnSpc>
+                <a:spcPct val="110000"/>
+              </a:lnSpc>
+            </a:pPr>
+            <a:r>
+              <a:rPr sz="1000" b="1">
+                <a:solidFill>
+                  <a:srgbClr val="FFFFFF"/>
+                </a:solidFill>
+                <a:latin typeface="Poppins"/>
+              </a:rPr>
+              <a:t>APRÈS · PROPOSÉ</a:t>
+            </a:r>
+          </a:p>
+        </p:txBody>
+      </p:sp>
+      <p:pic>
+        <p:nvPicPr>
+          <p:cNvPr id="16" name="Picture 15" descr="w_d_carotte.jpg"/>
+          <p:cNvPicPr>
+            <a:picLocks noChangeAspect="1"/>
+          </p:cNvPicPr>
+          <p:nvPr/>
+        </p:nvPicPr>
+        <p:blipFill>
+          <a:blip r:embed="rId5"/>
+          <a:stretch>
+            <a:fillRect/>
+          </a:stretch>
+        </p:blipFill>
+        <p:spPr>
+          <a:xfrm>
+            <a:off x="4946400" y="1872000"/>
+            <a:ext cx="3571200" cy="4464000"/>
+          </a:xfrm>
+          <a:prstGeom prst="rect">
+            <a:avLst/>
+          </a:prstGeom>
+        </p:spPr>
+      </p:pic>
+      <p:sp>
+        <p:nvSpPr>
+          <p:cNvPr id="17" name="Rounded Rectangle 16"/>
+          <p:cNvSpPr/>
+          <p:nvPr/>
+        </p:nvSpPr>
+        <p:spPr>
+          <a:xfrm>
+            <a:off x="8820000" y="1512000"/>
+            <a:ext cx="2808000" cy="4824000"/>
+          </a:xfrm>
+          <a:prstGeom prst="roundRect">
+            <a:avLst>
+              <a:gd name="adj" fmla="val 6000"/>
+            </a:avLst>
+          </a:prstGeom>
+          <a:solidFill>
+            <a:srgbClr val="FFF0F1"/>
+          </a:solidFill>
+          <a:ln>
+            <a:noFill/>
+          </a:ln>
+          <a:effectLst/>
+        </p:spPr>
+        <p:style>
+          <a:lnRef idx="1">
+            <a:schemeClr val="accent1"/>
+          </a:lnRef>
+          <a:fillRef idx="3">
+            <a:schemeClr val="accent1"/>
+          </a:fillRef>
+          <a:effectRef idx="2">
+            <a:schemeClr val="accent1"/>
+          </a:effectRef>
+          <a:fontRef idx="minor">
+            <a:schemeClr val="lt1"/>
+          </a:fontRef>
+        </p:style>
+        <p:txBody>
+          <a:bodyPr rtlCol="0" anchor="ctr"/>
+          <a:lstStyle/>
+          <a:p>
+            <a:pPr algn="ctr"/>
+          </a:p>
+        </p:txBody>
+      </p:sp>
+      <p:sp>
+        <p:nvSpPr>
+          <p:cNvPr id="18" name="TextBox 17"/>
+          <p:cNvSpPr txBox="1"/>
+          <p:nvPr/>
+        </p:nvSpPr>
+        <p:spPr>
+          <a:xfrm>
+            <a:off x="9036000" y="1655999"/>
+            <a:ext cx="2448000" cy="324000"/>
+          </a:xfrm>
+          <a:prstGeom prst="rect">
+            <a:avLst/>
+          </a:prstGeom>
+          <a:noFill/>
+        </p:spPr>
+        <p:txBody>
+          <a:bodyPr wrap="square" lIns="36000" rIns="36000" tIns="18000" bIns="18000" anchor="t">
+            <a:spAutoFit/>
+          </a:bodyPr>
+          <a:lstStyle/>
+          <a:p>
+            <a:pPr algn="l">
+              <a:lnSpc>
+                <a:spcPct val="110000"/>
+              </a:lnSpc>
+            </a:pPr>
+            <a:r>
+              <a:rPr sz="1500" b="1">
+                <a:solidFill>
+                  <a:srgbClr val="AE172A"/>
+                </a:solidFill>
+                <a:latin typeface="Poppins"/>
+              </a:rPr>
+              <a:t>Ce qui change</a:t>
+            </a:r>
+          </a:p>
+        </p:txBody>
+      </p:sp>
+      <p:sp>
+        <p:nvSpPr>
+          <p:cNvPr id="19" name="Oval 18"/>
+          <p:cNvSpPr/>
+          <p:nvPr/>
+        </p:nvSpPr>
+        <p:spPr>
+          <a:xfrm>
+            <a:off x="9036000" y="2088000"/>
+            <a:ext cx="342000" cy="342000"/>
+          </a:xfrm>
+          <a:prstGeom prst="ellipse">
+            <a:avLst/>
+          </a:prstGeom>
+          <a:solidFill>
+            <a:srgbClr val="FF8087"/>
+          </a:solidFill>
+          <a:ln>
+            <a:noFill/>
+          </a:ln>
+          <a:effectLst/>
+        </p:spPr>
+        <p:style>
+          <a:lnRef idx="1">
+            <a:schemeClr val="accent1"/>
+          </a:lnRef>
+          <a:fillRef idx="3">
+            <a:schemeClr val="accent1"/>
+          </a:fillRef>
+          <a:effectRef idx="2">
+            <a:schemeClr val="accent1"/>
+          </a:effectRef>
+          <a:fontRef idx="minor">
+            <a:schemeClr val="lt1"/>
+          </a:fontRef>
+        </p:style>
+        <p:txBody>
+          <a:bodyPr rtlCol="0" anchor="ctr"/>
+          <a:lstStyle/>
+          <a:p>
+            <a:pPr algn="ctr"/>
+          </a:p>
+        </p:txBody>
+      </p:sp>
+      <p:pic>
+        <p:nvPicPr>
+          <p:cNvPr id="20" name="Picture 19" descr="check_bl.png"/>
+          <p:cNvPicPr>
+            <a:picLocks noChangeAspect="1"/>
+          </p:cNvPicPr>
+          <p:nvPr/>
+        </p:nvPicPr>
+        <p:blipFill>
+          <a:blip r:embed="rId6"/>
+          <a:stretch>
+            <a:fillRect/>
+          </a:stretch>
+        </p:blipFill>
+        <p:spPr>
+          <a:xfrm>
+            <a:off x="9097200" y="2149200"/>
+            <a:ext cx="216000" cy="216000"/>
+          </a:xfrm>
+          <a:prstGeom prst="rect">
+            <a:avLst/>
+          </a:prstGeom>
+        </p:spPr>
+      </p:pic>
+      <p:sp>
+        <p:nvSpPr>
+          <p:cNvPr id="21" name="TextBox 20"/>
+          <p:cNvSpPr txBox="1"/>
+          <p:nvPr/>
+        </p:nvSpPr>
+        <p:spPr>
+          <a:xfrm>
+            <a:off x="9468000" y="2052000"/>
+            <a:ext cx="2052000" cy="648000"/>
+          </a:xfrm>
+          <a:prstGeom prst="rect">
+            <a:avLst/>
+          </a:prstGeom>
+          <a:noFill/>
+        </p:spPr>
+        <p:txBody>
+          <a:bodyPr wrap="square" lIns="36000" rIns="36000" tIns="18000" bIns="18000" anchor="t">
+            <a:spAutoFit/>
+          </a:bodyPr>
+          <a:lstStyle/>
+          <a:p>
+            <a:pPr algn="l">
+              <a:lnSpc>
+                <a:spcPct val="110000"/>
+              </a:lnSpc>
+            </a:pPr>
+            <a:r>
+              <a:rPr sz="1100" b="1">
+                <a:solidFill>
+                  <a:srgbClr val="111111"/>
+                </a:solidFill>
+                <a:latin typeface="Poppins"/>
+              </a:rPr>
+              <a:t>Un vrai choix au lieu d’une phrase vague</a:t>
+            </a:r>
+          </a:p>
+        </p:txBody>
+      </p:sp>
+      <p:sp>
+        <p:nvSpPr>
+          <p:cNvPr id="22" name="Oval 21"/>
+          <p:cNvSpPr/>
+          <p:nvPr/>
+        </p:nvSpPr>
+        <p:spPr>
+          <a:xfrm>
+            <a:off x="9036000" y="2790000"/>
+            <a:ext cx="342000" cy="342000"/>
+          </a:xfrm>
+          <a:prstGeom prst="ellipse">
+            <a:avLst/>
+          </a:prstGeom>
+          <a:solidFill>
+            <a:srgbClr val="FF8087"/>
+          </a:solidFill>
+          <a:ln>
+            <a:noFill/>
+          </a:ln>
+          <a:effectLst/>
+        </p:spPr>
+        <p:style>
+          <a:lnRef idx="1">
+            <a:schemeClr val="accent1"/>
+          </a:lnRef>
+          <a:fillRef idx="3">
+            <a:schemeClr val="accent1"/>
+          </a:fillRef>
+          <a:effectRef idx="2">
+            <a:schemeClr val="accent1"/>
+          </a:effectRef>
+          <a:fontRef idx="minor">
+            <a:schemeClr val="lt1"/>
+          </a:fontRef>
+        </p:style>
+        <p:txBody>
+          <a:bodyPr rtlCol="0" anchor="ctr"/>
+          <a:lstStyle/>
+          <a:p>
+            <a:pPr algn="ctr"/>
+          </a:p>
+        </p:txBody>
+      </p:sp>
+      <p:pic>
+        <p:nvPicPr>
+          <p:cNvPr id="23" name="Picture 22" descr="check_bl.png"/>
+          <p:cNvPicPr>
+            <a:picLocks noChangeAspect="1"/>
+          </p:cNvPicPr>
+          <p:nvPr/>
+        </p:nvPicPr>
+        <p:blipFill>
+          <a:blip r:embed="rId6"/>
+          <a:stretch>
+            <a:fillRect/>
+          </a:stretch>
+        </p:blipFill>
+        <p:spPr>
+          <a:xfrm>
+            <a:off x="9097200" y="2851200"/>
+            <a:ext cx="216000" cy="216000"/>
+          </a:xfrm>
+          <a:prstGeom prst="rect">
+            <a:avLst/>
+          </a:prstGeom>
+        </p:spPr>
+      </p:pic>
+      <p:sp>
+        <p:nvSpPr>
+          <p:cNvPr id="24" name="TextBox 23"/>
+          <p:cNvSpPr txBox="1"/>
+          <p:nvPr/>
+        </p:nvSpPr>
+        <p:spPr>
+          <a:xfrm>
+            <a:off x="9468000" y="2754000"/>
+            <a:ext cx="2052000" cy="648000"/>
+          </a:xfrm>
+          <a:prstGeom prst="rect">
+            <a:avLst/>
+          </a:prstGeom>
+          <a:noFill/>
+        </p:spPr>
+        <p:txBody>
+          <a:bodyPr wrap="square" lIns="36000" rIns="36000" tIns="18000" bIns="18000" anchor="t">
+            <a:spAutoFit/>
+          </a:bodyPr>
+          <a:lstStyle/>
+          <a:p>
+            <a:pPr algn="l">
+              <a:lnSpc>
+                <a:spcPct val="110000"/>
+              </a:lnSpc>
+            </a:pPr>
+            <a:r>
+              <a:rPr sz="1100" b="1">
+                <a:solidFill>
+                  <a:srgbClr val="111111"/>
+                </a:solidFill>
+                <a:latin typeface="Poppins"/>
+              </a:rPr>
+              <a:t>Une femme qui applique, pas un pot seul</a:t>
+            </a:r>
+          </a:p>
+        </p:txBody>
+      </p:sp>
+      <p:sp>
+        <p:nvSpPr>
+          <p:cNvPr id="25" name="Oval 24"/>
+          <p:cNvSpPr/>
+          <p:nvPr/>
+        </p:nvSpPr>
+        <p:spPr>
+          <a:xfrm>
+            <a:off x="9036000" y="3492000"/>
+            <a:ext cx="342000" cy="342000"/>
+          </a:xfrm>
+          <a:prstGeom prst="ellipse">
+            <a:avLst/>
+          </a:prstGeom>
+          <a:solidFill>
+            <a:srgbClr val="FF8087"/>
+          </a:solidFill>
+          <a:ln>
+            <a:noFill/>
+          </a:ln>
+          <a:effectLst/>
+        </p:spPr>
+        <p:style>
+          <a:lnRef idx="1">
+            <a:schemeClr val="accent1"/>
+          </a:lnRef>
+          <a:fillRef idx="3">
+            <a:schemeClr val="accent1"/>
+          </a:fillRef>
+          <a:effectRef idx="2">
+            <a:schemeClr val="accent1"/>
+          </a:effectRef>
+          <a:fontRef idx="minor">
+            <a:schemeClr val="lt1"/>
+          </a:fontRef>
+        </p:style>
+        <p:txBody>
+          <a:bodyPr rtlCol="0" anchor="ctr"/>
+          <a:lstStyle/>
+          <a:p>
+            <a:pPr algn="ctr"/>
+          </a:p>
+        </p:txBody>
+      </p:sp>
+      <p:pic>
+        <p:nvPicPr>
+          <p:cNvPr id="26" name="Picture 25" descr="check_bl.png"/>
+          <p:cNvPicPr>
+            <a:picLocks noChangeAspect="1"/>
+          </p:cNvPicPr>
+          <p:nvPr/>
+        </p:nvPicPr>
+        <p:blipFill>
+          <a:blip r:embed="rId6"/>
+          <a:stretch>
+            <a:fillRect/>
+          </a:stretch>
+        </p:blipFill>
+        <p:spPr>
+          <a:xfrm>
+            <a:off x="9097200" y="3553200"/>
+            <a:ext cx="216000" cy="216000"/>
+          </a:xfrm>
+          <a:prstGeom prst="rect">
+            <a:avLst/>
+          </a:prstGeom>
+        </p:spPr>
+      </p:pic>
+      <p:sp>
+        <p:nvSpPr>
+          <p:cNvPr id="27" name="TextBox 26"/>
+          <p:cNvSpPr txBox="1"/>
+          <p:nvPr/>
+        </p:nvSpPr>
+        <p:spPr>
+          <a:xfrm>
+            <a:off x="9468000" y="3456000"/>
+            <a:ext cx="2052000" cy="648000"/>
+          </a:xfrm>
+          <a:prstGeom prst="rect">
+            <a:avLst/>
+          </a:prstGeom>
+          <a:noFill/>
+        </p:spPr>
+        <p:txBody>
+          <a:bodyPr wrap="square" lIns="36000" rIns="36000" tIns="18000" bIns="18000" anchor="t">
+            <a:spAutoFit/>
+          </a:bodyPr>
+          <a:lstStyle/>
+          <a:p>
+            <a:pPr algn="l">
+              <a:lnSpc>
+                <a:spcPct val="110000"/>
+              </a:lnSpc>
+            </a:pPr>
+            <a:r>
+              <a:rPr sz="1100" b="1">
+                <a:solidFill>
+                  <a:srgbClr val="111111"/>
+                </a:solidFill>
+                <a:latin typeface="Poppins"/>
+              </a:rPr>
+              <a:t>Deux camps : tout le monde peut répondre</a:t>
+            </a:r>
+          </a:p>
+        </p:txBody>
+      </p:sp>
+      <p:sp>
+        <p:nvSpPr>
+          <p:cNvPr id="28" name="Rectangle 27"/>
+          <p:cNvSpPr/>
+          <p:nvPr/>
+        </p:nvSpPr>
+        <p:spPr>
+          <a:xfrm>
+            <a:off x="9036000" y="4248000"/>
+            <a:ext cx="2376000" cy="21600"/>
+          </a:xfrm>
+          <a:prstGeom prst="rect">
+            <a:avLst/>
+          </a:prstGeom>
+          <a:solidFill>
+            <a:srgbClr val="E2E2E2"/>
+          </a:solidFill>
+          <a:ln>
+            <a:noFill/>
+          </a:ln>
+          <a:effectLst/>
+        </p:spPr>
+        <p:style>
+          <a:lnRef idx="1">
+            <a:schemeClr val="accent1"/>
+          </a:lnRef>
+          <a:fillRef idx="3">
+            <a:schemeClr val="accent1"/>
+          </a:fillRef>
+          <a:effectRef idx="2">
+            <a:schemeClr val="accent1"/>
+          </a:effectRef>
+          <a:fontRef idx="minor">
+            <a:schemeClr val="lt1"/>
+          </a:fontRef>
+        </p:style>
+        <p:txBody>
+          <a:bodyPr rtlCol="0" anchor="ctr"/>
+          <a:lstStyle/>
+          <a:p>
+            <a:pPr algn="ctr"/>
+          </a:p>
+        </p:txBody>
+      </p:sp>
+      <p:sp>
+        <p:nvSpPr>
+          <p:cNvPr id="29" name="TextBox 28"/>
+          <p:cNvSpPr txBox="1"/>
+          <p:nvPr/>
+        </p:nvSpPr>
+        <p:spPr>
+          <a:xfrm>
+            <a:off x="9036000" y="4320000"/>
+            <a:ext cx="2376000" cy="251999"/>
+          </a:xfrm>
+          <a:prstGeom prst="rect">
+            <a:avLst/>
+          </a:prstGeom>
+          <a:noFill/>
+        </p:spPr>
+        <p:txBody>
+          <a:bodyPr wrap="square" lIns="36000" rIns="36000" tIns="18000" bIns="18000" anchor="t">
+            <a:spAutoFit/>
+          </a:bodyPr>
+          <a:lstStyle/>
+          <a:p>
+            <a:pPr algn="l">
+              <a:lnSpc>
+                <a:spcPct val="110000"/>
+              </a:lnSpc>
+            </a:pPr>
+            <a:r>
+              <a:rPr sz="900" b="1">
+                <a:solidFill>
+                  <a:srgbClr val="5A5A5A"/>
+                </a:solidFill>
+                <a:latin typeface="Poppins"/>
+              </a:rPr>
+              <a:t>LE TEXTE PROPOSÉ</a:t>
+            </a:r>
+          </a:p>
+        </p:txBody>
+      </p:sp>
+      <p:sp>
+        <p:nvSpPr>
+          <p:cNvPr id="30" name="TextBox 29"/>
+          <p:cNvSpPr txBox="1"/>
+          <p:nvPr/>
+        </p:nvSpPr>
+        <p:spPr>
+          <a:xfrm>
+            <a:off x="9036000" y="4536000"/>
+            <a:ext cx="2376000" cy="1764000"/>
+          </a:xfrm>
+          <a:prstGeom prst="rect">
+            <a:avLst/>
+          </a:prstGeom>
+          <a:noFill/>
+        </p:spPr>
+        <p:txBody>
+          <a:bodyPr wrap="square" lIns="36000" rIns="36000" tIns="18000" bIns="18000" anchor="t">
+            <a:spAutoFit/>
+          </a:bodyPr>
+          <a:lstStyle/>
+          <a:p>
+            <a:pPr algn="l">
+              <a:lnSpc>
+                <a:spcPct val="110000"/>
+              </a:lnSpc>
+            </a:pPr>
+            <a:r>
+              <a:rPr sz="950" b="0">
+                <a:solidFill>
+                  <a:srgbClr val="111111"/>
+                </a:solidFill>
+                <a:latin typeface="Poppins"/>
+              </a:rPr>
+              <a:t>Team pommade ou team lait ? 🥕
+La gamme Carowhite à l’huile de carotte existe dans les deux.
+ Votre camp en commentaire 👇</a:t>
+            </a:r>
+          </a:p>
+        </p:txBody>
+      </p:sp>
     </p:spTree>
   </p:cSld>
   <p:clrMapOvr>
@@ -10352,9 +14309,92 @@
           </a:p>
         </p:txBody>
       </p:sp>
+      <p:sp>
+        <p:nvSpPr>
+          <p:cNvPr id="9" name="Rounded Rectangle 8"/>
+          <p:cNvSpPr/>
+          <p:nvPr/>
+        </p:nvSpPr>
+        <p:spPr>
+          <a:xfrm>
+            <a:off x="576000" y="1512000"/>
+            <a:ext cx="3456000" cy="270000"/>
+          </a:xfrm>
+          <a:prstGeom prst="roundRect">
+            <a:avLst/>
+          </a:prstGeom>
+          <a:solidFill>
+            <a:srgbClr val="E2E2E2"/>
+          </a:solidFill>
+          <a:ln>
+            <a:noFill/>
+          </a:ln>
+          <a:effectLst/>
+        </p:spPr>
+        <p:style>
+          <a:lnRef idx="1">
+            <a:schemeClr val="accent1"/>
+          </a:lnRef>
+          <a:fillRef idx="3">
+            <a:schemeClr val="accent1"/>
+          </a:fillRef>
+          <a:effectRef idx="2">
+            <a:schemeClr val="accent1"/>
+          </a:effectRef>
+          <a:fontRef idx="minor">
+            <a:schemeClr val="lt1"/>
+          </a:fontRef>
+        </p:style>
+        <p:txBody>
+          <a:bodyPr rtlCol="0" anchor="ctr"/>
+          <a:lstStyle/>
+          <a:p>
+            <a:pPr algn="ctr"/>
+          </a:p>
+        </p:txBody>
+      </p:sp>
+      <p:sp>
+        <p:nvSpPr>
+          <p:cNvPr id="10" name="TextBox 9"/>
+          <p:cNvSpPr txBox="1"/>
+          <p:nvPr/>
+        </p:nvSpPr>
+        <p:spPr>
+          <a:xfrm>
+            <a:off x="576000" y="1512000"/>
+            <a:ext cx="3456000" cy="270000"/>
+          </a:xfrm>
+          <a:prstGeom prst="rect">
+            <a:avLst/>
+          </a:prstGeom>
+          <a:noFill/>
+        </p:spPr>
+        <p:txBody>
+          <a:bodyPr wrap="square" lIns="36000" rIns="36000" tIns="18000" bIns="18000" anchor="ctr">
+            <a:spAutoFit/>
+          </a:bodyPr>
+          <a:lstStyle/>
+          <a:p>
+            <a:pPr algn="ctr">
+              <a:lnSpc>
+                <a:spcPct val="110000"/>
+              </a:lnSpc>
+            </a:pPr>
+            <a:r>
+              <a:rPr sz="1000" b="1">
+                <a:solidFill>
+                  <a:srgbClr val="5A5A5A"/>
+                </a:solidFill>
+                <a:latin typeface="Poppins"/>
+              </a:rPr>
+              <a:t>AVANT · PUBLIÉ</a:t>
+            </a:r>
+          </a:p>
+        </p:txBody>
+      </p:sp>
       <p:pic>
         <p:nvPicPr>
-          <p:cNvPr id="9" name="Picture 8" descr="cmp_d_bebe.jpg"/>
+          <p:cNvPr id="11" name="Picture 10" descr="b_d_bebe.jpg"/>
           <p:cNvPicPr>
             <a:picLocks noChangeAspect="1"/>
           </p:cNvPicPr>
@@ -10368,14 +14408,719 @@
         </p:blipFill>
         <p:spPr>
           <a:xfrm>
-            <a:off x="1199493" y="1422000"/>
-            <a:ext cx="9769014" cy="4896000"/>
+            <a:off x="576000" y="1879200"/>
+            <a:ext cx="3456000" cy="4449600"/>
           </a:xfrm>
           <a:prstGeom prst="rect">
             <a:avLst/>
           </a:prstGeom>
         </p:spPr>
       </p:pic>
+      <p:sp>
+        <p:nvSpPr>
+          <p:cNvPr id="12" name="Oval 11"/>
+          <p:cNvSpPr/>
+          <p:nvPr/>
+        </p:nvSpPr>
+        <p:spPr>
+          <a:xfrm>
+            <a:off x="4158000" y="3744000"/>
+            <a:ext cx="540000" cy="540000"/>
+          </a:xfrm>
+          <a:prstGeom prst="ellipse">
+            <a:avLst/>
+          </a:prstGeom>
+          <a:solidFill>
+            <a:srgbClr val="AE172A"/>
+          </a:solidFill>
+          <a:ln>
+            <a:noFill/>
+          </a:ln>
+          <a:effectLst/>
+        </p:spPr>
+        <p:style>
+          <a:lnRef idx="1">
+            <a:schemeClr val="accent1"/>
+          </a:lnRef>
+          <a:fillRef idx="3">
+            <a:schemeClr val="accent1"/>
+          </a:fillRef>
+          <a:effectRef idx="2">
+            <a:schemeClr val="accent1"/>
+          </a:effectRef>
+          <a:fontRef idx="minor">
+            <a:schemeClr val="lt1"/>
+          </a:fontRef>
+        </p:style>
+        <p:txBody>
+          <a:bodyPr rtlCol="0" anchor="ctr"/>
+          <a:lstStyle/>
+          <a:p>
+            <a:pPr algn="ctr"/>
+          </a:p>
+        </p:txBody>
+      </p:sp>
+      <p:pic>
+        <p:nvPicPr>
+          <p:cNvPr id="13" name="Picture 12" descr="arrow-right_bl.png"/>
+          <p:cNvPicPr>
+            <a:picLocks noChangeAspect="1"/>
+          </p:cNvPicPr>
+          <p:nvPr/>
+        </p:nvPicPr>
+        <p:blipFill>
+          <a:blip r:embed="rId4"/>
+          <a:stretch>
+            <a:fillRect/>
+          </a:stretch>
+        </p:blipFill>
+        <p:spPr>
+          <a:xfrm>
+            <a:off x="4266000" y="3851999"/>
+            <a:ext cx="324000" cy="324000"/>
+          </a:xfrm>
+          <a:prstGeom prst="rect">
+            <a:avLst/>
+          </a:prstGeom>
+        </p:spPr>
+      </p:pic>
+      <p:sp>
+        <p:nvSpPr>
+          <p:cNvPr id="14" name="Rounded Rectangle 13"/>
+          <p:cNvSpPr/>
+          <p:nvPr/>
+        </p:nvSpPr>
+        <p:spPr>
+          <a:xfrm>
+            <a:off x="4824000" y="1512000"/>
+            <a:ext cx="3816000" cy="270000"/>
+          </a:xfrm>
+          <a:prstGeom prst="roundRect">
+            <a:avLst/>
+          </a:prstGeom>
+          <a:solidFill>
+            <a:srgbClr val="AE172A"/>
+          </a:solidFill>
+          <a:ln>
+            <a:noFill/>
+          </a:ln>
+          <a:effectLst/>
+        </p:spPr>
+        <p:style>
+          <a:lnRef idx="1">
+            <a:schemeClr val="accent1"/>
+          </a:lnRef>
+          <a:fillRef idx="3">
+            <a:schemeClr val="accent1"/>
+          </a:fillRef>
+          <a:effectRef idx="2">
+            <a:schemeClr val="accent1"/>
+          </a:effectRef>
+          <a:fontRef idx="minor">
+            <a:schemeClr val="lt1"/>
+          </a:fontRef>
+        </p:style>
+        <p:txBody>
+          <a:bodyPr rtlCol="0" anchor="ctr"/>
+          <a:lstStyle/>
+          <a:p>
+            <a:pPr algn="ctr"/>
+          </a:p>
+        </p:txBody>
+      </p:sp>
+      <p:sp>
+        <p:nvSpPr>
+          <p:cNvPr id="15" name="TextBox 14"/>
+          <p:cNvSpPr txBox="1"/>
+          <p:nvPr/>
+        </p:nvSpPr>
+        <p:spPr>
+          <a:xfrm>
+            <a:off x="4824000" y="1512000"/>
+            <a:ext cx="3816000" cy="270000"/>
+          </a:xfrm>
+          <a:prstGeom prst="rect">
+            <a:avLst/>
+          </a:prstGeom>
+          <a:noFill/>
+        </p:spPr>
+        <p:txBody>
+          <a:bodyPr wrap="square" lIns="36000" rIns="36000" tIns="18000" bIns="18000" anchor="ctr">
+            <a:spAutoFit/>
+          </a:bodyPr>
+          <a:lstStyle/>
+          <a:p>
+            <a:pPr algn="ctr">
+              <a:lnSpc>
+                <a:spcPct val="110000"/>
+              </a:lnSpc>
+            </a:pPr>
+            <a:r>
+              <a:rPr sz="1000" b="1">
+                <a:solidFill>
+                  <a:srgbClr val="FFFFFF"/>
+                </a:solidFill>
+                <a:latin typeface="Poppins"/>
+              </a:rPr>
+              <a:t>APRÈS · PROPOSÉ</a:t>
+            </a:r>
+          </a:p>
+        </p:txBody>
+      </p:sp>
+      <p:pic>
+        <p:nvPicPr>
+          <p:cNvPr id="16" name="Picture 15" descr="w_d_bebe.jpg"/>
+          <p:cNvPicPr>
+            <a:picLocks noChangeAspect="1"/>
+          </p:cNvPicPr>
+          <p:nvPr/>
+        </p:nvPicPr>
+        <p:blipFill>
+          <a:blip r:embed="rId5"/>
+          <a:stretch>
+            <a:fillRect/>
+          </a:stretch>
+        </p:blipFill>
+        <p:spPr>
+          <a:xfrm>
+            <a:off x="4946400" y="1872000"/>
+            <a:ext cx="3571200" cy="4464000"/>
+          </a:xfrm>
+          <a:prstGeom prst="rect">
+            <a:avLst/>
+          </a:prstGeom>
+        </p:spPr>
+      </p:pic>
+      <p:sp>
+        <p:nvSpPr>
+          <p:cNvPr id="17" name="Rounded Rectangle 16"/>
+          <p:cNvSpPr/>
+          <p:nvPr/>
+        </p:nvSpPr>
+        <p:spPr>
+          <a:xfrm>
+            <a:off x="8820000" y="1512000"/>
+            <a:ext cx="2808000" cy="4824000"/>
+          </a:xfrm>
+          <a:prstGeom prst="roundRect">
+            <a:avLst>
+              <a:gd name="adj" fmla="val 6000"/>
+            </a:avLst>
+          </a:prstGeom>
+          <a:solidFill>
+            <a:srgbClr val="FFF0F1"/>
+          </a:solidFill>
+          <a:ln>
+            <a:noFill/>
+          </a:ln>
+          <a:effectLst/>
+        </p:spPr>
+        <p:style>
+          <a:lnRef idx="1">
+            <a:schemeClr val="accent1"/>
+          </a:lnRef>
+          <a:fillRef idx="3">
+            <a:schemeClr val="accent1"/>
+          </a:fillRef>
+          <a:effectRef idx="2">
+            <a:schemeClr val="accent1"/>
+          </a:effectRef>
+          <a:fontRef idx="minor">
+            <a:schemeClr val="lt1"/>
+          </a:fontRef>
+        </p:style>
+        <p:txBody>
+          <a:bodyPr rtlCol="0" anchor="ctr"/>
+          <a:lstStyle/>
+          <a:p>
+            <a:pPr algn="ctr"/>
+          </a:p>
+        </p:txBody>
+      </p:sp>
+      <p:sp>
+        <p:nvSpPr>
+          <p:cNvPr id="18" name="TextBox 17"/>
+          <p:cNvSpPr txBox="1"/>
+          <p:nvPr/>
+        </p:nvSpPr>
+        <p:spPr>
+          <a:xfrm>
+            <a:off x="9036000" y="1655999"/>
+            <a:ext cx="2448000" cy="324000"/>
+          </a:xfrm>
+          <a:prstGeom prst="rect">
+            <a:avLst/>
+          </a:prstGeom>
+          <a:noFill/>
+        </p:spPr>
+        <p:txBody>
+          <a:bodyPr wrap="square" lIns="36000" rIns="36000" tIns="18000" bIns="18000" anchor="t">
+            <a:spAutoFit/>
+          </a:bodyPr>
+          <a:lstStyle/>
+          <a:p>
+            <a:pPr algn="l">
+              <a:lnSpc>
+                <a:spcPct val="110000"/>
+              </a:lnSpc>
+            </a:pPr>
+            <a:r>
+              <a:rPr sz="1500" b="1">
+                <a:solidFill>
+                  <a:srgbClr val="AE172A"/>
+                </a:solidFill>
+                <a:latin typeface="Poppins"/>
+              </a:rPr>
+              <a:t>Ce qui change</a:t>
+            </a:r>
+          </a:p>
+        </p:txBody>
+      </p:sp>
+      <p:sp>
+        <p:nvSpPr>
+          <p:cNvPr id="19" name="Oval 18"/>
+          <p:cNvSpPr/>
+          <p:nvPr/>
+        </p:nvSpPr>
+        <p:spPr>
+          <a:xfrm>
+            <a:off x="9036000" y="2088000"/>
+            <a:ext cx="342000" cy="342000"/>
+          </a:xfrm>
+          <a:prstGeom prst="ellipse">
+            <a:avLst/>
+          </a:prstGeom>
+          <a:solidFill>
+            <a:srgbClr val="FF8087"/>
+          </a:solidFill>
+          <a:ln>
+            <a:noFill/>
+          </a:ln>
+          <a:effectLst/>
+        </p:spPr>
+        <p:style>
+          <a:lnRef idx="1">
+            <a:schemeClr val="accent1"/>
+          </a:lnRef>
+          <a:fillRef idx="3">
+            <a:schemeClr val="accent1"/>
+          </a:fillRef>
+          <a:effectRef idx="2">
+            <a:schemeClr val="accent1"/>
+          </a:effectRef>
+          <a:fontRef idx="minor">
+            <a:schemeClr val="lt1"/>
+          </a:fontRef>
+        </p:style>
+        <p:txBody>
+          <a:bodyPr rtlCol="0" anchor="ctr"/>
+          <a:lstStyle/>
+          <a:p>
+            <a:pPr algn="ctr"/>
+          </a:p>
+        </p:txBody>
+      </p:sp>
+      <p:pic>
+        <p:nvPicPr>
+          <p:cNvPr id="20" name="Picture 19" descr="check_bl.png"/>
+          <p:cNvPicPr>
+            <a:picLocks noChangeAspect="1"/>
+          </p:cNvPicPr>
+          <p:nvPr/>
+        </p:nvPicPr>
+        <p:blipFill>
+          <a:blip r:embed="rId6"/>
+          <a:stretch>
+            <a:fillRect/>
+          </a:stretch>
+        </p:blipFill>
+        <p:spPr>
+          <a:xfrm>
+            <a:off x="9097200" y="2149200"/>
+            <a:ext cx="216000" cy="216000"/>
+          </a:xfrm>
+          <a:prstGeom prst="rect">
+            <a:avLst/>
+          </a:prstGeom>
+        </p:spPr>
+      </p:pic>
+      <p:sp>
+        <p:nvSpPr>
+          <p:cNvPr id="21" name="TextBox 20"/>
+          <p:cNvSpPr txBox="1"/>
+          <p:nvPr/>
+        </p:nvSpPr>
+        <p:spPr>
+          <a:xfrm>
+            <a:off x="9468000" y="2052000"/>
+            <a:ext cx="2052000" cy="648000"/>
+          </a:xfrm>
+          <a:prstGeom prst="rect">
+            <a:avLst/>
+          </a:prstGeom>
+          <a:noFill/>
+        </p:spPr>
+        <p:txBody>
+          <a:bodyPr wrap="square" lIns="36000" rIns="36000" tIns="18000" bIns="18000" anchor="t">
+            <a:spAutoFit/>
+          </a:bodyPr>
+          <a:lstStyle/>
+          <a:p>
+            <a:pPr algn="l">
+              <a:lnSpc>
+                <a:spcPct val="110000"/>
+              </a:lnSpc>
+            </a:pPr>
+            <a:r>
+              <a:rPr sz="1100" b="1">
+                <a:solidFill>
+                  <a:srgbClr val="111111"/>
+                </a:solidFill>
+                <a:latin typeface="Poppins"/>
+              </a:rPr>
+              <a:t>On parle de la gamme qui marche le mieux chez vous</a:t>
+            </a:r>
+          </a:p>
+        </p:txBody>
+      </p:sp>
+      <p:sp>
+        <p:nvSpPr>
+          <p:cNvPr id="22" name="Oval 21"/>
+          <p:cNvSpPr/>
+          <p:nvPr/>
+        </p:nvSpPr>
+        <p:spPr>
+          <a:xfrm>
+            <a:off x="9036000" y="2790000"/>
+            <a:ext cx="342000" cy="342000"/>
+          </a:xfrm>
+          <a:prstGeom prst="ellipse">
+            <a:avLst/>
+          </a:prstGeom>
+          <a:solidFill>
+            <a:srgbClr val="FF8087"/>
+          </a:solidFill>
+          <a:ln>
+            <a:noFill/>
+          </a:ln>
+          <a:effectLst/>
+        </p:spPr>
+        <p:style>
+          <a:lnRef idx="1">
+            <a:schemeClr val="accent1"/>
+          </a:lnRef>
+          <a:fillRef idx="3">
+            <a:schemeClr val="accent1"/>
+          </a:fillRef>
+          <a:effectRef idx="2">
+            <a:schemeClr val="accent1"/>
+          </a:effectRef>
+          <a:fontRef idx="minor">
+            <a:schemeClr val="lt1"/>
+          </a:fontRef>
+        </p:style>
+        <p:txBody>
+          <a:bodyPr rtlCol="0" anchor="ctr"/>
+          <a:lstStyle/>
+          <a:p>
+            <a:pPr algn="ctr"/>
+          </a:p>
+        </p:txBody>
+      </p:sp>
+      <p:pic>
+        <p:nvPicPr>
+          <p:cNvPr id="23" name="Picture 22" descr="check_bl.png"/>
+          <p:cNvPicPr>
+            <a:picLocks noChangeAspect="1"/>
+          </p:cNvPicPr>
+          <p:nvPr/>
+        </p:nvPicPr>
+        <p:blipFill>
+          <a:blip r:embed="rId6"/>
+          <a:stretch>
+            <a:fillRect/>
+          </a:stretch>
+        </p:blipFill>
+        <p:spPr>
+          <a:xfrm>
+            <a:off x="9097200" y="2851200"/>
+            <a:ext cx="216000" cy="216000"/>
+          </a:xfrm>
+          <a:prstGeom prst="rect">
+            <a:avLst/>
+          </a:prstGeom>
+        </p:spPr>
+      </p:pic>
+      <p:sp>
+        <p:nvSpPr>
+          <p:cNvPr id="24" name="TextBox 23"/>
+          <p:cNvSpPr txBox="1"/>
+          <p:nvPr/>
+        </p:nvSpPr>
+        <p:spPr>
+          <a:xfrm>
+            <a:off x="9468000" y="2754000"/>
+            <a:ext cx="2052000" cy="648000"/>
+          </a:xfrm>
+          <a:prstGeom prst="rect">
+            <a:avLst/>
+          </a:prstGeom>
+          <a:noFill/>
+        </p:spPr>
+        <p:txBody>
+          <a:bodyPr wrap="square" lIns="36000" rIns="36000" tIns="18000" bIns="18000" anchor="t">
+            <a:spAutoFit/>
+          </a:bodyPr>
+          <a:lstStyle/>
+          <a:p>
+            <a:pPr algn="l">
+              <a:lnSpc>
+                <a:spcPct val="110000"/>
+              </a:lnSpc>
+            </a:pPr>
+            <a:r>
+              <a:rPr sz="1100" b="1">
+                <a:solidFill>
+                  <a:srgbClr val="111111"/>
+                </a:solidFill>
+                <a:latin typeface="Poppins"/>
+              </a:rPr>
+              <a:t>Une mère et son bébé, une scène vraie</a:t>
+            </a:r>
+          </a:p>
+        </p:txBody>
+      </p:sp>
+      <p:sp>
+        <p:nvSpPr>
+          <p:cNvPr id="25" name="Oval 24"/>
+          <p:cNvSpPr/>
+          <p:nvPr/>
+        </p:nvSpPr>
+        <p:spPr>
+          <a:xfrm>
+            <a:off x="9036000" y="3492000"/>
+            <a:ext cx="342000" cy="342000"/>
+          </a:xfrm>
+          <a:prstGeom prst="ellipse">
+            <a:avLst/>
+          </a:prstGeom>
+          <a:solidFill>
+            <a:srgbClr val="FF8087"/>
+          </a:solidFill>
+          <a:ln>
+            <a:noFill/>
+          </a:ln>
+          <a:effectLst/>
+        </p:spPr>
+        <p:style>
+          <a:lnRef idx="1">
+            <a:schemeClr val="accent1"/>
+          </a:lnRef>
+          <a:fillRef idx="3">
+            <a:schemeClr val="accent1"/>
+          </a:fillRef>
+          <a:effectRef idx="2">
+            <a:schemeClr val="accent1"/>
+          </a:effectRef>
+          <a:fontRef idx="minor">
+            <a:schemeClr val="lt1"/>
+          </a:fontRef>
+        </p:style>
+        <p:txBody>
+          <a:bodyPr rtlCol="0" anchor="ctr"/>
+          <a:lstStyle/>
+          <a:p>
+            <a:pPr algn="ctr"/>
+          </a:p>
+        </p:txBody>
+      </p:sp>
+      <p:pic>
+        <p:nvPicPr>
+          <p:cNvPr id="26" name="Picture 25" descr="check_bl.png"/>
+          <p:cNvPicPr>
+            <a:picLocks noChangeAspect="1"/>
+          </p:cNvPicPr>
+          <p:nvPr/>
+        </p:nvPicPr>
+        <p:blipFill>
+          <a:blip r:embed="rId6"/>
+          <a:stretch>
+            <a:fillRect/>
+          </a:stretch>
+        </p:blipFill>
+        <p:spPr>
+          <a:xfrm>
+            <a:off x="9097200" y="3553200"/>
+            <a:ext cx="216000" cy="216000"/>
+          </a:xfrm>
+          <a:prstGeom prst="rect">
+            <a:avLst/>
+          </a:prstGeom>
+        </p:spPr>
+      </p:pic>
+      <p:sp>
+        <p:nvSpPr>
+          <p:cNvPr id="27" name="TextBox 26"/>
+          <p:cNvSpPr txBox="1"/>
+          <p:nvPr/>
+        </p:nvSpPr>
+        <p:spPr>
+          <a:xfrm>
+            <a:off x="9468000" y="3456000"/>
+            <a:ext cx="2052000" cy="648000"/>
+          </a:xfrm>
+          <a:prstGeom prst="rect">
+            <a:avLst/>
+          </a:prstGeom>
+          <a:noFill/>
+        </p:spPr>
+        <p:txBody>
+          <a:bodyPr wrap="square" lIns="36000" rIns="36000" tIns="18000" bIns="18000" anchor="t">
+            <a:spAutoFit/>
+          </a:bodyPr>
+          <a:lstStyle/>
+          <a:p>
+            <a:pPr algn="l">
+              <a:lnSpc>
+                <a:spcPct val="110000"/>
+              </a:lnSpc>
+            </a:pPr>
+            <a:r>
+              <a:rPr sz="1100" b="1">
+                <a:solidFill>
+                  <a:srgbClr val="111111"/>
+                </a:solidFill>
+                <a:latin typeface="Poppins"/>
+              </a:rPr>
+              <a:t>Les mamans répondent entre elles</a:t>
+            </a:r>
+          </a:p>
+        </p:txBody>
+      </p:sp>
+      <p:sp>
+        <p:nvSpPr>
+          <p:cNvPr id="28" name="Rectangle 27"/>
+          <p:cNvSpPr/>
+          <p:nvPr/>
+        </p:nvSpPr>
+        <p:spPr>
+          <a:xfrm>
+            <a:off x="9036000" y="4248000"/>
+            <a:ext cx="2376000" cy="21600"/>
+          </a:xfrm>
+          <a:prstGeom prst="rect">
+            <a:avLst/>
+          </a:prstGeom>
+          <a:solidFill>
+            <a:srgbClr val="E2E2E2"/>
+          </a:solidFill>
+          <a:ln>
+            <a:noFill/>
+          </a:ln>
+          <a:effectLst/>
+        </p:spPr>
+        <p:style>
+          <a:lnRef idx="1">
+            <a:schemeClr val="accent1"/>
+          </a:lnRef>
+          <a:fillRef idx="3">
+            <a:schemeClr val="accent1"/>
+          </a:fillRef>
+          <a:effectRef idx="2">
+            <a:schemeClr val="accent1"/>
+          </a:effectRef>
+          <a:fontRef idx="minor">
+            <a:schemeClr val="lt1"/>
+          </a:fontRef>
+        </p:style>
+        <p:txBody>
+          <a:bodyPr rtlCol="0" anchor="ctr"/>
+          <a:lstStyle/>
+          <a:p>
+            <a:pPr algn="ctr"/>
+          </a:p>
+        </p:txBody>
+      </p:sp>
+      <p:sp>
+        <p:nvSpPr>
+          <p:cNvPr id="29" name="TextBox 28"/>
+          <p:cNvSpPr txBox="1"/>
+          <p:nvPr/>
+        </p:nvSpPr>
+        <p:spPr>
+          <a:xfrm>
+            <a:off x="9036000" y="4320000"/>
+            <a:ext cx="2376000" cy="251999"/>
+          </a:xfrm>
+          <a:prstGeom prst="rect">
+            <a:avLst/>
+          </a:prstGeom>
+          <a:noFill/>
+        </p:spPr>
+        <p:txBody>
+          <a:bodyPr wrap="square" lIns="36000" rIns="36000" tIns="18000" bIns="18000" anchor="t">
+            <a:spAutoFit/>
+          </a:bodyPr>
+          <a:lstStyle/>
+          <a:p>
+            <a:pPr algn="l">
+              <a:lnSpc>
+                <a:spcPct val="110000"/>
+              </a:lnSpc>
+            </a:pPr>
+            <a:r>
+              <a:rPr sz="900" b="1">
+                <a:solidFill>
+                  <a:srgbClr val="5A5A5A"/>
+                </a:solidFill>
+                <a:latin typeface="Poppins"/>
+              </a:rPr>
+              <a:t>LE TEXTE PROPOSÉ</a:t>
+            </a:r>
+          </a:p>
+        </p:txBody>
+      </p:sp>
+      <p:sp>
+        <p:nvSpPr>
+          <p:cNvPr id="30" name="TextBox 29"/>
+          <p:cNvSpPr txBox="1"/>
+          <p:nvPr/>
+        </p:nvSpPr>
+        <p:spPr>
+          <a:xfrm>
+            <a:off x="9036000" y="4536000"/>
+            <a:ext cx="2376000" cy="1764000"/>
+          </a:xfrm>
+          <a:prstGeom prst="rect">
+            <a:avLst/>
+          </a:prstGeom>
+          <a:noFill/>
+        </p:spPr>
+        <p:txBody>
+          <a:bodyPr wrap="square" lIns="36000" rIns="36000" tIns="18000" bIns="18000" anchor="t">
+            <a:spAutoFit/>
+          </a:bodyPr>
+          <a:lstStyle/>
+          <a:p>
+            <a:pPr algn="l">
+              <a:lnSpc>
+                <a:spcPct val="110000"/>
+              </a:lnSpc>
+            </a:pPr>
+            <a:r>
+              <a:rPr sz="950" b="0">
+                <a:solidFill>
+                  <a:srgbClr val="111111"/>
+                </a:solidFill>
+                <a:latin typeface="Poppins"/>
+              </a:rPr>
+              <a:t>Le bain, un massage, la pommade. Bébé dort. 🤍
+La Pommade Nourrissante Babymed, au beurre de karité.
+ Mamans, votre astuce pour le coucher ? 👇</a:t>
+            </a:r>
+          </a:p>
+        </p:txBody>
+      </p:sp>
     </p:spTree>
   </p:cSld>
   <p:clrMapOvr>
@@ -11716,16 +16461,41 @@
           </a:p>
         </p:txBody>
       </p:sp>
-      <p:sp>
-        <p:nvSpPr>
-          <p:cNvPr id="9" name="Rounded Rectangle 8"/>
+      <p:pic>
+        <p:nvPicPr>
+          <p:cNvPr id="9" name="Picture 8" descr="d_alw_2.jpg"/>
+          <p:cNvPicPr>
+            <a:picLocks noChangeAspect="1"/>
+          </p:cNvPicPr>
+          <p:nvPr/>
+        </p:nvPicPr>
+        <p:blipFill>
+          <a:blip r:embed="rId3"/>
+          <a:srcRect l="6530" r="6530"/>
+          <a:stretch>
+            <a:fillRect/>
+          </a:stretch>
+        </p:blipFill>
+        <p:spPr>
+          <a:xfrm>
+            <a:off x="8928000" y="1584000"/>
+            <a:ext cx="2700000" cy="4662000"/>
+          </a:xfrm>
+          <a:prstGeom prst="rect">
+            <a:avLst/>
+          </a:prstGeom>
+        </p:spPr>
+      </p:pic>
+      <p:sp>
+        <p:nvSpPr>
+          <p:cNvPr id="10" name="Rounded Rectangle 9"/>
           <p:cNvSpPr/>
           <p:nvPr/>
         </p:nvSpPr>
         <p:spPr>
           <a:xfrm>
             <a:off x="576000" y="1584000"/>
-            <a:ext cx="11052000" cy="846000"/>
+            <a:ext cx="8136000" cy="846000"/>
           </a:xfrm>
           <a:prstGeom prst="roundRect">
             <a:avLst>
@@ -11733,7 +16503,7 @@
             </a:avLst>
           </a:prstGeom>
           <a:solidFill>
-            <a:srgbClr val="FFFFFF"/>
+            <a:srgbClr val="FFF0F1"/>
           </a:solidFill>
           <a:ln>
             <a:noFill/>
@@ -11764,7 +16534,7 @@
       </p:sp>
       <p:sp>
         <p:nvSpPr>
-          <p:cNvPr id="10" name="Rectangle 9"/>
+          <p:cNvPr id="11" name="Rectangle 10"/>
           <p:cNvSpPr/>
           <p:nvPr/>
         </p:nvSpPr>
@@ -11808,14 +16578,14 @@
       </p:sp>
       <p:sp>
         <p:nvSpPr>
-          <p:cNvPr id="11" name="TextBox 10"/>
+          <p:cNvPr id="12" name="TextBox 11"/>
           <p:cNvSpPr txBox="1"/>
           <p:nvPr/>
         </p:nvSpPr>
         <p:spPr>
           <a:xfrm>
-            <a:off x="792000" y="1584000"/>
-            <a:ext cx="503999" cy="846000"/>
+            <a:off x="756000" y="1584000"/>
+            <a:ext cx="468000" cy="846000"/>
           </a:xfrm>
           <a:prstGeom prst="rect">
             <a:avLst/>
@@ -11847,14 +16617,289 @@
       </p:sp>
       <p:sp>
         <p:nvSpPr>
-          <p:cNvPr id="12" name="Oval 11"/>
+          <p:cNvPr id="13" name="Oval 12"/>
           <p:cNvSpPr/>
           <p:nvPr/>
         </p:nvSpPr>
         <p:spPr>
           <a:xfrm>
-            <a:off x="1404000" y="1709999"/>
-            <a:ext cx="594000" cy="594000"/>
+            <a:off x="1296000" y="1728000"/>
+            <a:ext cx="558000" cy="558000"/>
+          </a:xfrm>
+          <a:prstGeom prst="ellipse">
+            <a:avLst/>
+          </a:prstGeom>
+          <a:solidFill>
+            <a:srgbClr val="AE172A"/>
+          </a:solidFill>
+          <a:ln>
+            <a:noFill/>
+          </a:ln>
+          <a:effectLst/>
+        </p:spPr>
+        <p:style>
+          <a:lnRef idx="1">
+            <a:schemeClr val="accent1"/>
+          </a:lnRef>
+          <a:fillRef idx="3">
+            <a:schemeClr val="accent1"/>
+          </a:fillRef>
+          <a:effectRef idx="2">
+            <a:schemeClr val="accent1"/>
+          </a:effectRef>
+          <a:fontRef idx="minor">
+            <a:schemeClr val="lt1"/>
+          </a:fontRef>
+        </p:style>
+        <p:txBody>
+          <a:bodyPr rtlCol="0" anchor="ctr"/>
+          <a:lstStyle/>
+          <a:p>
+            <a:pPr algn="ctr"/>
+          </a:p>
+        </p:txBody>
+      </p:sp>
+      <p:pic>
+        <p:nvPicPr>
+          <p:cNvPr id="14" name="Picture 13" descr="world_bl.png"/>
+          <p:cNvPicPr>
+            <a:picLocks noChangeAspect="1"/>
+          </p:cNvPicPr>
+          <p:nvPr/>
+        </p:nvPicPr>
+        <p:blipFill>
+          <a:blip r:embed="rId4"/>
+          <a:stretch>
+            <a:fillRect/>
+          </a:stretch>
+        </p:blipFill>
+        <p:spPr>
+          <a:xfrm>
+            <a:off x="1418760" y="1850760"/>
+            <a:ext cx="312480" cy="312480"/>
+          </a:xfrm>
+          <a:prstGeom prst="rect">
+            <a:avLst/>
+          </a:prstGeom>
+        </p:spPr>
+      </p:pic>
+      <p:sp>
+        <p:nvSpPr>
+          <p:cNvPr id="15" name="TextBox 14"/>
+          <p:cNvSpPr txBox="1"/>
+          <p:nvPr/>
+        </p:nvSpPr>
+        <p:spPr>
+          <a:xfrm>
+            <a:off x="2015999" y="1584000"/>
+            <a:ext cx="2304000" cy="846000"/>
+          </a:xfrm>
+          <a:prstGeom prst="rect">
+            <a:avLst/>
+          </a:prstGeom>
+          <a:noFill/>
+        </p:spPr>
+        <p:txBody>
+          <a:bodyPr wrap="square" lIns="36000" rIns="36000" tIns="18000" bIns="18000" anchor="ctr">
+            <a:spAutoFit/>
+          </a:bodyPr>
+          <a:lstStyle/>
+          <a:p>
+            <a:pPr algn="l">
+              <a:lnSpc>
+                <a:spcPct val="110000"/>
+              </a:lnSpc>
+            </a:pPr>
+            <a:r>
+              <a:rPr sz="1350" b="1">
+                <a:solidFill>
+                  <a:srgbClr val="111111"/>
+                </a:solidFill>
+                <a:latin typeface="Poppins"/>
+              </a:rPr>
+              <a:t>Le français d’abord</a:t>
+            </a:r>
+          </a:p>
+        </p:txBody>
+      </p:sp>
+      <p:sp>
+        <p:nvSpPr>
+          <p:cNvPr id="16" name="TextBox 15"/>
+          <p:cNvSpPr txBox="1"/>
+          <p:nvPr/>
+        </p:nvSpPr>
+        <p:spPr>
+          <a:xfrm>
+            <a:off x="4356000" y="1584000"/>
+            <a:ext cx="4248000" cy="846000"/>
+          </a:xfrm>
+          <a:prstGeom prst="rect">
+            <a:avLst/>
+          </a:prstGeom>
+          <a:noFill/>
+        </p:spPr>
+        <p:txBody>
+          <a:bodyPr wrap="square" lIns="36000" rIns="36000" tIns="18000" bIns="18000" anchor="ctr">
+            <a:spAutoFit/>
+          </a:bodyPr>
+          <a:lstStyle/>
+          <a:p>
+            <a:pPr algn="l">
+              <a:lnSpc>
+                <a:spcPct val="110000"/>
+              </a:lnSpc>
+            </a:pPr>
+            <a:r>
+              <a:rPr sz="1050" b="0">
+                <a:solidFill>
+                  <a:srgbClr val="5A5A5A"/>
+                </a:solidFill>
+                <a:latin typeface="Poppins"/>
+              </a:rPr>
+              <a:t>Un texte en français seul ; l’anglais en premier commentaire, ou réservé à une publication export.</a:t>
+            </a:r>
+          </a:p>
+        </p:txBody>
+      </p:sp>
+      <p:sp>
+        <p:nvSpPr>
+          <p:cNvPr id="17" name="Rounded Rectangle 16"/>
+          <p:cNvSpPr/>
+          <p:nvPr/>
+        </p:nvSpPr>
+        <p:spPr>
+          <a:xfrm>
+            <a:off x="576000" y="2538000"/>
+            <a:ext cx="8136000" cy="846000"/>
+          </a:xfrm>
+          <a:prstGeom prst="roundRect">
+            <a:avLst>
+              <a:gd name="adj" fmla="val 6000"/>
+            </a:avLst>
+          </a:prstGeom>
+          <a:solidFill>
+            <a:srgbClr val="F4F4F2"/>
+          </a:solidFill>
+          <a:ln>
+            <a:noFill/>
+          </a:ln>
+          <a:effectLst/>
+        </p:spPr>
+        <p:style>
+          <a:lnRef idx="1">
+            <a:schemeClr val="accent1"/>
+          </a:lnRef>
+          <a:fillRef idx="3">
+            <a:schemeClr val="accent1"/>
+          </a:fillRef>
+          <a:effectRef idx="2">
+            <a:schemeClr val="accent1"/>
+          </a:effectRef>
+          <a:fontRef idx="minor">
+            <a:schemeClr val="lt1"/>
+          </a:fontRef>
+        </p:style>
+        <p:txBody>
+          <a:bodyPr rtlCol="0" anchor="ctr"/>
+          <a:lstStyle/>
+          <a:p>
+            <a:pPr algn="ctr"/>
+          </a:p>
+        </p:txBody>
+      </p:sp>
+      <p:sp>
+        <p:nvSpPr>
+          <p:cNvPr id="18" name="Rectangle 17"/>
+          <p:cNvSpPr/>
+          <p:nvPr/>
+        </p:nvSpPr>
+        <p:spPr>
+          <a:xfrm>
+            <a:off x="576000" y="2538000"/>
+            <a:ext cx="90000" cy="846000"/>
+          </a:xfrm>
+          <a:prstGeom prst="rect">
+            <a:avLst/>
+          </a:prstGeom>
+          <a:solidFill>
+            <a:srgbClr val="AE172A"/>
+          </a:solidFill>
+          <a:ln>
+            <a:noFill/>
+          </a:ln>
+          <a:effectLst/>
+        </p:spPr>
+        <p:style>
+          <a:lnRef idx="1">
+            <a:schemeClr val="accent1"/>
+          </a:lnRef>
+          <a:fillRef idx="3">
+            <a:schemeClr val="accent1"/>
+          </a:fillRef>
+          <a:effectRef idx="2">
+            <a:schemeClr val="accent1"/>
+          </a:effectRef>
+          <a:fontRef idx="minor">
+            <a:schemeClr val="lt1"/>
+          </a:fontRef>
+        </p:style>
+        <p:txBody>
+          <a:bodyPr rtlCol="0" anchor="ctr"/>
+          <a:lstStyle/>
+          <a:p>
+            <a:pPr algn="ctr"/>
+          </a:p>
+        </p:txBody>
+      </p:sp>
+      <p:sp>
+        <p:nvSpPr>
+          <p:cNvPr id="19" name="TextBox 18"/>
+          <p:cNvSpPr txBox="1"/>
+          <p:nvPr/>
+        </p:nvSpPr>
+        <p:spPr>
+          <a:xfrm>
+            <a:off x="756000" y="2538000"/>
+            <a:ext cx="468000" cy="846000"/>
+          </a:xfrm>
+          <a:prstGeom prst="rect">
+            <a:avLst/>
+          </a:prstGeom>
+          <a:noFill/>
+        </p:spPr>
+        <p:txBody>
+          <a:bodyPr wrap="square" lIns="36000" rIns="36000" tIns="18000" bIns="18000" anchor="ctr">
+            <a:spAutoFit/>
+          </a:bodyPr>
+          <a:lstStyle/>
+          <a:p>
+            <a:pPr algn="ctr">
+              <a:lnSpc>
+                <a:spcPct val="110000"/>
+              </a:lnSpc>
+            </a:pPr>
+            <a:r>
+              <a:rPr sz="2400" b="1">
+                <a:solidFill>
+                  <a:srgbClr val="AE172A"/>
+                </a:solidFill>
+                <a:latin typeface="Poppins"/>
+              </a:rPr>
+              <a:t>2</a:t>
+            </a:r>
+          </a:p>
+        </p:txBody>
+      </p:sp>
+      <p:sp>
+        <p:nvSpPr>
+          <p:cNvPr id="20" name="Oval 19"/>
+          <p:cNvSpPr/>
+          <p:nvPr/>
+        </p:nvSpPr>
+        <p:spPr>
+          <a:xfrm>
+            <a:off x="1296000" y="2682000"/>
+            <a:ext cx="558000" cy="558000"/>
           </a:xfrm>
           <a:prstGeom prst="ellipse">
             <a:avLst/>
@@ -11891,22 +16936,22 @@
       </p:sp>
       <p:pic>
         <p:nvPicPr>
-          <p:cNvPr id="13" name="Picture 12" descr="world_bl.png"/>
+          <p:cNvPr id="21" name="Picture 20" descr="baby-carriage_bl.png"/>
           <p:cNvPicPr>
             <a:picLocks noChangeAspect="1"/>
           </p:cNvPicPr>
           <p:nvPr/>
         </p:nvPicPr>
         <p:blipFill>
-          <a:blip r:embed="rId3"/>
+          <a:blip r:embed="rId5"/>
           <a:stretch>
             <a:fillRect/>
           </a:stretch>
         </p:blipFill>
         <p:spPr>
           <a:xfrm>
-            <a:off x="1534680" y="1840679"/>
-            <a:ext cx="332640" cy="332640"/>
+            <a:off x="1418760" y="2804760"/>
+            <a:ext cx="312480" cy="312480"/>
           </a:xfrm>
           <a:prstGeom prst="rect">
             <a:avLst/>
@@ -11915,14 +16960,14 @@
       </p:pic>
       <p:sp>
         <p:nvSpPr>
-          <p:cNvPr id="14" name="TextBox 13"/>
+          <p:cNvPr id="22" name="TextBox 21"/>
           <p:cNvSpPr txBox="1"/>
           <p:nvPr/>
         </p:nvSpPr>
         <p:spPr>
           <a:xfrm>
-            <a:off x="2196000" y="1584000"/>
-            <a:ext cx="3060000" cy="846000"/>
+            <a:off x="2015999" y="2538000"/>
+            <a:ext cx="2304000" cy="846000"/>
           </a:xfrm>
           <a:prstGeom prst="rect">
             <a:avLst/>
@@ -11941,27 +16986,27 @@
               </a:lnSpc>
             </a:pPr>
             <a:r>
-              <a:rPr sz="1450" b="1">
+              <a:rPr sz="1350" b="1">
                 <a:solidFill>
                   <a:srgbClr val="111111"/>
                 </a:solidFill>
                 <a:latin typeface="Poppins"/>
               </a:rPr>
-              <a:t>Le français d’abord</a:t>
-            </a:r>
-          </a:p>
-        </p:txBody>
-      </p:sp>
-      <p:sp>
-        <p:nvSpPr>
-          <p:cNvPr id="15" name="TextBox 14"/>
+              <a:t>Miser sur Babymed</a:t>
+            </a:r>
+          </a:p>
+        </p:txBody>
+      </p:sp>
+      <p:sp>
+        <p:nvSpPr>
+          <p:cNvPr id="23" name="TextBox 22"/>
           <p:cNvSpPr txBox="1"/>
           <p:nvPr/>
         </p:nvSpPr>
         <p:spPr>
           <a:xfrm>
-            <a:off x="5256000" y="1584000"/>
-            <a:ext cx="6228000" cy="846000"/>
+            <a:off x="4356000" y="2538000"/>
+            <a:ext cx="4248000" cy="846000"/>
           </a:xfrm>
           <a:prstGeom prst="rect">
             <a:avLst/>
@@ -11980,27 +17025,302 @@
               </a:lnSpc>
             </a:pPr>
             <a:r>
-              <a:rPr sz="1200" b="0">
+              <a:rPr sz="1050" b="0">
                 <a:solidFill>
                   <a:srgbClr val="5A5A5A"/>
                 </a:solidFill>
                 <a:latin typeface="Poppins"/>
               </a:rPr>
-              <a:t>Un texte en français seul ; l’anglais en premier commentaire, ou réservé à une publication export.</a:t>
-            </a:r>
-          </a:p>
-        </p:txBody>
-      </p:sp>
-      <p:sp>
-        <p:nvSpPr>
-          <p:cNvPr id="16" name="Rounded Rectangle 15"/>
+              <a:t>Une publication Babymed par semaine : c’est votre gamme la plus régulière, et Gandour gagne sur bébé.</a:t>
+            </a:r>
+          </a:p>
+        </p:txBody>
+      </p:sp>
+      <p:sp>
+        <p:nvSpPr>
+          <p:cNvPr id="24" name="Rounded Rectangle 23"/>
           <p:cNvSpPr/>
           <p:nvPr/>
         </p:nvSpPr>
         <p:spPr>
           <a:xfrm>
-            <a:off x="576000" y="2538000"/>
-            <a:ext cx="11052000" cy="846000"/>
+            <a:off x="576000" y="3492000"/>
+            <a:ext cx="8136000" cy="846000"/>
+          </a:xfrm>
+          <a:prstGeom prst="roundRect">
+            <a:avLst>
+              <a:gd name="adj" fmla="val 6000"/>
+            </a:avLst>
+          </a:prstGeom>
+          <a:solidFill>
+            <a:srgbClr val="FFF0F1"/>
+          </a:solidFill>
+          <a:ln>
+            <a:noFill/>
+          </a:ln>
+          <a:effectLst/>
+        </p:spPr>
+        <p:style>
+          <a:lnRef idx="1">
+            <a:schemeClr val="accent1"/>
+          </a:lnRef>
+          <a:fillRef idx="3">
+            <a:schemeClr val="accent1"/>
+          </a:fillRef>
+          <a:effectRef idx="2">
+            <a:schemeClr val="accent1"/>
+          </a:effectRef>
+          <a:fontRef idx="minor">
+            <a:schemeClr val="lt1"/>
+          </a:fontRef>
+        </p:style>
+        <p:txBody>
+          <a:bodyPr rtlCol="0" anchor="ctr"/>
+          <a:lstStyle/>
+          <a:p>
+            <a:pPr algn="ctr"/>
+          </a:p>
+        </p:txBody>
+      </p:sp>
+      <p:sp>
+        <p:nvSpPr>
+          <p:cNvPr id="25" name="Rectangle 24"/>
+          <p:cNvSpPr/>
+          <p:nvPr/>
+        </p:nvSpPr>
+        <p:spPr>
+          <a:xfrm>
+            <a:off x="576000" y="3492000"/>
+            <a:ext cx="90000" cy="846000"/>
+          </a:xfrm>
+          <a:prstGeom prst="rect">
+            <a:avLst/>
+          </a:prstGeom>
+          <a:solidFill>
+            <a:srgbClr val="AE172A"/>
+          </a:solidFill>
+          <a:ln>
+            <a:noFill/>
+          </a:ln>
+          <a:effectLst/>
+        </p:spPr>
+        <p:style>
+          <a:lnRef idx="1">
+            <a:schemeClr val="accent1"/>
+          </a:lnRef>
+          <a:fillRef idx="3">
+            <a:schemeClr val="accent1"/>
+          </a:fillRef>
+          <a:effectRef idx="2">
+            <a:schemeClr val="accent1"/>
+          </a:effectRef>
+          <a:fontRef idx="minor">
+            <a:schemeClr val="lt1"/>
+          </a:fontRef>
+        </p:style>
+        <p:txBody>
+          <a:bodyPr rtlCol="0" anchor="ctr"/>
+          <a:lstStyle/>
+          <a:p>
+            <a:pPr algn="ctr"/>
+          </a:p>
+        </p:txBody>
+      </p:sp>
+      <p:sp>
+        <p:nvSpPr>
+          <p:cNvPr id="26" name="TextBox 25"/>
+          <p:cNvSpPr txBox="1"/>
+          <p:nvPr/>
+        </p:nvSpPr>
+        <p:spPr>
+          <a:xfrm>
+            <a:off x="756000" y="3492000"/>
+            <a:ext cx="468000" cy="846000"/>
+          </a:xfrm>
+          <a:prstGeom prst="rect">
+            <a:avLst/>
+          </a:prstGeom>
+          <a:noFill/>
+        </p:spPr>
+        <p:txBody>
+          <a:bodyPr wrap="square" lIns="36000" rIns="36000" tIns="18000" bIns="18000" anchor="ctr">
+            <a:spAutoFit/>
+          </a:bodyPr>
+          <a:lstStyle/>
+          <a:p>
+            <a:pPr algn="ctr">
+              <a:lnSpc>
+                <a:spcPct val="110000"/>
+              </a:lnSpc>
+            </a:pPr>
+            <a:r>
+              <a:rPr sz="2400" b="1">
+                <a:solidFill>
+                  <a:srgbClr val="AE172A"/>
+                </a:solidFill>
+                <a:latin typeface="Poppins"/>
+              </a:rPr>
+              <a:t>3</a:t>
+            </a:r>
+          </a:p>
+        </p:txBody>
+      </p:sp>
+      <p:sp>
+        <p:nvSpPr>
+          <p:cNvPr id="27" name="Oval 26"/>
+          <p:cNvSpPr/>
+          <p:nvPr/>
+        </p:nvSpPr>
+        <p:spPr>
+          <a:xfrm>
+            <a:off x="1296000" y="3636000"/>
+            <a:ext cx="558000" cy="558000"/>
+          </a:xfrm>
+          <a:prstGeom prst="ellipse">
+            <a:avLst/>
+          </a:prstGeom>
+          <a:solidFill>
+            <a:srgbClr val="AE172A"/>
+          </a:solidFill>
+          <a:ln>
+            <a:noFill/>
+          </a:ln>
+          <a:effectLst/>
+        </p:spPr>
+        <p:style>
+          <a:lnRef idx="1">
+            <a:schemeClr val="accent1"/>
+          </a:lnRef>
+          <a:fillRef idx="3">
+            <a:schemeClr val="accent1"/>
+          </a:fillRef>
+          <a:effectRef idx="2">
+            <a:schemeClr val="accent1"/>
+          </a:effectRef>
+          <a:fontRef idx="minor">
+            <a:schemeClr val="lt1"/>
+          </a:fontRef>
+        </p:style>
+        <p:txBody>
+          <a:bodyPr rtlCol="0" anchor="ctr"/>
+          <a:lstStyle/>
+          <a:p>
+            <a:pPr algn="ctr"/>
+          </a:p>
+        </p:txBody>
+      </p:sp>
+      <p:pic>
+        <p:nvPicPr>
+          <p:cNvPr id="28" name="Picture 27" descr="map-pin_bl.png"/>
+          <p:cNvPicPr>
+            <a:picLocks noChangeAspect="1"/>
+          </p:cNvPicPr>
+          <p:nvPr/>
+        </p:nvPicPr>
+        <p:blipFill>
+          <a:blip r:embed="rId6"/>
+          <a:stretch>
+            <a:fillRect/>
+          </a:stretch>
+        </p:blipFill>
+        <p:spPr>
+          <a:xfrm>
+            <a:off x="1418760" y="3758760"/>
+            <a:ext cx="312480" cy="312480"/>
+          </a:xfrm>
+          <a:prstGeom prst="rect">
+            <a:avLst/>
+          </a:prstGeom>
+        </p:spPr>
+      </p:pic>
+      <p:sp>
+        <p:nvSpPr>
+          <p:cNvPr id="29" name="TextBox 28"/>
+          <p:cNvSpPr txBox="1"/>
+          <p:nvPr/>
+        </p:nvSpPr>
+        <p:spPr>
+          <a:xfrm>
+            <a:off x="2015999" y="3492000"/>
+            <a:ext cx="2304000" cy="846000"/>
+          </a:xfrm>
+          <a:prstGeom prst="rect">
+            <a:avLst/>
+          </a:prstGeom>
+          <a:noFill/>
+        </p:spPr>
+        <p:txBody>
+          <a:bodyPr wrap="square" lIns="36000" rIns="36000" tIns="18000" bIns="18000" anchor="ctr">
+            <a:spAutoFit/>
+          </a:bodyPr>
+          <a:lstStyle/>
+          <a:p>
+            <a:pPr algn="l">
+              <a:lnSpc>
+                <a:spcPct val="110000"/>
+              </a:lnSpc>
+            </a:pPr>
+            <a:r>
+              <a:rPr sz="1350" b="1">
+                <a:solidFill>
+                  <a:srgbClr val="111111"/>
+                </a:solidFill>
+                <a:latin typeface="Poppins"/>
+              </a:rPr>
+              <a:t>Dire où acheter</a:t>
+            </a:r>
+          </a:p>
+        </p:txBody>
+      </p:sp>
+      <p:sp>
+        <p:nvSpPr>
+          <p:cNvPr id="30" name="TextBox 29"/>
+          <p:cNvSpPr txBox="1"/>
+          <p:nvPr/>
+        </p:nvSpPr>
+        <p:spPr>
+          <a:xfrm>
+            <a:off x="4356000" y="3492000"/>
+            <a:ext cx="4248000" cy="846000"/>
+          </a:xfrm>
+          <a:prstGeom prst="rect">
+            <a:avLst/>
+          </a:prstGeom>
+          <a:noFill/>
+        </p:spPr>
+        <p:txBody>
+          <a:bodyPr wrap="square" lIns="36000" rIns="36000" tIns="18000" bIns="18000" anchor="ctr">
+            <a:spAutoFit/>
+          </a:bodyPr>
+          <a:lstStyle/>
+          <a:p>
+            <a:pPr algn="l">
+              <a:lnSpc>
+                <a:spcPct val="110000"/>
+              </a:lnSpc>
+            </a:pPr>
+            <a:r>
+              <a:rPr sz="1050" b="0">
+                <a:solidFill>
+                  <a:srgbClr val="5A5A5A"/>
+                </a:solidFill>
+                <a:latin typeface="Poppins"/>
+              </a:rPr>
+              <a:t>Une fois par semaine : la pharmacie, le supermarché, le marché où l’on trouve le produit.</a:t>
+            </a:r>
+          </a:p>
+        </p:txBody>
+      </p:sp>
+      <p:sp>
+        <p:nvSpPr>
+          <p:cNvPr id="31" name="Rounded Rectangle 30"/>
+          <p:cNvSpPr/>
+          <p:nvPr/>
+        </p:nvSpPr>
+        <p:spPr>
+          <a:xfrm>
+            <a:off x="576000" y="4446000"/>
+            <a:ext cx="8136000" cy="846000"/>
           </a:xfrm>
           <a:prstGeom prst="roundRect">
             <a:avLst>
@@ -12039,13 +17359,13 @@
       </p:sp>
       <p:sp>
         <p:nvSpPr>
-          <p:cNvPr id="17" name="Rectangle 16"/>
+          <p:cNvPr id="32" name="Rectangle 31"/>
           <p:cNvSpPr/>
           <p:nvPr/>
         </p:nvSpPr>
         <p:spPr>
           <a:xfrm>
-            <a:off x="576000" y="2538000"/>
+            <a:off x="576000" y="4446000"/>
             <a:ext cx="90000" cy="846000"/>
           </a:xfrm>
           <a:prstGeom prst="rect">
@@ -12083,14 +17403,14 @@
       </p:sp>
       <p:sp>
         <p:nvSpPr>
-          <p:cNvPr id="18" name="TextBox 17"/>
+          <p:cNvPr id="33" name="TextBox 32"/>
           <p:cNvSpPr txBox="1"/>
           <p:nvPr/>
         </p:nvSpPr>
         <p:spPr>
           <a:xfrm>
-            <a:off x="792000" y="2538000"/>
-            <a:ext cx="503999" cy="846000"/>
+            <a:off x="756000" y="4446000"/>
+            <a:ext cx="468000" cy="846000"/>
           </a:xfrm>
           <a:prstGeom prst="rect">
             <a:avLst/>
@@ -12115,21 +17435,21 @@
                 </a:solidFill>
                 <a:latin typeface="Poppins"/>
               </a:rPr>
-              <a:t>2</a:t>
-            </a:r>
-          </a:p>
-        </p:txBody>
-      </p:sp>
-      <p:sp>
-        <p:nvSpPr>
-          <p:cNvPr id="19" name="Oval 18"/>
+              <a:t>4</a:t>
+            </a:r>
+          </a:p>
+        </p:txBody>
+      </p:sp>
+      <p:sp>
+        <p:nvSpPr>
+          <p:cNvPr id="34" name="Oval 33"/>
           <p:cNvSpPr/>
           <p:nvPr/>
         </p:nvSpPr>
         <p:spPr>
           <a:xfrm>
-            <a:off x="1404000" y="2663999"/>
-            <a:ext cx="594000" cy="594000"/>
+            <a:off x="1296000" y="4590000"/>
+            <a:ext cx="558000" cy="558000"/>
           </a:xfrm>
           <a:prstGeom prst="ellipse">
             <a:avLst/>
@@ -12166,22 +17486,22 @@
       </p:sp>
       <p:pic>
         <p:nvPicPr>
-          <p:cNvPr id="20" name="Picture 19" descr="baby-carriage_bl.png"/>
+          <p:cNvPr id="35" name="Picture 34" descr="video_bl.png"/>
           <p:cNvPicPr>
             <a:picLocks noChangeAspect="1"/>
           </p:cNvPicPr>
           <p:nvPr/>
         </p:nvPicPr>
         <p:blipFill>
-          <a:blip r:embed="rId4"/>
+          <a:blip r:embed="rId7"/>
           <a:stretch>
             <a:fillRect/>
           </a:stretch>
         </p:blipFill>
         <p:spPr>
           <a:xfrm>
-            <a:off x="1534680" y="2794679"/>
-            <a:ext cx="332640" cy="332640"/>
+            <a:off x="1418760" y="4712760"/>
+            <a:ext cx="312480" cy="312480"/>
           </a:xfrm>
           <a:prstGeom prst="rect">
             <a:avLst/>
@@ -12190,14 +17510,14 @@
       </p:pic>
       <p:sp>
         <p:nvSpPr>
-          <p:cNvPr id="21" name="TextBox 20"/>
+          <p:cNvPr id="36" name="TextBox 35"/>
           <p:cNvSpPr txBox="1"/>
           <p:nvPr/>
         </p:nvSpPr>
         <p:spPr>
           <a:xfrm>
-            <a:off x="2196000" y="2538000"/>
-            <a:ext cx="3060000" cy="846000"/>
+            <a:off x="2015999" y="4446000"/>
+            <a:ext cx="2304000" cy="846000"/>
           </a:xfrm>
           <a:prstGeom prst="rect">
             <a:avLst/>
@@ -12216,27 +17536,27 @@
               </a:lnSpc>
             </a:pPr>
             <a:r>
-              <a:rPr sz="1450" b="1">
+              <a:rPr sz="1350" b="1">
                 <a:solidFill>
                   <a:srgbClr val="111111"/>
                 </a:solidFill>
                 <a:latin typeface="Poppins"/>
               </a:rPr>
-              <a:t>Miser sur Babymed</a:t>
-            </a:r>
-          </a:p>
-        </p:txBody>
-      </p:sp>
-      <p:sp>
-        <p:nvSpPr>
-          <p:cNvPr id="22" name="TextBox 21"/>
+              <a:t>Plus de vidéos courtes</a:t>
+            </a:r>
+          </a:p>
+        </p:txBody>
+      </p:sp>
+      <p:sp>
+        <p:nvSpPr>
+          <p:cNvPr id="37" name="TextBox 36"/>
           <p:cNvSpPr txBox="1"/>
           <p:nvPr/>
         </p:nvSpPr>
         <p:spPr>
           <a:xfrm>
-            <a:off x="5256000" y="2538000"/>
-            <a:ext cx="6228000" cy="846000"/>
+            <a:off x="4356000" y="4446000"/>
+            <a:ext cx="4248000" cy="846000"/>
           </a:xfrm>
           <a:prstGeom prst="rect">
             <a:avLst/>
@@ -12255,27 +17575,27 @@
               </a:lnSpc>
             </a:pPr>
             <a:r>
-              <a:rPr sz="1200" b="0">
+              <a:rPr sz="1050" b="0">
                 <a:solidFill>
                   <a:srgbClr val="5A5A5A"/>
                 </a:solidFill>
                 <a:latin typeface="Poppins"/>
               </a:rPr>
-              <a:t>Une publication Babymed par semaine : c’est votre gamme la plus régulière, et Gandour gagne sur bébé.</a:t>
-            </a:r>
-          </a:p>
-        </p:txBody>
-      </p:sp>
-      <p:sp>
-        <p:nvSpPr>
-          <p:cNvPr id="23" name="Rounded Rectangle 22"/>
+              <a:t>Votre vidéo PawPaw a fait 205 110 vues sur Instagram : deux vidéos de routine par semaine.</a:t>
+            </a:r>
+          </a:p>
+        </p:txBody>
+      </p:sp>
+      <p:sp>
+        <p:nvSpPr>
+          <p:cNvPr id="38" name="Rounded Rectangle 37"/>
           <p:cNvSpPr/>
           <p:nvPr/>
         </p:nvSpPr>
         <p:spPr>
           <a:xfrm>
-            <a:off x="576000" y="3492000"/>
-            <a:ext cx="11052000" cy="846000"/>
+            <a:off x="576000" y="5400000"/>
+            <a:ext cx="8136000" cy="846000"/>
           </a:xfrm>
           <a:prstGeom prst="roundRect">
             <a:avLst>
@@ -12283,7 +17603,7 @@
             </a:avLst>
           </a:prstGeom>
           <a:solidFill>
-            <a:srgbClr val="FFFFFF"/>
+            <a:srgbClr val="FFF0F1"/>
           </a:solidFill>
           <a:ln>
             <a:noFill/>
@@ -12314,13 +17634,13 @@
       </p:sp>
       <p:sp>
         <p:nvSpPr>
-          <p:cNvPr id="24" name="Rectangle 23"/>
+          <p:cNvPr id="39" name="Rectangle 38"/>
           <p:cNvSpPr/>
           <p:nvPr/>
         </p:nvSpPr>
         <p:spPr>
           <a:xfrm>
-            <a:off x="576000" y="3492000"/>
+            <a:off x="576000" y="5400000"/>
             <a:ext cx="90000" cy="846000"/>
           </a:xfrm>
           <a:prstGeom prst="rect">
@@ -12358,14 +17678,14 @@
       </p:sp>
       <p:sp>
         <p:nvSpPr>
-          <p:cNvPr id="25" name="TextBox 24"/>
+          <p:cNvPr id="40" name="TextBox 39"/>
           <p:cNvSpPr txBox="1"/>
           <p:nvPr/>
         </p:nvSpPr>
         <p:spPr>
           <a:xfrm>
-            <a:off x="792000" y="3492000"/>
-            <a:ext cx="503999" cy="846000"/>
+            <a:off x="756000" y="5400000"/>
+            <a:ext cx="468000" cy="846000"/>
           </a:xfrm>
           <a:prstGeom prst="rect">
             <a:avLst/>
@@ -12390,215 +17710,23 @@
                 </a:solidFill>
                 <a:latin typeface="Poppins"/>
               </a:rPr>
-              <a:t>3</a:t>
-            </a:r>
-          </a:p>
-        </p:txBody>
-      </p:sp>
-      <p:sp>
-        <p:nvSpPr>
-          <p:cNvPr id="26" name="Oval 25"/>
+              <a:t>5</a:t>
+            </a:r>
+          </a:p>
+        </p:txBody>
+      </p:sp>
+      <p:sp>
+        <p:nvSpPr>
+          <p:cNvPr id="41" name="Oval 40"/>
           <p:cNvSpPr/>
           <p:nvPr/>
         </p:nvSpPr>
         <p:spPr>
           <a:xfrm>
-            <a:off x="1404000" y="3617999"/>
-            <a:ext cx="594000" cy="594000"/>
+            <a:off x="1296000" y="5544000"/>
+            <a:ext cx="558000" cy="558000"/>
           </a:xfrm>
           <a:prstGeom prst="ellipse">
-            <a:avLst/>
-          </a:prstGeom>
-          <a:solidFill>
-            <a:srgbClr val="FF8087"/>
-          </a:solidFill>
-          <a:ln>
-            <a:noFill/>
-          </a:ln>
-          <a:effectLst/>
-        </p:spPr>
-        <p:style>
-          <a:lnRef idx="1">
-            <a:schemeClr val="accent1"/>
-          </a:lnRef>
-          <a:fillRef idx="3">
-            <a:schemeClr val="accent1"/>
-          </a:fillRef>
-          <a:effectRef idx="2">
-            <a:schemeClr val="accent1"/>
-          </a:effectRef>
-          <a:fontRef idx="minor">
-            <a:schemeClr val="lt1"/>
-          </a:fontRef>
-        </p:style>
-        <p:txBody>
-          <a:bodyPr rtlCol="0" anchor="ctr"/>
-          <a:lstStyle/>
-          <a:p>
-            <a:pPr algn="ctr"/>
-          </a:p>
-        </p:txBody>
-      </p:sp>
-      <p:pic>
-        <p:nvPicPr>
-          <p:cNvPr id="27" name="Picture 26" descr="map-pin_bl.png"/>
-          <p:cNvPicPr>
-            <a:picLocks noChangeAspect="1"/>
-          </p:cNvPicPr>
-          <p:nvPr/>
-        </p:nvPicPr>
-        <p:blipFill>
-          <a:blip r:embed="rId5"/>
-          <a:stretch>
-            <a:fillRect/>
-          </a:stretch>
-        </p:blipFill>
-        <p:spPr>
-          <a:xfrm>
-            <a:off x="1534680" y="3748679"/>
-            <a:ext cx="332640" cy="332640"/>
-          </a:xfrm>
-          <a:prstGeom prst="rect">
-            <a:avLst/>
-          </a:prstGeom>
-        </p:spPr>
-      </p:pic>
-      <p:sp>
-        <p:nvSpPr>
-          <p:cNvPr id="28" name="TextBox 27"/>
-          <p:cNvSpPr txBox="1"/>
-          <p:nvPr/>
-        </p:nvSpPr>
-        <p:spPr>
-          <a:xfrm>
-            <a:off x="2196000" y="3492000"/>
-            <a:ext cx="3060000" cy="846000"/>
-          </a:xfrm>
-          <a:prstGeom prst="rect">
-            <a:avLst/>
-          </a:prstGeom>
-          <a:noFill/>
-        </p:spPr>
-        <p:txBody>
-          <a:bodyPr wrap="square" lIns="36000" rIns="36000" tIns="18000" bIns="18000" anchor="ctr">
-            <a:spAutoFit/>
-          </a:bodyPr>
-          <a:lstStyle/>
-          <a:p>
-            <a:pPr algn="l">
-              <a:lnSpc>
-                <a:spcPct val="110000"/>
-              </a:lnSpc>
-            </a:pPr>
-            <a:r>
-              <a:rPr sz="1450" b="1">
-                <a:solidFill>
-                  <a:srgbClr val="111111"/>
-                </a:solidFill>
-                <a:latin typeface="Poppins"/>
-              </a:rPr>
-              <a:t>Dire où acheter</a:t>
-            </a:r>
-          </a:p>
-        </p:txBody>
-      </p:sp>
-      <p:sp>
-        <p:nvSpPr>
-          <p:cNvPr id="29" name="TextBox 28"/>
-          <p:cNvSpPr txBox="1"/>
-          <p:nvPr/>
-        </p:nvSpPr>
-        <p:spPr>
-          <a:xfrm>
-            <a:off x="5256000" y="3492000"/>
-            <a:ext cx="6228000" cy="846000"/>
-          </a:xfrm>
-          <a:prstGeom prst="rect">
-            <a:avLst/>
-          </a:prstGeom>
-          <a:noFill/>
-        </p:spPr>
-        <p:txBody>
-          <a:bodyPr wrap="square" lIns="36000" rIns="36000" tIns="18000" bIns="18000" anchor="ctr">
-            <a:spAutoFit/>
-          </a:bodyPr>
-          <a:lstStyle/>
-          <a:p>
-            <a:pPr algn="l">
-              <a:lnSpc>
-                <a:spcPct val="110000"/>
-              </a:lnSpc>
-            </a:pPr>
-            <a:r>
-              <a:rPr sz="1200" b="0">
-                <a:solidFill>
-                  <a:srgbClr val="5A5A5A"/>
-                </a:solidFill>
-                <a:latin typeface="Poppins"/>
-              </a:rPr>
-              <a:t>Une fois par semaine : la pharmacie, le supermarché, le marché où l’on trouve le produit.</a:t>
-            </a:r>
-          </a:p>
-        </p:txBody>
-      </p:sp>
-      <p:sp>
-        <p:nvSpPr>
-          <p:cNvPr id="30" name="Rounded Rectangle 29"/>
-          <p:cNvSpPr/>
-          <p:nvPr/>
-        </p:nvSpPr>
-        <p:spPr>
-          <a:xfrm>
-            <a:off x="576000" y="4446000"/>
-            <a:ext cx="11052000" cy="846000"/>
-          </a:xfrm>
-          <a:prstGeom prst="roundRect">
-            <a:avLst>
-              <a:gd name="adj" fmla="val 6000"/>
-            </a:avLst>
-          </a:prstGeom>
-          <a:solidFill>
-            <a:srgbClr val="F4F4F2"/>
-          </a:solidFill>
-          <a:ln>
-            <a:noFill/>
-          </a:ln>
-          <a:effectLst/>
-        </p:spPr>
-        <p:style>
-          <a:lnRef idx="1">
-            <a:schemeClr val="accent1"/>
-          </a:lnRef>
-          <a:fillRef idx="3">
-            <a:schemeClr val="accent1"/>
-          </a:fillRef>
-          <a:effectRef idx="2">
-            <a:schemeClr val="accent1"/>
-          </a:effectRef>
-          <a:fontRef idx="minor">
-            <a:schemeClr val="lt1"/>
-          </a:fontRef>
-        </p:style>
-        <p:txBody>
-          <a:bodyPr rtlCol="0" anchor="ctr"/>
-          <a:lstStyle/>
-          <a:p>
-            <a:pPr algn="ctr"/>
-          </a:p>
-        </p:txBody>
-      </p:sp>
-      <p:sp>
-        <p:nvSpPr>
-          <p:cNvPr id="31" name="Rectangle 30"/>
-          <p:cNvSpPr/>
-          <p:nvPr/>
-        </p:nvSpPr>
-        <p:spPr>
-          <a:xfrm>
-            <a:off x="576000" y="4446000"/>
-            <a:ext cx="90000" cy="846000"/>
-          </a:xfrm>
-          <a:prstGeom prst="rect">
             <a:avLst/>
           </a:prstGeom>
           <a:solidFill>
@@ -12631,107 +17759,24 @@
           </a:p>
         </p:txBody>
       </p:sp>
-      <p:sp>
-        <p:nvSpPr>
-          <p:cNvPr id="32" name="TextBox 31"/>
-          <p:cNvSpPr txBox="1"/>
-          <p:nvPr/>
-        </p:nvSpPr>
-        <p:spPr>
-          <a:xfrm>
-            <a:off x="792000" y="4446000"/>
-            <a:ext cx="503999" cy="846000"/>
-          </a:xfrm>
-          <a:prstGeom prst="rect">
-            <a:avLst/>
-          </a:prstGeom>
-          <a:noFill/>
-        </p:spPr>
-        <p:txBody>
-          <a:bodyPr wrap="square" lIns="36000" rIns="36000" tIns="18000" bIns="18000" anchor="ctr">
-            <a:spAutoFit/>
-          </a:bodyPr>
-          <a:lstStyle/>
-          <a:p>
-            <a:pPr algn="ctr">
-              <a:lnSpc>
-                <a:spcPct val="110000"/>
-              </a:lnSpc>
-            </a:pPr>
-            <a:r>
-              <a:rPr sz="2400" b="1">
-                <a:solidFill>
-                  <a:srgbClr val="AE172A"/>
-                </a:solidFill>
-                <a:latin typeface="Poppins"/>
-              </a:rPr>
-              <a:t>4</a:t>
-            </a:r>
-          </a:p>
-        </p:txBody>
-      </p:sp>
-      <p:sp>
-        <p:nvSpPr>
-          <p:cNvPr id="33" name="Oval 32"/>
-          <p:cNvSpPr/>
-          <p:nvPr/>
-        </p:nvSpPr>
-        <p:spPr>
-          <a:xfrm>
-            <a:off x="1404000" y="4571999"/>
-            <a:ext cx="594000" cy="594000"/>
-          </a:xfrm>
-          <a:prstGeom prst="ellipse">
-            <a:avLst/>
-          </a:prstGeom>
-          <a:solidFill>
-            <a:srgbClr val="FF8087"/>
-          </a:solidFill>
-          <a:ln>
-            <a:noFill/>
-          </a:ln>
-          <a:effectLst/>
-        </p:spPr>
-        <p:style>
-          <a:lnRef idx="1">
-            <a:schemeClr val="accent1"/>
-          </a:lnRef>
-          <a:fillRef idx="3">
-            <a:schemeClr val="accent1"/>
-          </a:fillRef>
-          <a:effectRef idx="2">
-            <a:schemeClr val="accent1"/>
-          </a:effectRef>
-          <a:fontRef idx="minor">
-            <a:schemeClr val="lt1"/>
-          </a:fontRef>
-        </p:style>
-        <p:txBody>
-          <a:bodyPr rtlCol="0" anchor="ctr"/>
-          <a:lstStyle/>
-          <a:p>
-            <a:pPr algn="ctr"/>
-          </a:p>
-        </p:txBody>
-      </p:sp>
       <p:pic>
         <p:nvPicPr>
-          <p:cNvPr id="34" name="Picture 33" descr="video_bl.png"/>
+          <p:cNvPr id="42" name="Picture 41" descr="brand-linkedin_bl.png"/>
           <p:cNvPicPr>
             <a:picLocks noChangeAspect="1"/>
           </p:cNvPicPr>
           <p:nvPr/>
         </p:nvPicPr>
         <p:blipFill>
-          <a:blip r:embed="rId6"/>
+          <a:blip r:embed="rId8"/>
           <a:stretch>
             <a:fillRect/>
           </a:stretch>
         </p:blipFill>
         <p:spPr>
           <a:xfrm>
-            <a:off x="1534680" y="4702679"/>
-            <a:ext cx="332640" cy="332640"/>
+            <a:off x="1418760" y="5666760"/>
+            <a:ext cx="312480" cy="312480"/>
           </a:xfrm>
           <a:prstGeom prst="rect">
             <a:avLst/>
@@ -12740,14 +17785,14 @@
       </p:pic>
       <p:sp>
         <p:nvSpPr>
-          <p:cNvPr id="35" name="TextBox 34"/>
+          <p:cNvPr id="43" name="TextBox 42"/>
           <p:cNvSpPr txBox="1"/>
           <p:nvPr/>
         </p:nvSpPr>
         <p:spPr>
           <a:xfrm>
-            <a:off x="2196000" y="4446000"/>
-            <a:ext cx="3060000" cy="846000"/>
+            <a:off x="2015999" y="5400000"/>
+            <a:ext cx="2304000" cy="846000"/>
           </a:xfrm>
           <a:prstGeom prst="rect">
             <a:avLst/>
@@ -12766,27 +17811,27 @@
               </a:lnSpc>
             </a:pPr>
             <a:r>
-              <a:rPr sz="1450" b="1">
+              <a:rPr sz="1350" b="1">
                 <a:solidFill>
                   <a:srgbClr val="111111"/>
                 </a:solidFill>
                 <a:latin typeface="Poppins"/>
               </a:rPr>
-              <a:t>Plus de vidéos courtes</a:t>
-            </a:r>
-          </a:p>
-        </p:txBody>
-      </p:sp>
-      <p:sp>
-        <p:nvSpPr>
-          <p:cNvPr id="36" name="TextBox 35"/>
+              <a:t>Réveiller LinkedIn</a:t>
+            </a:r>
+          </a:p>
+        </p:txBody>
+      </p:sp>
+      <p:sp>
+        <p:nvSpPr>
+          <p:cNvPr id="44" name="TextBox 43"/>
           <p:cNvSpPr txBox="1"/>
           <p:nvPr/>
         </p:nvSpPr>
         <p:spPr>
           <a:xfrm>
-            <a:off x="5256000" y="4446000"/>
-            <a:ext cx="6228000" cy="846000"/>
+            <a:off x="4356000" y="5400000"/>
+            <a:ext cx="4248000" cy="846000"/>
           </a:xfrm>
           <a:prstGeom prst="rect">
             <a:avLst/>
@@ -12805,282 +17850,7 @@
               </a:lnSpc>
             </a:pPr>
             <a:r>
-              <a:rPr sz="1200" b="0">
-                <a:solidFill>
-                  <a:srgbClr val="5A5A5A"/>
-                </a:solidFill>
-                <a:latin typeface="Poppins"/>
-              </a:rPr>
-              <a:t>Votre vidéo PawPaw a fait 205 110 vues sur Instagram : deux vidéos de routine par semaine.</a:t>
-            </a:r>
-          </a:p>
-        </p:txBody>
-      </p:sp>
-      <p:sp>
-        <p:nvSpPr>
-          <p:cNvPr id="37" name="Rounded Rectangle 36"/>
-          <p:cNvSpPr/>
-          <p:nvPr/>
-        </p:nvSpPr>
-        <p:spPr>
-          <a:xfrm>
-            <a:off x="576000" y="5400000"/>
-            <a:ext cx="11052000" cy="846000"/>
-          </a:xfrm>
-          <a:prstGeom prst="roundRect">
-            <a:avLst>
-              <a:gd name="adj" fmla="val 6000"/>
-            </a:avLst>
-          </a:prstGeom>
-          <a:solidFill>
-            <a:srgbClr val="FFFFFF"/>
-          </a:solidFill>
-          <a:ln>
-            <a:noFill/>
-          </a:ln>
-          <a:effectLst/>
-        </p:spPr>
-        <p:style>
-          <a:lnRef idx="1">
-            <a:schemeClr val="accent1"/>
-          </a:lnRef>
-          <a:fillRef idx="3">
-            <a:schemeClr val="accent1"/>
-          </a:fillRef>
-          <a:effectRef idx="2">
-            <a:schemeClr val="accent1"/>
-          </a:effectRef>
-          <a:fontRef idx="minor">
-            <a:schemeClr val="lt1"/>
-          </a:fontRef>
-        </p:style>
-        <p:txBody>
-          <a:bodyPr rtlCol="0" anchor="ctr"/>
-          <a:lstStyle/>
-          <a:p>
-            <a:pPr algn="ctr"/>
-          </a:p>
-        </p:txBody>
-      </p:sp>
-      <p:sp>
-        <p:nvSpPr>
-          <p:cNvPr id="38" name="Rectangle 37"/>
-          <p:cNvSpPr/>
-          <p:nvPr/>
-        </p:nvSpPr>
-        <p:spPr>
-          <a:xfrm>
-            <a:off x="576000" y="5400000"/>
-            <a:ext cx="90000" cy="846000"/>
-          </a:xfrm>
-          <a:prstGeom prst="rect">
-            <a:avLst/>
-          </a:prstGeom>
-          <a:solidFill>
-            <a:srgbClr val="AE172A"/>
-          </a:solidFill>
-          <a:ln>
-            <a:noFill/>
-          </a:ln>
-          <a:effectLst/>
-        </p:spPr>
-        <p:style>
-          <a:lnRef idx="1">
-            <a:schemeClr val="accent1"/>
-          </a:lnRef>
-          <a:fillRef idx="3">
-            <a:schemeClr val="accent1"/>
-          </a:fillRef>
-          <a:effectRef idx="2">
-            <a:schemeClr val="accent1"/>
-          </a:effectRef>
-          <a:fontRef idx="minor">
-            <a:schemeClr val="lt1"/>
-          </a:fontRef>
-        </p:style>
-        <p:txBody>
-          <a:bodyPr rtlCol="0" anchor="ctr"/>
-          <a:lstStyle/>
-          <a:p>
-            <a:pPr algn="ctr"/>
-          </a:p>
-        </p:txBody>
-      </p:sp>
-      <p:sp>
-        <p:nvSpPr>
-          <p:cNvPr id="39" name="TextBox 38"/>
-          <p:cNvSpPr txBox="1"/>
-          <p:nvPr/>
-        </p:nvSpPr>
-        <p:spPr>
-          <a:xfrm>
-            <a:off x="792000" y="5400000"/>
-            <a:ext cx="503999" cy="846000"/>
-          </a:xfrm>
-          <a:prstGeom prst="rect">
-            <a:avLst/>
-          </a:prstGeom>
-          <a:noFill/>
-        </p:spPr>
-        <p:txBody>
-          <a:bodyPr wrap="square" lIns="36000" rIns="36000" tIns="18000" bIns="18000" anchor="ctr">
-            <a:spAutoFit/>
-          </a:bodyPr>
-          <a:lstStyle/>
-          <a:p>
-            <a:pPr algn="ctr">
-              <a:lnSpc>
-                <a:spcPct val="110000"/>
-              </a:lnSpc>
-            </a:pPr>
-            <a:r>
-              <a:rPr sz="2400" b="1">
-                <a:solidFill>
-                  <a:srgbClr val="AE172A"/>
-                </a:solidFill>
-                <a:latin typeface="Poppins"/>
-              </a:rPr>
-              <a:t>5</a:t>
-            </a:r>
-          </a:p>
-        </p:txBody>
-      </p:sp>
-      <p:sp>
-        <p:nvSpPr>
-          <p:cNvPr id="40" name="Oval 39"/>
-          <p:cNvSpPr/>
-          <p:nvPr/>
-        </p:nvSpPr>
-        <p:spPr>
-          <a:xfrm>
-            <a:off x="1404000" y="5525999"/>
-            <a:ext cx="594000" cy="594000"/>
-          </a:xfrm>
-          <a:prstGeom prst="ellipse">
-            <a:avLst/>
-          </a:prstGeom>
-          <a:solidFill>
-            <a:srgbClr val="FF8087"/>
-          </a:solidFill>
-          <a:ln>
-            <a:noFill/>
-          </a:ln>
-          <a:effectLst/>
-        </p:spPr>
-        <p:style>
-          <a:lnRef idx="1">
-            <a:schemeClr val="accent1"/>
-          </a:lnRef>
-          <a:fillRef idx="3">
-            <a:schemeClr val="accent1"/>
-          </a:fillRef>
-          <a:effectRef idx="2">
-            <a:schemeClr val="accent1"/>
-          </a:effectRef>
-          <a:fontRef idx="minor">
-            <a:schemeClr val="lt1"/>
-          </a:fontRef>
-        </p:style>
-        <p:txBody>
-          <a:bodyPr rtlCol="0" anchor="ctr"/>
-          <a:lstStyle/>
-          <a:p>
-            <a:pPr algn="ctr"/>
-          </a:p>
-        </p:txBody>
-      </p:sp>
-      <p:pic>
-        <p:nvPicPr>
-          <p:cNvPr id="41" name="Picture 40" descr="brand-linkedin_bl.png"/>
-          <p:cNvPicPr>
-            <a:picLocks noChangeAspect="1"/>
-          </p:cNvPicPr>
-          <p:nvPr/>
-        </p:nvPicPr>
-        <p:blipFill>
-          <a:blip r:embed="rId7"/>
-          <a:stretch>
-            <a:fillRect/>
-          </a:stretch>
-        </p:blipFill>
-        <p:spPr>
-          <a:xfrm>
-            <a:off x="1534680" y="5656679"/>
-            <a:ext cx="332640" cy="332640"/>
-          </a:xfrm>
-          <a:prstGeom prst="rect">
-            <a:avLst/>
-          </a:prstGeom>
-        </p:spPr>
-      </p:pic>
-      <p:sp>
-        <p:nvSpPr>
-          <p:cNvPr id="42" name="TextBox 41"/>
-          <p:cNvSpPr txBox="1"/>
-          <p:nvPr/>
-        </p:nvSpPr>
-        <p:spPr>
-          <a:xfrm>
-            <a:off x="2196000" y="5400000"/>
-            <a:ext cx="3060000" cy="846000"/>
-          </a:xfrm>
-          <a:prstGeom prst="rect">
-            <a:avLst/>
-          </a:prstGeom>
-          <a:noFill/>
-        </p:spPr>
-        <p:txBody>
-          <a:bodyPr wrap="square" lIns="36000" rIns="36000" tIns="18000" bIns="18000" anchor="ctr">
-            <a:spAutoFit/>
-          </a:bodyPr>
-          <a:lstStyle/>
-          <a:p>
-            <a:pPr algn="l">
-              <a:lnSpc>
-                <a:spcPct val="110000"/>
-              </a:lnSpc>
-            </a:pPr>
-            <a:r>
-              <a:rPr sz="1450" b="1">
-                <a:solidFill>
-                  <a:srgbClr val="111111"/>
-                </a:solidFill>
-                <a:latin typeface="Poppins"/>
-              </a:rPr>
-              <a:t>Réveiller LinkedIn</a:t>
-            </a:r>
-          </a:p>
-        </p:txBody>
-      </p:sp>
-      <p:sp>
-        <p:nvSpPr>
-          <p:cNvPr id="43" name="TextBox 42"/>
-          <p:cNvSpPr txBox="1"/>
-          <p:nvPr/>
-        </p:nvSpPr>
-        <p:spPr>
-          <a:xfrm>
-            <a:off x="5256000" y="5400000"/>
-            <a:ext cx="6228000" cy="846000"/>
-          </a:xfrm>
-          <a:prstGeom prst="rect">
-            <a:avLst/>
-          </a:prstGeom>
-          <a:noFill/>
-        </p:spPr>
-        <p:txBody>
-          <a:bodyPr wrap="square" lIns="36000" rIns="36000" tIns="18000" bIns="18000" anchor="ctr">
-            <a:spAutoFit/>
-          </a:bodyPr>
-          <a:lstStyle/>
-          <a:p>
-            <a:pPr algn="l">
-              <a:lnSpc>
-                <a:spcPct val="110000"/>
-              </a:lnSpc>
-            </a:pPr>
-            <a:r>
-              <a:rPr sz="1200" b="0">
+              <a:rPr sz="1050" b="0">
                 <a:solidFill>
                   <a:srgbClr val="5A5A5A"/>
                 </a:solidFill>
@@ -15787,16 +20557,41 @@
           </a:p>
         </p:txBody>
       </p:sp>
-      <p:sp>
-        <p:nvSpPr>
-          <p:cNvPr id="9" name="Rounded Rectangle 8"/>
+      <p:pic>
+        <p:nvPicPr>
+          <p:cNvPr id="9" name="Picture 8" descr="d_baby_9.jpg"/>
+          <p:cNvPicPr>
+            <a:picLocks noChangeAspect="1"/>
+          </p:cNvPicPr>
+          <p:nvPr/>
+        </p:nvPicPr>
+        <p:blipFill>
+          <a:blip r:embed="rId3"/>
+          <a:srcRect l="6362" r="6362"/>
+          <a:stretch>
+            <a:fillRect/>
+          </a:stretch>
+        </p:blipFill>
+        <p:spPr>
+          <a:xfrm>
+            <a:off x="8928000" y="1584000"/>
+            <a:ext cx="2700000" cy="4644000"/>
+          </a:xfrm>
+          <a:prstGeom prst="rect">
+            <a:avLst/>
+          </a:prstGeom>
+        </p:spPr>
+      </p:pic>
+      <p:sp>
+        <p:nvSpPr>
+          <p:cNvPr id="10" name="Rounded Rectangle 9"/>
           <p:cNvSpPr/>
           <p:nvPr/>
         </p:nvSpPr>
         <p:spPr>
           <a:xfrm>
-            <a:off x="576000" y="1655999"/>
-            <a:ext cx="3528000" cy="3420000"/>
+            <a:off x="576000" y="1584000"/>
+            <a:ext cx="2628000" cy="3671999"/>
           </a:xfrm>
           <a:prstGeom prst="roundRect">
             <a:avLst>
@@ -15835,14 +20630,14 @@
       </p:sp>
       <p:sp>
         <p:nvSpPr>
-          <p:cNvPr id="10" name="Oval 9"/>
+          <p:cNvPr id="11" name="Oval 10"/>
           <p:cNvSpPr/>
           <p:nvPr/>
         </p:nvSpPr>
         <p:spPr>
           <a:xfrm>
-            <a:off x="864000" y="1944000"/>
-            <a:ext cx="792000" cy="792000"/>
+            <a:off x="827999" y="1835999"/>
+            <a:ext cx="720000" cy="720000"/>
           </a:xfrm>
           <a:prstGeom prst="ellipse">
             <a:avLst/>
@@ -15879,22 +20674,22 @@
       </p:sp>
       <p:pic>
         <p:nvPicPr>
-          <p:cNvPr id="11" name="Picture 10" descr="eye_bl.png"/>
+          <p:cNvPr id="12" name="Picture 11" descr="eye_bl.png"/>
           <p:cNvPicPr>
             <a:picLocks noChangeAspect="1"/>
           </p:cNvPicPr>
           <p:nvPr/>
         </p:nvPicPr>
         <p:blipFill>
-          <a:blip r:embed="rId3"/>
+          <a:blip r:embed="rId4"/>
           <a:stretch>
             <a:fillRect/>
           </a:stretch>
         </p:blipFill>
         <p:spPr>
           <a:xfrm>
-            <a:off x="1038240" y="2118240"/>
-            <a:ext cx="443520" cy="443520"/>
+            <a:off x="986399" y="1994399"/>
+            <a:ext cx="403200" cy="403200"/>
           </a:xfrm>
           <a:prstGeom prst="rect">
             <a:avLst/>
@@ -15903,14 +20698,14 @@
       </p:pic>
       <p:sp>
         <p:nvSpPr>
-          <p:cNvPr id="12" name="TextBox 11"/>
+          <p:cNvPr id="13" name="TextBox 12"/>
           <p:cNvSpPr txBox="1"/>
           <p:nvPr/>
         </p:nvSpPr>
         <p:spPr>
           <a:xfrm>
-            <a:off x="864000" y="2951999"/>
-            <a:ext cx="3024000" cy="432000"/>
+            <a:off x="827999" y="2736000"/>
+            <a:ext cx="2196000" cy="576000"/>
           </a:xfrm>
           <a:prstGeom prst="rect">
             <a:avLst/>
@@ -15929,7 +20724,7 @@
               </a:lnSpc>
             </a:pPr>
             <a:r>
-              <a:rPr sz="1700" b="1">
+              <a:rPr sz="1500" b="1">
                 <a:solidFill>
                   <a:srgbClr val="111111"/>
                 </a:solidFill>
@@ -15942,14 +20737,14 @@
       </p:sp>
       <p:sp>
         <p:nvSpPr>
-          <p:cNvPr id="13" name="TextBox 12"/>
+          <p:cNvPr id="14" name="TextBox 13"/>
           <p:cNvSpPr txBox="1"/>
           <p:nvPr/>
         </p:nvSpPr>
         <p:spPr>
           <a:xfrm>
-            <a:off x="864000" y="3456000"/>
-            <a:ext cx="3024000" cy="1512000"/>
+            <a:off x="827999" y="3348000"/>
+            <a:ext cx="2196000" cy="1800000"/>
           </a:xfrm>
           <a:prstGeom prst="rect">
             <a:avLst/>
@@ -15968,7 +20763,7 @@
               </a:lnSpc>
             </a:pPr>
             <a:r>
-              <a:rPr sz="1250" b="0">
+              <a:rPr sz="1150" b="0">
                 <a:solidFill>
                   <a:srgbClr val="5A5A5A"/>
                 </a:solidFill>
@@ -15981,14 +20776,14 @@
       </p:sp>
       <p:sp>
         <p:nvSpPr>
-          <p:cNvPr id="14" name="Rounded Rectangle 13"/>
+          <p:cNvPr id="15" name="Rounded Rectangle 14"/>
           <p:cNvSpPr/>
           <p:nvPr/>
         </p:nvSpPr>
         <p:spPr>
           <a:xfrm>
-            <a:off x="4320000" y="1655999"/>
-            <a:ext cx="3528000" cy="3420000"/>
+            <a:off x="3366000" y="1584000"/>
+            <a:ext cx="2628000" cy="3671999"/>
           </a:xfrm>
           <a:prstGeom prst="roundRect">
             <a:avLst>
@@ -16027,14 +20822,14 @@
       </p:sp>
       <p:sp>
         <p:nvSpPr>
-          <p:cNvPr id="15" name="Oval 14"/>
+          <p:cNvPr id="16" name="Oval 15"/>
           <p:cNvSpPr/>
           <p:nvPr/>
         </p:nvSpPr>
         <p:spPr>
           <a:xfrm>
-            <a:off x="4608000" y="1944000"/>
-            <a:ext cx="792000" cy="792000"/>
+            <a:off x="3617999" y="1835999"/>
+            <a:ext cx="720000" cy="720000"/>
           </a:xfrm>
           <a:prstGeom prst="ellipse">
             <a:avLst/>
@@ -16071,22 +20866,22 @@
       </p:sp>
       <p:pic>
         <p:nvPicPr>
-          <p:cNvPr id="16" name="Picture 15" descr="map-pin_bl.png"/>
+          <p:cNvPr id="17" name="Picture 16" descr="map-pin_bl.png"/>
           <p:cNvPicPr>
             <a:picLocks noChangeAspect="1"/>
           </p:cNvPicPr>
           <p:nvPr/>
         </p:nvPicPr>
         <p:blipFill>
-          <a:blip r:embed="rId4"/>
+          <a:blip r:embed="rId5"/>
           <a:stretch>
             <a:fillRect/>
           </a:stretch>
         </p:blipFill>
         <p:spPr>
           <a:xfrm>
-            <a:off x="4782240" y="2118240"/>
-            <a:ext cx="443520" cy="443520"/>
+            <a:off x="3776399" y="1994399"/>
+            <a:ext cx="403200" cy="403200"/>
           </a:xfrm>
           <a:prstGeom prst="rect">
             <a:avLst/>
@@ -16095,14 +20890,14 @@
       </p:pic>
       <p:sp>
         <p:nvSpPr>
-          <p:cNvPr id="17" name="TextBox 16"/>
+          <p:cNvPr id="18" name="TextBox 17"/>
           <p:cNvSpPr txBox="1"/>
           <p:nvPr/>
         </p:nvSpPr>
         <p:spPr>
           <a:xfrm>
-            <a:off x="4608000" y="2951999"/>
-            <a:ext cx="3024000" cy="432000"/>
+            <a:off x="3617999" y="2736000"/>
+            <a:ext cx="2196000" cy="576000"/>
           </a:xfrm>
           <a:prstGeom prst="rect">
             <a:avLst/>
@@ -16121,7 +20916,7 @@
               </a:lnSpc>
             </a:pPr>
             <a:r>
-              <a:rPr sz="1700" b="1">
+              <a:rPr sz="1500" b="1">
                 <a:solidFill>
                   <a:srgbClr val="111111"/>
                 </a:solidFill>
@@ -16134,14 +20929,14 @@
       </p:sp>
       <p:sp>
         <p:nvSpPr>
-          <p:cNvPr id="18" name="TextBox 17"/>
+          <p:cNvPr id="19" name="TextBox 18"/>
           <p:cNvSpPr txBox="1"/>
           <p:nvPr/>
         </p:nvSpPr>
         <p:spPr>
           <a:xfrm>
-            <a:off x="4608000" y="3456000"/>
-            <a:ext cx="3024000" cy="1512000"/>
+            <a:off x="3617999" y="3348000"/>
+            <a:ext cx="2196000" cy="1800000"/>
           </a:xfrm>
           <a:prstGeom prst="rect">
             <a:avLst/>
@@ -16160,7 +20955,7 @@
               </a:lnSpc>
             </a:pPr>
             <a:r>
-              <a:rPr sz="1250" b="0">
+              <a:rPr sz="1150" b="0">
                 <a:solidFill>
                   <a:srgbClr val="5A5A5A"/>
                 </a:solidFill>
@@ -16173,14 +20968,14 @@
       </p:sp>
       <p:sp>
         <p:nvSpPr>
-          <p:cNvPr id="19" name="Rounded Rectangle 18"/>
+          <p:cNvPr id="20" name="Rounded Rectangle 19"/>
           <p:cNvSpPr/>
           <p:nvPr/>
         </p:nvSpPr>
         <p:spPr>
           <a:xfrm>
-            <a:off x="8064000" y="1655999"/>
-            <a:ext cx="3528000" cy="3420000"/>
+            <a:off x="6156000" y="1584000"/>
+            <a:ext cx="2628000" cy="3671999"/>
           </a:xfrm>
           <a:prstGeom prst="roundRect">
             <a:avLst>
@@ -16219,14 +21014,14 @@
       </p:sp>
       <p:sp>
         <p:nvSpPr>
-          <p:cNvPr id="20" name="Oval 19"/>
+          <p:cNvPr id="21" name="Oval 20"/>
           <p:cNvSpPr/>
           <p:nvPr/>
         </p:nvSpPr>
         <p:spPr>
           <a:xfrm>
-            <a:off x="8352000" y="1944000"/>
-            <a:ext cx="792000" cy="792000"/>
+            <a:off x="6407999" y="1835999"/>
+            <a:ext cx="720000" cy="720000"/>
           </a:xfrm>
           <a:prstGeom prst="ellipse">
             <a:avLst/>
@@ -16263,22 +21058,22 @@
       </p:sp>
       <p:pic>
         <p:nvPicPr>
-          <p:cNvPr id="21" name="Picture 20" descr="circle-check_bl.png"/>
+          <p:cNvPr id="22" name="Picture 21" descr="circle-check_bl.png"/>
           <p:cNvPicPr>
             <a:picLocks noChangeAspect="1"/>
           </p:cNvPicPr>
           <p:nvPr/>
         </p:nvPicPr>
         <p:blipFill>
-          <a:blip r:embed="rId5"/>
+          <a:blip r:embed="rId6"/>
           <a:stretch>
             <a:fillRect/>
           </a:stretch>
         </p:blipFill>
         <p:spPr>
           <a:xfrm>
-            <a:off x="8526240" y="2118240"/>
-            <a:ext cx="443520" cy="443520"/>
+            <a:off x="6566399" y="1994399"/>
+            <a:ext cx="403200" cy="403200"/>
           </a:xfrm>
           <a:prstGeom prst="rect">
             <a:avLst/>
@@ -16287,14 +21082,14 @@
       </p:pic>
       <p:sp>
         <p:nvSpPr>
-          <p:cNvPr id="22" name="TextBox 21"/>
+          <p:cNvPr id="23" name="TextBox 22"/>
           <p:cNvSpPr txBox="1"/>
           <p:nvPr/>
         </p:nvSpPr>
         <p:spPr>
           <a:xfrm>
-            <a:off x="8352000" y="2951999"/>
-            <a:ext cx="3024000" cy="432000"/>
+            <a:off x="6407999" y="2736000"/>
+            <a:ext cx="2196000" cy="576000"/>
           </a:xfrm>
           <a:prstGeom prst="rect">
             <a:avLst/>
@@ -16313,7 +21108,7 @@
               </a:lnSpc>
             </a:pPr>
             <a:r>
-              <a:rPr sz="1700" b="1">
+              <a:rPr sz="1500" b="1">
                 <a:solidFill>
                   <a:srgbClr val="111111"/>
                 </a:solidFill>
@@ -16326,14 +21121,14 @@
       </p:sp>
       <p:sp>
         <p:nvSpPr>
-          <p:cNvPr id="23" name="TextBox 22"/>
+          <p:cNvPr id="24" name="TextBox 23"/>
           <p:cNvSpPr txBox="1"/>
           <p:nvPr/>
         </p:nvSpPr>
         <p:spPr>
           <a:xfrm>
-            <a:off x="8352000" y="3456000"/>
-            <a:ext cx="3024000" cy="1512000"/>
+            <a:off x="6407999" y="3348000"/>
+            <a:ext cx="2196000" cy="1800000"/>
           </a:xfrm>
           <a:prstGeom prst="rect">
             <a:avLst/>
@@ -16352,7 +21147,7 @@
               </a:lnSpc>
             </a:pPr>
             <a:r>
-              <a:rPr sz="1250" b="0">
+              <a:rPr sz="1150" b="0">
                 <a:solidFill>
                   <a:srgbClr val="5A5A5A"/>
                 </a:solidFill>
@@ -16365,14 +21160,14 @@
       </p:sp>
       <p:sp>
         <p:nvSpPr>
-          <p:cNvPr id="24" name="TextBox 23"/>
+          <p:cNvPr id="25" name="TextBox 24"/>
           <p:cNvSpPr txBox="1"/>
           <p:nvPr/>
         </p:nvSpPr>
         <p:spPr>
           <a:xfrm>
-            <a:off x="576000" y="5400000"/>
-            <a:ext cx="11052000" cy="720000"/>
+            <a:off x="576000" y="5436000"/>
+            <a:ext cx="8136000" cy="792000"/>
           </a:xfrm>
           <a:prstGeom prst="rect">
             <a:avLst/>
@@ -16391,7 +21186,7 @@
               </a:lnSpc>
             </a:pPr>
             <a:r>
-              <a:rPr sz="1200" b="0">
+              <a:rPr sz="1100" b="0">
                 <a:solidFill>
                   <a:srgbClr val="5A5A5A"/>
                 </a:solidFill>
@@ -16810,8 +21605,47 @@
         </p:nvSpPr>
         <p:spPr>
           <a:xfrm>
-            <a:off x="827999" y="2879999"/>
-            <a:ext cx="2160000" cy="648000"/>
+            <a:off x="827999" y="2843999"/>
+            <a:ext cx="2160000" cy="684000"/>
+          </a:xfrm>
+          <a:prstGeom prst="rect">
+            <a:avLst/>
+          </a:prstGeom>
+          <a:noFill/>
+        </p:spPr>
+        <p:txBody>
+          <a:bodyPr wrap="square" lIns="36000" rIns="36000" tIns="18000" bIns="18000" anchor="ctr">
+            <a:spAutoFit/>
+          </a:bodyPr>
+          <a:lstStyle/>
+          <a:p>
+            <a:pPr algn="l">
+              <a:lnSpc>
+                <a:spcPct val="110000"/>
+              </a:lnSpc>
+            </a:pPr>
+            <a:r>
+              <a:rPr sz="1500" b="1">
+                <a:solidFill>
+                  <a:srgbClr val="111111"/>
+                </a:solidFill>
+                <a:latin typeface="Poppins"/>
+              </a:rPr>
+              <a:t>Pages publiques</a:t>
+            </a:r>
+          </a:p>
+        </p:txBody>
+      </p:sp>
+      <p:sp>
+        <p:nvSpPr>
+          <p:cNvPr id="13" name="TextBox 12"/>
+          <p:cNvSpPr txBox="1"/>
+          <p:nvPr/>
+        </p:nvSpPr>
+        <p:spPr>
+          <a:xfrm>
+            <a:off x="827999" y="3635999"/>
+            <a:ext cx="2160000" cy="2160000"/>
           </a:xfrm>
           <a:prstGeom prst="rect">
             <a:avLst/>
@@ -16830,46 +21664,7 @@
               </a:lnSpc>
             </a:pPr>
             <a:r>
-              <a:rPr sz="1550" b="1">
-                <a:solidFill>
-                  <a:srgbClr val="111111"/>
-                </a:solidFill>
-                <a:latin typeface="Poppins"/>
-              </a:rPr>
-              <a:t>Pages publiques</a:t>
-            </a:r>
-          </a:p>
-        </p:txBody>
-      </p:sp>
-      <p:sp>
-        <p:nvSpPr>
-          <p:cNvPr id="13" name="TextBox 12"/>
-          <p:cNvSpPr txBox="1"/>
-          <p:nvPr/>
-        </p:nvSpPr>
-        <p:spPr>
-          <a:xfrm>
-            <a:off x="827999" y="3599999"/>
-            <a:ext cx="2160000" cy="2160000"/>
-          </a:xfrm>
-          <a:prstGeom prst="rect">
-            <a:avLst/>
-          </a:prstGeom>
-          <a:noFill/>
-        </p:spPr>
-        <p:txBody>
-          <a:bodyPr wrap="square" lIns="36000" rIns="36000" tIns="18000" bIns="18000" anchor="t">
-            <a:spAutoFit/>
-          </a:bodyPr>
-          <a:lstStyle/>
-          <a:p>
-            <a:pPr algn="l">
-              <a:lnSpc>
-                <a:spcPct val="110000"/>
-              </a:lnSpc>
-            </a:pPr>
-            <a:r>
-              <a:rPr sz="1250" b="0">
+              <a:rPr sz="1200" b="0">
                 <a:solidFill>
                   <a:srgbClr val="5A5A5A"/>
                 </a:solidFill>
@@ -17002,8 +21797,47 @@
         </p:nvSpPr>
         <p:spPr>
           <a:xfrm>
-            <a:off x="3635999" y="2879999"/>
-            <a:ext cx="2160000" cy="648000"/>
+            <a:off x="3635999" y="2843999"/>
+            <a:ext cx="2160000" cy="684000"/>
+          </a:xfrm>
+          <a:prstGeom prst="rect">
+            <a:avLst/>
+          </a:prstGeom>
+          <a:noFill/>
+        </p:spPr>
+        <p:txBody>
+          <a:bodyPr wrap="square" lIns="36000" rIns="36000" tIns="18000" bIns="18000" anchor="ctr">
+            <a:spAutoFit/>
+          </a:bodyPr>
+          <a:lstStyle/>
+          <a:p>
+            <a:pPr algn="l">
+              <a:lnSpc>
+                <a:spcPct val="110000"/>
+              </a:lnSpc>
+            </a:pPr>
+            <a:r>
+              <a:rPr sz="1500" b="1">
+                <a:solidFill>
+                  <a:srgbClr val="111111"/>
+                </a:solidFill>
+                <a:latin typeface="Poppins"/>
+              </a:rPr>
+              <a:t>25 publications par marque</a:t>
+            </a:r>
+          </a:p>
+        </p:txBody>
+      </p:sp>
+      <p:sp>
+        <p:nvSpPr>
+          <p:cNvPr id="18" name="TextBox 17"/>
+          <p:cNvSpPr txBox="1"/>
+          <p:nvPr/>
+        </p:nvSpPr>
+        <p:spPr>
+          <a:xfrm>
+            <a:off x="3635999" y="3635999"/>
+            <a:ext cx="2160000" cy="2160000"/>
           </a:xfrm>
           <a:prstGeom prst="rect">
             <a:avLst/>
@@ -17022,46 +21856,7 @@
               </a:lnSpc>
             </a:pPr>
             <a:r>
-              <a:rPr sz="1550" b="1">
-                <a:solidFill>
-                  <a:srgbClr val="111111"/>
-                </a:solidFill>
-                <a:latin typeface="Poppins"/>
-              </a:rPr>
-              <a:t>25 publications par marque</a:t>
-            </a:r>
-          </a:p>
-        </p:txBody>
-      </p:sp>
-      <p:sp>
-        <p:nvSpPr>
-          <p:cNvPr id="18" name="TextBox 17"/>
-          <p:cNvSpPr txBox="1"/>
-          <p:nvPr/>
-        </p:nvSpPr>
-        <p:spPr>
-          <a:xfrm>
-            <a:off x="3635999" y="3599999"/>
-            <a:ext cx="2160000" cy="2160000"/>
-          </a:xfrm>
-          <a:prstGeom prst="rect">
-            <a:avLst/>
-          </a:prstGeom>
-          <a:noFill/>
-        </p:spPr>
-        <p:txBody>
-          <a:bodyPr wrap="square" lIns="36000" rIns="36000" tIns="18000" bIns="18000" anchor="t">
-            <a:spAutoFit/>
-          </a:bodyPr>
-          <a:lstStyle/>
-          <a:p>
-            <a:pPr algn="l">
-              <a:lnSpc>
-                <a:spcPct val="110000"/>
-              </a:lnSpc>
-            </a:pPr>
-            <a:r>
-              <a:rPr sz="1250" b="0">
+              <a:rPr sz="1200" b="0">
                 <a:solidFill>
                   <a:srgbClr val="5A5A5A"/>
                 </a:solidFill>
@@ -17194,8 +21989,47 @@
         </p:nvSpPr>
         <p:spPr>
           <a:xfrm>
-            <a:off x="6443999" y="2879999"/>
-            <a:ext cx="2160000" cy="648000"/>
+            <a:off x="6443999" y="2843999"/>
+            <a:ext cx="2160000" cy="684000"/>
+          </a:xfrm>
+          <a:prstGeom prst="rect">
+            <a:avLst/>
+          </a:prstGeom>
+          <a:noFill/>
+        </p:spPr>
+        <p:txBody>
+          <a:bodyPr wrap="square" lIns="36000" rIns="36000" tIns="18000" bIns="18000" anchor="ctr">
+            <a:spAutoFit/>
+          </a:bodyPr>
+          <a:lstStyle/>
+          <a:p>
+            <a:pPr algn="l">
+              <a:lnSpc>
+                <a:spcPct val="110000"/>
+              </a:lnSpc>
+            </a:pPr>
+            <a:r>
+              <a:rPr sz="1500" b="1">
+                <a:solidFill>
+                  <a:srgbClr val="111111"/>
+                </a:solidFill>
+                <a:latin typeface="Poppins"/>
+              </a:rPr>
+              <a:t>Médianes</a:t>
+            </a:r>
+          </a:p>
+        </p:txBody>
+      </p:sp>
+      <p:sp>
+        <p:nvSpPr>
+          <p:cNvPr id="23" name="TextBox 22"/>
+          <p:cNvSpPr txBox="1"/>
+          <p:nvPr/>
+        </p:nvSpPr>
+        <p:spPr>
+          <a:xfrm>
+            <a:off x="6443999" y="3635999"/>
+            <a:ext cx="2160000" cy="2160000"/>
           </a:xfrm>
           <a:prstGeom prst="rect">
             <a:avLst/>
@@ -17214,46 +22048,7 @@
               </a:lnSpc>
             </a:pPr>
             <a:r>
-              <a:rPr sz="1550" b="1">
-                <a:solidFill>
-                  <a:srgbClr val="111111"/>
-                </a:solidFill>
-                <a:latin typeface="Poppins"/>
-              </a:rPr>
-              <a:t>Médianes</a:t>
-            </a:r>
-          </a:p>
-        </p:txBody>
-      </p:sp>
-      <p:sp>
-        <p:nvSpPr>
-          <p:cNvPr id="23" name="TextBox 22"/>
-          <p:cNvSpPr txBox="1"/>
-          <p:nvPr/>
-        </p:nvSpPr>
-        <p:spPr>
-          <a:xfrm>
-            <a:off x="6443999" y="3599999"/>
-            <a:ext cx="2160000" cy="2160000"/>
-          </a:xfrm>
-          <a:prstGeom prst="rect">
-            <a:avLst/>
-          </a:prstGeom>
-          <a:noFill/>
-        </p:spPr>
-        <p:txBody>
-          <a:bodyPr wrap="square" lIns="36000" rIns="36000" tIns="18000" bIns="18000" anchor="t">
-            <a:spAutoFit/>
-          </a:bodyPr>
-          <a:lstStyle/>
-          <a:p>
-            <a:pPr algn="l">
-              <a:lnSpc>
-                <a:spcPct val="110000"/>
-              </a:lnSpc>
-            </a:pPr>
-            <a:r>
-              <a:rPr sz="1250" b="0">
+              <a:rPr sz="1200" b="0">
                 <a:solidFill>
                   <a:srgbClr val="5A5A5A"/>
                 </a:solidFill>
@@ -17386,8 +22181,47 @@
         </p:nvSpPr>
         <p:spPr>
           <a:xfrm>
-            <a:off x="9251999" y="2879999"/>
-            <a:ext cx="2160000" cy="648000"/>
+            <a:off x="9251999" y="2843999"/>
+            <a:ext cx="2160000" cy="684000"/>
+          </a:xfrm>
+          <a:prstGeom prst="rect">
+            <a:avLst/>
+          </a:prstGeom>
+          <a:noFill/>
+        </p:spPr>
+        <p:txBody>
+          <a:bodyPr wrap="square" lIns="36000" rIns="36000" tIns="18000" bIns="18000" anchor="ctr">
+            <a:spAutoFit/>
+          </a:bodyPr>
+          <a:lstStyle/>
+          <a:p>
+            <a:pPr algn="l">
+              <a:lnSpc>
+                <a:spcPct val="110000"/>
+              </a:lnSpc>
+            </a:pPr>
+            <a:r>
+              <a:rPr sz="1500" b="1">
+                <a:solidFill>
+                  <a:srgbClr val="111111"/>
+                </a:solidFill>
+                <a:latin typeface="Poppins"/>
+              </a:rPr>
+              <a:t>Hors de vue</a:t>
+            </a:r>
+          </a:p>
+        </p:txBody>
+      </p:sp>
+      <p:sp>
+        <p:nvSpPr>
+          <p:cNvPr id="28" name="TextBox 27"/>
+          <p:cNvSpPr txBox="1"/>
+          <p:nvPr/>
+        </p:nvSpPr>
+        <p:spPr>
+          <a:xfrm>
+            <a:off x="9251999" y="3635999"/>
+            <a:ext cx="2160000" cy="2160000"/>
           </a:xfrm>
           <a:prstGeom prst="rect">
             <a:avLst/>
@@ -17406,46 +22240,7 @@
               </a:lnSpc>
             </a:pPr>
             <a:r>
-              <a:rPr sz="1550" b="1">
-                <a:solidFill>
-                  <a:srgbClr val="111111"/>
-                </a:solidFill>
-                <a:latin typeface="Poppins"/>
-              </a:rPr>
-              <a:t>Hors de vue</a:t>
-            </a:r>
-          </a:p>
-        </p:txBody>
-      </p:sp>
-      <p:sp>
-        <p:nvSpPr>
-          <p:cNvPr id="28" name="TextBox 27"/>
-          <p:cNvSpPr txBox="1"/>
-          <p:nvPr/>
-        </p:nvSpPr>
-        <p:spPr>
-          <a:xfrm>
-            <a:off x="9251999" y="3599999"/>
-            <a:ext cx="2160000" cy="2160000"/>
-          </a:xfrm>
-          <a:prstGeom prst="rect">
-            <a:avLst/>
-          </a:prstGeom>
-          <a:noFill/>
-        </p:spPr>
-        <p:txBody>
-          <a:bodyPr wrap="square" lIns="36000" rIns="36000" tIns="18000" bIns="18000" anchor="t">
-            <a:spAutoFit/>
-          </a:bodyPr>
-          <a:lstStyle/>
-          <a:p>
-            <a:pPr algn="l">
-              <a:lnSpc>
-                <a:spcPct val="110000"/>
-              </a:lnSpc>
-            </a:pPr>
-            <a:r>
-              <a:rPr sz="1250" b="0">
+              <a:rPr sz="1200" b="0">
                 <a:solidFill>
                   <a:srgbClr val="5A5A5A"/>
                 </a:solidFill>
@@ -20092,7 +24887,7 @@
         </p:nvSpPr>
         <p:spPr>
           <a:xfrm>
-            <a:off x="792000" y="3419999"/>
+            <a:off x="792000" y="3401998"/>
             <a:ext cx="3132000" cy="576000"/>
           </a:xfrm>
           <a:prstGeom prst="rect">
@@ -20112,7 +24907,7 @@
               </a:lnSpc>
             </a:pPr>
             <a:r>
-              <a:rPr sz="1050" b="0">
+              <a:rPr sz="1000" b="0">
                 <a:solidFill>
                   <a:srgbClr val="5A5A5A"/>
                 </a:solidFill>
@@ -20323,7 +25118,7 @@
         </p:nvSpPr>
         <p:spPr>
           <a:xfrm>
-            <a:off x="4536000" y="3419999"/>
+            <a:off x="4536000" y="3401998"/>
             <a:ext cx="3132000" cy="576000"/>
           </a:xfrm>
           <a:prstGeom prst="rect">
@@ -20343,7 +25138,7 @@
               </a:lnSpc>
             </a:pPr>
             <a:r>
-              <a:rPr sz="1050" b="0">
+              <a:rPr sz="1000" b="0">
                 <a:solidFill>
                   <a:srgbClr val="5A5A5A"/>
                 </a:solidFill>
@@ -20554,7 +25349,7 @@
         </p:nvSpPr>
         <p:spPr>
           <a:xfrm>
-            <a:off x="8279999" y="3419999"/>
+            <a:off x="8279999" y="3401998"/>
             <a:ext cx="3132000" cy="576000"/>
           </a:xfrm>
           <a:prstGeom prst="rect">
@@ -20574,7 +25369,7 @@
               </a:lnSpc>
             </a:pPr>
             <a:r>
-              <a:rPr sz="1050" b="0">
+              <a:rPr sz="1000" b="0">
                 <a:solidFill>
                   <a:srgbClr val="5A5A5A"/>
                 </a:solidFill>
@@ -21052,8 +25847,8 @@
           <p:nvPr/>
         </p:nvGraphicFramePr>
         <p:xfrm>
-          <a:off x="576000" y="1584000"/>
-          <a:ext cx="5256000" cy="4176000"/>
+          <a:off x="576000" y="1944000"/>
+          <a:ext cx="5256000" cy="3816000"/>
         </p:xfrm>
         <a:graphic>
           <a:graphicData uri="http://schemas.openxmlformats.org/drawingml/2006/chart">
@@ -21061,9 +25856,48 @@
           </a:graphicData>
         </a:graphic>
       </p:graphicFrame>
+      <p:sp>
+        <p:nvSpPr>
+          <p:cNvPr id="10" name="TextBox 9"/>
+          <p:cNvSpPr txBox="1"/>
+          <p:nvPr/>
+        </p:nvSpPr>
+        <p:spPr>
+          <a:xfrm>
+            <a:off x="576000" y="1548000"/>
+            <a:ext cx="5256000" cy="360000"/>
+          </a:xfrm>
+          <a:prstGeom prst="rect">
+            <a:avLst/>
+          </a:prstGeom>
+          <a:noFill/>
+        </p:spPr>
+        <p:txBody>
+          <a:bodyPr wrap="square" lIns="36000" rIns="36000" tIns="18000" bIns="18000" anchor="t">
+            <a:spAutoFit/>
+          </a:bodyPr>
+          <a:lstStyle/>
+          <a:p>
+            <a:pPr algn="l">
+              <a:lnSpc>
+                <a:spcPct val="110000"/>
+              </a:lnSpc>
+            </a:pPr>
+            <a:r>
+              <a:rPr sz="1250" b="1">
+                <a:solidFill>
+                  <a:srgbClr val="111111"/>
+                </a:solidFill>
+                <a:latin typeface="Poppins"/>
+              </a:rPr>
+              <a:t>Instagram : J’aime médians ÷ abonnés (%)</a:t>
+            </a:r>
+          </a:p>
+        </p:txBody>
+      </p:sp>
       <p:graphicFrame>
         <p:nvGraphicFramePr>
-          <p:cNvPr id="10" name="Table 9"/>
+          <p:cNvPr id="11" name="Table 10"/>
           <p:cNvGraphicFramePr>
             <a:graphicFrameLocks noGrp="1"/>
           </p:cNvGraphicFramePr>
@@ -22143,7 +26977,7 @@
       </p:graphicFrame>
       <p:sp>
         <p:nvSpPr>
-          <p:cNvPr id="11" name="TextBox 10"/>
+          <p:cNvPr id="12" name="TextBox 11"/>
           <p:cNvSpPr txBox="1"/>
           <p:nvPr/>
         </p:nvSpPr>

--- a/tmp-tj/261028_dream-cosmetics_audit-reseaux-sociaux_v2.pptx
+++ b/tmp-tj/261028_dream-cosmetics_audit-reseaux-sociaux_v2.pptx
@@ -127,415 +127,6 @@
     </a:lvl9pPr>
   </p:defaultTextStyle>
 </p:presentation>
-</file>
-
-<file path=ppt/charts/chart1.xml><?xml version="1.0" encoding="utf-8"?>
-<c:chartSpace xmlns:c="http://schemas.openxmlformats.org/drawingml/2006/chart" xmlns:a="http://schemas.openxmlformats.org/drawingml/2006/main" xmlns:r="http://schemas.openxmlformats.org/officeDocument/2006/relationships">
-  <c:date1904 val="0"/>
-  <c:chart>
-    <c:autoTitleDeleted val="1"/>
-    <c:plotArea>
-      <c:barChart>
-        <c:barDir val="bar"/>
-        <c:grouping val="clustered"/>
-        <c:ser>
-          <c:idx val="0"/>
-          <c:order val="0"/>
-          <c:tx>
-            <c:strRef>
-              <c:f>Sheet1!$B$1</c:f>
-              <c:strCache>
-                <c:ptCount val="1"/>
-                <c:pt idx="0">
-                  <c:v>Instagram : J’aime médians ÷ abonnés (%)</c:v>
-                </c:pt>
-              </c:strCache>
-            </c:strRef>
-          </c:tx>
-          <c:dPt>
-            <c:idx val="0"/>
-            <c:spPr>
-              <a:solidFill>
-                <a:srgbClr val="B9B9B9"/>
-              </a:solidFill>
-            </c:spPr>
-          </c:dPt>
-          <c:dPt>
-            <c:idx val="1"/>
-            <c:spPr>
-              <a:solidFill>
-                <a:srgbClr val="B9B9B9"/>
-              </a:solidFill>
-            </c:spPr>
-          </c:dPt>
-          <c:dPt>
-            <c:idx val="2"/>
-            <c:spPr>
-              <a:solidFill>
-                <a:srgbClr val="B9B9B9"/>
-              </a:solidFill>
-            </c:spPr>
-          </c:dPt>
-          <c:dPt>
-            <c:idx val="3"/>
-            <c:spPr>
-              <a:solidFill>
-                <a:srgbClr val="AE172A"/>
-              </a:solidFill>
-            </c:spPr>
-          </c:dPt>
-          <c:cat>
-            <c:strRef>
-              <c:f>Sheet1!$A$2:$A$5</c:f>
-              <c:strCache>
-                <c:ptCount val="4"/>
-                <c:pt idx="0">
-                  <c:v>Gandour</c:v>
-                </c:pt>
-                <c:pt idx="1">
-                  <c:v>Kaera</c:v>
-                </c:pt>
-                <c:pt idx="2">
-                  <c:v>SIVOP</c:v>
-                </c:pt>
-                <c:pt idx="3">
-                  <c:v>Dream Cosmetics</c:v>
-                </c:pt>
-              </c:strCache>
-            </c:strRef>
-          </c:cat>
-          <c:val>
-            <c:numRef>
-              <c:f>Sheet1!$B$2:$B$5</c:f>
-              <c:numCache>
-                <c:formatCode>General</c:formatCode>
-                <c:ptCount val="4"/>
-                <c:pt idx="0">
-                  <c:v>0.03</c:v>
-                </c:pt>
-                <c:pt idx="1">
-                  <c:v>0.07</c:v>
-                </c:pt>
-                <c:pt idx="2">
-                  <c:v>0.11</c:v>
-                </c:pt>
-                <c:pt idx="3">
-                  <c:v>0.38</c:v>
-                </c:pt>
-              </c:numCache>
-            </c:numRef>
-          </c:val>
-        </c:ser>
-        <c:dLbls>
-          <c:numFmt formatCode="0.00" sourceLinked="0"/>
-          <c:txPr>
-            <a:bodyPr/>
-            <a:lstStyle/>
-            <a:p>
-              <a:pPr>
-                <a:defRPr sz="1300" b="1"/>
-              </a:pPr>
-            </a:p>
-          </c:txPr>
-          <c:dLblPos val="outEnd"/>
-          <c:showLegendKey val="0"/>
-          <c:showVal val="1"/>
-          <c:showCatName val="0"/>
-          <c:showSerName val="0"/>
-          <c:showPercent val="0"/>
-          <c:showBubbleSize val="0"/>
-          <c:showLeaderLines val="1"/>
-        </c:dLbls>
-        <c:gapWidth val="55"/>
-        <c:axId val="-2068027336"/>
-        <c:axId val="-2113994440"/>
-      </c:barChart>
-      <c:catAx>
-        <c:axId val="-2068027336"/>
-        <c:scaling>
-          <c:orientation val="minMax"/>
-        </c:scaling>
-        <c:delete val="0"/>
-        <c:axPos val="l"/>
-        <c:majorTickMark val="out"/>
-        <c:minorTickMark val="none"/>
-        <c:tickLblPos val="nextTo"/>
-        <c:spPr>
-          <a:ln>
-            <a:noFill/>
-          </a:ln>
-        </c:spPr>
-        <c:txPr>
-          <a:bodyPr/>
-          <a:lstStyle/>
-          <a:p>
-            <a:pPr>
-              <a:defRPr sz="1200">
-                <a:latin typeface="Poppins"/>
-              </a:defRPr>
-            </a:pPr>
-          </a:p>
-        </c:txPr>
-        <c:crossAx val="-2113994440"/>
-        <c:crosses val="autoZero"/>
-        <c:auto val="1"/>
-        <c:lblAlgn val="ctr"/>
-        <c:lblOffset val="100"/>
-        <c:noMultiLvlLbl val="0"/>
-      </c:catAx>
-      <c:valAx>
-        <c:axId val="-2113994440"/>
-        <c:scaling>
-          <c:min val="0.0"/>
-        </c:scaling>
-        <c:delete/>
-        <c:axPos val="b"/>
-        <c:majorTickMark val="none"/>
-        <c:minorTickMark val="none"/>
-        <c:tickLblPos val="none"/>
-        <c:spPr>
-          <a:ln>
-            <a:noFill/>
-          </a:ln>
-        </c:spPr>
-        <c:crossAx val="-2068027336"/>
-        <c:crosses val="autoZero"/>
-      </c:valAx>
-    </c:plotArea>
-    <c:dispBlanksAs val="gap"/>
-  </c:chart>
-  <c:txPr>
-    <a:bodyPr/>
-    <a:lstStyle/>
-    <a:p>
-      <a:pPr>
-        <a:defRPr sz="1800"/>
-      </a:pPr>
-      <a:endParaRPr lang="en-US"/>
-    </a:p>
-  </c:txPr>
-  <c:externalData r:id="rId1">
-    <c:autoUpdate val="0"/>
-  </c:externalData>
-</c:chartSpace>
-</file>
-
-<file path=ppt/charts/chart2.xml><?xml version="1.0" encoding="utf-8"?>
-<c:chartSpace xmlns:c="http://schemas.openxmlformats.org/drawingml/2006/chart" xmlns:a="http://schemas.openxmlformats.org/drawingml/2006/main" xmlns:r="http://schemas.openxmlformats.org/officeDocument/2006/relationships">
-  <c:date1904 val="0"/>
-  <c:chart>
-    <c:autoTitleDeleted val="1"/>
-    <c:plotArea>
-      <c:barChart>
-        <c:barDir val="bar"/>
-        <c:grouping val="clustered"/>
-        <c:ser>
-          <c:idx val="0"/>
-          <c:order val="0"/>
-          <c:tx>
-            <c:strRef>
-              <c:f>Sheet1!$B$1</c:f>
-              <c:strCache>
-                <c:ptCount val="1"/>
-                <c:pt idx="0">
-                  <c:v>Réactions médianes par gamme (nombre de publications)</c:v>
-                </c:pt>
-              </c:strCache>
-            </c:strRef>
-          </c:tx>
-          <c:dPt>
-            <c:idx val="0"/>
-            <c:spPr>
-              <a:solidFill>
-                <a:srgbClr val="B9B9B9"/>
-              </a:solidFill>
-            </c:spPr>
-          </c:dPt>
-          <c:dPt>
-            <c:idx val="1"/>
-            <c:spPr>
-              <a:solidFill>
-                <a:srgbClr val="B9B9B9"/>
-              </a:solidFill>
-            </c:spPr>
-          </c:dPt>
-          <c:dPt>
-            <c:idx val="2"/>
-            <c:spPr>
-              <a:solidFill>
-                <a:srgbClr val="B9B9B9"/>
-              </a:solidFill>
-            </c:spPr>
-          </c:dPt>
-          <c:dPt>
-            <c:idx val="3"/>
-            <c:spPr>
-              <a:solidFill>
-                <a:srgbClr val="B9B9B9"/>
-              </a:solidFill>
-            </c:spPr>
-          </c:dPt>
-          <c:dPt>
-            <c:idx val="4"/>
-            <c:spPr>
-              <a:solidFill>
-                <a:srgbClr val="B9B9B9"/>
-              </a:solidFill>
-            </c:spPr>
-          </c:dPt>
-          <c:dPt>
-            <c:idx val="5"/>
-            <c:spPr>
-              <a:solidFill>
-                <a:srgbClr val="AE172A"/>
-              </a:solidFill>
-            </c:spPr>
-          </c:dPt>
-          <c:cat>
-            <c:strRef>
-              <c:f>Sheet1!$A$2:$A$7</c:f>
-              <c:strCache>
-                <c:ptCount val="6"/>
-                <c:pt idx="0">
-                  <c:v>Always Young (1)</c:v>
-                </c:pt>
-                <c:pt idx="1">
-                  <c:v>Dr Wang (1)</c:v>
-                </c:pt>
-                <c:pt idx="2">
-                  <c:v>Sans gamme nommée (7)</c:v>
-                </c:pt>
-                <c:pt idx="3">
-                  <c:v>Cocopulp (2)</c:v>
-                </c:pt>
-                <c:pt idx="4">
-                  <c:v>Day by Day (4)</c:v>
-                </c:pt>
-                <c:pt idx="5">
-                  <c:v>Babymed (8)</c:v>
-                </c:pt>
-              </c:strCache>
-            </c:strRef>
-          </c:cat>
-          <c:val>
-            <c:numRef>
-              <c:f>Sheet1!$B$2:$B$7</c:f>
-              <c:numCache>
-                <c:formatCode>General</c:formatCode>
-                <c:ptCount val="6"/>
-                <c:pt idx="0">
-                  <c:v>13</c:v>
-                </c:pt>
-                <c:pt idx="1">
-                  <c:v>46</c:v>
-                </c:pt>
-                <c:pt idx="2">
-                  <c:v>52</c:v>
-                </c:pt>
-                <c:pt idx="3">
-                  <c:v>1724</c:v>
-                </c:pt>
-                <c:pt idx="4">
-                  <c:v>112</c:v>
-                </c:pt>
-                <c:pt idx="5">
-                  <c:v>216</c:v>
-                </c:pt>
-              </c:numCache>
-            </c:numRef>
-          </c:val>
-        </c:ser>
-        <c:dLbls>
-          <c:txPr>
-            <a:bodyPr/>
-            <a:lstStyle/>
-            <a:p>
-              <a:pPr>
-                <a:defRPr sz="1300" b="1"/>
-              </a:pPr>
-            </a:p>
-          </c:txPr>
-          <c:dLblPos val="outEnd"/>
-          <c:showLegendKey val="0"/>
-          <c:showVal val="1"/>
-          <c:showCatName val="0"/>
-          <c:showSerName val="0"/>
-          <c:showPercent val="0"/>
-          <c:showBubbleSize val="0"/>
-          <c:showLeaderLines val="1"/>
-        </c:dLbls>
-        <c:gapWidth val="55"/>
-        <c:axId val="-2068027336"/>
-        <c:axId val="-2113994440"/>
-      </c:barChart>
-      <c:catAx>
-        <c:axId val="-2068027336"/>
-        <c:scaling>
-          <c:orientation val="minMax"/>
-        </c:scaling>
-        <c:delete val="0"/>
-        <c:axPos val="l"/>
-        <c:majorTickMark val="out"/>
-        <c:minorTickMark val="none"/>
-        <c:tickLblPos val="nextTo"/>
-        <c:spPr>
-          <a:ln>
-            <a:noFill/>
-          </a:ln>
-        </c:spPr>
-        <c:txPr>
-          <a:bodyPr/>
-          <a:lstStyle/>
-          <a:p>
-            <a:pPr>
-              <a:defRPr sz="1200">
-                <a:latin typeface="Poppins"/>
-              </a:defRPr>
-            </a:pPr>
-          </a:p>
-        </c:txPr>
-        <c:crossAx val="-2113994440"/>
-        <c:crosses val="autoZero"/>
-        <c:auto val="1"/>
-        <c:lblAlgn val="ctr"/>
-        <c:lblOffset val="100"/>
-        <c:noMultiLvlLbl val="0"/>
-      </c:catAx>
-      <c:valAx>
-        <c:axId val="-2113994440"/>
-        <c:scaling>
-          <c:min val="0.0"/>
-        </c:scaling>
-        <c:delete/>
-        <c:axPos val="b"/>
-        <c:majorTickMark val="none"/>
-        <c:minorTickMark val="none"/>
-        <c:tickLblPos val="none"/>
-        <c:spPr>
-          <a:ln>
-            <a:noFill/>
-          </a:ln>
-        </c:spPr>
-        <c:crossAx val="-2068027336"/>
-        <c:crosses val="autoZero"/>
-      </c:valAx>
-    </c:plotArea>
-    <c:dispBlanksAs val="gap"/>
-  </c:chart>
-  <c:txPr>
-    <a:bodyPr/>
-    <a:lstStyle/>
-    <a:p>
-      <a:pPr>
-        <a:defRPr sz="1800"/>
-      </a:pPr>
-      <a:endParaRPr lang="en-US"/>
-    </a:p>
-  </c:txPr>
-  <c:externalData r:id="rId1">
-    <c:autoUpdate val="0"/>
-  </c:externalData>
-</c:chartSpace>
 </file>
 
 <file path=ppt/slideLayouts/slideLayout1.xml><?xml version="1.0" encoding="utf-8"?>
@@ -6466,27 +6057,9 @@
           </a:p>
         </p:txBody>
       </p:sp>
-      <p:graphicFrame>
-        <p:nvGraphicFramePr>
-          <p:cNvPr id="9" name="Chart 8"/>
-          <p:cNvGraphicFramePr>
-            <a:graphicFrameLocks noGrp="1"/>
-          </p:cNvGraphicFramePr>
-          <p:nvPr/>
-        </p:nvGraphicFramePr>
-        <p:xfrm>
-          <a:off x="576000" y="1944000"/>
-          <a:ext cx="5760000" cy="4104000"/>
-        </p:xfrm>
-        <a:graphic>
-          <a:graphicData uri="http://schemas.openxmlformats.org/drawingml/2006/chart">
-            <c:chart xmlns:c="http://schemas.openxmlformats.org/drawingml/2006/chart" r:id="rId3"/>
-          </a:graphicData>
-        </a:graphic>
-      </p:graphicFrame>
-      <p:sp>
-        <p:nvSpPr>
-          <p:cNvPr id="10" name="TextBox 9"/>
+      <p:sp>
+        <p:nvSpPr>
+          <p:cNvPr id="9" name="TextBox 8"/>
           <p:cNvSpPr txBox="1"/>
           <p:nvPr/>
         </p:nvSpPr>
@@ -6525,7 +6098,1003 @@
       </p:sp>
       <p:sp>
         <p:nvSpPr>
-          <p:cNvPr id="11" name="TextBox 10"/>
+          <p:cNvPr id="10" name="TextBox 9"/>
+          <p:cNvSpPr txBox="1"/>
+          <p:nvPr/>
+        </p:nvSpPr>
+        <p:spPr>
+          <a:xfrm>
+            <a:off x="576000" y="2016000"/>
+            <a:ext cx="1583999" cy="672000"/>
+          </a:xfrm>
+          <a:prstGeom prst="rect">
+            <a:avLst/>
+          </a:prstGeom>
+          <a:noFill/>
+        </p:spPr>
+        <p:txBody>
+          <a:bodyPr wrap="square" lIns="36000" rIns="36000" tIns="18000" bIns="18000" anchor="ctr">
+            <a:spAutoFit/>
+          </a:bodyPr>
+          <a:lstStyle/>
+          <a:p>
+            <a:pPr algn="l">
+              <a:lnSpc>
+                <a:spcPct val="110000"/>
+              </a:lnSpc>
+            </a:pPr>
+            <a:r>
+              <a:rPr sz="1150" b="1">
+                <a:solidFill>
+                  <a:srgbClr val="111111"/>
+                </a:solidFill>
+                <a:latin typeface="Poppins"/>
+              </a:rPr>
+              <a:t>Babymed (8)</a:t>
+            </a:r>
+          </a:p>
+        </p:txBody>
+      </p:sp>
+      <p:sp>
+        <p:nvSpPr>
+          <p:cNvPr id="11" name="Rounded Rectangle 10"/>
+          <p:cNvSpPr/>
+          <p:nvPr/>
+        </p:nvSpPr>
+        <p:spPr>
+          <a:xfrm>
+            <a:off x="2231999" y="2167200"/>
+            <a:ext cx="3204001" cy="369600"/>
+          </a:xfrm>
+          <a:prstGeom prst="roundRect">
+            <a:avLst/>
+          </a:prstGeom>
+          <a:solidFill>
+            <a:srgbClr val="F0F0F0"/>
+          </a:solidFill>
+          <a:ln>
+            <a:noFill/>
+          </a:ln>
+          <a:effectLst/>
+        </p:spPr>
+        <p:style>
+          <a:lnRef idx="1">
+            <a:schemeClr val="accent1"/>
+          </a:lnRef>
+          <a:fillRef idx="3">
+            <a:schemeClr val="accent1"/>
+          </a:fillRef>
+          <a:effectRef idx="2">
+            <a:schemeClr val="accent1"/>
+          </a:effectRef>
+          <a:fontRef idx="minor">
+            <a:schemeClr val="lt1"/>
+          </a:fontRef>
+        </p:style>
+        <p:txBody>
+          <a:bodyPr rtlCol="0" anchor="ctr"/>
+          <a:lstStyle/>
+          <a:p>
+            <a:pPr algn="ctr"/>
+          </a:p>
+        </p:txBody>
+      </p:sp>
+      <p:sp>
+        <p:nvSpPr>
+          <p:cNvPr id="12" name="Rounded Rectangle 11"/>
+          <p:cNvSpPr/>
+          <p:nvPr/>
+        </p:nvSpPr>
+        <p:spPr>
+          <a:xfrm>
+            <a:off x="2231999" y="2167200"/>
+            <a:ext cx="401429" cy="369600"/>
+          </a:xfrm>
+          <a:prstGeom prst="roundRect">
+            <a:avLst/>
+          </a:prstGeom>
+          <a:solidFill>
+            <a:srgbClr val="AE172A"/>
+          </a:solidFill>
+          <a:ln>
+            <a:noFill/>
+          </a:ln>
+          <a:effectLst/>
+        </p:spPr>
+        <p:style>
+          <a:lnRef idx="1">
+            <a:schemeClr val="accent1"/>
+          </a:lnRef>
+          <a:fillRef idx="3">
+            <a:schemeClr val="accent1"/>
+          </a:fillRef>
+          <a:effectRef idx="2">
+            <a:schemeClr val="accent1"/>
+          </a:effectRef>
+          <a:fontRef idx="minor">
+            <a:schemeClr val="lt1"/>
+          </a:fontRef>
+        </p:style>
+        <p:txBody>
+          <a:bodyPr rtlCol="0" anchor="ctr"/>
+          <a:lstStyle/>
+          <a:p>
+            <a:pPr algn="ctr"/>
+          </a:p>
+        </p:txBody>
+      </p:sp>
+      <p:sp>
+        <p:nvSpPr>
+          <p:cNvPr id="13" name="TextBox 12"/>
+          <p:cNvSpPr txBox="1"/>
+          <p:nvPr/>
+        </p:nvSpPr>
+        <p:spPr>
+          <a:xfrm>
+            <a:off x="5508000" y="2016000"/>
+            <a:ext cx="792000" cy="672000"/>
+          </a:xfrm>
+          <a:prstGeom prst="rect">
+            <a:avLst/>
+          </a:prstGeom>
+          <a:noFill/>
+        </p:spPr>
+        <p:txBody>
+          <a:bodyPr wrap="square" lIns="36000" rIns="36000" tIns="18000" bIns="18000" anchor="ctr">
+            <a:spAutoFit/>
+          </a:bodyPr>
+          <a:lstStyle/>
+          <a:p>
+            <a:pPr algn="l">
+              <a:lnSpc>
+                <a:spcPct val="110000"/>
+              </a:lnSpc>
+            </a:pPr>
+            <a:r>
+              <a:rPr sz="1250" b="1">
+                <a:solidFill>
+                  <a:srgbClr val="AE172A"/>
+                </a:solidFill>
+                <a:latin typeface="Poppins"/>
+              </a:rPr>
+              <a:t>216</a:t>
+            </a:r>
+          </a:p>
+        </p:txBody>
+      </p:sp>
+      <p:sp>
+        <p:nvSpPr>
+          <p:cNvPr id="14" name="TextBox 13"/>
+          <p:cNvSpPr txBox="1"/>
+          <p:nvPr/>
+        </p:nvSpPr>
+        <p:spPr>
+          <a:xfrm>
+            <a:off x="576000" y="2688000"/>
+            <a:ext cx="1583999" cy="672000"/>
+          </a:xfrm>
+          <a:prstGeom prst="rect">
+            <a:avLst/>
+          </a:prstGeom>
+          <a:noFill/>
+        </p:spPr>
+        <p:txBody>
+          <a:bodyPr wrap="square" lIns="36000" rIns="36000" tIns="18000" bIns="18000" anchor="ctr">
+            <a:spAutoFit/>
+          </a:bodyPr>
+          <a:lstStyle/>
+          <a:p>
+            <a:pPr algn="l">
+              <a:lnSpc>
+                <a:spcPct val="110000"/>
+              </a:lnSpc>
+            </a:pPr>
+            <a:r>
+              <a:rPr sz="1150" b="0">
+                <a:solidFill>
+                  <a:srgbClr val="111111"/>
+                </a:solidFill>
+                <a:latin typeface="Poppins"/>
+              </a:rPr>
+              <a:t>Day by Day (4)</a:t>
+            </a:r>
+          </a:p>
+        </p:txBody>
+      </p:sp>
+      <p:sp>
+        <p:nvSpPr>
+          <p:cNvPr id="15" name="Rounded Rectangle 14"/>
+          <p:cNvSpPr/>
+          <p:nvPr/>
+        </p:nvSpPr>
+        <p:spPr>
+          <a:xfrm>
+            <a:off x="2231999" y="2839200"/>
+            <a:ext cx="3204001" cy="369600"/>
+          </a:xfrm>
+          <a:prstGeom prst="roundRect">
+            <a:avLst/>
+          </a:prstGeom>
+          <a:solidFill>
+            <a:srgbClr val="F0F0F0"/>
+          </a:solidFill>
+          <a:ln>
+            <a:noFill/>
+          </a:ln>
+          <a:effectLst/>
+        </p:spPr>
+        <p:style>
+          <a:lnRef idx="1">
+            <a:schemeClr val="accent1"/>
+          </a:lnRef>
+          <a:fillRef idx="3">
+            <a:schemeClr val="accent1"/>
+          </a:fillRef>
+          <a:effectRef idx="2">
+            <a:schemeClr val="accent1"/>
+          </a:effectRef>
+          <a:fontRef idx="minor">
+            <a:schemeClr val="lt1"/>
+          </a:fontRef>
+        </p:style>
+        <p:txBody>
+          <a:bodyPr rtlCol="0" anchor="ctr"/>
+          <a:lstStyle/>
+          <a:p>
+            <a:pPr algn="ctr"/>
+          </a:p>
+        </p:txBody>
+      </p:sp>
+      <p:sp>
+        <p:nvSpPr>
+          <p:cNvPr id="16" name="Rounded Rectangle 15"/>
+          <p:cNvSpPr/>
+          <p:nvPr/>
+        </p:nvSpPr>
+        <p:spPr>
+          <a:xfrm>
+            <a:off x="2231999" y="2839200"/>
+            <a:ext cx="208148" cy="369600"/>
+          </a:xfrm>
+          <a:prstGeom prst="roundRect">
+            <a:avLst/>
+          </a:prstGeom>
+          <a:solidFill>
+            <a:srgbClr val="B9B9B9"/>
+          </a:solidFill>
+          <a:ln>
+            <a:noFill/>
+          </a:ln>
+          <a:effectLst/>
+        </p:spPr>
+        <p:style>
+          <a:lnRef idx="1">
+            <a:schemeClr val="accent1"/>
+          </a:lnRef>
+          <a:fillRef idx="3">
+            <a:schemeClr val="accent1"/>
+          </a:fillRef>
+          <a:effectRef idx="2">
+            <a:schemeClr val="accent1"/>
+          </a:effectRef>
+          <a:fontRef idx="minor">
+            <a:schemeClr val="lt1"/>
+          </a:fontRef>
+        </p:style>
+        <p:txBody>
+          <a:bodyPr rtlCol="0" anchor="ctr"/>
+          <a:lstStyle/>
+          <a:p>
+            <a:pPr algn="ctr"/>
+          </a:p>
+        </p:txBody>
+      </p:sp>
+      <p:sp>
+        <p:nvSpPr>
+          <p:cNvPr id="17" name="TextBox 16"/>
+          <p:cNvSpPr txBox="1"/>
+          <p:nvPr/>
+        </p:nvSpPr>
+        <p:spPr>
+          <a:xfrm>
+            <a:off x="5508000" y="2688000"/>
+            <a:ext cx="792000" cy="672000"/>
+          </a:xfrm>
+          <a:prstGeom prst="rect">
+            <a:avLst/>
+          </a:prstGeom>
+          <a:noFill/>
+        </p:spPr>
+        <p:txBody>
+          <a:bodyPr wrap="square" lIns="36000" rIns="36000" tIns="18000" bIns="18000" anchor="ctr">
+            <a:spAutoFit/>
+          </a:bodyPr>
+          <a:lstStyle/>
+          <a:p>
+            <a:pPr algn="l">
+              <a:lnSpc>
+                <a:spcPct val="110000"/>
+              </a:lnSpc>
+            </a:pPr>
+            <a:r>
+              <a:rPr sz="1250" b="1">
+                <a:solidFill>
+                  <a:srgbClr val="111111"/>
+                </a:solidFill>
+                <a:latin typeface="Poppins"/>
+              </a:rPr>
+              <a:t>112</a:t>
+            </a:r>
+          </a:p>
+        </p:txBody>
+      </p:sp>
+      <p:sp>
+        <p:nvSpPr>
+          <p:cNvPr id="18" name="TextBox 17"/>
+          <p:cNvSpPr txBox="1"/>
+          <p:nvPr/>
+        </p:nvSpPr>
+        <p:spPr>
+          <a:xfrm>
+            <a:off x="576000" y="3360000"/>
+            <a:ext cx="1583999" cy="672000"/>
+          </a:xfrm>
+          <a:prstGeom prst="rect">
+            <a:avLst/>
+          </a:prstGeom>
+          <a:noFill/>
+        </p:spPr>
+        <p:txBody>
+          <a:bodyPr wrap="square" lIns="36000" rIns="36000" tIns="18000" bIns="18000" anchor="ctr">
+            <a:spAutoFit/>
+          </a:bodyPr>
+          <a:lstStyle/>
+          <a:p>
+            <a:pPr algn="l">
+              <a:lnSpc>
+                <a:spcPct val="110000"/>
+              </a:lnSpc>
+            </a:pPr>
+            <a:r>
+              <a:rPr sz="1150" b="0">
+                <a:solidFill>
+                  <a:srgbClr val="111111"/>
+                </a:solidFill>
+                <a:latin typeface="Poppins"/>
+              </a:rPr>
+              <a:t>Cocopulp (2)</a:t>
+            </a:r>
+          </a:p>
+        </p:txBody>
+      </p:sp>
+      <p:sp>
+        <p:nvSpPr>
+          <p:cNvPr id="19" name="Rounded Rectangle 18"/>
+          <p:cNvSpPr/>
+          <p:nvPr/>
+        </p:nvSpPr>
+        <p:spPr>
+          <a:xfrm>
+            <a:off x="2231999" y="3511200"/>
+            <a:ext cx="3204001" cy="369600"/>
+          </a:xfrm>
+          <a:prstGeom prst="roundRect">
+            <a:avLst/>
+          </a:prstGeom>
+          <a:solidFill>
+            <a:srgbClr val="F0F0F0"/>
+          </a:solidFill>
+          <a:ln>
+            <a:noFill/>
+          </a:ln>
+          <a:effectLst/>
+        </p:spPr>
+        <p:style>
+          <a:lnRef idx="1">
+            <a:schemeClr val="accent1"/>
+          </a:lnRef>
+          <a:fillRef idx="3">
+            <a:schemeClr val="accent1"/>
+          </a:fillRef>
+          <a:effectRef idx="2">
+            <a:schemeClr val="accent1"/>
+          </a:effectRef>
+          <a:fontRef idx="minor">
+            <a:schemeClr val="lt1"/>
+          </a:fontRef>
+        </p:style>
+        <p:txBody>
+          <a:bodyPr rtlCol="0" anchor="ctr"/>
+          <a:lstStyle/>
+          <a:p>
+            <a:pPr algn="ctr"/>
+          </a:p>
+        </p:txBody>
+      </p:sp>
+      <p:sp>
+        <p:nvSpPr>
+          <p:cNvPr id="20" name="Rounded Rectangle 19"/>
+          <p:cNvSpPr/>
+          <p:nvPr/>
+        </p:nvSpPr>
+        <p:spPr>
+          <a:xfrm>
+            <a:off x="2231999" y="3511200"/>
+            <a:ext cx="3204001" cy="369600"/>
+          </a:xfrm>
+          <a:prstGeom prst="roundRect">
+            <a:avLst/>
+          </a:prstGeom>
+          <a:solidFill>
+            <a:srgbClr val="B9B9B9"/>
+          </a:solidFill>
+          <a:ln>
+            <a:noFill/>
+          </a:ln>
+          <a:effectLst/>
+        </p:spPr>
+        <p:style>
+          <a:lnRef idx="1">
+            <a:schemeClr val="accent1"/>
+          </a:lnRef>
+          <a:fillRef idx="3">
+            <a:schemeClr val="accent1"/>
+          </a:fillRef>
+          <a:effectRef idx="2">
+            <a:schemeClr val="accent1"/>
+          </a:effectRef>
+          <a:fontRef idx="minor">
+            <a:schemeClr val="lt1"/>
+          </a:fontRef>
+        </p:style>
+        <p:txBody>
+          <a:bodyPr rtlCol="0" anchor="ctr"/>
+          <a:lstStyle/>
+          <a:p>
+            <a:pPr algn="ctr"/>
+          </a:p>
+        </p:txBody>
+      </p:sp>
+      <p:sp>
+        <p:nvSpPr>
+          <p:cNvPr id="21" name="TextBox 20"/>
+          <p:cNvSpPr txBox="1"/>
+          <p:nvPr/>
+        </p:nvSpPr>
+        <p:spPr>
+          <a:xfrm>
+            <a:off x="5508000" y="3360000"/>
+            <a:ext cx="792000" cy="672000"/>
+          </a:xfrm>
+          <a:prstGeom prst="rect">
+            <a:avLst/>
+          </a:prstGeom>
+          <a:noFill/>
+        </p:spPr>
+        <p:txBody>
+          <a:bodyPr wrap="square" lIns="36000" rIns="36000" tIns="18000" bIns="18000" anchor="ctr">
+            <a:spAutoFit/>
+          </a:bodyPr>
+          <a:lstStyle/>
+          <a:p>
+            <a:pPr algn="l">
+              <a:lnSpc>
+                <a:spcPct val="110000"/>
+              </a:lnSpc>
+            </a:pPr>
+            <a:r>
+              <a:rPr sz="1250" b="1">
+                <a:solidFill>
+                  <a:srgbClr val="111111"/>
+                </a:solidFill>
+                <a:latin typeface="Poppins"/>
+              </a:rPr>
+              <a:t>1 724</a:t>
+            </a:r>
+          </a:p>
+        </p:txBody>
+      </p:sp>
+      <p:sp>
+        <p:nvSpPr>
+          <p:cNvPr id="22" name="TextBox 21"/>
+          <p:cNvSpPr txBox="1"/>
+          <p:nvPr/>
+        </p:nvSpPr>
+        <p:spPr>
+          <a:xfrm>
+            <a:off x="576000" y="4032000"/>
+            <a:ext cx="1583999" cy="672000"/>
+          </a:xfrm>
+          <a:prstGeom prst="rect">
+            <a:avLst/>
+          </a:prstGeom>
+          <a:noFill/>
+        </p:spPr>
+        <p:txBody>
+          <a:bodyPr wrap="square" lIns="36000" rIns="36000" tIns="18000" bIns="18000" anchor="ctr">
+            <a:spAutoFit/>
+          </a:bodyPr>
+          <a:lstStyle/>
+          <a:p>
+            <a:pPr algn="l">
+              <a:lnSpc>
+                <a:spcPct val="110000"/>
+              </a:lnSpc>
+            </a:pPr>
+            <a:r>
+              <a:rPr sz="1150" b="0">
+                <a:solidFill>
+                  <a:srgbClr val="111111"/>
+                </a:solidFill>
+                <a:latin typeface="Poppins"/>
+              </a:rPr>
+              <a:t>Sans gamme nommée (7)</a:t>
+            </a:r>
+          </a:p>
+        </p:txBody>
+      </p:sp>
+      <p:sp>
+        <p:nvSpPr>
+          <p:cNvPr id="23" name="Rounded Rectangle 22"/>
+          <p:cNvSpPr/>
+          <p:nvPr/>
+        </p:nvSpPr>
+        <p:spPr>
+          <a:xfrm>
+            <a:off x="2231999" y="4183200"/>
+            <a:ext cx="3204001" cy="369600"/>
+          </a:xfrm>
+          <a:prstGeom prst="roundRect">
+            <a:avLst/>
+          </a:prstGeom>
+          <a:solidFill>
+            <a:srgbClr val="F0F0F0"/>
+          </a:solidFill>
+          <a:ln>
+            <a:noFill/>
+          </a:ln>
+          <a:effectLst/>
+        </p:spPr>
+        <p:style>
+          <a:lnRef idx="1">
+            <a:schemeClr val="accent1"/>
+          </a:lnRef>
+          <a:fillRef idx="3">
+            <a:schemeClr val="accent1"/>
+          </a:fillRef>
+          <a:effectRef idx="2">
+            <a:schemeClr val="accent1"/>
+          </a:effectRef>
+          <a:fontRef idx="minor">
+            <a:schemeClr val="lt1"/>
+          </a:fontRef>
+        </p:style>
+        <p:txBody>
+          <a:bodyPr rtlCol="0" anchor="ctr"/>
+          <a:lstStyle/>
+          <a:p>
+            <a:pPr algn="ctr"/>
+          </a:p>
+        </p:txBody>
+      </p:sp>
+      <p:sp>
+        <p:nvSpPr>
+          <p:cNvPr id="24" name="Rounded Rectangle 23"/>
+          <p:cNvSpPr/>
+          <p:nvPr/>
+        </p:nvSpPr>
+        <p:spPr>
+          <a:xfrm>
+            <a:off x="2231999" y="4183200"/>
+            <a:ext cx="96640" cy="369600"/>
+          </a:xfrm>
+          <a:prstGeom prst="roundRect">
+            <a:avLst/>
+          </a:prstGeom>
+          <a:solidFill>
+            <a:srgbClr val="B9B9B9"/>
+          </a:solidFill>
+          <a:ln>
+            <a:noFill/>
+          </a:ln>
+          <a:effectLst/>
+        </p:spPr>
+        <p:style>
+          <a:lnRef idx="1">
+            <a:schemeClr val="accent1"/>
+          </a:lnRef>
+          <a:fillRef idx="3">
+            <a:schemeClr val="accent1"/>
+          </a:fillRef>
+          <a:effectRef idx="2">
+            <a:schemeClr val="accent1"/>
+          </a:effectRef>
+          <a:fontRef idx="minor">
+            <a:schemeClr val="lt1"/>
+          </a:fontRef>
+        </p:style>
+        <p:txBody>
+          <a:bodyPr rtlCol="0" anchor="ctr"/>
+          <a:lstStyle/>
+          <a:p>
+            <a:pPr algn="ctr"/>
+          </a:p>
+        </p:txBody>
+      </p:sp>
+      <p:sp>
+        <p:nvSpPr>
+          <p:cNvPr id="25" name="TextBox 24"/>
+          <p:cNvSpPr txBox="1"/>
+          <p:nvPr/>
+        </p:nvSpPr>
+        <p:spPr>
+          <a:xfrm>
+            <a:off x="5508000" y="4032000"/>
+            <a:ext cx="792000" cy="672000"/>
+          </a:xfrm>
+          <a:prstGeom prst="rect">
+            <a:avLst/>
+          </a:prstGeom>
+          <a:noFill/>
+        </p:spPr>
+        <p:txBody>
+          <a:bodyPr wrap="square" lIns="36000" rIns="36000" tIns="18000" bIns="18000" anchor="ctr">
+            <a:spAutoFit/>
+          </a:bodyPr>
+          <a:lstStyle/>
+          <a:p>
+            <a:pPr algn="l">
+              <a:lnSpc>
+                <a:spcPct val="110000"/>
+              </a:lnSpc>
+            </a:pPr>
+            <a:r>
+              <a:rPr sz="1250" b="1">
+                <a:solidFill>
+                  <a:srgbClr val="111111"/>
+                </a:solidFill>
+                <a:latin typeface="Poppins"/>
+              </a:rPr>
+              <a:t>52</a:t>
+            </a:r>
+          </a:p>
+        </p:txBody>
+      </p:sp>
+      <p:sp>
+        <p:nvSpPr>
+          <p:cNvPr id="26" name="TextBox 25"/>
+          <p:cNvSpPr txBox="1"/>
+          <p:nvPr/>
+        </p:nvSpPr>
+        <p:spPr>
+          <a:xfrm>
+            <a:off x="576000" y="4704000"/>
+            <a:ext cx="1583999" cy="672000"/>
+          </a:xfrm>
+          <a:prstGeom prst="rect">
+            <a:avLst/>
+          </a:prstGeom>
+          <a:noFill/>
+        </p:spPr>
+        <p:txBody>
+          <a:bodyPr wrap="square" lIns="36000" rIns="36000" tIns="18000" bIns="18000" anchor="ctr">
+            <a:spAutoFit/>
+          </a:bodyPr>
+          <a:lstStyle/>
+          <a:p>
+            <a:pPr algn="l">
+              <a:lnSpc>
+                <a:spcPct val="110000"/>
+              </a:lnSpc>
+            </a:pPr>
+            <a:r>
+              <a:rPr sz="1150" b="0">
+                <a:solidFill>
+                  <a:srgbClr val="111111"/>
+                </a:solidFill>
+                <a:latin typeface="Poppins"/>
+              </a:rPr>
+              <a:t>Dr Wang (1)</a:t>
+            </a:r>
+          </a:p>
+        </p:txBody>
+      </p:sp>
+      <p:sp>
+        <p:nvSpPr>
+          <p:cNvPr id="27" name="Rounded Rectangle 26"/>
+          <p:cNvSpPr/>
+          <p:nvPr/>
+        </p:nvSpPr>
+        <p:spPr>
+          <a:xfrm>
+            <a:off x="2231999" y="4855200"/>
+            <a:ext cx="3204001" cy="369600"/>
+          </a:xfrm>
+          <a:prstGeom prst="roundRect">
+            <a:avLst/>
+          </a:prstGeom>
+          <a:solidFill>
+            <a:srgbClr val="F0F0F0"/>
+          </a:solidFill>
+          <a:ln>
+            <a:noFill/>
+          </a:ln>
+          <a:effectLst/>
+        </p:spPr>
+        <p:style>
+          <a:lnRef idx="1">
+            <a:schemeClr val="accent1"/>
+          </a:lnRef>
+          <a:fillRef idx="3">
+            <a:schemeClr val="accent1"/>
+          </a:fillRef>
+          <a:effectRef idx="2">
+            <a:schemeClr val="accent1"/>
+          </a:effectRef>
+          <a:fontRef idx="minor">
+            <a:schemeClr val="lt1"/>
+          </a:fontRef>
+        </p:style>
+        <p:txBody>
+          <a:bodyPr rtlCol="0" anchor="ctr"/>
+          <a:lstStyle/>
+          <a:p>
+            <a:pPr algn="ctr"/>
+          </a:p>
+        </p:txBody>
+      </p:sp>
+      <p:sp>
+        <p:nvSpPr>
+          <p:cNvPr id="28" name="Rounded Rectangle 27"/>
+          <p:cNvSpPr/>
+          <p:nvPr/>
+        </p:nvSpPr>
+        <p:spPr>
+          <a:xfrm>
+            <a:off x="2231999" y="4855200"/>
+            <a:ext cx="90000" cy="369600"/>
+          </a:xfrm>
+          <a:prstGeom prst="roundRect">
+            <a:avLst/>
+          </a:prstGeom>
+          <a:solidFill>
+            <a:srgbClr val="B9B9B9"/>
+          </a:solidFill>
+          <a:ln>
+            <a:noFill/>
+          </a:ln>
+          <a:effectLst/>
+        </p:spPr>
+        <p:style>
+          <a:lnRef idx="1">
+            <a:schemeClr val="accent1"/>
+          </a:lnRef>
+          <a:fillRef idx="3">
+            <a:schemeClr val="accent1"/>
+          </a:fillRef>
+          <a:effectRef idx="2">
+            <a:schemeClr val="accent1"/>
+          </a:effectRef>
+          <a:fontRef idx="minor">
+            <a:schemeClr val="lt1"/>
+          </a:fontRef>
+        </p:style>
+        <p:txBody>
+          <a:bodyPr rtlCol="0" anchor="ctr"/>
+          <a:lstStyle/>
+          <a:p>
+            <a:pPr algn="ctr"/>
+          </a:p>
+        </p:txBody>
+      </p:sp>
+      <p:sp>
+        <p:nvSpPr>
+          <p:cNvPr id="29" name="TextBox 28"/>
+          <p:cNvSpPr txBox="1"/>
+          <p:nvPr/>
+        </p:nvSpPr>
+        <p:spPr>
+          <a:xfrm>
+            <a:off x="5508000" y="4704000"/>
+            <a:ext cx="792000" cy="672000"/>
+          </a:xfrm>
+          <a:prstGeom prst="rect">
+            <a:avLst/>
+          </a:prstGeom>
+          <a:noFill/>
+        </p:spPr>
+        <p:txBody>
+          <a:bodyPr wrap="square" lIns="36000" rIns="36000" tIns="18000" bIns="18000" anchor="ctr">
+            <a:spAutoFit/>
+          </a:bodyPr>
+          <a:lstStyle/>
+          <a:p>
+            <a:pPr algn="l">
+              <a:lnSpc>
+                <a:spcPct val="110000"/>
+              </a:lnSpc>
+            </a:pPr>
+            <a:r>
+              <a:rPr sz="1250" b="1">
+                <a:solidFill>
+                  <a:srgbClr val="111111"/>
+                </a:solidFill>
+                <a:latin typeface="Poppins"/>
+              </a:rPr>
+              <a:t>46</a:t>
+            </a:r>
+          </a:p>
+        </p:txBody>
+      </p:sp>
+      <p:sp>
+        <p:nvSpPr>
+          <p:cNvPr id="30" name="TextBox 29"/>
+          <p:cNvSpPr txBox="1"/>
+          <p:nvPr/>
+        </p:nvSpPr>
+        <p:spPr>
+          <a:xfrm>
+            <a:off x="576000" y="5376000"/>
+            <a:ext cx="1583999" cy="672000"/>
+          </a:xfrm>
+          <a:prstGeom prst="rect">
+            <a:avLst/>
+          </a:prstGeom>
+          <a:noFill/>
+        </p:spPr>
+        <p:txBody>
+          <a:bodyPr wrap="square" lIns="36000" rIns="36000" tIns="18000" bIns="18000" anchor="ctr">
+            <a:spAutoFit/>
+          </a:bodyPr>
+          <a:lstStyle/>
+          <a:p>
+            <a:pPr algn="l">
+              <a:lnSpc>
+                <a:spcPct val="110000"/>
+              </a:lnSpc>
+            </a:pPr>
+            <a:r>
+              <a:rPr sz="1150" b="0">
+                <a:solidFill>
+                  <a:srgbClr val="111111"/>
+                </a:solidFill>
+                <a:latin typeface="Poppins"/>
+              </a:rPr>
+              <a:t>Always Young (1)</a:t>
+            </a:r>
+          </a:p>
+        </p:txBody>
+      </p:sp>
+      <p:sp>
+        <p:nvSpPr>
+          <p:cNvPr id="31" name="Rounded Rectangle 30"/>
+          <p:cNvSpPr/>
+          <p:nvPr/>
+        </p:nvSpPr>
+        <p:spPr>
+          <a:xfrm>
+            <a:off x="2231999" y="5527200"/>
+            <a:ext cx="3204001" cy="369600"/>
+          </a:xfrm>
+          <a:prstGeom prst="roundRect">
+            <a:avLst/>
+          </a:prstGeom>
+          <a:solidFill>
+            <a:srgbClr val="F0F0F0"/>
+          </a:solidFill>
+          <a:ln>
+            <a:noFill/>
+          </a:ln>
+          <a:effectLst/>
+        </p:spPr>
+        <p:style>
+          <a:lnRef idx="1">
+            <a:schemeClr val="accent1"/>
+          </a:lnRef>
+          <a:fillRef idx="3">
+            <a:schemeClr val="accent1"/>
+          </a:fillRef>
+          <a:effectRef idx="2">
+            <a:schemeClr val="accent1"/>
+          </a:effectRef>
+          <a:fontRef idx="minor">
+            <a:schemeClr val="lt1"/>
+          </a:fontRef>
+        </p:style>
+        <p:txBody>
+          <a:bodyPr rtlCol="0" anchor="ctr"/>
+          <a:lstStyle/>
+          <a:p>
+            <a:pPr algn="ctr"/>
+          </a:p>
+        </p:txBody>
+      </p:sp>
+      <p:sp>
+        <p:nvSpPr>
+          <p:cNvPr id="32" name="Rounded Rectangle 31"/>
+          <p:cNvSpPr/>
+          <p:nvPr/>
+        </p:nvSpPr>
+        <p:spPr>
+          <a:xfrm>
+            <a:off x="2231999" y="5527200"/>
+            <a:ext cx="90000" cy="369600"/>
+          </a:xfrm>
+          <a:prstGeom prst="roundRect">
+            <a:avLst/>
+          </a:prstGeom>
+          <a:solidFill>
+            <a:srgbClr val="B9B9B9"/>
+          </a:solidFill>
+          <a:ln>
+            <a:noFill/>
+          </a:ln>
+          <a:effectLst/>
+        </p:spPr>
+        <p:style>
+          <a:lnRef idx="1">
+            <a:schemeClr val="accent1"/>
+          </a:lnRef>
+          <a:fillRef idx="3">
+            <a:schemeClr val="accent1"/>
+          </a:fillRef>
+          <a:effectRef idx="2">
+            <a:schemeClr val="accent1"/>
+          </a:effectRef>
+          <a:fontRef idx="minor">
+            <a:schemeClr val="lt1"/>
+          </a:fontRef>
+        </p:style>
+        <p:txBody>
+          <a:bodyPr rtlCol="0" anchor="ctr"/>
+          <a:lstStyle/>
+          <a:p>
+            <a:pPr algn="ctr"/>
+          </a:p>
+        </p:txBody>
+      </p:sp>
+      <p:sp>
+        <p:nvSpPr>
+          <p:cNvPr id="33" name="TextBox 32"/>
+          <p:cNvSpPr txBox="1"/>
+          <p:nvPr/>
+        </p:nvSpPr>
+        <p:spPr>
+          <a:xfrm>
+            <a:off x="5508000" y="5376000"/>
+            <a:ext cx="792000" cy="672000"/>
+          </a:xfrm>
+          <a:prstGeom prst="rect">
+            <a:avLst/>
+          </a:prstGeom>
+          <a:noFill/>
+        </p:spPr>
+        <p:txBody>
+          <a:bodyPr wrap="square" lIns="36000" rIns="36000" tIns="18000" bIns="18000" anchor="ctr">
+            <a:spAutoFit/>
+          </a:bodyPr>
+          <a:lstStyle/>
+          <a:p>
+            <a:pPr algn="l">
+              <a:lnSpc>
+                <a:spcPct val="110000"/>
+              </a:lnSpc>
+            </a:pPr>
+            <a:r>
+              <a:rPr sz="1250" b="1">
+                <a:solidFill>
+                  <a:srgbClr val="111111"/>
+                </a:solidFill>
+                <a:latin typeface="Poppins"/>
+              </a:rPr>
+              <a:t>13</a:t>
+            </a:r>
+          </a:p>
+        </p:txBody>
+      </p:sp>
+      <p:sp>
+        <p:nvSpPr>
+          <p:cNvPr id="34" name="TextBox 33"/>
           <p:cNvSpPr txBox="1"/>
           <p:nvPr/>
         </p:nvSpPr>
@@ -25838,27 +26407,9 @@
           </a:p>
         </p:txBody>
       </p:sp>
-      <p:graphicFrame>
-        <p:nvGraphicFramePr>
-          <p:cNvPr id="9" name="Chart 8"/>
-          <p:cNvGraphicFramePr>
-            <a:graphicFrameLocks noGrp="1"/>
-          </p:cNvGraphicFramePr>
-          <p:nvPr/>
-        </p:nvGraphicFramePr>
-        <p:xfrm>
-          <a:off x="576000" y="1944000"/>
-          <a:ext cx="5256000" cy="3816000"/>
-        </p:xfrm>
-        <a:graphic>
-          <a:graphicData uri="http://schemas.openxmlformats.org/drawingml/2006/chart">
-            <c:chart xmlns:c="http://schemas.openxmlformats.org/drawingml/2006/chart" r:id="rId3"/>
-          </a:graphicData>
-        </a:graphic>
-      </p:graphicFrame>
-      <p:sp>
-        <p:nvSpPr>
-          <p:cNvPr id="10" name="TextBox 9"/>
+      <p:sp>
+        <p:nvSpPr>
+          <p:cNvPr id="9" name="TextBox 8"/>
           <p:cNvSpPr txBox="1"/>
           <p:nvPr/>
         </p:nvSpPr>
@@ -25895,9 +26446,673 @@
           </a:p>
         </p:txBody>
       </p:sp>
+      <p:sp>
+        <p:nvSpPr>
+          <p:cNvPr id="10" name="TextBox 9"/>
+          <p:cNvSpPr txBox="1"/>
+          <p:nvPr/>
+        </p:nvSpPr>
+        <p:spPr>
+          <a:xfrm>
+            <a:off x="576000" y="2016000"/>
+            <a:ext cx="1583999" cy="936000"/>
+          </a:xfrm>
+          <a:prstGeom prst="rect">
+            <a:avLst/>
+          </a:prstGeom>
+          <a:noFill/>
+        </p:spPr>
+        <p:txBody>
+          <a:bodyPr wrap="square" lIns="36000" rIns="36000" tIns="18000" bIns="18000" anchor="ctr">
+            <a:spAutoFit/>
+          </a:bodyPr>
+          <a:lstStyle/>
+          <a:p>
+            <a:pPr algn="l">
+              <a:lnSpc>
+                <a:spcPct val="110000"/>
+              </a:lnSpc>
+            </a:pPr>
+            <a:r>
+              <a:rPr sz="1150" b="1">
+                <a:solidFill>
+                  <a:srgbClr val="111111"/>
+                </a:solidFill>
+                <a:latin typeface="Poppins"/>
+              </a:rPr>
+              <a:t>Dream Cosmetics</a:t>
+            </a:r>
+          </a:p>
+        </p:txBody>
+      </p:sp>
+      <p:sp>
+        <p:nvSpPr>
+          <p:cNvPr id="11" name="Rounded Rectangle 10"/>
+          <p:cNvSpPr/>
+          <p:nvPr/>
+        </p:nvSpPr>
+        <p:spPr>
+          <a:xfrm>
+            <a:off x="2231999" y="2250000"/>
+            <a:ext cx="2700001" cy="468000"/>
+          </a:xfrm>
+          <a:prstGeom prst="roundRect">
+            <a:avLst/>
+          </a:prstGeom>
+          <a:solidFill>
+            <a:srgbClr val="F0F0F0"/>
+          </a:solidFill>
+          <a:ln>
+            <a:noFill/>
+          </a:ln>
+          <a:effectLst/>
+        </p:spPr>
+        <p:style>
+          <a:lnRef idx="1">
+            <a:schemeClr val="accent1"/>
+          </a:lnRef>
+          <a:fillRef idx="3">
+            <a:schemeClr val="accent1"/>
+          </a:fillRef>
+          <a:effectRef idx="2">
+            <a:schemeClr val="accent1"/>
+          </a:effectRef>
+          <a:fontRef idx="minor">
+            <a:schemeClr val="lt1"/>
+          </a:fontRef>
+        </p:style>
+        <p:txBody>
+          <a:bodyPr rtlCol="0" anchor="ctr"/>
+          <a:lstStyle/>
+          <a:p>
+            <a:pPr algn="ctr"/>
+          </a:p>
+        </p:txBody>
+      </p:sp>
+      <p:sp>
+        <p:nvSpPr>
+          <p:cNvPr id="12" name="Rounded Rectangle 11"/>
+          <p:cNvSpPr/>
+          <p:nvPr/>
+        </p:nvSpPr>
+        <p:spPr>
+          <a:xfrm>
+            <a:off x="2231999" y="2250000"/>
+            <a:ext cx="2700001" cy="468000"/>
+          </a:xfrm>
+          <a:prstGeom prst="roundRect">
+            <a:avLst/>
+          </a:prstGeom>
+          <a:solidFill>
+            <a:srgbClr val="AE172A"/>
+          </a:solidFill>
+          <a:ln>
+            <a:noFill/>
+          </a:ln>
+          <a:effectLst/>
+        </p:spPr>
+        <p:style>
+          <a:lnRef idx="1">
+            <a:schemeClr val="accent1"/>
+          </a:lnRef>
+          <a:fillRef idx="3">
+            <a:schemeClr val="accent1"/>
+          </a:fillRef>
+          <a:effectRef idx="2">
+            <a:schemeClr val="accent1"/>
+          </a:effectRef>
+          <a:fontRef idx="minor">
+            <a:schemeClr val="lt1"/>
+          </a:fontRef>
+        </p:style>
+        <p:txBody>
+          <a:bodyPr rtlCol="0" anchor="ctr"/>
+          <a:lstStyle/>
+          <a:p>
+            <a:pPr algn="ctr"/>
+          </a:p>
+        </p:txBody>
+      </p:sp>
+      <p:sp>
+        <p:nvSpPr>
+          <p:cNvPr id="13" name="TextBox 12"/>
+          <p:cNvSpPr txBox="1"/>
+          <p:nvPr/>
+        </p:nvSpPr>
+        <p:spPr>
+          <a:xfrm>
+            <a:off x="5004000" y="2016000"/>
+            <a:ext cx="792000" cy="936000"/>
+          </a:xfrm>
+          <a:prstGeom prst="rect">
+            <a:avLst/>
+          </a:prstGeom>
+          <a:noFill/>
+        </p:spPr>
+        <p:txBody>
+          <a:bodyPr wrap="square" lIns="36000" rIns="36000" tIns="18000" bIns="18000" anchor="ctr">
+            <a:spAutoFit/>
+          </a:bodyPr>
+          <a:lstStyle/>
+          <a:p>
+            <a:pPr algn="l">
+              <a:lnSpc>
+                <a:spcPct val="110000"/>
+              </a:lnSpc>
+            </a:pPr>
+            <a:r>
+              <a:rPr sz="1250" b="1">
+                <a:solidFill>
+                  <a:srgbClr val="AE172A"/>
+                </a:solidFill>
+                <a:latin typeface="Poppins"/>
+              </a:rPr>
+              <a:t>0,38</a:t>
+            </a:r>
+          </a:p>
+        </p:txBody>
+      </p:sp>
+      <p:sp>
+        <p:nvSpPr>
+          <p:cNvPr id="14" name="TextBox 13"/>
+          <p:cNvSpPr txBox="1"/>
+          <p:nvPr/>
+        </p:nvSpPr>
+        <p:spPr>
+          <a:xfrm>
+            <a:off x="576000" y="2952000"/>
+            <a:ext cx="1583999" cy="936000"/>
+          </a:xfrm>
+          <a:prstGeom prst="rect">
+            <a:avLst/>
+          </a:prstGeom>
+          <a:noFill/>
+        </p:spPr>
+        <p:txBody>
+          <a:bodyPr wrap="square" lIns="36000" rIns="36000" tIns="18000" bIns="18000" anchor="ctr">
+            <a:spAutoFit/>
+          </a:bodyPr>
+          <a:lstStyle/>
+          <a:p>
+            <a:pPr algn="l">
+              <a:lnSpc>
+                <a:spcPct val="110000"/>
+              </a:lnSpc>
+            </a:pPr>
+            <a:r>
+              <a:rPr sz="1150" b="0">
+                <a:solidFill>
+                  <a:srgbClr val="111111"/>
+                </a:solidFill>
+                <a:latin typeface="Poppins"/>
+              </a:rPr>
+              <a:t>SIVOP</a:t>
+            </a:r>
+          </a:p>
+        </p:txBody>
+      </p:sp>
+      <p:sp>
+        <p:nvSpPr>
+          <p:cNvPr id="15" name="Rounded Rectangle 14"/>
+          <p:cNvSpPr/>
+          <p:nvPr/>
+        </p:nvSpPr>
+        <p:spPr>
+          <a:xfrm>
+            <a:off x="2231999" y="3186000"/>
+            <a:ext cx="2700001" cy="468000"/>
+          </a:xfrm>
+          <a:prstGeom prst="roundRect">
+            <a:avLst/>
+          </a:prstGeom>
+          <a:solidFill>
+            <a:srgbClr val="F0F0F0"/>
+          </a:solidFill>
+          <a:ln>
+            <a:noFill/>
+          </a:ln>
+          <a:effectLst/>
+        </p:spPr>
+        <p:style>
+          <a:lnRef idx="1">
+            <a:schemeClr val="accent1"/>
+          </a:lnRef>
+          <a:fillRef idx="3">
+            <a:schemeClr val="accent1"/>
+          </a:fillRef>
+          <a:effectRef idx="2">
+            <a:schemeClr val="accent1"/>
+          </a:effectRef>
+          <a:fontRef idx="minor">
+            <a:schemeClr val="lt1"/>
+          </a:fontRef>
+        </p:style>
+        <p:txBody>
+          <a:bodyPr rtlCol="0" anchor="ctr"/>
+          <a:lstStyle/>
+          <a:p>
+            <a:pPr algn="ctr"/>
+          </a:p>
+        </p:txBody>
+      </p:sp>
+      <p:sp>
+        <p:nvSpPr>
+          <p:cNvPr id="16" name="Rounded Rectangle 15"/>
+          <p:cNvSpPr/>
+          <p:nvPr/>
+        </p:nvSpPr>
+        <p:spPr>
+          <a:xfrm>
+            <a:off x="2231999" y="3186000"/>
+            <a:ext cx="781579" cy="468000"/>
+          </a:xfrm>
+          <a:prstGeom prst="roundRect">
+            <a:avLst/>
+          </a:prstGeom>
+          <a:solidFill>
+            <a:srgbClr val="B9B9B9"/>
+          </a:solidFill>
+          <a:ln>
+            <a:noFill/>
+          </a:ln>
+          <a:effectLst/>
+        </p:spPr>
+        <p:style>
+          <a:lnRef idx="1">
+            <a:schemeClr val="accent1"/>
+          </a:lnRef>
+          <a:fillRef idx="3">
+            <a:schemeClr val="accent1"/>
+          </a:fillRef>
+          <a:effectRef idx="2">
+            <a:schemeClr val="accent1"/>
+          </a:effectRef>
+          <a:fontRef idx="minor">
+            <a:schemeClr val="lt1"/>
+          </a:fontRef>
+        </p:style>
+        <p:txBody>
+          <a:bodyPr rtlCol="0" anchor="ctr"/>
+          <a:lstStyle/>
+          <a:p>
+            <a:pPr algn="ctr"/>
+          </a:p>
+        </p:txBody>
+      </p:sp>
+      <p:sp>
+        <p:nvSpPr>
+          <p:cNvPr id="17" name="TextBox 16"/>
+          <p:cNvSpPr txBox="1"/>
+          <p:nvPr/>
+        </p:nvSpPr>
+        <p:spPr>
+          <a:xfrm>
+            <a:off x="5004000" y="2952000"/>
+            <a:ext cx="792000" cy="936000"/>
+          </a:xfrm>
+          <a:prstGeom prst="rect">
+            <a:avLst/>
+          </a:prstGeom>
+          <a:noFill/>
+        </p:spPr>
+        <p:txBody>
+          <a:bodyPr wrap="square" lIns="36000" rIns="36000" tIns="18000" bIns="18000" anchor="ctr">
+            <a:spAutoFit/>
+          </a:bodyPr>
+          <a:lstStyle/>
+          <a:p>
+            <a:pPr algn="l">
+              <a:lnSpc>
+                <a:spcPct val="110000"/>
+              </a:lnSpc>
+            </a:pPr>
+            <a:r>
+              <a:rPr sz="1250" b="1">
+                <a:solidFill>
+                  <a:srgbClr val="111111"/>
+                </a:solidFill>
+                <a:latin typeface="Poppins"/>
+              </a:rPr>
+              <a:t>0,11</a:t>
+            </a:r>
+          </a:p>
+        </p:txBody>
+      </p:sp>
+      <p:sp>
+        <p:nvSpPr>
+          <p:cNvPr id="18" name="TextBox 17"/>
+          <p:cNvSpPr txBox="1"/>
+          <p:nvPr/>
+        </p:nvSpPr>
+        <p:spPr>
+          <a:xfrm>
+            <a:off x="576000" y="3888000"/>
+            <a:ext cx="1583999" cy="936000"/>
+          </a:xfrm>
+          <a:prstGeom prst="rect">
+            <a:avLst/>
+          </a:prstGeom>
+          <a:noFill/>
+        </p:spPr>
+        <p:txBody>
+          <a:bodyPr wrap="square" lIns="36000" rIns="36000" tIns="18000" bIns="18000" anchor="ctr">
+            <a:spAutoFit/>
+          </a:bodyPr>
+          <a:lstStyle/>
+          <a:p>
+            <a:pPr algn="l">
+              <a:lnSpc>
+                <a:spcPct val="110000"/>
+              </a:lnSpc>
+            </a:pPr>
+            <a:r>
+              <a:rPr sz="1150" b="0">
+                <a:solidFill>
+                  <a:srgbClr val="111111"/>
+                </a:solidFill>
+                <a:latin typeface="Poppins"/>
+              </a:rPr>
+              <a:t>Kaera</a:t>
+            </a:r>
+          </a:p>
+        </p:txBody>
+      </p:sp>
+      <p:sp>
+        <p:nvSpPr>
+          <p:cNvPr id="19" name="Rounded Rectangle 18"/>
+          <p:cNvSpPr/>
+          <p:nvPr/>
+        </p:nvSpPr>
+        <p:spPr>
+          <a:xfrm>
+            <a:off x="2231999" y="4122000"/>
+            <a:ext cx="2700001" cy="468000"/>
+          </a:xfrm>
+          <a:prstGeom prst="roundRect">
+            <a:avLst/>
+          </a:prstGeom>
+          <a:solidFill>
+            <a:srgbClr val="F0F0F0"/>
+          </a:solidFill>
+          <a:ln>
+            <a:noFill/>
+          </a:ln>
+          <a:effectLst/>
+        </p:spPr>
+        <p:style>
+          <a:lnRef idx="1">
+            <a:schemeClr val="accent1"/>
+          </a:lnRef>
+          <a:fillRef idx="3">
+            <a:schemeClr val="accent1"/>
+          </a:fillRef>
+          <a:effectRef idx="2">
+            <a:schemeClr val="accent1"/>
+          </a:effectRef>
+          <a:fontRef idx="minor">
+            <a:schemeClr val="lt1"/>
+          </a:fontRef>
+        </p:style>
+        <p:txBody>
+          <a:bodyPr rtlCol="0" anchor="ctr"/>
+          <a:lstStyle/>
+          <a:p>
+            <a:pPr algn="ctr"/>
+          </a:p>
+        </p:txBody>
+      </p:sp>
+      <p:sp>
+        <p:nvSpPr>
+          <p:cNvPr id="20" name="Rounded Rectangle 19"/>
+          <p:cNvSpPr/>
+          <p:nvPr/>
+        </p:nvSpPr>
+        <p:spPr>
+          <a:xfrm>
+            <a:off x="2231999" y="4122000"/>
+            <a:ext cx="497368" cy="468000"/>
+          </a:xfrm>
+          <a:prstGeom prst="roundRect">
+            <a:avLst/>
+          </a:prstGeom>
+          <a:solidFill>
+            <a:srgbClr val="B9B9B9"/>
+          </a:solidFill>
+          <a:ln>
+            <a:noFill/>
+          </a:ln>
+          <a:effectLst/>
+        </p:spPr>
+        <p:style>
+          <a:lnRef idx="1">
+            <a:schemeClr val="accent1"/>
+          </a:lnRef>
+          <a:fillRef idx="3">
+            <a:schemeClr val="accent1"/>
+          </a:fillRef>
+          <a:effectRef idx="2">
+            <a:schemeClr val="accent1"/>
+          </a:effectRef>
+          <a:fontRef idx="minor">
+            <a:schemeClr val="lt1"/>
+          </a:fontRef>
+        </p:style>
+        <p:txBody>
+          <a:bodyPr rtlCol="0" anchor="ctr"/>
+          <a:lstStyle/>
+          <a:p>
+            <a:pPr algn="ctr"/>
+          </a:p>
+        </p:txBody>
+      </p:sp>
+      <p:sp>
+        <p:nvSpPr>
+          <p:cNvPr id="21" name="TextBox 20"/>
+          <p:cNvSpPr txBox="1"/>
+          <p:nvPr/>
+        </p:nvSpPr>
+        <p:spPr>
+          <a:xfrm>
+            <a:off x="5004000" y="3888000"/>
+            <a:ext cx="792000" cy="936000"/>
+          </a:xfrm>
+          <a:prstGeom prst="rect">
+            <a:avLst/>
+          </a:prstGeom>
+          <a:noFill/>
+        </p:spPr>
+        <p:txBody>
+          <a:bodyPr wrap="square" lIns="36000" rIns="36000" tIns="18000" bIns="18000" anchor="ctr">
+            <a:spAutoFit/>
+          </a:bodyPr>
+          <a:lstStyle/>
+          <a:p>
+            <a:pPr algn="l">
+              <a:lnSpc>
+                <a:spcPct val="110000"/>
+              </a:lnSpc>
+            </a:pPr>
+            <a:r>
+              <a:rPr sz="1250" b="1">
+                <a:solidFill>
+                  <a:srgbClr val="111111"/>
+                </a:solidFill>
+                <a:latin typeface="Poppins"/>
+              </a:rPr>
+              <a:t>0,07</a:t>
+            </a:r>
+          </a:p>
+        </p:txBody>
+      </p:sp>
+      <p:sp>
+        <p:nvSpPr>
+          <p:cNvPr id="22" name="TextBox 21"/>
+          <p:cNvSpPr txBox="1"/>
+          <p:nvPr/>
+        </p:nvSpPr>
+        <p:spPr>
+          <a:xfrm>
+            <a:off x="576000" y="4824000"/>
+            <a:ext cx="1583999" cy="936000"/>
+          </a:xfrm>
+          <a:prstGeom prst="rect">
+            <a:avLst/>
+          </a:prstGeom>
+          <a:noFill/>
+        </p:spPr>
+        <p:txBody>
+          <a:bodyPr wrap="square" lIns="36000" rIns="36000" tIns="18000" bIns="18000" anchor="ctr">
+            <a:spAutoFit/>
+          </a:bodyPr>
+          <a:lstStyle/>
+          <a:p>
+            <a:pPr algn="l">
+              <a:lnSpc>
+                <a:spcPct val="110000"/>
+              </a:lnSpc>
+            </a:pPr>
+            <a:r>
+              <a:rPr sz="1150" b="0">
+                <a:solidFill>
+                  <a:srgbClr val="111111"/>
+                </a:solidFill>
+                <a:latin typeface="Poppins"/>
+              </a:rPr>
+              <a:t>Gandour</a:t>
+            </a:r>
+          </a:p>
+        </p:txBody>
+      </p:sp>
+      <p:sp>
+        <p:nvSpPr>
+          <p:cNvPr id="23" name="Rounded Rectangle 22"/>
+          <p:cNvSpPr/>
+          <p:nvPr/>
+        </p:nvSpPr>
+        <p:spPr>
+          <a:xfrm>
+            <a:off x="2231999" y="5058000"/>
+            <a:ext cx="2700001" cy="468000"/>
+          </a:xfrm>
+          <a:prstGeom prst="roundRect">
+            <a:avLst/>
+          </a:prstGeom>
+          <a:solidFill>
+            <a:srgbClr val="F0F0F0"/>
+          </a:solidFill>
+          <a:ln>
+            <a:noFill/>
+          </a:ln>
+          <a:effectLst/>
+        </p:spPr>
+        <p:style>
+          <a:lnRef idx="1">
+            <a:schemeClr val="accent1"/>
+          </a:lnRef>
+          <a:fillRef idx="3">
+            <a:schemeClr val="accent1"/>
+          </a:fillRef>
+          <a:effectRef idx="2">
+            <a:schemeClr val="accent1"/>
+          </a:effectRef>
+          <a:fontRef idx="minor">
+            <a:schemeClr val="lt1"/>
+          </a:fontRef>
+        </p:style>
+        <p:txBody>
+          <a:bodyPr rtlCol="0" anchor="ctr"/>
+          <a:lstStyle/>
+          <a:p>
+            <a:pPr algn="ctr"/>
+          </a:p>
+        </p:txBody>
+      </p:sp>
+      <p:sp>
+        <p:nvSpPr>
+          <p:cNvPr id="24" name="Rounded Rectangle 23"/>
+          <p:cNvSpPr/>
+          <p:nvPr/>
+        </p:nvSpPr>
+        <p:spPr>
+          <a:xfrm>
+            <a:off x="2231999" y="5058000"/>
+            <a:ext cx="213157" cy="468000"/>
+          </a:xfrm>
+          <a:prstGeom prst="roundRect">
+            <a:avLst/>
+          </a:prstGeom>
+          <a:solidFill>
+            <a:srgbClr val="B9B9B9"/>
+          </a:solidFill>
+          <a:ln>
+            <a:noFill/>
+          </a:ln>
+          <a:effectLst/>
+        </p:spPr>
+        <p:style>
+          <a:lnRef idx="1">
+            <a:schemeClr val="accent1"/>
+          </a:lnRef>
+          <a:fillRef idx="3">
+            <a:schemeClr val="accent1"/>
+          </a:fillRef>
+          <a:effectRef idx="2">
+            <a:schemeClr val="accent1"/>
+          </a:effectRef>
+          <a:fontRef idx="minor">
+            <a:schemeClr val="lt1"/>
+          </a:fontRef>
+        </p:style>
+        <p:txBody>
+          <a:bodyPr rtlCol="0" anchor="ctr"/>
+          <a:lstStyle/>
+          <a:p>
+            <a:pPr algn="ctr"/>
+          </a:p>
+        </p:txBody>
+      </p:sp>
+      <p:sp>
+        <p:nvSpPr>
+          <p:cNvPr id="25" name="TextBox 24"/>
+          <p:cNvSpPr txBox="1"/>
+          <p:nvPr/>
+        </p:nvSpPr>
+        <p:spPr>
+          <a:xfrm>
+            <a:off x="5004000" y="4824000"/>
+            <a:ext cx="792000" cy="936000"/>
+          </a:xfrm>
+          <a:prstGeom prst="rect">
+            <a:avLst/>
+          </a:prstGeom>
+          <a:noFill/>
+        </p:spPr>
+        <p:txBody>
+          <a:bodyPr wrap="square" lIns="36000" rIns="36000" tIns="18000" bIns="18000" anchor="ctr">
+            <a:spAutoFit/>
+          </a:bodyPr>
+          <a:lstStyle/>
+          <a:p>
+            <a:pPr algn="l">
+              <a:lnSpc>
+                <a:spcPct val="110000"/>
+              </a:lnSpc>
+            </a:pPr>
+            <a:r>
+              <a:rPr sz="1250" b="1">
+                <a:solidFill>
+                  <a:srgbClr val="111111"/>
+                </a:solidFill>
+                <a:latin typeface="Poppins"/>
+              </a:rPr>
+              <a:t>0,03</a:t>
+            </a:r>
+          </a:p>
+        </p:txBody>
+      </p:sp>
       <p:graphicFrame>
         <p:nvGraphicFramePr>
-          <p:cNvPr id="11" name="Table 10"/>
+          <p:cNvPr id="26" name="Table 25"/>
           <p:cNvGraphicFramePr>
             <a:graphicFrameLocks noGrp="1"/>
           </p:cNvGraphicFramePr>
@@ -26977,7 +28192,7 @@
       </p:graphicFrame>
       <p:sp>
         <p:nvSpPr>
-          <p:cNvPr id="12" name="TextBox 11"/>
+          <p:cNvPr id="27" name="TextBox 26"/>
           <p:cNvSpPr txBox="1"/>
           <p:nvPr/>
         </p:nvSpPr>

--- a/tmp-tj/261028_dream-cosmetics_audit-reseaux-sociaux_v2.pptx
+++ b/tmp-tj/261028_dream-cosmetics_audit-reseaux-sociaux_v2.pptx
@@ -28,6 +28,8 @@
     <p:sldId id="276" r:id="rId27"/>
     <p:sldId id="277" r:id="rId28"/>
     <p:sldId id="278" r:id="rId29"/>
+    <p:sldId id="279" r:id="rId30"/>
+    <p:sldId id="280" r:id="rId31"/>
   </p:sldIdLst>
   <p:sldSz cx="12192119" cy="6858000" type="screen4x3"/>
   <p:notesSz cx="6858000" cy="9144000"/>
@@ -18550,7 +18552,7 @@
                 </a:solidFill>
                 <a:latin typeface="Poppins"/>
               </a:rPr>
-              <a:t>PLAN 30 JOURS</a:t>
+              <a:t>NOUVELLE LIGNE DE FLYERS · 1 SUR 2</a:t>
             </a:r>
           </a:p>
         </p:txBody>
@@ -18583,13 +18585,13 @@
               </a:lnSpc>
             </a:pPr>
             <a:r>
-              <a:rPr sz="2500" b="1">
+              <a:rPr sz="2100" b="1">
                 <a:solidFill>
                   <a:srgbClr val="111111"/>
                 </a:solidFill>
                 <a:latin typeface="Poppins"/>
               </a:rPr>
-              <a:t>Le premier mois, semaine par semaine</a:t>
+              <a:t>Une nouvelle ligne : trois styles, vos produits au centre</a:t>
             </a:r>
           </a:p>
         </p:txBody>
@@ -18716,53 +18718,9 @@
           </a:p>
         </p:txBody>
       </p:sp>
-      <p:sp>
-        <p:nvSpPr>
-          <p:cNvPr id="9" name="Rounded Rectangle 8"/>
-          <p:cNvSpPr/>
-          <p:nvPr/>
-        </p:nvSpPr>
-        <p:spPr>
-          <a:xfrm>
-            <a:off x="576000" y="1584000"/>
-            <a:ext cx="2628000" cy="576000"/>
-          </a:xfrm>
-          <a:prstGeom prst="roundRect">
-            <a:avLst/>
-          </a:prstGeom>
-          <a:solidFill>
-            <a:srgbClr val="AE172A"/>
-          </a:solidFill>
-          <a:ln>
-            <a:noFill/>
-          </a:ln>
-          <a:effectLst/>
-        </p:spPr>
-        <p:style>
-          <a:lnRef idx="1">
-            <a:schemeClr val="accent1"/>
-          </a:lnRef>
-          <a:fillRef idx="3">
-            <a:schemeClr val="accent1"/>
-          </a:fillRef>
-          <a:effectRef idx="2">
-            <a:schemeClr val="accent1"/>
-          </a:effectRef>
-          <a:fontRef idx="minor">
-            <a:schemeClr val="lt1"/>
-          </a:fontRef>
-        </p:style>
-        <p:txBody>
-          <a:bodyPr rtlCol="0" anchor="ctr"/>
-          <a:lstStyle/>
-          <a:p>
-            <a:pPr algn="ctr"/>
-          </a:p>
-        </p:txBody>
-      </p:sp>
       <p:pic>
         <p:nvPicPr>
-          <p:cNvPr id="10" name="Picture 9" descr="calendar-event_bl.png"/>
+          <p:cNvPr id="9" name="Picture 8" descr="n_d1.jpg"/>
           <p:cNvPicPr>
             <a:picLocks noChangeAspect="1"/>
           </p:cNvPicPr>
@@ -18776,8 +18734,8 @@
         </p:blipFill>
         <p:spPr>
           <a:xfrm>
-            <a:off x="720000" y="1710000"/>
-            <a:ext cx="324000" cy="324000"/>
+            <a:off x="576000" y="1512000"/>
+            <a:ext cx="3528000" cy="4410000"/>
           </a:xfrm>
           <a:prstGeom prst="rect">
             <a:avLst/>
@@ -18786,61 +18744,20 @@
       </p:pic>
       <p:sp>
         <p:nvSpPr>
-          <p:cNvPr id="11" name="TextBox 10"/>
-          <p:cNvSpPr txBox="1"/>
-          <p:nvPr/>
-        </p:nvSpPr>
-        <p:spPr>
-          <a:xfrm>
-            <a:off x="1116000" y="1584000"/>
-            <a:ext cx="2015999" cy="576000"/>
-          </a:xfrm>
-          <a:prstGeom prst="rect">
-            <a:avLst/>
-          </a:prstGeom>
-          <a:noFill/>
-        </p:spPr>
-        <p:txBody>
-          <a:bodyPr wrap="square" lIns="36000" rIns="36000" tIns="18000" bIns="18000" anchor="ctr">
-            <a:spAutoFit/>
-          </a:bodyPr>
-          <a:lstStyle/>
-          <a:p>
-            <a:pPr algn="l">
-              <a:lnSpc>
-                <a:spcPct val="110000"/>
-              </a:lnSpc>
-            </a:pPr>
-            <a:r>
-              <a:rPr sz="1500" b="1">
-                <a:solidFill>
-                  <a:srgbClr val="FFFFFF"/>
-                </a:solidFill>
-                <a:latin typeface="Poppins"/>
-              </a:rPr>
-              <a:t>Semaine 1</a:t>
-            </a:r>
-          </a:p>
-        </p:txBody>
-      </p:sp>
-      <p:sp>
-        <p:nvSpPr>
-          <p:cNvPr id="12" name="Rounded Rectangle 11"/>
+          <p:cNvPr id="10" name="Rounded Rectangle 9"/>
           <p:cNvSpPr/>
           <p:nvPr/>
         </p:nvSpPr>
         <p:spPr>
           <a:xfrm>
-            <a:off x="576000" y="2304000"/>
-            <a:ext cx="2628000" cy="2880000"/>
+            <a:off x="576000" y="6012000"/>
+            <a:ext cx="3528000" cy="306000"/>
           </a:xfrm>
           <a:prstGeom prst="roundRect">
-            <a:avLst>
-              <a:gd name="adj" fmla="val 6000"/>
-            </a:avLst>
+            <a:avLst/>
           </a:prstGeom>
           <a:solidFill>
-            <a:srgbClr val="F4F4F2"/>
+            <a:srgbClr val="FFF0F1"/>
           </a:solidFill>
           <a:ln>
             <a:noFill/>
@@ -18871,14 +18788,14 @@
       </p:sp>
       <p:sp>
         <p:nvSpPr>
-          <p:cNvPr id="13" name="TextBox 12"/>
+          <p:cNvPr id="11" name="TextBox 10"/>
           <p:cNvSpPr txBox="1"/>
           <p:nvPr/>
         </p:nvSpPr>
         <p:spPr>
           <a:xfrm>
-            <a:off x="720000" y="2448000"/>
-            <a:ext cx="2376000" cy="2664000"/>
+            <a:off x="576000" y="6012000"/>
+            <a:ext cx="3528000" cy="306000"/>
           </a:xfrm>
           <a:prstGeom prst="rect">
             <a:avLst/>
@@ -18886,134 +18803,31 @@
           <a:noFill/>
         </p:spPr>
         <p:txBody>
-          <a:bodyPr wrap="square">
+          <a:bodyPr wrap="square" lIns="36000" rIns="36000" tIns="18000" bIns="18000" anchor="ctr">
             <a:spAutoFit/>
           </a:bodyPr>
           <a:lstStyle/>
           <a:p>
-            <a:pPr>
-              <a:spcAft>
-                <a:spcPts val="700"/>
-              </a:spcAft>
-            </a:pPr>
-            <a:r>
-              <a:rPr sz="800">
+            <a:pPr algn="ctr">
+              <a:lnSpc>
+                <a:spcPct val="110000"/>
+              </a:lnSpc>
+            </a:pPr>
+            <a:r>
+              <a:rPr sz="1100" b="1">
                 <a:solidFill>
                   <a:srgbClr val="AE172A"/>
                 </a:solidFill>
                 <a:latin typeface="Poppins"/>
               </a:rPr>
-              <a:t>■  </a:t>
-            </a:r>
-            <a:r>
-              <a:rPr sz="1200">
-                <a:solidFill>
-                  <a:srgbClr val="111111"/>
-                </a:solidFill>
-                <a:latin typeface="Poppins"/>
-              </a:rPr>
-              <a:t>Valider les 6 publications refaites</a:t>
-            </a:r>
-          </a:p>
-          <a:p>
-            <a:pPr>
-              <a:spcAft>
-                <a:spcPts val="700"/>
-              </a:spcAft>
-            </a:pPr>
-            <a:r>
-              <a:rPr sz="800">
-                <a:solidFill>
-                  <a:srgbClr val="AE172A"/>
-                </a:solidFill>
-                <a:latin typeface="Poppins"/>
-              </a:rPr>
-              <a:t>■  </a:t>
-            </a:r>
-            <a:r>
-              <a:rPr sz="1200">
-                <a:solidFill>
-                  <a:srgbClr val="111111"/>
-                </a:solidFill>
-                <a:latin typeface="Poppins"/>
-              </a:rPr>
-              <a:t>Passer les textes en français seul</a:t>
-            </a:r>
-          </a:p>
-          <a:p>
-            <a:pPr>
-              <a:spcAft>
-                <a:spcPts val="700"/>
-              </a:spcAft>
-            </a:pPr>
-            <a:r>
-              <a:rPr sz="800">
-                <a:solidFill>
-                  <a:srgbClr val="AE172A"/>
-                </a:solidFill>
-                <a:latin typeface="Poppins"/>
-              </a:rPr>
-              <a:t>■  </a:t>
-            </a:r>
-            <a:r>
-              <a:rPr sz="1200">
-                <a:solidFill>
-                  <a:srgbClr val="111111"/>
-                </a:solidFill>
-                <a:latin typeface="Poppins"/>
-              </a:rPr>
-              <a:t>Lister les points de vente à citer</a:t>
-            </a:r>
-          </a:p>
-        </p:txBody>
-      </p:sp>
-      <p:sp>
-        <p:nvSpPr>
-          <p:cNvPr id="14" name="Rounded Rectangle 13"/>
-          <p:cNvSpPr/>
-          <p:nvPr/>
-        </p:nvSpPr>
-        <p:spPr>
-          <a:xfrm>
-            <a:off x="3384000" y="1584000"/>
-            <a:ext cx="2628000" cy="576000"/>
-          </a:xfrm>
-          <a:prstGeom prst="roundRect">
-            <a:avLst/>
-          </a:prstGeom>
-          <a:solidFill>
-            <a:srgbClr val="FF8087"/>
-          </a:solidFill>
-          <a:ln>
-            <a:noFill/>
-          </a:ln>
-          <a:effectLst/>
-        </p:spPr>
-        <p:style>
-          <a:lnRef idx="1">
-            <a:schemeClr val="accent1"/>
-          </a:lnRef>
-          <a:fillRef idx="3">
-            <a:schemeClr val="accent1"/>
-          </a:fillRef>
-          <a:effectRef idx="2">
-            <a:schemeClr val="accent1"/>
-          </a:effectRef>
-          <a:fontRef idx="minor">
-            <a:schemeClr val="lt1"/>
-          </a:fontRef>
-        </p:style>
-        <p:txBody>
-          <a:bodyPr rtlCol="0" anchor="ctr"/>
-          <a:lstStyle/>
-          <a:p>
-            <a:pPr algn="ctr"/>
+              <a:t>Style éditorial</a:t>
+            </a:r>
           </a:p>
         </p:txBody>
       </p:sp>
       <p:pic>
         <p:nvPicPr>
-          <p:cNvPr id="15" name="Picture 14" descr="pencil_bl.png"/>
+          <p:cNvPr id="12" name="Picture 11" descr="n_d2.jpg"/>
           <p:cNvPicPr>
             <a:picLocks noChangeAspect="1"/>
           </p:cNvPicPr>
@@ -19027,8 +18841,8 @@
         </p:blipFill>
         <p:spPr>
           <a:xfrm>
-            <a:off x="3528000" y="1710000"/>
-            <a:ext cx="324000" cy="324000"/>
+            <a:off x="4320000" y="1512000"/>
+            <a:ext cx="3528000" cy="4410000"/>
           </a:xfrm>
           <a:prstGeom prst="rect">
             <a:avLst/>
@@ -19037,61 +18851,20 @@
       </p:pic>
       <p:sp>
         <p:nvSpPr>
-          <p:cNvPr id="16" name="TextBox 15"/>
-          <p:cNvSpPr txBox="1"/>
-          <p:nvPr/>
-        </p:nvSpPr>
-        <p:spPr>
-          <a:xfrm>
-            <a:off x="3924000" y="1584000"/>
-            <a:ext cx="2015999" cy="576000"/>
-          </a:xfrm>
-          <a:prstGeom prst="rect">
-            <a:avLst/>
-          </a:prstGeom>
-          <a:noFill/>
-        </p:spPr>
-        <p:txBody>
-          <a:bodyPr wrap="square" lIns="36000" rIns="36000" tIns="18000" bIns="18000" anchor="ctr">
-            <a:spAutoFit/>
-          </a:bodyPr>
-          <a:lstStyle/>
-          <a:p>
-            <a:pPr algn="l">
-              <a:lnSpc>
-                <a:spcPct val="110000"/>
-              </a:lnSpc>
-            </a:pPr>
-            <a:r>
-              <a:rPr sz="1500" b="1">
-                <a:solidFill>
-                  <a:srgbClr val="FFFFFF"/>
-                </a:solidFill>
-                <a:latin typeface="Poppins"/>
-              </a:rPr>
-              <a:t>Semaine 2</a:t>
-            </a:r>
-          </a:p>
-        </p:txBody>
-      </p:sp>
-      <p:sp>
-        <p:nvSpPr>
-          <p:cNvPr id="17" name="Rounded Rectangle 16"/>
+          <p:cNvPr id="13" name="Rounded Rectangle 12"/>
           <p:cNvSpPr/>
           <p:nvPr/>
         </p:nvSpPr>
         <p:spPr>
           <a:xfrm>
-            <a:off x="3384000" y="2304000"/>
-            <a:ext cx="2628000" cy="2880000"/>
+            <a:off x="4320000" y="6012000"/>
+            <a:ext cx="3528000" cy="306000"/>
           </a:xfrm>
           <a:prstGeom prst="roundRect">
-            <a:avLst>
-              <a:gd name="adj" fmla="val 6000"/>
-            </a:avLst>
+            <a:avLst/>
           </a:prstGeom>
           <a:solidFill>
-            <a:srgbClr val="F4F4F2"/>
+            <a:srgbClr val="FFF0F1"/>
           </a:solidFill>
           <a:ln>
             <a:noFill/>
@@ -19122,14 +18895,14 @@
       </p:sp>
       <p:sp>
         <p:nvSpPr>
-          <p:cNvPr id="18" name="TextBox 17"/>
+          <p:cNvPr id="14" name="TextBox 13"/>
           <p:cNvSpPr txBox="1"/>
           <p:nvPr/>
         </p:nvSpPr>
         <p:spPr>
           <a:xfrm>
-            <a:off x="3528000" y="2448000"/>
-            <a:ext cx="2376000" cy="2664000"/>
+            <a:off x="4320000" y="6012000"/>
+            <a:ext cx="3528000" cy="306000"/>
           </a:xfrm>
           <a:prstGeom prst="rect">
             <a:avLst/>
@@ -19137,134 +18910,31 @@
           <a:noFill/>
         </p:spPr>
         <p:txBody>
-          <a:bodyPr wrap="square">
+          <a:bodyPr wrap="square" lIns="36000" rIns="36000" tIns="18000" bIns="18000" anchor="ctr">
             <a:spAutoFit/>
           </a:bodyPr>
           <a:lstStyle/>
           <a:p>
-            <a:pPr>
-              <a:spcAft>
-                <a:spcPts val="700"/>
-              </a:spcAft>
-            </a:pPr>
-            <a:r>
-              <a:rPr sz="800">
+            <a:pPr algn="ctr">
+              <a:lnSpc>
+                <a:spcPct val="110000"/>
+              </a:lnSpc>
+            </a:pPr>
+            <a:r>
+              <a:rPr sz="1100" b="1">
                 <a:solidFill>
                   <a:srgbClr val="AE172A"/>
                 </a:solidFill>
                 <a:latin typeface="Poppins"/>
               </a:rPr>
-              <a:t>■  </a:t>
-            </a:r>
-            <a:r>
-              <a:rPr sz="1200">
-                <a:solidFill>
-                  <a:srgbClr val="111111"/>
-                </a:solidFill>
-                <a:latin typeface="Poppins"/>
-              </a:rPr>
-              <a:t>Publier les 6 avant / après</a:t>
-            </a:r>
-          </a:p>
-          <a:p>
-            <a:pPr>
-              <a:spcAft>
-                <a:spcPts val="700"/>
-              </a:spcAft>
-            </a:pPr>
-            <a:r>
-              <a:rPr sz="800">
-                <a:solidFill>
-                  <a:srgbClr val="AE172A"/>
-                </a:solidFill>
-                <a:latin typeface="Poppins"/>
-              </a:rPr>
-              <a:t>■  </a:t>
-            </a:r>
-            <a:r>
-              <a:rPr sz="1200">
-                <a:solidFill>
-                  <a:srgbClr val="111111"/>
-                </a:solidFill>
-                <a:latin typeface="Poppins"/>
-              </a:rPr>
-              <a:t>3 publications par semaine, 12 h ou 19 h</a:t>
-            </a:r>
-          </a:p>
-          <a:p>
-            <a:pPr>
-              <a:spcAft>
-                <a:spcPts val="700"/>
-              </a:spcAft>
-            </a:pPr>
-            <a:r>
-              <a:rPr sz="800">
-                <a:solidFill>
-                  <a:srgbClr val="AE172A"/>
-                </a:solidFill>
-                <a:latin typeface="Poppins"/>
-              </a:rPr>
-              <a:t>■  </a:t>
-            </a:r>
-            <a:r>
-              <a:rPr sz="1200">
-                <a:solidFill>
-                  <a:srgbClr val="111111"/>
-                </a:solidFill>
-                <a:latin typeface="Poppins"/>
-              </a:rPr>
-              <a:t>Répondre à chaque commentaire</a:t>
-            </a:r>
-          </a:p>
-        </p:txBody>
-      </p:sp>
-      <p:sp>
-        <p:nvSpPr>
-          <p:cNvPr id="19" name="Rounded Rectangle 18"/>
-          <p:cNvSpPr/>
-          <p:nvPr/>
-        </p:nvSpPr>
-        <p:spPr>
-          <a:xfrm>
-            <a:off x="6192000" y="1584000"/>
-            <a:ext cx="2628000" cy="576000"/>
-          </a:xfrm>
-          <a:prstGeom prst="roundRect">
-            <a:avLst/>
-          </a:prstGeom>
-          <a:solidFill>
-            <a:srgbClr val="AE172A"/>
-          </a:solidFill>
-          <a:ln>
-            <a:noFill/>
-          </a:ln>
-          <a:effectLst/>
-        </p:spPr>
-        <p:style>
-          <a:lnRef idx="1">
-            <a:schemeClr val="accent1"/>
-          </a:lnRef>
-          <a:fillRef idx="3">
-            <a:schemeClr val="accent1"/>
-          </a:fillRef>
-          <a:effectRef idx="2">
-            <a:schemeClr val="accent1"/>
-          </a:effectRef>
-          <a:fontRef idx="minor">
-            <a:schemeClr val="lt1"/>
-          </a:fontRef>
-        </p:style>
-        <p:txBody>
-          <a:bodyPr rtlCol="0" anchor="ctr"/>
-          <a:lstStyle/>
-          <a:p>
-            <a:pPr algn="ctr"/>
+              <a:t>Style aplat couleur</a:t>
+            </a:r>
           </a:p>
         </p:txBody>
       </p:sp>
       <p:pic>
         <p:nvPicPr>
-          <p:cNvPr id="20" name="Picture 19" descr="video_bl.png"/>
+          <p:cNvPr id="15" name="Picture 14" descr="n_d3.jpg"/>
           <p:cNvPicPr>
             <a:picLocks noChangeAspect="1"/>
           </p:cNvPicPr>
@@ -19278,8 +18948,8 @@
         </p:blipFill>
         <p:spPr>
           <a:xfrm>
-            <a:off x="6336000" y="1710000"/>
-            <a:ext cx="324000" cy="324000"/>
+            <a:off x="8064000" y="1512000"/>
+            <a:ext cx="3528000" cy="4410000"/>
           </a:xfrm>
           <a:prstGeom prst="rect">
             <a:avLst/>
@@ -19288,61 +18958,20 @@
       </p:pic>
       <p:sp>
         <p:nvSpPr>
-          <p:cNvPr id="21" name="TextBox 20"/>
-          <p:cNvSpPr txBox="1"/>
-          <p:nvPr/>
-        </p:nvSpPr>
-        <p:spPr>
-          <a:xfrm>
-            <a:off x="6732000" y="1584000"/>
-            <a:ext cx="2015999" cy="576000"/>
-          </a:xfrm>
-          <a:prstGeom prst="rect">
-            <a:avLst/>
-          </a:prstGeom>
-          <a:noFill/>
-        </p:spPr>
-        <p:txBody>
-          <a:bodyPr wrap="square" lIns="36000" rIns="36000" tIns="18000" bIns="18000" anchor="ctr">
-            <a:spAutoFit/>
-          </a:bodyPr>
-          <a:lstStyle/>
-          <a:p>
-            <a:pPr algn="l">
-              <a:lnSpc>
-                <a:spcPct val="110000"/>
-              </a:lnSpc>
-            </a:pPr>
-            <a:r>
-              <a:rPr sz="1500" b="1">
-                <a:solidFill>
-                  <a:srgbClr val="FFFFFF"/>
-                </a:solidFill>
-                <a:latin typeface="Poppins"/>
-              </a:rPr>
-              <a:t>Semaine 3</a:t>
-            </a:r>
-          </a:p>
-        </p:txBody>
-      </p:sp>
-      <p:sp>
-        <p:nvSpPr>
-          <p:cNvPr id="22" name="Rounded Rectangle 21"/>
+          <p:cNvPr id="16" name="Rounded Rectangle 15"/>
           <p:cNvSpPr/>
           <p:nvPr/>
         </p:nvSpPr>
         <p:spPr>
           <a:xfrm>
-            <a:off x="6192000" y="2304000"/>
-            <a:ext cx="2628000" cy="2880000"/>
+            <a:off x="8064000" y="6012000"/>
+            <a:ext cx="3528000" cy="306000"/>
           </a:xfrm>
           <a:prstGeom prst="roundRect">
-            <a:avLst>
-              <a:gd name="adj" fmla="val 6000"/>
-            </a:avLst>
+            <a:avLst/>
           </a:prstGeom>
           <a:solidFill>
-            <a:srgbClr val="F4F4F2"/>
+            <a:srgbClr val="FFF0F1"/>
           </a:solidFill>
           <a:ln>
             <a:noFill/>
@@ -19373,180 +19002,14 @@
       </p:sp>
       <p:sp>
         <p:nvSpPr>
-          <p:cNvPr id="23" name="TextBox 22"/>
+          <p:cNvPr id="17" name="TextBox 16"/>
           <p:cNvSpPr txBox="1"/>
           <p:nvPr/>
         </p:nvSpPr>
         <p:spPr>
           <a:xfrm>
-            <a:off x="6336000" y="2448000"/>
-            <a:ext cx="2376000" cy="2664000"/>
-          </a:xfrm>
-          <a:prstGeom prst="rect">
-            <a:avLst/>
-          </a:prstGeom>
-          <a:noFill/>
-        </p:spPr>
-        <p:txBody>
-          <a:bodyPr wrap="square">
-            <a:spAutoFit/>
-          </a:bodyPr>
-          <a:lstStyle/>
-          <a:p>
-            <a:pPr>
-              <a:spcAft>
-                <a:spcPts val="700"/>
-              </a:spcAft>
-            </a:pPr>
-            <a:r>
-              <a:rPr sz="800">
-                <a:solidFill>
-                  <a:srgbClr val="AE172A"/>
-                </a:solidFill>
-                <a:latin typeface="Poppins"/>
-              </a:rPr>
-              <a:t>■  </a:t>
-            </a:r>
-            <a:r>
-              <a:rPr sz="1200">
-                <a:solidFill>
-                  <a:srgbClr val="111111"/>
-                </a:solidFill>
-                <a:latin typeface="Poppins"/>
-              </a:rPr>
-              <a:t>Tourner 2 vidéos de routine</a:t>
-            </a:r>
-          </a:p>
-          <a:p>
-            <a:pPr>
-              <a:spcAft>
-                <a:spcPts val="700"/>
-              </a:spcAft>
-            </a:pPr>
-            <a:r>
-              <a:rPr sz="800">
-                <a:solidFill>
-                  <a:srgbClr val="AE172A"/>
-                </a:solidFill>
-                <a:latin typeface="Poppins"/>
-              </a:rPr>
-              <a:t>■  </a:t>
-            </a:r>
-            <a:r>
-              <a:rPr sz="1200">
-                <a:solidFill>
-                  <a:srgbClr val="111111"/>
-                </a:solidFill>
-                <a:latin typeface="Poppins"/>
-              </a:rPr>
-              <a:t>Un sondage Babymed pour les mamans</a:t>
-            </a:r>
-          </a:p>
-          <a:p>
-            <a:pPr>
-              <a:spcAft>
-                <a:spcPts val="700"/>
-              </a:spcAft>
-            </a:pPr>
-            <a:r>
-              <a:rPr sz="800">
-                <a:solidFill>
-                  <a:srgbClr val="AE172A"/>
-                </a:solidFill>
-                <a:latin typeface="Poppins"/>
-              </a:rPr>
-              <a:t>■  </a:t>
-            </a:r>
-            <a:r>
-              <a:rPr sz="1200">
-                <a:solidFill>
-                  <a:srgbClr val="111111"/>
-                </a:solidFill>
-                <a:latin typeface="Poppins"/>
-              </a:rPr>
-              <a:t>Première publication LinkedIn</a:t>
-            </a:r>
-          </a:p>
-        </p:txBody>
-      </p:sp>
-      <p:sp>
-        <p:nvSpPr>
-          <p:cNvPr id="24" name="Rounded Rectangle 23"/>
-          <p:cNvSpPr/>
-          <p:nvPr/>
-        </p:nvSpPr>
-        <p:spPr>
-          <a:xfrm>
-            <a:off x="9000000" y="1584000"/>
-            <a:ext cx="2628000" cy="576000"/>
-          </a:xfrm>
-          <a:prstGeom prst="roundRect">
-            <a:avLst/>
-          </a:prstGeom>
-          <a:solidFill>
-            <a:srgbClr val="FF8087"/>
-          </a:solidFill>
-          <a:ln>
-            <a:noFill/>
-          </a:ln>
-          <a:effectLst/>
-        </p:spPr>
-        <p:style>
-          <a:lnRef idx="1">
-            <a:schemeClr val="accent1"/>
-          </a:lnRef>
-          <a:fillRef idx="3">
-            <a:schemeClr val="accent1"/>
-          </a:fillRef>
-          <a:effectRef idx="2">
-            <a:schemeClr val="accent1"/>
-          </a:effectRef>
-          <a:fontRef idx="minor">
-            <a:schemeClr val="lt1"/>
-          </a:fontRef>
-        </p:style>
-        <p:txBody>
-          <a:bodyPr rtlCol="0" anchor="ctr"/>
-          <a:lstStyle/>
-          <a:p>
-            <a:pPr algn="ctr"/>
-          </a:p>
-        </p:txBody>
-      </p:sp>
-      <p:pic>
-        <p:nvPicPr>
-          <p:cNvPr id="25" name="Picture 24" descr="trending-up_bl.png"/>
-          <p:cNvPicPr>
-            <a:picLocks noChangeAspect="1"/>
-          </p:cNvPicPr>
-          <p:nvPr/>
-        </p:nvPicPr>
-        <p:blipFill>
-          <a:blip r:embed="rId6"/>
-          <a:stretch>
-            <a:fillRect/>
-          </a:stretch>
-        </p:blipFill>
-        <p:spPr>
-          <a:xfrm>
-            <a:off x="9144000" y="1710000"/>
-            <a:ext cx="324000" cy="324000"/>
-          </a:xfrm>
-          <a:prstGeom prst="rect">
-            <a:avLst/>
-          </a:prstGeom>
-        </p:spPr>
-      </p:pic>
-      <p:sp>
-        <p:nvSpPr>
-          <p:cNvPr id="26" name="TextBox 25"/>
-          <p:cNvSpPr txBox="1"/>
-          <p:nvPr/>
-        </p:nvSpPr>
-        <p:spPr>
-          <a:xfrm>
-            <a:off x="9540000" y="1584000"/>
-            <a:ext cx="2015999" cy="576000"/>
+            <a:off x="8064000" y="6012000"/>
+            <a:ext cx="3528000" cy="306000"/>
           </a:xfrm>
           <a:prstGeom prst="rect">
             <a:avLst/>
@@ -19559,272 +19022,19 @@
           </a:bodyPr>
           <a:lstStyle/>
           <a:p>
-            <a:pPr algn="l">
-              <a:lnSpc>
-                <a:spcPct val="110000"/>
-              </a:lnSpc>
-            </a:pPr>
-            <a:r>
-              <a:rPr sz="1500" b="1">
-                <a:solidFill>
-                  <a:srgbClr val="FFFFFF"/>
-                </a:solidFill>
-                <a:latin typeface="Poppins"/>
-              </a:rPr>
-              <a:t>Semaine 4</a:t>
-            </a:r>
-          </a:p>
-        </p:txBody>
-      </p:sp>
-      <p:sp>
-        <p:nvSpPr>
-          <p:cNvPr id="27" name="Rounded Rectangle 26"/>
-          <p:cNvSpPr/>
-          <p:nvPr/>
-        </p:nvSpPr>
-        <p:spPr>
-          <a:xfrm>
-            <a:off x="9000000" y="2304000"/>
-            <a:ext cx="2628000" cy="2880000"/>
-          </a:xfrm>
-          <a:prstGeom prst="roundRect">
-            <a:avLst>
-              <a:gd name="adj" fmla="val 6000"/>
-            </a:avLst>
-          </a:prstGeom>
-          <a:solidFill>
-            <a:srgbClr val="F4F4F2"/>
-          </a:solidFill>
-          <a:ln>
-            <a:noFill/>
-          </a:ln>
-          <a:effectLst/>
-        </p:spPr>
-        <p:style>
-          <a:lnRef idx="1">
-            <a:schemeClr val="accent1"/>
-          </a:lnRef>
-          <a:fillRef idx="3">
-            <a:schemeClr val="accent1"/>
-          </a:fillRef>
-          <a:effectRef idx="2">
-            <a:schemeClr val="accent1"/>
-          </a:effectRef>
-          <a:fontRef idx="minor">
-            <a:schemeClr val="lt1"/>
-          </a:fontRef>
-        </p:style>
-        <p:txBody>
-          <a:bodyPr rtlCol="0" anchor="ctr"/>
-          <a:lstStyle/>
-          <a:p>
-            <a:pPr algn="ctr"/>
-          </a:p>
-        </p:txBody>
-      </p:sp>
-      <p:sp>
-        <p:nvSpPr>
-          <p:cNvPr id="28" name="TextBox 27"/>
-          <p:cNvSpPr txBox="1"/>
-          <p:nvPr/>
-        </p:nvSpPr>
-        <p:spPr>
-          <a:xfrm>
-            <a:off x="9144000" y="2448000"/>
-            <a:ext cx="2376000" cy="2664000"/>
-          </a:xfrm>
-          <a:prstGeom prst="rect">
-            <a:avLst/>
-          </a:prstGeom>
-          <a:noFill/>
-        </p:spPr>
-        <p:txBody>
-          <a:bodyPr wrap="square">
-            <a:spAutoFit/>
-          </a:bodyPr>
-          <a:lstStyle/>
-          <a:p>
-            <a:pPr>
-              <a:spcAft>
-                <a:spcPts val="700"/>
-              </a:spcAft>
-            </a:pPr>
-            <a:r>
-              <a:rPr sz="800">
+            <a:pPr algn="ctr">
+              <a:lnSpc>
+                <a:spcPct val="110000"/>
+              </a:lnSpc>
+            </a:pPr>
+            <a:r>
+              <a:rPr sz="1100" b="1">
                 <a:solidFill>
                   <a:srgbClr val="AE172A"/>
                 </a:solidFill>
                 <a:latin typeface="Poppins"/>
               </a:rPr>
-              <a:t>■  </a:t>
-            </a:r>
-            <a:r>
-              <a:rPr sz="1200">
-                <a:solidFill>
-                  <a:srgbClr val="111111"/>
-                </a:solidFill>
-                <a:latin typeface="Poppins"/>
-              </a:rPr>
-              <a:t>Comparer aux 138 réactions de départ</a:t>
-            </a:r>
-          </a:p>
-          <a:p>
-            <a:pPr>
-              <a:spcAft>
-                <a:spcPts val="700"/>
-              </a:spcAft>
-            </a:pPr>
-            <a:r>
-              <a:rPr sz="800">
-                <a:solidFill>
-                  <a:srgbClr val="AE172A"/>
-                </a:solidFill>
-                <a:latin typeface="Poppins"/>
-              </a:rPr>
-              <a:t>■  </a:t>
-            </a:r>
-            <a:r>
-              <a:rPr sz="1200">
-                <a:solidFill>
-                  <a:srgbClr val="111111"/>
-                </a:solidFill>
-                <a:latin typeface="Poppins"/>
-              </a:rPr>
-              <a:t>Garder ce qui marche</a:t>
-            </a:r>
-          </a:p>
-          <a:p>
-            <a:pPr>
-              <a:spcAft>
-                <a:spcPts val="700"/>
-              </a:spcAft>
-            </a:pPr>
-            <a:r>
-              <a:rPr sz="800">
-                <a:solidFill>
-                  <a:srgbClr val="AE172A"/>
-                </a:solidFill>
-                <a:latin typeface="Poppins"/>
-              </a:rPr>
-              <a:t>■  </a:t>
-            </a:r>
-            <a:r>
-              <a:rPr sz="1200">
-                <a:solidFill>
-                  <a:srgbClr val="111111"/>
-                </a:solidFill>
-                <a:latin typeface="Poppins"/>
-              </a:rPr>
-              <a:t>Préparer le mois suivant</a:t>
-            </a:r>
-          </a:p>
-        </p:txBody>
-      </p:sp>
-      <p:sp>
-        <p:nvSpPr>
-          <p:cNvPr id="29" name="Rounded Rectangle 28"/>
-          <p:cNvSpPr/>
-          <p:nvPr/>
-        </p:nvSpPr>
-        <p:spPr>
-          <a:xfrm>
-            <a:off x="576000" y="5364000"/>
-            <a:ext cx="11052000" cy="864000"/>
-          </a:xfrm>
-          <a:prstGeom prst="roundRect">
-            <a:avLst>
-              <a:gd name="adj" fmla="val 6000"/>
-            </a:avLst>
-          </a:prstGeom>
-          <a:solidFill>
-            <a:srgbClr val="2A0E12"/>
-          </a:solidFill>
-          <a:ln>
-            <a:noFill/>
-          </a:ln>
-          <a:effectLst/>
-        </p:spPr>
-        <p:style>
-          <a:lnRef idx="1">
-            <a:schemeClr val="accent1"/>
-          </a:lnRef>
-          <a:fillRef idx="3">
-            <a:schemeClr val="accent1"/>
-          </a:fillRef>
-          <a:effectRef idx="2">
-            <a:schemeClr val="accent1"/>
-          </a:effectRef>
-          <a:fontRef idx="minor">
-            <a:schemeClr val="lt1"/>
-          </a:fontRef>
-        </p:style>
-        <p:txBody>
-          <a:bodyPr rtlCol="0" anchor="ctr"/>
-          <a:lstStyle/>
-          <a:p>
-            <a:pPr algn="ctr"/>
-          </a:p>
-        </p:txBody>
-      </p:sp>
-      <p:pic>
-        <p:nvPicPr>
-          <p:cNvPr id="30" name="Picture 29" descr="target-arrow_bl.png"/>
-          <p:cNvPicPr>
-            <a:picLocks noChangeAspect="1"/>
-          </p:cNvPicPr>
-          <p:nvPr/>
-        </p:nvPicPr>
-        <p:blipFill>
-          <a:blip r:embed="rId7"/>
-          <a:stretch>
-            <a:fillRect/>
-          </a:stretch>
-        </p:blipFill>
-        <p:spPr>
-          <a:xfrm>
-            <a:off x="792000" y="5544000"/>
-            <a:ext cx="503999" cy="503999"/>
-          </a:xfrm>
-          <a:prstGeom prst="rect">
-            <a:avLst/>
-          </a:prstGeom>
-        </p:spPr>
-      </p:pic>
-      <p:sp>
-        <p:nvSpPr>
-          <p:cNvPr id="31" name="TextBox 30"/>
-          <p:cNvSpPr txBox="1"/>
-          <p:nvPr/>
-        </p:nvSpPr>
-        <p:spPr>
-          <a:xfrm>
-            <a:off x="1440000" y="5364000"/>
-            <a:ext cx="10008000" cy="864000"/>
-          </a:xfrm>
-          <a:prstGeom prst="rect">
-            <a:avLst/>
-          </a:prstGeom>
-          <a:noFill/>
-        </p:spPr>
-        <p:txBody>
-          <a:bodyPr wrap="square" lIns="36000" rIns="36000" tIns="18000" bIns="18000" anchor="ctr">
-            <a:spAutoFit/>
-          </a:bodyPr>
-          <a:lstStyle/>
-          <a:p>
-            <a:pPr algn="l">
-              <a:lnSpc>
-                <a:spcPct val="110000"/>
-              </a:lnSpc>
-            </a:pPr>
-            <a:r>
-              <a:rPr sz="1300" b="1">
-                <a:solidFill>
-                  <a:srgbClr val="FFFFFF"/>
-                </a:solidFill>
-                <a:latin typeface="Poppins"/>
-              </a:rPr>
-              <a:t>Objectif proposé à 30 jours : passer de 138 à 300 réactions médianes sur Facebook, et d’un commentaire sur trois publications Instagram à une sur deux.</a:t>
+              <a:t>Style fiche sombre</a:t>
             </a:r>
           </a:p>
         </p:txBody>
@@ -19949,7 +19159,7 @@
                 </a:solidFill>
                 <a:latin typeface="Poppins"/>
               </a:rPr>
-              <a:t>TABLEAU DE BORD</a:t>
+              <a:t>NOUVELLE LIGNE DE FLYERS · 2 SUR 2</a:t>
             </a:r>
           </a:p>
         </p:txBody>
@@ -19988,7 +19198,7 @@
                 </a:solidFill>
                 <a:latin typeface="Poppins"/>
               </a:rPr>
-              <a:t>Les chiffres à suivre chaque semaine</a:t>
+              <a:t>Trois styles qui alternent pour un fil varié</a:t>
             </a:r>
           </a:p>
         </p:txBody>
@@ -20072,6 +19282,2012 @@
                 <a:latin typeface="Poppins"/>
               </a:rPr>
               <a:t>22 / 23</a:t>
+            </a:r>
+          </a:p>
+        </p:txBody>
+      </p:sp>
+      <p:sp>
+        <p:nvSpPr>
+          <p:cNvPr id="8" name="TextBox 7"/>
+          <p:cNvSpPr txBox="1"/>
+          <p:nvPr/>
+        </p:nvSpPr>
+        <p:spPr>
+          <a:xfrm>
+            <a:off x="576000" y="6498000"/>
+            <a:ext cx="7920000" cy="216000"/>
+          </a:xfrm>
+          <a:prstGeom prst="rect">
+            <a:avLst/>
+          </a:prstGeom>
+          <a:noFill/>
+        </p:spPr>
+        <p:txBody>
+          <a:bodyPr wrap="square" lIns="36000" rIns="36000" tIns="18000" bIns="18000" anchor="t">
+            <a:spAutoFit/>
+          </a:bodyPr>
+          <a:lstStyle/>
+          <a:p>
+            <a:pPr algn="l">
+              <a:lnSpc>
+                <a:spcPct val="110000"/>
+              </a:lnSpc>
+            </a:pPr>
+            <a:r>
+              <a:rPr sz="900" b="0">
+                <a:solidFill>
+                  <a:srgbClr val="5A5A5A"/>
+                </a:solidFill>
+                <a:latin typeface="Poppins"/>
+              </a:rPr>
+              <a:t>Dream Cosmetics · Audit réseaux sociaux · relevé du 28/10/2026</a:t>
+            </a:r>
+          </a:p>
+        </p:txBody>
+      </p:sp>
+      <p:pic>
+        <p:nvPicPr>
+          <p:cNvPr id="9" name="Picture 8" descr="n_d4.jpg"/>
+          <p:cNvPicPr>
+            <a:picLocks noChangeAspect="1"/>
+          </p:cNvPicPr>
+          <p:nvPr/>
+        </p:nvPicPr>
+        <p:blipFill>
+          <a:blip r:embed="rId3"/>
+          <a:stretch>
+            <a:fillRect/>
+          </a:stretch>
+        </p:blipFill>
+        <p:spPr>
+          <a:xfrm>
+            <a:off x="576000" y="1512000"/>
+            <a:ext cx="3528000" cy="4410000"/>
+          </a:xfrm>
+          <a:prstGeom prst="rect">
+            <a:avLst/>
+          </a:prstGeom>
+        </p:spPr>
+      </p:pic>
+      <p:sp>
+        <p:nvSpPr>
+          <p:cNvPr id="10" name="Rounded Rectangle 9"/>
+          <p:cNvSpPr/>
+          <p:nvPr/>
+        </p:nvSpPr>
+        <p:spPr>
+          <a:xfrm>
+            <a:off x="576000" y="6012000"/>
+            <a:ext cx="3528000" cy="306000"/>
+          </a:xfrm>
+          <a:prstGeom prst="roundRect">
+            <a:avLst/>
+          </a:prstGeom>
+          <a:solidFill>
+            <a:srgbClr val="FFF0F1"/>
+          </a:solidFill>
+          <a:ln>
+            <a:noFill/>
+          </a:ln>
+          <a:effectLst/>
+        </p:spPr>
+        <p:style>
+          <a:lnRef idx="1">
+            <a:schemeClr val="accent1"/>
+          </a:lnRef>
+          <a:fillRef idx="3">
+            <a:schemeClr val="accent1"/>
+          </a:fillRef>
+          <a:effectRef idx="2">
+            <a:schemeClr val="accent1"/>
+          </a:effectRef>
+          <a:fontRef idx="minor">
+            <a:schemeClr val="lt1"/>
+          </a:fontRef>
+        </p:style>
+        <p:txBody>
+          <a:bodyPr rtlCol="0" anchor="ctr"/>
+          <a:lstStyle/>
+          <a:p>
+            <a:pPr algn="ctr"/>
+          </a:p>
+        </p:txBody>
+      </p:sp>
+      <p:sp>
+        <p:nvSpPr>
+          <p:cNvPr id="11" name="TextBox 10"/>
+          <p:cNvSpPr txBox="1"/>
+          <p:nvPr/>
+        </p:nvSpPr>
+        <p:spPr>
+          <a:xfrm>
+            <a:off x="576000" y="6012000"/>
+            <a:ext cx="3528000" cy="306000"/>
+          </a:xfrm>
+          <a:prstGeom prst="rect">
+            <a:avLst/>
+          </a:prstGeom>
+          <a:noFill/>
+        </p:spPr>
+        <p:txBody>
+          <a:bodyPr wrap="square" lIns="36000" rIns="36000" tIns="18000" bIns="18000" anchor="ctr">
+            <a:spAutoFit/>
+          </a:bodyPr>
+          <a:lstStyle/>
+          <a:p>
+            <a:pPr algn="ctr">
+              <a:lnSpc>
+                <a:spcPct val="110000"/>
+              </a:lnSpc>
+            </a:pPr>
+            <a:r>
+              <a:rPr sz="1100" b="1">
+                <a:solidFill>
+                  <a:srgbClr val="AE172A"/>
+                </a:solidFill>
+                <a:latin typeface="Poppins"/>
+              </a:rPr>
+              <a:t>Style éditorial</a:t>
+            </a:r>
+          </a:p>
+        </p:txBody>
+      </p:sp>
+      <p:pic>
+        <p:nvPicPr>
+          <p:cNvPr id="12" name="Picture 11" descr="n_d5.jpg"/>
+          <p:cNvPicPr>
+            <a:picLocks noChangeAspect="1"/>
+          </p:cNvPicPr>
+          <p:nvPr/>
+        </p:nvPicPr>
+        <p:blipFill>
+          <a:blip r:embed="rId4"/>
+          <a:stretch>
+            <a:fillRect/>
+          </a:stretch>
+        </p:blipFill>
+        <p:spPr>
+          <a:xfrm>
+            <a:off x="4320000" y="1512000"/>
+            <a:ext cx="3528000" cy="4410000"/>
+          </a:xfrm>
+          <a:prstGeom prst="rect">
+            <a:avLst/>
+          </a:prstGeom>
+        </p:spPr>
+      </p:pic>
+      <p:sp>
+        <p:nvSpPr>
+          <p:cNvPr id="13" name="Rounded Rectangle 12"/>
+          <p:cNvSpPr/>
+          <p:nvPr/>
+        </p:nvSpPr>
+        <p:spPr>
+          <a:xfrm>
+            <a:off x="4320000" y="6012000"/>
+            <a:ext cx="3528000" cy="306000"/>
+          </a:xfrm>
+          <a:prstGeom prst="roundRect">
+            <a:avLst/>
+          </a:prstGeom>
+          <a:solidFill>
+            <a:srgbClr val="FFF0F1"/>
+          </a:solidFill>
+          <a:ln>
+            <a:noFill/>
+          </a:ln>
+          <a:effectLst/>
+        </p:spPr>
+        <p:style>
+          <a:lnRef idx="1">
+            <a:schemeClr val="accent1"/>
+          </a:lnRef>
+          <a:fillRef idx="3">
+            <a:schemeClr val="accent1"/>
+          </a:fillRef>
+          <a:effectRef idx="2">
+            <a:schemeClr val="accent1"/>
+          </a:effectRef>
+          <a:fontRef idx="minor">
+            <a:schemeClr val="lt1"/>
+          </a:fontRef>
+        </p:style>
+        <p:txBody>
+          <a:bodyPr rtlCol="0" anchor="ctr"/>
+          <a:lstStyle/>
+          <a:p>
+            <a:pPr algn="ctr"/>
+          </a:p>
+        </p:txBody>
+      </p:sp>
+      <p:sp>
+        <p:nvSpPr>
+          <p:cNvPr id="14" name="TextBox 13"/>
+          <p:cNvSpPr txBox="1"/>
+          <p:nvPr/>
+        </p:nvSpPr>
+        <p:spPr>
+          <a:xfrm>
+            <a:off x="4320000" y="6012000"/>
+            <a:ext cx="3528000" cy="306000"/>
+          </a:xfrm>
+          <a:prstGeom prst="rect">
+            <a:avLst/>
+          </a:prstGeom>
+          <a:noFill/>
+        </p:spPr>
+        <p:txBody>
+          <a:bodyPr wrap="square" lIns="36000" rIns="36000" tIns="18000" bIns="18000" anchor="ctr">
+            <a:spAutoFit/>
+          </a:bodyPr>
+          <a:lstStyle/>
+          <a:p>
+            <a:pPr algn="ctr">
+              <a:lnSpc>
+                <a:spcPct val="110000"/>
+              </a:lnSpc>
+            </a:pPr>
+            <a:r>
+              <a:rPr sz="1100" b="1">
+                <a:solidFill>
+                  <a:srgbClr val="AE172A"/>
+                </a:solidFill>
+                <a:latin typeface="Poppins"/>
+              </a:rPr>
+              <a:t>Style aplat couleur</a:t>
+            </a:r>
+          </a:p>
+        </p:txBody>
+      </p:sp>
+      <p:pic>
+        <p:nvPicPr>
+          <p:cNvPr id="15" name="Picture 14" descr="n_d6.jpg"/>
+          <p:cNvPicPr>
+            <a:picLocks noChangeAspect="1"/>
+          </p:cNvPicPr>
+          <p:nvPr/>
+        </p:nvPicPr>
+        <p:blipFill>
+          <a:blip r:embed="rId5"/>
+          <a:stretch>
+            <a:fillRect/>
+          </a:stretch>
+        </p:blipFill>
+        <p:spPr>
+          <a:xfrm>
+            <a:off x="8064000" y="1512000"/>
+            <a:ext cx="3528000" cy="4410000"/>
+          </a:xfrm>
+          <a:prstGeom prst="rect">
+            <a:avLst/>
+          </a:prstGeom>
+        </p:spPr>
+      </p:pic>
+      <p:sp>
+        <p:nvSpPr>
+          <p:cNvPr id="16" name="Rounded Rectangle 15"/>
+          <p:cNvSpPr/>
+          <p:nvPr/>
+        </p:nvSpPr>
+        <p:spPr>
+          <a:xfrm>
+            <a:off x="8064000" y="6012000"/>
+            <a:ext cx="3528000" cy="306000"/>
+          </a:xfrm>
+          <a:prstGeom prst="roundRect">
+            <a:avLst/>
+          </a:prstGeom>
+          <a:solidFill>
+            <a:srgbClr val="FFF0F1"/>
+          </a:solidFill>
+          <a:ln>
+            <a:noFill/>
+          </a:ln>
+          <a:effectLst/>
+        </p:spPr>
+        <p:style>
+          <a:lnRef idx="1">
+            <a:schemeClr val="accent1"/>
+          </a:lnRef>
+          <a:fillRef idx="3">
+            <a:schemeClr val="accent1"/>
+          </a:fillRef>
+          <a:effectRef idx="2">
+            <a:schemeClr val="accent1"/>
+          </a:effectRef>
+          <a:fontRef idx="minor">
+            <a:schemeClr val="lt1"/>
+          </a:fontRef>
+        </p:style>
+        <p:txBody>
+          <a:bodyPr rtlCol="0" anchor="ctr"/>
+          <a:lstStyle/>
+          <a:p>
+            <a:pPr algn="ctr"/>
+          </a:p>
+        </p:txBody>
+      </p:sp>
+      <p:sp>
+        <p:nvSpPr>
+          <p:cNvPr id="17" name="TextBox 16"/>
+          <p:cNvSpPr txBox="1"/>
+          <p:nvPr/>
+        </p:nvSpPr>
+        <p:spPr>
+          <a:xfrm>
+            <a:off x="8064000" y="6012000"/>
+            <a:ext cx="3528000" cy="306000"/>
+          </a:xfrm>
+          <a:prstGeom prst="rect">
+            <a:avLst/>
+          </a:prstGeom>
+          <a:noFill/>
+        </p:spPr>
+        <p:txBody>
+          <a:bodyPr wrap="square" lIns="36000" rIns="36000" tIns="18000" bIns="18000" anchor="ctr">
+            <a:spAutoFit/>
+          </a:bodyPr>
+          <a:lstStyle/>
+          <a:p>
+            <a:pPr algn="ctr">
+              <a:lnSpc>
+                <a:spcPct val="110000"/>
+              </a:lnSpc>
+            </a:pPr>
+            <a:r>
+              <a:rPr sz="1100" b="1">
+                <a:solidFill>
+                  <a:srgbClr val="AE172A"/>
+                </a:solidFill>
+                <a:latin typeface="Poppins"/>
+              </a:rPr>
+              <a:t>Style fiche sombre</a:t>
+            </a:r>
+          </a:p>
+        </p:txBody>
+      </p:sp>
+    </p:spTree>
+  </p:cSld>
+  <p:clrMapOvr>
+    <a:masterClrMapping/>
+  </p:clrMapOvr>
+</p:sld>
+</file>
+
+<file path=ppt/slides/slide23.xml><?xml version="1.0" encoding="utf-8"?>
+<p:sld xmlns:a="http://schemas.openxmlformats.org/drawingml/2006/main" xmlns:p="http://schemas.openxmlformats.org/presentationml/2006/main" xmlns:r="http://schemas.openxmlformats.org/officeDocument/2006/relationships">
+  <p:cSld>
+    <p:spTree>
+      <p:nvGrpSpPr>
+        <p:cNvPr id="1" name=""/>
+        <p:cNvGrpSpPr/>
+        <p:nvPr/>
+      </p:nvGrpSpPr>
+      <p:grpSpPr/>
+      <p:sp>
+        <p:nvSpPr>
+          <p:cNvPr id="2" name="Rectangle 1"/>
+          <p:cNvSpPr/>
+          <p:nvPr/>
+        </p:nvSpPr>
+        <p:spPr>
+          <a:xfrm>
+            <a:off x="0" y="0"/>
+            <a:ext cx="180000" cy="6858000"/>
+          </a:xfrm>
+          <a:prstGeom prst="rect">
+            <a:avLst/>
+          </a:prstGeom>
+          <a:solidFill>
+            <a:srgbClr val="AE172A"/>
+          </a:solidFill>
+          <a:ln>
+            <a:noFill/>
+          </a:ln>
+          <a:effectLst/>
+        </p:spPr>
+        <p:style>
+          <a:lnRef idx="1">
+            <a:schemeClr val="accent1"/>
+          </a:lnRef>
+          <a:fillRef idx="3">
+            <a:schemeClr val="accent1"/>
+          </a:fillRef>
+          <a:effectRef idx="2">
+            <a:schemeClr val="accent1"/>
+          </a:effectRef>
+          <a:fontRef idx="minor">
+            <a:schemeClr val="lt1"/>
+          </a:fontRef>
+        </p:style>
+        <p:txBody>
+          <a:bodyPr rtlCol="0" anchor="ctr"/>
+          <a:lstStyle/>
+          <a:p>
+            <a:pPr algn="ctr"/>
+          </a:p>
+        </p:txBody>
+      </p:sp>
+      <p:pic>
+        <p:nvPicPr>
+          <p:cNvPr id="3" name="Picture 2" descr="logo-dream.png"/>
+          <p:cNvPicPr>
+            <a:picLocks noChangeAspect="1"/>
+          </p:cNvPicPr>
+          <p:nvPr/>
+        </p:nvPicPr>
+        <p:blipFill>
+          <a:blip r:embed="rId2"/>
+          <a:stretch>
+            <a:fillRect/>
+          </a:stretch>
+        </p:blipFill>
+        <p:spPr>
+          <a:xfrm>
+            <a:off x="10176120" y="246443"/>
+            <a:ext cx="1655999" cy="515114"/>
+          </a:xfrm>
+          <a:prstGeom prst="rect">
+            <a:avLst/>
+          </a:prstGeom>
+        </p:spPr>
+      </p:pic>
+      <p:sp>
+        <p:nvSpPr>
+          <p:cNvPr id="4" name="TextBox 3"/>
+          <p:cNvSpPr txBox="1"/>
+          <p:nvPr/>
+        </p:nvSpPr>
+        <p:spPr>
+          <a:xfrm>
+            <a:off x="576000" y="324000"/>
+            <a:ext cx="8640000" cy="288000"/>
+          </a:xfrm>
+          <a:prstGeom prst="rect">
+            <a:avLst/>
+          </a:prstGeom>
+          <a:noFill/>
+        </p:spPr>
+        <p:txBody>
+          <a:bodyPr wrap="square" lIns="36000" rIns="36000" tIns="18000" bIns="18000" anchor="t">
+            <a:spAutoFit/>
+          </a:bodyPr>
+          <a:lstStyle/>
+          <a:p>
+            <a:pPr algn="l">
+              <a:lnSpc>
+                <a:spcPct val="110000"/>
+              </a:lnSpc>
+            </a:pPr>
+            <a:r>
+              <a:rPr sz="1100" b="1">
+                <a:solidFill>
+                  <a:srgbClr val="AE172A"/>
+                </a:solidFill>
+                <a:latin typeface="Poppins"/>
+              </a:rPr>
+              <a:t>PLAN 30 JOURS</a:t>
+            </a:r>
+          </a:p>
+        </p:txBody>
+      </p:sp>
+      <p:sp>
+        <p:nvSpPr>
+          <p:cNvPr id="5" name="TextBox 4"/>
+          <p:cNvSpPr txBox="1"/>
+          <p:nvPr/>
+        </p:nvSpPr>
+        <p:spPr>
+          <a:xfrm>
+            <a:off x="576000" y="576000"/>
+            <a:ext cx="9180000" cy="720000"/>
+          </a:xfrm>
+          <a:prstGeom prst="rect">
+            <a:avLst/>
+          </a:prstGeom>
+          <a:noFill/>
+        </p:spPr>
+        <p:txBody>
+          <a:bodyPr wrap="square" lIns="36000" rIns="36000" tIns="18000" bIns="18000" anchor="t">
+            <a:spAutoFit/>
+          </a:bodyPr>
+          <a:lstStyle/>
+          <a:p>
+            <a:pPr algn="l">
+              <a:lnSpc>
+                <a:spcPct val="110000"/>
+              </a:lnSpc>
+            </a:pPr>
+            <a:r>
+              <a:rPr sz="2500" b="1">
+                <a:solidFill>
+                  <a:srgbClr val="111111"/>
+                </a:solidFill>
+                <a:latin typeface="Poppins"/>
+              </a:rPr>
+              <a:t>Le premier mois, semaine par semaine</a:t>
+            </a:r>
+          </a:p>
+        </p:txBody>
+      </p:sp>
+      <p:sp>
+        <p:nvSpPr>
+          <p:cNvPr id="6" name="Rectangle 5"/>
+          <p:cNvSpPr/>
+          <p:nvPr/>
+        </p:nvSpPr>
+        <p:spPr>
+          <a:xfrm>
+            <a:off x="576000" y="1278000"/>
+            <a:ext cx="792000" cy="50400"/>
+          </a:xfrm>
+          <a:prstGeom prst="rect">
+            <a:avLst/>
+          </a:prstGeom>
+          <a:solidFill>
+            <a:srgbClr val="FF8087"/>
+          </a:solidFill>
+          <a:ln>
+            <a:noFill/>
+          </a:ln>
+          <a:effectLst/>
+        </p:spPr>
+        <p:style>
+          <a:lnRef idx="1">
+            <a:schemeClr val="accent1"/>
+          </a:lnRef>
+          <a:fillRef idx="3">
+            <a:schemeClr val="accent1"/>
+          </a:fillRef>
+          <a:effectRef idx="2">
+            <a:schemeClr val="accent1"/>
+          </a:effectRef>
+          <a:fontRef idx="minor">
+            <a:schemeClr val="lt1"/>
+          </a:fontRef>
+        </p:style>
+        <p:txBody>
+          <a:bodyPr rtlCol="0" anchor="ctr"/>
+          <a:lstStyle/>
+          <a:p>
+            <a:pPr algn="ctr"/>
+          </a:p>
+        </p:txBody>
+      </p:sp>
+      <p:sp>
+        <p:nvSpPr>
+          <p:cNvPr id="7" name="TextBox 6"/>
+          <p:cNvSpPr txBox="1"/>
+          <p:nvPr/>
+        </p:nvSpPr>
+        <p:spPr>
+          <a:xfrm>
+            <a:off x="10572119" y="6498000"/>
+            <a:ext cx="1296000" cy="216000"/>
+          </a:xfrm>
+          <a:prstGeom prst="rect">
+            <a:avLst/>
+          </a:prstGeom>
+          <a:noFill/>
+        </p:spPr>
+        <p:txBody>
+          <a:bodyPr wrap="square" lIns="36000" rIns="36000" tIns="18000" bIns="18000" anchor="t">
+            <a:spAutoFit/>
+          </a:bodyPr>
+          <a:lstStyle/>
+          <a:p>
+            <a:pPr algn="r">
+              <a:lnSpc>
+                <a:spcPct val="110000"/>
+              </a:lnSpc>
+            </a:pPr>
+            <a:r>
+              <a:rPr sz="900" b="0">
+                <a:solidFill>
+                  <a:srgbClr val="5A5A5A"/>
+                </a:solidFill>
+                <a:latin typeface="Poppins"/>
+              </a:rPr>
+              <a:t>23 / 23</a:t>
+            </a:r>
+          </a:p>
+        </p:txBody>
+      </p:sp>
+      <p:sp>
+        <p:nvSpPr>
+          <p:cNvPr id="8" name="TextBox 7"/>
+          <p:cNvSpPr txBox="1"/>
+          <p:nvPr/>
+        </p:nvSpPr>
+        <p:spPr>
+          <a:xfrm>
+            <a:off x="576000" y="6498000"/>
+            <a:ext cx="7920000" cy="216000"/>
+          </a:xfrm>
+          <a:prstGeom prst="rect">
+            <a:avLst/>
+          </a:prstGeom>
+          <a:noFill/>
+        </p:spPr>
+        <p:txBody>
+          <a:bodyPr wrap="square" lIns="36000" rIns="36000" tIns="18000" bIns="18000" anchor="t">
+            <a:spAutoFit/>
+          </a:bodyPr>
+          <a:lstStyle/>
+          <a:p>
+            <a:pPr algn="l">
+              <a:lnSpc>
+                <a:spcPct val="110000"/>
+              </a:lnSpc>
+            </a:pPr>
+            <a:r>
+              <a:rPr sz="900" b="0">
+                <a:solidFill>
+                  <a:srgbClr val="5A5A5A"/>
+                </a:solidFill>
+                <a:latin typeface="Poppins"/>
+              </a:rPr>
+              <a:t>Dream Cosmetics · Audit réseaux sociaux · relevé du 28/10/2026</a:t>
+            </a:r>
+          </a:p>
+        </p:txBody>
+      </p:sp>
+      <p:sp>
+        <p:nvSpPr>
+          <p:cNvPr id="9" name="Rounded Rectangle 8"/>
+          <p:cNvSpPr/>
+          <p:nvPr/>
+        </p:nvSpPr>
+        <p:spPr>
+          <a:xfrm>
+            <a:off x="576000" y="1584000"/>
+            <a:ext cx="2628000" cy="576000"/>
+          </a:xfrm>
+          <a:prstGeom prst="roundRect">
+            <a:avLst/>
+          </a:prstGeom>
+          <a:solidFill>
+            <a:srgbClr val="AE172A"/>
+          </a:solidFill>
+          <a:ln>
+            <a:noFill/>
+          </a:ln>
+          <a:effectLst/>
+        </p:spPr>
+        <p:style>
+          <a:lnRef idx="1">
+            <a:schemeClr val="accent1"/>
+          </a:lnRef>
+          <a:fillRef idx="3">
+            <a:schemeClr val="accent1"/>
+          </a:fillRef>
+          <a:effectRef idx="2">
+            <a:schemeClr val="accent1"/>
+          </a:effectRef>
+          <a:fontRef idx="minor">
+            <a:schemeClr val="lt1"/>
+          </a:fontRef>
+        </p:style>
+        <p:txBody>
+          <a:bodyPr rtlCol="0" anchor="ctr"/>
+          <a:lstStyle/>
+          <a:p>
+            <a:pPr algn="ctr"/>
+          </a:p>
+        </p:txBody>
+      </p:sp>
+      <p:pic>
+        <p:nvPicPr>
+          <p:cNvPr id="10" name="Picture 9" descr="calendar-event_bl.png"/>
+          <p:cNvPicPr>
+            <a:picLocks noChangeAspect="1"/>
+          </p:cNvPicPr>
+          <p:nvPr/>
+        </p:nvPicPr>
+        <p:blipFill>
+          <a:blip r:embed="rId3"/>
+          <a:stretch>
+            <a:fillRect/>
+          </a:stretch>
+        </p:blipFill>
+        <p:spPr>
+          <a:xfrm>
+            <a:off x="720000" y="1710000"/>
+            <a:ext cx="324000" cy="324000"/>
+          </a:xfrm>
+          <a:prstGeom prst="rect">
+            <a:avLst/>
+          </a:prstGeom>
+        </p:spPr>
+      </p:pic>
+      <p:sp>
+        <p:nvSpPr>
+          <p:cNvPr id="11" name="TextBox 10"/>
+          <p:cNvSpPr txBox="1"/>
+          <p:nvPr/>
+        </p:nvSpPr>
+        <p:spPr>
+          <a:xfrm>
+            <a:off x="1116000" y="1584000"/>
+            <a:ext cx="2015999" cy="576000"/>
+          </a:xfrm>
+          <a:prstGeom prst="rect">
+            <a:avLst/>
+          </a:prstGeom>
+          <a:noFill/>
+        </p:spPr>
+        <p:txBody>
+          <a:bodyPr wrap="square" lIns="36000" rIns="36000" tIns="18000" bIns="18000" anchor="ctr">
+            <a:spAutoFit/>
+          </a:bodyPr>
+          <a:lstStyle/>
+          <a:p>
+            <a:pPr algn="l">
+              <a:lnSpc>
+                <a:spcPct val="110000"/>
+              </a:lnSpc>
+            </a:pPr>
+            <a:r>
+              <a:rPr sz="1500" b="1">
+                <a:solidFill>
+                  <a:srgbClr val="FFFFFF"/>
+                </a:solidFill>
+                <a:latin typeface="Poppins"/>
+              </a:rPr>
+              <a:t>Semaine 1</a:t>
+            </a:r>
+          </a:p>
+        </p:txBody>
+      </p:sp>
+      <p:sp>
+        <p:nvSpPr>
+          <p:cNvPr id="12" name="Rounded Rectangle 11"/>
+          <p:cNvSpPr/>
+          <p:nvPr/>
+        </p:nvSpPr>
+        <p:spPr>
+          <a:xfrm>
+            <a:off x="576000" y="2304000"/>
+            <a:ext cx="2628000" cy="2880000"/>
+          </a:xfrm>
+          <a:prstGeom prst="roundRect">
+            <a:avLst>
+              <a:gd name="adj" fmla="val 6000"/>
+            </a:avLst>
+          </a:prstGeom>
+          <a:solidFill>
+            <a:srgbClr val="F4F4F2"/>
+          </a:solidFill>
+          <a:ln>
+            <a:noFill/>
+          </a:ln>
+          <a:effectLst/>
+        </p:spPr>
+        <p:style>
+          <a:lnRef idx="1">
+            <a:schemeClr val="accent1"/>
+          </a:lnRef>
+          <a:fillRef idx="3">
+            <a:schemeClr val="accent1"/>
+          </a:fillRef>
+          <a:effectRef idx="2">
+            <a:schemeClr val="accent1"/>
+          </a:effectRef>
+          <a:fontRef idx="minor">
+            <a:schemeClr val="lt1"/>
+          </a:fontRef>
+        </p:style>
+        <p:txBody>
+          <a:bodyPr rtlCol="0" anchor="ctr"/>
+          <a:lstStyle/>
+          <a:p>
+            <a:pPr algn="ctr"/>
+          </a:p>
+        </p:txBody>
+      </p:sp>
+      <p:sp>
+        <p:nvSpPr>
+          <p:cNvPr id="13" name="TextBox 12"/>
+          <p:cNvSpPr txBox="1"/>
+          <p:nvPr/>
+        </p:nvSpPr>
+        <p:spPr>
+          <a:xfrm>
+            <a:off x="720000" y="2448000"/>
+            <a:ext cx="2376000" cy="2664000"/>
+          </a:xfrm>
+          <a:prstGeom prst="rect">
+            <a:avLst/>
+          </a:prstGeom>
+          <a:noFill/>
+        </p:spPr>
+        <p:txBody>
+          <a:bodyPr wrap="square">
+            <a:spAutoFit/>
+          </a:bodyPr>
+          <a:lstStyle/>
+          <a:p>
+            <a:pPr>
+              <a:spcAft>
+                <a:spcPts val="700"/>
+              </a:spcAft>
+            </a:pPr>
+            <a:r>
+              <a:rPr sz="800">
+                <a:solidFill>
+                  <a:srgbClr val="AE172A"/>
+                </a:solidFill>
+                <a:latin typeface="Poppins"/>
+              </a:rPr>
+              <a:t>■  </a:t>
+            </a:r>
+            <a:r>
+              <a:rPr sz="1200">
+                <a:solidFill>
+                  <a:srgbClr val="111111"/>
+                </a:solidFill>
+                <a:latin typeface="Poppins"/>
+              </a:rPr>
+              <a:t>Valider les 6 publications refaites</a:t>
+            </a:r>
+          </a:p>
+          <a:p>
+            <a:pPr>
+              <a:spcAft>
+                <a:spcPts val="700"/>
+              </a:spcAft>
+            </a:pPr>
+            <a:r>
+              <a:rPr sz="800">
+                <a:solidFill>
+                  <a:srgbClr val="AE172A"/>
+                </a:solidFill>
+                <a:latin typeface="Poppins"/>
+              </a:rPr>
+              <a:t>■  </a:t>
+            </a:r>
+            <a:r>
+              <a:rPr sz="1200">
+                <a:solidFill>
+                  <a:srgbClr val="111111"/>
+                </a:solidFill>
+                <a:latin typeface="Poppins"/>
+              </a:rPr>
+              <a:t>Passer les textes en français seul</a:t>
+            </a:r>
+          </a:p>
+          <a:p>
+            <a:pPr>
+              <a:spcAft>
+                <a:spcPts val="700"/>
+              </a:spcAft>
+            </a:pPr>
+            <a:r>
+              <a:rPr sz="800">
+                <a:solidFill>
+                  <a:srgbClr val="AE172A"/>
+                </a:solidFill>
+                <a:latin typeface="Poppins"/>
+              </a:rPr>
+              <a:t>■  </a:t>
+            </a:r>
+            <a:r>
+              <a:rPr sz="1200">
+                <a:solidFill>
+                  <a:srgbClr val="111111"/>
+                </a:solidFill>
+                <a:latin typeface="Poppins"/>
+              </a:rPr>
+              <a:t>Lister les points de vente à citer</a:t>
+            </a:r>
+          </a:p>
+        </p:txBody>
+      </p:sp>
+      <p:sp>
+        <p:nvSpPr>
+          <p:cNvPr id="14" name="Rounded Rectangle 13"/>
+          <p:cNvSpPr/>
+          <p:nvPr/>
+        </p:nvSpPr>
+        <p:spPr>
+          <a:xfrm>
+            <a:off x="3384000" y="1584000"/>
+            <a:ext cx="2628000" cy="576000"/>
+          </a:xfrm>
+          <a:prstGeom prst="roundRect">
+            <a:avLst/>
+          </a:prstGeom>
+          <a:solidFill>
+            <a:srgbClr val="FF8087"/>
+          </a:solidFill>
+          <a:ln>
+            <a:noFill/>
+          </a:ln>
+          <a:effectLst/>
+        </p:spPr>
+        <p:style>
+          <a:lnRef idx="1">
+            <a:schemeClr val="accent1"/>
+          </a:lnRef>
+          <a:fillRef idx="3">
+            <a:schemeClr val="accent1"/>
+          </a:fillRef>
+          <a:effectRef idx="2">
+            <a:schemeClr val="accent1"/>
+          </a:effectRef>
+          <a:fontRef idx="minor">
+            <a:schemeClr val="lt1"/>
+          </a:fontRef>
+        </p:style>
+        <p:txBody>
+          <a:bodyPr rtlCol="0" anchor="ctr"/>
+          <a:lstStyle/>
+          <a:p>
+            <a:pPr algn="ctr"/>
+          </a:p>
+        </p:txBody>
+      </p:sp>
+      <p:pic>
+        <p:nvPicPr>
+          <p:cNvPr id="15" name="Picture 14" descr="pencil_bl.png"/>
+          <p:cNvPicPr>
+            <a:picLocks noChangeAspect="1"/>
+          </p:cNvPicPr>
+          <p:nvPr/>
+        </p:nvPicPr>
+        <p:blipFill>
+          <a:blip r:embed="rId4"/>
+          <a:stretch>
+            <a:fillRect/>
+          </a:stretch>
+        </p:blipFill>
+        <p:spPr>
+          <a:xfrm>
+            <a:off x="3528000" y="1710000"/>
+            <a:ext cx="324000" cy="324000"/>
+          </a:xfrm>
+          <a:prstGeom prst="rect">
+            <a:avLst/>
+          </a:prstGeom>
+        </p:spPr>
+      </p:pic>
+      <p:sp>
+        <p:nvSpPr>
+          <p:cNvPr id="16" name="TextBox 15"/>
+          <p:cNvSpPr txBox="1"/>
+          <p:nvPr/>
+        </p:nvSpPr>
+        <p:spPr>
+          <a:xfrm>
+            <a:off x="3924000" y="1584000"/>
+            <a:ext cx="2015999" cy="576000"/>
+          </a:xfrm>
+          <a:prstGeom prst="rect">
+            <a:avLst/>
+          </a:prstGeom>
+          <a:noFill/>
+        </p:spPr>
+        <p:txBody>
+          <a:bodyPr wrap="square" lIns="36000" rIns="36000" tIns="18000" bIns="18000" anchor="ctr">
+            <a:spAutoFit/>
+          </a:bodyPr>
+          <a:lstStyle/>
+          <a:p>
+            <a:pPr algn="l">
+              <a:lnSpc>
+                <a:spcPct val="110000"/>
+              </a:lnSpc>
+            </a:pPr>
+            <a:r>
+              <a:rPr sz="1500" b="1">
+                <a:solidFill>
+                  <a:srgbClr val="FFFFFF"/>
+                </a:solidFill>
+                <a:latin typeface="Poppins"/>
+              </a:rPr>
+              <a:t>Semaine 2</a:t>
+            </a:r>
+          </a:p>
+        </p:txBody>
+      </p:sp>
+      <p:sp>
+        <p:nvSpPr>
+          <p:cNvPr id="17" name="Rounded Rectangle 16"/>
+          <p:cNvSpPr/>
+          <p:nvPr/>
+        </p:nvSpPr>
+        <p:spPr>
+          <a:xfrm>
+            <a:off x="3384000" y="2304000"/>
+            <a:ext cx="2628000" cy="2880000"/>
+          </a:xfrm>
+          <a:prstGeom prst="roundRect">
+            <a:avLst>
+              <a:gd name="adj" fmla="val 6000"/>
+            </a:avLst>
+          </a:prstGeom>
+          <a:solidFill>
+            <a:srgbClr val="F4F4F2"/>
+          </a:solidFill>
+          <a:ln>
+            <a:noFill/>
+          </a:ln>
+          <a:effectLst/>
+        </p:spPr>
+        <p:style>
+          <a:lnRef idx="1">
+            <a:schemeClr val="accent1"/>
+          </a:lnRef>
+          <a:fillRef idx="3">
+            <a:schemeClr val="accent1"/>
+          </a:fillRef>
+          <a:effectRef idx="2">
+            <a:schemeClr val="accent1"/>
+          </a:effectRef>
+          <a:fontRef idx="minor">
+            <a:schemeClr val="lt1"/>
+          </a:fontRef>
+        </p:style>
+        <p:txBody>
+          <a:bodyPr rtlCol="0" anchor="ctr"/>
+          <a:lstStyle/>
+          <a:p>
+            <a:pPr algn="ctr"/>
+          </a:p>
+        </p:txBody>
+      </p:sp>
+      <p:sp>
+        <p:nvSpPr>
+          <p:cNvPr id="18" name="TextBox 17"/>
+          <p:cNvSpPr txBox="1"/>
+          <p:nvPr/>
+        </p:nvSpPr>
+        <p:spPr>
+          <a:xfrm>
+            <a:off x="3528000" y="2448000"/>
+            <a:ext cx="2376000" cy="2664000"/>
+          </a:xfrm>
+          <a:prstGeom prst="rect">
+            <a:avLst/>
+          </a:prstGeom>
+          <a:noFill/>
+        </p:spPr>
+        <p:txBody>
+          <a:bodyPr wrap="square">
+            <a:spAutoFit/>
+          </a:bodyPr>
+          <a:lstStyle/>
+          <a:p>
+            <a:pPr>
+              <a:spcAft>
+                <a:spcPts val="700"/>
+              </a:spcAft>
+            </a:pPr>
+            <a:r>
+              <a:rPr sz="800">
+                <a:solidFill>
+                  <a:srgbClr val="AE172A"/>
+                </a:solidFill>
+                <a:latin typeface="Poppins"/>
+              </a:rPr>
+              <a:t>■  </a:t>
+            </a:r>
+            <a:r>
+              <a:rPr sz="1200">
+                <a:solidFill>
+                  <a:srgbClr val="111111"/>
+                </a:solidFill>
+                <a:latin typeface="Poppins"/>
+              </a:rPr>
+              <a:t>Publier les 6 avant / après</a:t>
+            </a:r>
+          </a:p>
+          <a:p>
+            <a:pPr>
+              <a:spcAft>
+                <a:spcPts val="700"/>
+              </a:spcAft>
+            </a:pPr>
+            <a:r>
+              <a:rPr sz="800">
+                <a:solidFill>
+                  <a:srgbClr val="AE172A"/>
+                </a:solidFill>
+                <a:latin typeface="Poppins"/>
+              </a:rPr>
+              <a:t>■  </a:t>
+            </a:r>
+            <a:r>
+              <a:rPr sz="1200">
+                <a:solidFill>
+                  <a:srgbClr val="111111"/>
+                </a:solidFill>
+                <a:latin typeface="Poppins"/>
+              </a:rPr>
+              <a:t>3 publications par semaine, 12 h ou 19 h</a:t>
+            </a:r>
+          </a:p>
+          <a:p>
+            <a:pPr>
+              <a:spcAft>
+                <a:spcPts val="700"/>
+              </a:spcAft>
+            </a:pPr>
+            <a:r>
+              <a:rPr sz="800">
+                <a:solidFill>
+                  <a:srgbClr val="AE172A"/>
+                </a:solidFill>
+                <a:latin typeface="Poppins"/>
+              </a:rPr>
+              <a:t>■  </a:t>
+            </a:r>
+            <a:r>
+              <a:rPr sz="1200">
+                <a:solidFill>
+                  <a:srgbClr val="111111"/>
+                </a:solidFill>
+                <a:latin typeface="Poppins"/>
+              </a:rPr>
+              <a:t>Répondre à chaque commentaire</a:t>
+            </a:r>
+          </a:p>
+        </p:txBody>
+      </p:sp>
+      <p:sp>
+        <p:nvSpPr>
+          <p:cNvPr id="19" name="Rounded Rectangle 18"/>
+          <p:cNvSpPr/>
+          <p:nvPr/>
+        </p:nvSpPr>
+        <p:spPr>
+          <a:xfrm>
+            <a:off x="6192000" y="1584000"/>
+            <a:ext cx="2628000" cy="576000"/>
+          </a:xfrm>
+          <a:prstGeom prst="roundRect">
+            <a:avLst/>
+          </a:prstGeom>
+          <a:solidFill>
+            <a:srgbClr val="AE172A"/>
+          </a:solidFill>
+          <a:ln>
+            <a:noFill/>
+          </a:ln>
+          <a:effectLst/>
+        </p:spPr>
+        <p:style>
+          <a:lnRef idx="1">
+            <a:schemeClr val="accent1"/>
+          </a:lnRef>
+          <a:fillRef idx="3">
+            <a:schemeClr val="accent1"/>
+          </a:fillRef>
+          <a:effectRef idx="2">
+            <a:schemeClr val="accent1"/>
+          </a:effectRef>
+          <a:fontRef idx="minor">
+            <a:schemeClr val="lt1"/>
+          </a:fontRef>
+        </p:style>
+        <p:txBody>
+          <a:bodyPr rtlCol="0" anchor="ctr"/>
+          <a:lstStyle/>
+          <a:p>
+            <a:pPr algn="ctr"/>
+          </a:p>
+        </p:txBody>
+      </p:sp>
+      <p:pic>
+        <p:nvPicPr>
+          <p:cNvPr id="20" name="Picture 19" descr="video_bl.png"/>
+          <p:cNvPicPr>
+            <a:picLocks noChangeAspect="1"/>
+          </p:cNvPicPr>
+          <p:nvPr/>
+        </p:nvPicPr>
+        <p:blipFill>
+          <a:blip r:embed="rId5"/>
+          <a:stretch>
+            <a:fillRect/>
+          </a:stretch>
+        </p:blipFill>
+        <p:spPr>
+          <a:xfrm>
+            <a:off x="6336000" y="1710000"/>
+            <a:ext cx="324000" cy="324000"/>
+          </a:xfrm>
+          <a:prstGeom prst="rect">
+            <a:avLst/>
+          </a:prstGeom>
+        </p:spPr>
+      </p:pic>
+      <p:sp>
+        <p:nvSpPr>
+          <p:cNvPr id="21" name="TextBox 20"/>
+          <p:cNvSpPr txBox="1"/>
+          <p:nvPr/>
+        </p:nvSpPr>
+        <p:spPr>
+          <a:xfrm>
+            <a:off x="6732000" y="1584000"/>
+            <a:ext cx="2015999" cy="576000"/>
+          </a:xfrm>
+          <a:prstGeom prst="rect">
+            <a:avLst/>
+          </a:prstGeom>
+          <a:noFill/>
+        </p:spPr>
+        <p:txBody>
+          <a:bodyPr wrap="square" lIns="36000" rIns="36000" tIns="18000" bIns="18000" anchor="ctr">
+            <a:spAutoFit/>
+          </a:bodyPr>
+          <a:lstStyle/>
+          <a:p>
+            <a:pPr algn="l">
+              <a:lnSpc>
+                <a:spcPct val="110000"/>
+              </a:lnSpc>
+            </a:pPr>
+            <a:r>
+              <a:rPr sz="1500" b="1">
+                <a:solidFill>
+                  <a:srgbClr val="FFFFFF"/>
+                </a:solidFill>
+                <a:latin typeface="Poppins"/>
+              </a:rPr>
+              <a:t>Semaine 3</a:t>
+            </a:r>
+          </a:p>
+        </p:txBody>
+      </p:sp>
+      <p:sp>
+        <p:nvSpPr>
+          <p:cNvPr id="22" name="Rounded Rectangle 21"/>
+          <p:cNvSpPr/>
+          <p:nvPr/>
+        </p:nvSpPr>
+        <p:spPr>
+          <a:xfrm>
+            <a:off x="6192000" y="2304000"/>
+            <a:ext cx="2628000" cy="2880000"/>
+          </a:xfrm>
+          <a:prstGeom prst="roundRect">
+            <a:avLst>
+              <a:gd name="adj" fmla="val 6000"/>
+            </a:avLst>
+          </a:prstGeom>
+          <a:solidFill>
+            <a:srgbClr val="F4F4F2"/>
+          </a:solidFill>
+          <a:ln>
+            <a:noFill/>
+          </a:ln>
+          <a:effectLst/>
+        </p:spPr>
+        <p:style>
+          <a:lnRef idx="1">
+            <a:schemeClr val="accent1"/>
+          </a:lnRef>
+          <a:fillRef idx="3">
+            <a:schemeClr val="accent1"/>
+          </a:fillRef>
+          <a:effectRef idx="2">
+            <a:schemeClr val="accent1"/>
+          </a:effectRef>
+          <a:fontRef idx="minor">
+            <a:schemeClr val="lt1"/>
+          </a:fontRef>
+        </p:style>
+        <p:txBody>
+          <a:bodyPr rtlCol="0" anchor="ctr"/>
+          <a:lstStyle/>
+          <a:p>
+            <a:pPr algn="ctr"/>
+          </a:p>
+        </p:txBody>
+      </p:sp>
+      <p:sp>
+        <p:nvSpPr>
+          <p:cNvPr id="23" name="TextBox 22"/>
+          <p:cNvSpPr txBox="1"/>
+          <p:nvPr/>
+        </p:nvSpPr>
+        <p:spPr>
+          <a:xfrm>
+            <a:off x="6336000" y="2448000"/>
+            <a:ext cx="2376000" cy="2664000"/>
+          </a:xfrm>
+          <a:prstGeom prst="rect">
+            <a:avLst/>
+          </a:prstGeom>
+          <a:noFill/>
+        </p:spPr>
+        <p:txBody>
+          <a:bodyPr wrap="square">
+            <a:spAutoFit/>
+          </a:bodyPr>
+          <a:lstStyle/>
+          <a:p>
+            <a:pPr>
+              <a:spcAft>
+                <a:spcPts val="700"/>
+              </a:spcAft>
+            </a:pPr>
+            <a:r>
+              <a:rPr sz="800">
+                <a:solidFill>
+                  <a:srgbClr val="AE172A"/>
+                </a:solidFill>
+                <a:latin typeface="Poppins"/>
+              </a:rPr>
+              <a:t>■  </a:t>
+            </a:r>
+            <a:r>
+              <a:rPr sz="1200">
+                <a:solidFill>
+                  <a:srgbClr val="111111"/>
+                </a:solidFill>
+                <a:latin typeface="Poppins"/>
+              </a:rPr>
+              <a:t>Tourner 2 vidéos de routine</a:t>
+            </a:r>
+          </a:p>
+          <a:p>
+            <a:pPr>
+              <a:spcAft>
+                <a:spcPts val="700"/>
+              </a:spcAft>
+            </a:pPr>
+            <a:r>
+              <a:rPr sz="800">
+                <a:solidFill>
+                  <a:srgbClr val="AE172A"/>
+                </a:solidFill>
+                <a:latin typeface="Poppins"/>
+              </a:rPr>
+              <a:t>■  </a:t>
+            </a:r>
+            <a:r>
+              <a:rPr sz="1200">
+                <a:solidFill>
+                  <a:srgbClr val="111111"/>
+                </a:solidFill>
+                <a:latin typeface="Poppins"/>
+              </a:rPr>
+              <a:t>Un sondage Babymed pour les mamans</a:t>
+            </a:r>
+          </a:p>
+          <a:p>
+            <a:pPr>
+              <a:spcAft>
+                <a:spcPts val="700"/>
+              </a:spcAft>
+            </a:pPr>
+            <a:r>
+              <a:rPr sz="800">
+                <a:solidFill>
+                  <a:srgbClr val="AE172A"/>
+                </a:solidFill>
+                <a:latin typeface="Poppins"/>
+              </a:rPr>
+              <a:t>■  </a:t>
+            </a:r>
+            <a:r>
+              <a:rPr sz="1200">
+                <a:solidFill>
+                  <a:srgbClr val="111111"/>
+                </a:solidFill>
+                <a:latin typeface="Poppins"/>
+              </a:rPr>
+              <a:t>Première publication LinkedIn</a:t>
+            </a:r>
+          </a:p>
+        </p:txBody>
+      </p:sp>
+      <p:sp>
+        <p:nvSpPr>
+          <p:cNvPr id="24" name="Rounded Rectangle 23"/>
+          <p:cNvSpPr/>
+          <p:nvPr/>
+        </p:nvSpPr>
+        <p:spPr>
+          <a:xfrm>
+            <a:off x="9000000" y="1584000"/>
+            <a:ext cx="2628000" cy="576000"/>
+          </a:xfrm>
+          <a:prstGeom prst="roundRect">
+            <a:avLst/>
+          </a:prstGeom>
+          <a:solidFill>
+            <a:srgbClr val="FF8087"/>
+          </a:solidFill>
+          <a:ln>
+            <a:noFill/>
+          </a:ln>
+          <a:effectLst/>
+        </p:spPr>
+        <p:style>
+          <a:lnRef idx="1">
+            <a:schemeClr val="accent1"/>
+          </a:lnRef>
+          <a:fillRef idx="3">
+            <a:schemeClr val="accent1"/>
+          </a:fillRef>
+          <a:effectRef idx="2">
+            <a:schemeClr val="accent1"/>
+          </a:effectRef>
+          <a:fontRef idx="minor">
+            <a:schemeClr val="lt1"/>
+          </a:fontRef>
+        </p:style>
+        <p:txBody>
+          <a:bodyPr rtlCol="0" anchor="ctr"/>
+          <a:lstStyle/>
+          <a:p>
+            <a:pPr algn="ctr"/>
+          </a:p>
+        </p:txBody>
+      </p:sp>
+      <p:pic>
+        <p:nvPicPr>
+          <p:cNvPr id="25" name="Picture 24" descr="trending-up_bl.png"/>
+          <p:cNvPicPr>
+            <a:picLocks noChangeAspect="1"/>
+          </p:cNvPicPr>
+          <p:nvPr/>
+        </p:nvPicPr>
+        <p:blipFill>
+          <a:blip r:embed="rId6"/>
+          <a:stretch>
+            <a:fillRect/>
+          </a:stretch>
+        </p:blipFill>
+        <p:spPr>
+          <a:xfrm>
+            <a:off x="9144000" y="1710000"/>
+            <a:ext cx="324000" cy="324000"/>
+          </a:xfrm>
+          <a:prstGeom prst="rect">
+            <a:avLst/>
+          </a:prstGeom>
+        </p:spPr>
+      </p:pic>
+      <p:sp>
+        <p:nvSpPr>
+          <p:cNvPr id="26" name="TextBox 25"/>
+          <p:cNvSpPr txBox="1"/>
+          <p:nvPr/>
+        </p:nvSpPr>
+        <p:spPr>
+          <a:xfrm>
+            <a:off x="9540000" y="1584000"/>
+            <a:ext cx="2015999" cy="576000"/>
+          </a:xfrm>
+          <a:prstGeom prst="rect">
+            <a:avLst/>
+          </a:prstGeom>
+          <a:noFill/>
+        </p:spPr>
+        <p:txBody>
+          <a:bodyPr wrap="square" lIns="36000" rIns="36000" tIns="18000" bIns="18000" anchor="ctr">
+            <a:spAutoFit/>
+          </a:bodyPr>
+          <a:lstStyle/>
+          <a:p>
+            <a:pPr algn="l">
+              <a:lnSpc>
+                <a:spcPct val="110000"/>
+              </a:lnSpc>
+            </a:pPr>
+            <a:r>
+              <a:rPr sz="1500" b="1">
+                <a:solidFill>
+                  <a:srgbClr val="FFFFFF"/>
+                </a:solidFill>
+                <a:latin typeface="Poppins"/>
+              </a:rPr>
+              <a:t>Semaine 4</a:t>
+            </a:r>
+          </a:p>
+        </p:txBody>
+      </p:sp>
+      <p:sp>
+        <p:nvSpPr>
+          <p:cNvPr id="27" name="Rounded Rectangle 26"/>
+          <p:cNvSpPr/>
+          <p:nvPr/>
+        </p:nvSpPr>
+        <p:spPr>
+          <a:xfrm>
+            <a:off x="9000000" y="2304000"/>
+            <a:ext cx="2628000" cy="2880000"/>
+          </a:xfrm>
+          <a:prstGeom prst="roundRect">
+            <a:avLst>
+              <a:gd name="adj" fmla="val 6000"/>
+            </a:avLst>
+          </a:prstGeom>
+          <a:solidFill>
+            <a:srgbClr val="F4F4F2"/>
+          </a:solidFill>
+          <a:ln>
+            <a:noFill/>
+          </a:ln>
+          <a:effectLst/>
+        </p:spPr>
+        <p:style>
+          <a:lnRef idx="1">
+            <a:schemeClr val="accent1"/>
+          </a:lnRef>
+          <a:fillRef idx="3">
+            <a:schemeClr val="accent1"/>
+          </a:fillRef>
+          <a:effectRef idx="2">
+            <a:schemeClr val="accent1"/>
+          </a:effectRef>
+          <a:fontRef idx="minor">
+            <a:schemeClr val="lt1"/>
+          </a:fontRef>
+        </p:style>
+        <p:txBody>
+          <a:bodyPr rtlCol="0" anchor="ctr"/>
+          <a:lstStyle/>
+          <a:p>
+            <a:pPr algn="ctr"/>
+          </a:p>
+        </p:txBody>
+      </p:sp>
+      <p:sp>
+        <p:nvSpPr>
+          <p:cNvPr id="28" name="TextBox 27"/>
+          <p:cNvSpPr txBox="1"/>
+          <p:nvPr/>
+        </p:nvSpPr>
+        <p:spPr>
+          <a:xfrm>
+            <a:off x="9144000" y="2448000"/>
+            <a:ext cx="2376000" cy="2664000"/>
+          </a:xfrm>
+          <a:prstGeom prst="rect">
+            <a:avLst/>
+          </a:prstGeom>
+          <a:noFill/>
+        </p:spPr>
+        <p:txBody>
+          <a:bodyPr wrap="square">
+            <a:spAutoFit/>
+          </a:bodyPr>
+          <a:lstStyle/>
+          <a:p>
+            <a:pPr>
+              <a:spcAft>
+                <a:spcPts val="700"/>
+              </a:spcAft>
+            </a:pPr>
+            <a:r>
+              <a:rPr sz="800">
+                <a:solidFill>
+                  <a:srgbClr val="AE172A"/>
+                </a:solidFill>
+                <a:latin typeface="Poppins"/>
+              </a:rPr>
+              <a:t>■  </a:t>
+            </a:r>
+            <a:r>
+              <a:rPr sz="1200">
+                <a:solidFill>
+                  <a:srgbClr val="111111"/>
+                </a:solidFill>
+                <a:latin typeface="Poppins"/>
+              </a:rPr>
+              <a:t>Comparer aux 138 réactions de départ</a:t>
+            </a:r>
+          </a:p>
+          <a:p>
+            <a:pPr>
+              <a:spcAft>
+                <a:spcPts val="700"/>
+              </a:spcAft>
+            </a:pPr>
+            <a:r>
+              <a:rPr sz="800">
+                <a:solidFill>
+                  <a:srgbClr val="AE172A"/>
+                </a:solidFill>
+                <a:latin typeface="Poppins"/>
+              </a:rPr>
+              <a:t>■  </a:t>
+            </a:r>
+            <a:r>
+              <a:rPr sz="1200">
+                <a:solidFill>
+                  <a:srgbClr val="111111"/>
+                </a:solidFill>
+                <a:latin typeface="Poppins"/>
+              </a:rPr>
+              <a:t>Garder ce qui marche</a:t>
+            </a:r>
+          </a:p>
+          <a:p>
+            <a:pPr>
+              <a:spcAft>
+                <a:spcPts val="700"/>
+              </a:spcAft>
+            </a:pPr>
+            <a:r>
+              <a:rPr sz="800">
+                <a:solidFill>
+                  <a:srgbClr val="AE172A"/>
+                </a:solidFill>
+                <a:latin typeface="Poppins"/>
+              </a:rPr>
+              <a:t>■  </a:t>
+            </a:r>
+            <a:r>
+              <a:rPr sz="1200">
+                <a:solidFill>
+                  <a:srgbClr val="111111"/>
+                </a:solidFill>
+                <a:latin typeface="Poppins"/>
+              </a:rPr>
+              <a:t>Préparer le mois suivant</a:t>
+            </a:r>
+          </a:p>
+        </p:txBody>
+      </p:sp>
+      <p:sp>
+        <p:nvSpPr>
+          <p:cNvPr id="29" name="Rounded Rectangle 28"/>
+          <p:cNvSpPr/>
+          <p:nvPr/>
+        </p:nvSpPr>
+        <p:spPr>
+          <a:xfrm>
+            <a:off x="576000" y="5364000"/>
+            <a:ext cx="11052000" cy="864000"/>
+          </a:xfrm>
+          <a:prstGeom prst="roundRect">
+            <a:avLst>
+              <a:gd name="adj" fmla="val 6000"/>
+            </a:avLst>
+          </a:prstGeom>
+          <a:solidFill>
+            <a:srgbClr val="2A0E12"/>
+          </a:solidFill>
+          <a:ln>
+            <a:noFill/>
+          </a:ln>
+          <a:effectLst/>
+        </p:spPr>
+        <p:style>
+          <a:lnRef idx="1">
+            <a:schemeClr val="accent1"/>
+          </a:lnRef>
+          <a:fillRef idx="3">
+            <a:schemeClr val="accent1"/>
+          </a:fillRef>
+          <a:effectRef idx="2">
+            <a:schemeClr val="accent1"/>
+          </a:effectRef>
+          <a:fontRef idx="minor">
+            <a:schemeClr val="lt1"/>
+          </a:fontRef>
+        </p:style>
+        <p:txBody>
+          <a:bodyPr rtlCol="0" anchor="ctr"/>
+          <a:lstStyle/>
+          <a:p>
+            <a:pPr algn="ctr"/>
+          </a:p>
+        </p:txBody>
+      </p:sp>
+      <p:pic>
+        <p:nvPicPr>
+          <p:cNvPr id="30" name="Picture 29" descr="target-arrow_bl.png"/>
+          <p:cNvPicPr>
+            <a:picLocks noChangeAspect="1"/>
+          </p:cNvPicPr>
+          <p:nvPr/>
+        </p:nvPicPr>
+        <p:blipFill>
+          <a:blip r:embed="rId7"/>
+          <a:stretch>
+            <a:fillRect/>
+          </a:stretch>
+        </p:blipFill>
+        <p:spPr>
+          <a:xfrm>
+            <a:off x="792000" y="5544000"/>
+            <a:ext cx="503999" cy="503999"/>
+          </a:xfrm>
+          <a:prstGeom prst="rect">
+            <a:avLst/>
+          </a:prstGeom>
+        </p:spPr>
+      </p:pic>
+      <p:sp>
+        <p:nvSpPr>
+          <p:cNvPr id="31" name="TextBox 30"/>
+          <p:cNvSpPr txBox="1"/>
+          <p:nvPr/>
+        </p:nvSpPr>
+        <p:spPr>
+          <a:xfrm>
+            <a:off x="1440000" y="5364000"/>
+            <a:ext cx="10008000" cy="864000"/>
+          </a:xfrm>
+          <a:prstGeom prst="rect">
+            <a:avLst/>
+          </a:prstGeom>
+          <a:noFill/>
+        </p:spPr>
+        <p:txBody>
+          <a:bodyPr wrap="square" lIns="36000" rIns="36000" tIns="18000" bIns="18000" anchor="ctr">
+            <a:spAutoFit/>
+          </a:bodyPr>
+          <a:lstStyle/>
+          <a:p>
+            <a:pPr algn="l">
+              <a:lnSpc>
+                <a:spcPct val="110000"/>
+              </a:lnSpc>
+            </a:pPr>
+            <a:r>
+              <a:rPr sz="1300" b="1">
+                <a:solidFill>
+                  <a:srgbClr val="FFFFFF"/>
+                </a:solidFill>
+                <a:latin typeface="Poppins"/>
+              </a:rPr>
+              <a:t>Objectif proposé à 30 jours : passer de 138 à 300 réactions médianes sur Facebook, et d’un commentaire sur trois publications Instagram à une sur deux.</a:t>
+            </a:r>
+          </a:p>
+        </p:txBody>
+      </p:sp>
+    </p:spTree>
+  </p:cSld>
+  <p:clrMapOvr>
+    <a:masterClrMapping/>
+  </p:clrMapOvr>
+</p:sld>
+</file>
+
+<file path=ppt/slides/slide24.xml><?xml version="1.0" encoding="utf-8"?>
+<p:sld xmlns:a="http://schemas.openxmlformats.org/drawingml/2006/main" xmlns:p="http://schemas.openxmlformats.org/presentationml/2006/main" xmlns:r="http://schemas.openxmlformats.org/officeDocument/2006/relationships">
+  <p:cSld>
+    <p:spTree>
+      <p:nvGrpSpPr>
+        <p:cNvPr id="1" name=""/>
+        <p:cNvGrpSpPr/>
+        <p:nvPr/>
+      </p:nvGrpSpPr>
+      <p:grpSpPr/>
+      <p:sp>
+        <p:nvSpPr>
+          <p:cNvPr id="2" name="Rectangle 1"/>
+          <p:cNvSpPr/>
+          <p:nvPr/>
+        </p:nvSpPr>
+        <p:spPr>
+          <a:xfrm>
+            <a:off x="0" y="0"/>
+            <a:ext cx="180000" cy="6858000"/>
+          </a:xfrm>
+          <a:prstGeom prst="rect">
+            <a:avLst/>
+          </a:prstGeom>
+          <a:solidFill>
+            <a:srgbClr val="AE172A"/>
+          </a:solidFill>
+          <a:ln>
+            <a:noFill/>
+          </a:ln>
+          <a:effectLst/>
+        </p:spPr>
+        <p:style>
+          <a:lnRef idx="1">
+            <a:schemeClr val="accent1"/>
+          </a:lnRef>
+          <a:fillRef idx="3">
+            <a:schemeClr val="accent1"/>
+          </a:fillRef>
+          <a:effectRef idx="2">
+            <a:schemeClr val="accent1"/>
+          </a:effectRef>
+          <a:fontRef idx="minor">
+            <a:schemeClr val="lt1"/>
+          </a:fontRef>
+        </p:style>
+        <p:txBody>
+          <a:bodyPr rtlCol="0" anchor="ctr"/>
+          <a:lstStyle/>
+          <a:p>
+            <a:pPr algn="ctr"/>
+          </a:p>
+        </p:txBody>
+      </p:sp>
+      <p:pic>
+        <p:nvPicPr>
+          <p:cNvPr id="3" name="Picture 2" descr="logo-dream.png"/>
+          <p:cNvPicPr>
+            <a:picLocks noChangeAspect="1"/>
+          </p:cNvPicPr>
+          <p:nvPr/>
+        </p:nvPicPr>
+        <p:blipFill>
+          <a:blip r:embed="rId2"/>
+          <a:stretch>
+            <a:fillRect/>
+          </a:stretch>
+        </p:blipFill>
+        <p:spPr>
+          <a:xfrm>
+            <a:off x="10176120" y="246443"/>
+            <a:ext cx="1655999" cy="515114"/>
+          </a:xfrm>
+          <a:prstGeom prst="rect">
+            <a:avLst/>
+          </a:prstGeom>
+        </p:spPr>
+      </p:pic>
+      <p:sp>
+        <p:nvSpPr>
+          <p:cNvPr id="4" name="TextBox 3"/>
+          <p:cNvSpPr txBox="1"/>
+          <p:nvPr/>
+        </p:nvSpPr>
+        <p:spPr>
+          <a:xfrm>
+            <a:off x="576000" y="324000"/>
+            <a:ext cx="8640000" cy="288000"/>
+          </a:xfrm>
+          <a:prstGeom prst="rect">
+            <a:avLst/>
+          </a:prstGeom>
+          <a:noFill/>
+        </p:spPr>
+        <p:txBody>
+          <a:bodyPr wrap="square" lIns="36000" rIns="36000" tIns="18000" bIns="18000" anchor="t">
+            <a:spAutoFit/>
+          </a:bodyPr>
+          <a:lstStyle/>
+          <a:p>
+            <a:pPr algn="l">
+              <a:lnSpc>
+                <a:spcPct val="110000"/>
+              </a:lnSpc>
+            </a:pPr>
+            <a:r>
+              <a:rPr sz="1100" b="1">
+                <a:solidFill>
+                  <a:srgbClr val="AE172A"/>
+                </a:solidFill>
+                <a:latin typeface="Poppins"/>
+              </a:rPr>
+              <a:t>TABLEAU DE BORD</a:t>
+            </a:r>
+          </a:p>
+        </p:txBody>
+      </p:sp>
+      <p:sp>
+        <p:nvSpPr>
+          <p:cNvPr id="5" name="TextBox 4"/>
+          <p:cNvSpPr txBox="1"/>
+          <p:nvPr/>
+        </p:nvSpPr>
+        <p:spPr>
+          <a:xfrm>
+            <a:off x="576000" y="576000"/>
+            <a:ext cx="9180000" cy="720000"/>
+          </a:xfrm>
+          <a:prstGeom prst="rect">
+            <a:avLst/>
+          </a:prstGeom>
+          <a:noFill/>
+        </p:spPr>
+        <p:txBody>
+          <a:bodyPr wrap="square" lIns="36000" rIns="36000" tIns="18000" bIns="18000" anchor="t">
+            <a:spAutoFit/>
+          </a:bodyPr>
+          <a:lstStyle/>
+          <a:p>
+            <a:pPr algn="l">
+              <a:lnSpc>
+                <a:spcPct val="110000"/>
+              </a:lnSpc>
+            </a:pPr>
+            <a:r>
+              <a:rPr sz="2500" b="1">
+                <a:solidFill>
+                  <a:srgbClr val="111111"/>
+                </a:solidFill>
+                <a:latin typeface="Poppins"/>
+              </a:rPr>
+              <a:t>Les chiffres à suivre chaque semaine</a:t>
+            </a:r>
+          </a:p>
+        </p:txBody>
+      </p:sp>
+      <p:sp>
+        <p:nvSpPr>
+          <p:cNvPr id="6" name="Rectangle 5"/>
+          <p:cNvSpPr/>
+          <p:nvPr/>
+        </p:nvSpPr>
+        <p:spPr>
+          <a:xfrm>
+            <a:off x="576000" y="1278000"/>
+            <a:ext cx="792000" cy="50400"/>
+          </a:xfrm>
+          <a:prstGeom prst="rect">
+            <a:avLst/>
+          </a:prstGeom>
+          <a:solidFill>
+            <a:srgbClr val="FF8087"/>
+          </a:solidFill>
+          <a:ln>
+            <a:noFill/>
+          </a:ln>
+          <a:effectLst/>
+        </p:spPr>
+        <p:style>
+          <a:lnRef idx="1">
+            <a:schemeClr val="accent1"/>
+          </a:lnRef>
+          <a:fillRef idx="3">
+            <a:schemeClr val="accent1"/>
+          </a:fillRef>
+          <a:effectRef idx="2">
+            <a:schemeClr val="accent1"/>
+          </a:effectRef>
+          <a:fontRef idx="minor">
+            <a:schemeClr val="lt1"/>
+          </a:fontRef>
+        </p:style>
+        <p:txBody>
+          <a:bodyPr rtlCol="0" anchor="ctr"/>
+          <a:lstStyle/>
+          <a:p>
+            <a:pPr algn="ctr"/>
+          </a:p>
+        </p:txBody>
+      </p:sp>
+      <p:sp>
+        <p:nvSpPr>
+          <p:cNvPr id="7" name="TextBox 6"/>
+          <p:cNvSpPr txBox="1"/>
+          <p:nvPr/>
+        </p:nvSpPr>
+        <p:spPr>
+          <a:xfrm>
+            <a:off x="10572119" y="6498000"/>
+            <a:ext cx="1296000" cy="216000"/>
+          </a:xfrm>
+          <a:prstGeom prst="rect">
+            <a:avLst/>
+          </a:prstGeom>
+          <a:noFill/>
+        </p:spPr>
+        <p:txBody>
+          <a:bodyPr wrap="square" lIns="36000" rIns="36000" tIns="18000" bIns="18000" anchor="t">
+            <a:spAutoFit/>
+          </a:bodyPr>
+          <a:lstStyle/>
+          <a:p>
+            <a:pPr algn="r">
+              <a:lnSpc>
+                <a:spcPct val="110000"/>
+              </a:lnSpc>
+            </a:pPr>
+            <a:r>
+              <a:rPr sz="900" b="0">
+                <a:solidFill>
+                  <a:srgbClr val="5A5A5A"/>
+                </a:solidFill>
+                <a:latin typeface="Poppins"/>
+              </a:rPr>
+              <a:t>24 / 23</a:t>
             </a:r>
           </a:p>
         </p:txBody>
@@ -20848,7 +22064,7 @@
 </p:sld>
 </file>
 
-<file path=ppt/slides/slide23.xml><?xml version="1.0" encoding="utf-8"?>
+<file path=ppt/slides/slide25.xml><?xml version="1.0" encoding="utf-8"?>
 <p:sld xmlns:a="http://schemas.openxmlformats.org/drawingml/2006/main" xmlns:p="http://schemas.openxmlformats.org/presentationml/2006/main" xmlns:r="http://schemas.openxmlformats.org/officeDocument/2006/relationships">
   <p:cSld>
     <p:spTree>
@@ -21082,7 +22298,7 @@
                 </a:solidFill>
                 <a:latin typeface="Poppins"/>
               </a:rPr>
-              <a:t>23 / 23</a:t>
+              <a:t>25 / 23</a:t>
             </a:r>
           </a:p>
         </p:txBody>
